--- a/presentation/Loan_Default_Prediction_Presentation.pptx
+++ b/presentation/Loan_Default_Prediction_Presentation.pptx
@@ -125,26 +125,26 @@
   <p:extLst>
     <p:ext uri="{521415D9-36F7-43E2-AB2F-B90AF26B5E84}">
       <p14:sectionLst xmlns:p14="http://schemas.microsoft.com/office/powerpoint/2010/main">
-        <p14:section name="Opening" id="{152c0ab4-0bc8-6677-17e8-38b932571b62}">
+        <p14:section name="Opening" id="{94860cd5-43ef-ee06-8049-37938167717a}">
           <p14:sldIdLst>
             <p14:sldId id="256"/>
             <p14:sldId id="257"/>
           </p14:sldIdLst>
         </p14:section>
-        <p14:section name="Problem and approach" id="{e81247c5-6dd3-30b9-22e4-21c35800f832}">
+        <p14:section name="Problem and approach" id="{b8e3ba4e-2566-0604-1b7c-1bf7fa7a922a}">
           <p14:sldIdLst>
             <p14:sldId id="258"/>
             <p14:sldId id="259"/>
           </p14:sldIdLst>
         </p14:section>
-        <p14:section name="Key insights" id="{cc135e1d-a26e-e379-35c0-a57e916115ab}">
+        <p14:section name="Key insights" id="{062fa8cf-80e6-52a2-5522-4a9b3c374866}">
           <p14:sldIdLst>
             <p14:sldId id="260"/>
             <p14:sldId id="261"/>
             <p14:sldId id="262"/>
           </p14:sldIdLst>
         </p14:section>
-        <p14:section name="Modelling" id="{7c36050b-0630-9c48-a285-dd5d63cb8f55}">
+        <p14:section name="Modelling" id="{ad2a4126-587f-a781-e790-e4f86936d131}">
           <p14:sldIdLst>
             <p14:sldId id="263"/>
             <p14:sldId id="264"/>
@@ -152,7 +152,7 @@
             <p14:sldId id="266"/>
           </p14:sldIdLst>
         </p14:section>
-        <p14:section name="Recommendations" id="{59cc9aa2-bac2-31c6-6279-d0c8237782ce}">
+        <p14:section name="Recommendations" id="{44a977be-9c89-7117-8ac5-43238303b891}">
           <p14:sldIdLst>
             <p14:sldId id="267"/>
             <p14:sldId id="268"/>
@@ -160,7 +160,7 @@
             <p14:sldId id="270"/>
           </p14:sldIdLst>
         </p14:section>
-        <p14:section name="Appendix" id="{37d195e6-c4e2-19f7-9fa1-7afed4aece6d}">
+        <p14:section name="Appendix" id="{3a967d96-123c-ed07-9e28-a66ad70eae32}">
           <p14:sldIdLst>
             <p14:sldId id="271"/>
             <p14:sldId id="272"/>
@@ -2129,9 +2129,9 @@
           </c:dLbls>
           <c:cat>
             <c:multiLvlStrRef>
-              <c:f>Sheet1!$A$2:$A$6</c:f>
+              <c:f>Sheet1!$A$2:$A$7</c:f>
               <c:multiLvlStrCache>
-                <c:ptCount val="5"/>
+                <c:ptCount val="6"/>
                 <c:lvl>
                   <c:pt idx="0">
                     <c:v>Logistic Regression (balanced)</c:v>
@@ -2140,12 +2140,15 @@
                     <c:v>Decision Tree (tuned)</c:v>
                   </c:pt>
                   <c:pt idx="2">
+                    <c:v>Bagged trees (200)</c:v>
+                  </c:pt>
+                  <c:pt idx="3">
                     <c:v>Random Forest (default)</c:v>
                   </c:pt>
-                  <c:pt idx="3">
+                  <c:pt idx="4">
                     <c:v>Random Forest (class weights)</c:v>
                   </c:pt>
-                  <c:pt idx="4">
+                  <c:pt idx="5">
                     <c:v>Random Forest, threshold 0.25</c:v>
                   </c:pt>
                 </c:lvl>
@@ -2154,10 +2157,10 @@
           </c:cat>
           <c:val>
             <c:numRef>
-              <c:f>Sheet1!$B$2:$B$6</c:f>
+              <c:f>Sheet1!$B$2:$B$7</c:f>
               <c:numCache>
                 <c:formatCode>General</c:formatCode>
-                <c:ptCount val="5"/>
+                <c:ptCount val="6"/>
                 <c:pt idx="0">
                   <c:v>79.8</c:v>
                 </c:pt>
@@ -2165,12 +2168,15 @@
                   <c:v>81.8</c:v>
                 </c:pt>
                 <c:pt idx="2">
+                  <c:v>67.8</c:v>
+                </c:pt>
+                <c:pt idx="3">
                   <c:v>68.9</c:v>
                 </c:pt>
-                <c:pt idx="3">
+                <c:pt idx="4">
                   <c:v>78.4</c:v>
                 </c:pt>
-                <c:pt idx="4">
+                <c:pt idx="5">
                   <c:v>93.3</c:v>
                 </c:pt>
               </c:numCache>
@@ -2224,9 +2230,9 @@
           </c:dLbls>
           <c:cat>
             <c:multiLvlStrRef>
-              <c:f>Sheet1!$A$2:$A$6</c:f>
+              <c:f>Sheet1!$A$2:$A$7</c:f>
               <c:multiLvlStrCache>
-                <c:ptCount val="5"/>
+                <c:ptCount val="6"/>
                 <c:lvl>
                   <c:pt idx="0">
                     <c:v>Logistic Regression (balanced)</c:v>
@@ -2235,12 +2241,15 @@
                     <c:v>Decision Tree (tuned)</c:v>
                   </c:pt>
                   <c:pt idx="2">
+                    <c:v>Bagged trees (200)</c:v>
+                  </c:pt>
+                  <c:pt idx="3">
                     <c:v>Random Forest (default)</c:v>
                   </c:pt>
-                  <c:pt idx="3">
+                  <c:pt idx="4">
                     <c:v>Random Forest (class weights)</c:v>
                   </c:pt>
-                  <c:pt idx="4">
+                  <c:pt idx="5">
                     <c:v>Random Forest, threshold 0.25</c:v>
                   </c:pt>
                 </c:lvl>
@@ -2249,10 +2258,10 @@
           </c:cat>
           <c:val>
             <c:numRef>
-              <c:f>Sheet1!$C$2:$C$6</c:f>
+              <c:f>Sheet1!$C$2:$C$7</c:f>
               <c:numCache>
                 <c:formatCode>General</c:formatCode>
-                <c:ptCount val="5"/>
+                <c:ptCount val="6"/>
                 <c:pt idx="0">
                   <c:v>61.2</c:v>
                 </c:pt>
@@ -2260,12 +2269,15 @@
                   <c:v>53.3</c:v>
                 </c:pt>
                 <c:pt idx="2">
+                  <c:v>82.6</c:v>
+                </c:pt>
+                <c:pt idx="3">
                   <c:v>84.5</c:v>
                 </c:pt>
-                <c:pt idx="3">
+                <c:pt idx="4">
                   <c:v>77.3</c:v>
                 </c:pt>
-                <c:pt idx="4">
+                <c:pt idx="5">
                   <c:v>67</c:v>
                 </c:pt>
               </c:numCache>
@@ -9970,7 +9982,7 @@
                 <a:gridCol w="868680"/>
                 <a:gridCol w="868680"/>
               </a:tblGrid>
-              <a:tr h="301752">
+              <a:tr h="274320">
                 <a:tc>
                   <a:txBody>
                     <a:bodyPr/>
@@ -9980,7 +9992,7 @@
                         <a:buNone/>
                       </a:pPr>
                       <a:r>
-                        <a:rPr lang="en-US" sz="1050" b="1" dirty="0">
+                        <a:rPr lang="en-US" sz="1000" b="1" dirty="0">
                           <a:solidFill>
                             <a:srgbClr val="FFFFFF"/>
                           </a:solidFill>
@@ -9990,14 +10002,14 @@
                         </a:rPr>
                         <a:t>Model</a:t>
                       </a:r>
-                      <a:endParaRPr lang="en-US" sz="1050" dirty="0">
+                      <a:endParaRPr lang="en-US" sz="1000" dirty="0">
                         <a:latin typeface="Calibri" charset="0"/>
                         <a:ea typeface="Calibri" charset="0"/>
                         <a:cs typeface="Calibri" charset="0"/>
                       </a:endParaRPr>
                     </a:p>
                   </a:txBody>
-                  <a:tcPr marL="36576" marR="36576" marT="36576" marB="36576" anchor="ctr">
+                  <a:tcPr marL="27432" marR="27432" marT="27432" marB="27432" anchor="ctr">
                     <a:lnL w="6350" cap="flat" cmpd="sng" algn="ctr">
                       <a:solidFill>
                         <a:srgbClr val="BFBFBF"/>
@@ -10048,7 +10060,7 @@
                         <a:buNone/>
                       </a:pPr>
                       <a:r>
-                        <a:rPr lang="en-US" sz="1050" b="1" dirty="0">
+                        <a:rPr lang="en-US" sz="1000" b="1" dirty="0">
                           <a:solidFill>
                             <a:srgbClr val="FFFFFF"/>
                           </a:solidFill>
@@ -10058,14 +10070,14 @@
                         </a:rPr>
                         <a:t>Recall</a:t>
                       </a:r>
-                      <a:endParaRPr lang="en-US" sz="1050" dirty="0">
+                      <a:endParaRPr lang="en-US" sz="1000" dirty="0">
                         <a:latin typeface="Calibri" charset="0"/>
                         <a:ea typeface="Calibri" charset="0"/>
                         <a:cs typeface="Calibri" charset="0"/>
                       </a:endParaRPr>
                     </a:p>
                   </a:txBody>
-                  <a:tcPr marL="36576" marR="36576" marT="36576" marB="36576" anchor="ctr">
+                  <a:tcPr marL="27432" marR="27432" marT="27432" marB="27432" anchor="ctr">
                     <a:lnL w="6350" cap="flat" cmpd="sng" algn="ctr">
                       <a:solidFill>
                         <a:srgbClr val="BFBFBF"/>
@@ -10116,7 +10128,7 @@
                         <a:buNone/>
                       </a:pPr>
                       <a:r>
-                        <a:rPr lang="en-US" sz="1050" b="1" dirty="0">
+                        <a:rPr lang="en-US" sz="1000" b="1" dirty="0">
                           <a:solidFill>
                             <a:srgbClr val="FFFFFF"/>
                           </a:solidFill>
@@ -10126,14 +10138,14 @@
                         </a:rPr>
                         <a:t>Precision</a:t>
                       </a:r>
-                      <a:endParaRPr lang="en-US" sz="1050" dirty="0">
+                      <a:endParaRPr lang="en-US" sz="1000" dirty="0">
                         <a:latin typeface="Calibri" charset="0"/>
                         <a:ea typeface="Calibri" charset="0"/>
                         <a:cs typeface="Calibri" charset="0"/>
                       </a:endParaRPr>
                     </a:p>
                   </a:txBody>
-                  <a:tcPr marL="36576" marR="36576" marT="36576" marB="36576" anchor="ctr">
+                  <a:tcPr marL="27432" marR="27432" marT="27432" marB="27432" anchor="ctr">
                     <a:lnL w="6350" cap="flat" cmpd="sng" algn="ctr">
                       <a:solidFill>
                         <a:srgbClr val="BFBFBF"/>
@@ -10184,7 +10196,7 @@
                         <a:buNone/>
                       </a:pPr>
                       <a:r>
-                        <a:rPr lang="en-US" sz="1050" b="1" dirty="0">
+                        <a:rPr lang="en-US" sz="1000" b="1" dirty="0">
                           <a:solidFill>
                             <a:srgbClr val="FFFFFF"/>
                           </a:solidFill>
@@ -10194,14 +10206,14 @@
                         </a:rPr>
                         <a:t>F1</a:t>
                       </a:r>
-                      <a:endParaRPr lang="en-US" sz="1050" dirty="0">
+                      <a:endParaRPr lang="en-US" sz="1000" dirty="0">
                         <a:latin typeface="Calibri" charset="0"/>
                         <a:ea typeface="Calibri" charset="0"/>
                         <a:cs typeface="Calibri" charset="0"/>
                       </a:endParaRPr>
                     </a:p>
                   </a:txBody>
-                  <a:tcPr marL="36576" marR="36576" marT="36576" marB="36576" anchor="ctr">
+                  <a:tcPr marL="27432" marR="27432" marT="27432" marB="27432" anchor="ctr">
                     <a:lnL w="6350" cap="flat" cmpd="sng" algn="ctr">
                       <a:solidFill>
                         <a:srgbClr val="BFBFBF"/>
@@ -10252,7 +10264,7 @@
                         <a:buNone/>
                       </a:pPr>
                       <a:r>
-                        <a:rPr lang="en-US" sz="1050" b="1" dirty="0">
+                        <a:rPr lang="en-US" sz="1000" b="1" dirty="0">
                           <a:solidFill>
                             <a:srgbClr val="FFFFFF"/>
                           </a:solidFill>
@@ -10262,14 +10274,14 @@
                         </a:rPr>
                         <a:t>Accuracy</a:t>
                       </a:r>
-                      <a:endParaRPr lang="en-US" sz="1050" dirty="0">
+                      <a:endParaRPr lang="en-US" sz="1000" dirty="0">
                         <a:latin typeface="Calibri" charset="0"/>
                         <a:ea typeface="Calibri" charset="0"/>
                         <a:cs typeface="Calibri" charset="0"/>
                       </a:endParaRPr>
                     </a:p>
                   </a:txBody>
-                  <a:tcPr marL="36576" marR="36576" marT="36576" marB="36576" anchor="ctr">
+                  <a:tcPr marL="27432" marR="27432" marT="27432" marB="27432" anchor="ctr">
                     <a:lnL w="6350" cap="flat" cmpd="sng" algn="ctr">
                       <a:solidFill>
                         <a:srgbClr val="BFBFBF"/>
@@ -10320,7 +10332,7 @@
                         <a:buNone/>
                       </a:pPr>
                       <a:r>
-                        <a:rPr lang="en-US" sz="1050" b="1" dirty="0">
+                        <a:rPr lang="en-US" sz="1000" b="1" dirty="0">
                           <a:solidFill>
                             <a:srgbClr val="FFFFFF"/>
                           </a:solidFill>
@@ -10330,14 +10342,14 @@
                         </a:rPr>
                         <a:t>ROC-AUC</a:t>
                       </a:r>
-                      <a:endParaRPr lang="en-US" sz="1050" dirty="0">
+                      <a:endParaRPr lang="en-US" sz="1000" dirty="0">
                         <a:latin typeface="Calibri" charset="0"/>
                         <a:ea typeface="Calibri" charset="0"/>
                         <a:cs typeface="Calibri" charset="0"/>
                       </a:endParaRPr>
                     </a:p>
                   </a:txBody>
-                  <a:tcPr marL="36576" marR="36576" marT="36576" marB="36576" anchor="ctr">
+                  <a:tcPr marL="27432" marR="27432" marT="27432" marB="27432" anchor="ctr">
                     <a:lnL w="6350" cap="flat" cmpd="sng" algn="ctr">
                       <a:solidFill>
                         <a:srgbClr val="BFBFBF"/>
@@ -10388,7 +10400,7 @@
                         <a:buNone/>
                       </a:pPr>
                       <a:r>
-                        <a:rPr lang="en-US" sz="1050" b="1" dirty="0">
+                        <a:rPr lang="en-US" sz="1000" b="1" dirty="0">
                           <a:solidFill>
                             <a:srgbClr val="FFFFFF"/>
                           </a:solidFill>
@@ -10398,14 +10410,14 @@
                         </a:rPr>
                         <a:t>Train recall</a:t>
                       </a:r>
-                      <a:endParaRPr lang="en-US" sz="1050" dirty="0">
+                      <a:endParaRPr lang="en-US" sz="1000" dirty="0">
                         <a:latin typeface="Calibri" charset="0"/>
                         <a:ea typeface="Calibri" charset="0"/>
                         <a:cs typeface="Calibri" charset="0"/>
                       </a:endParaRPr>
                     </a:p>
                   </a:txBody>
-                  <a:tcPr marL="36576" marR="36576" marT="36576" marB="36576" anchor="ctr">
+                  <a:tcPr marL="27432" marR="27432" marT="27432" marB="27432" anchor="ctr">
                     <a:lnL w="6350" cap="flat" cmpd="sng" algn="ctr">
                       <a:solidFill>
                         <a:srgbClr val="BFBFBF"/>
@@ -10448,7 +10460,7 @@
                   </a:tcPr>
                 </a:tc>
               </a:tr>
-              <a:tr h="301752">
+              <a:tr h="274320">
                 <a:tc>
                   <a:txBody>
                     <a:bodyPr/>
@@ -10458,7 +10470,7 @@
                         <a:buNone/>
                       </a:pPr>
                       <a:r>
-                        <a:rPr lang="en-US" sz="1050" dirty="0">
+                        <a:rPr lang="en-US" sz="1000" dirty="0">
                           <a:solidFill>
                             <a:srgbClr val="1F1F1F"/>
                           </a:solidFill>
@@ -10468,14 +10480,14 @@
                         </a:rPr>
                         <a:t>Logistic Regression (plain)</a:t>
                       </a:r>
-                      <a:endParaRPr lang="en-US" sz="1050" dirty="0">
+                      <a:endParaRPr lang="en-US" sz="1000" dirty="0">
                         <a:latin typeface="Calibri" charset="0"/>
                         <a:ea typeface="Calibri" charset="0"/>
                         <a:cs typeface="Calibri" charset="0"/>
                       </a:endParaRPr>
                     </a:p>
                   </a:txBody>
-                  <a:tcPr marL="36576" marR="36576" marT="36576" marB="36576" anchor="ctr">
+                  <a:tcPr marL="27432" marR="27432" marT="27432" marB="27432" anchor="ctr">
                     <a:lnL w="6350" cap="flat" cmpd="sng" algn="ctr">
                       <a:solidFill>
                         <a:srgbClr val="BFBFBF"/>
@@ -10523,7 +10535,7 @@
                         <a:buNone/>
                       </a:pPr>
                       <a:r>
-                        <a:rPr lang="en-US" sz="1050" dirty="0">
+                        <a:rPr lang="en-US" sz="1000" dirty="0">
                           <a:solidFill>
                             <a:srgbClr val="1F1F1F"/>
                           </a:solidFill>
@@ -10533,14 +10545,14 @@
                         </a:rPr>
                         <a:t>0.569</a:t>
                       </a:r>
-                      <a:endParaRPr lang="en-US" sz="1050" dirty="0">
+                      <a:endParaRPr lang="en-US" sz="1000" dirty="0">
                         <a:latin typeface="Calibri" charset="0"/>
                         <a:ea typeface="Calibri" charset="0"/>
                         <a:cs typeface="Calibri" charset="0"/>
                       </a:endParaRPr>
                     </a:p>
                   </a:txBody>
-                  <a:tcPr marL="36576" marR="36576" marT="36576" marB="36576" anchor="ctr">
+                  <a:tcPr marL="27432" marR="27432" marT="27432" marB="27432" anchor="ctr">
                     <a:lnL w="6350" cap="flat" cmpd="sng" algn="ctr">
                       <a:solidFill>
                         <a:srgbClr val="BFBFBF"/>
@@ -10588,7 +10600,7 @@
                         <a:buNone/>
                       </a:pPr>
                       <a:r>
-                        <a:rPr lang="en-US" sz="1050" dirty="0">
+                        <a:rPr lang="en-US" sz="1000" dirty="0">
                           <a:solidFill>
                             <a:srgbClr val="1F1F1F"/>
                           </a:solidFill>
@@ -10598,14 +10610,14 @@
                         </a:rPr>
                         <a:t>0.772</a:t>
                       </a:r>
-                      <a:endParaRPr lang="en-US" sz="1050" dirty="0">
+                      <a:endParaRPr lang="en-US" sz="1000" dirty="0">
                         <a:latin typeface="Calibri" charset="0"/>
                         <a:ea typeface="Calibri" charset="0"/>
                         <a:cs typeface="Calibri" charset="0"/>
                       </a:endParaRPr>
                     </a:p>
                   </a:txBody>
-                  <a:tcPr marL="36576" marR="36576" marT="36576" marB="36576" anchor="ctr">
+                  <a:tcPr marL="27432" marR="27432" marT="27432" marB="27432" anchor="ctr">
                     <a:lnL w="6350" cap="flat" cmpd="sng" algn="ctr">
                       <a:solidFill>
                         <a:srgbClr val="BFBFBF"/>
@@ -10653,7 +10665,7 @@
                         <a:buNone/>
                       </a:pPr>
                       <a:r>
-                        <a:rPr lang="en-US" sz="1050" dirty="0">
+                        <a:rPr lang="en-US" sz="1000" dirty="0">
                           <a:solidFill>
                             <a:srgbClr val="1F1F1F"/>
                           </a:solidFill>
@@ -10663,14 +10675,14 @@
                         </a:rPr>
                         <a:t>0.655</a:t>
                       </a:r>
-                      <a:endParaRPr lang="en-US" sz="1050" dirty="0">
+                      <a:endParaRPr lang="en-US" sz="1000" dirty="0">
                         <a:latin typeface="Calibri" charset="0"/>
                         <a:ea typeface="Calibri" charset="0"/>
                         <a:cs typeface="Calibri" charset="0"/>
                       </a:endParaRPr>
                     </a:p>
                   </a:txBody>
-                  <a:tcPr marL="36576" marR="36576" marT="36576" marB="36576" anchor="ctr">
+                  <a:tcPr marL="27432" marR="27432" marT="27432" marB="27432" anchor="ctr">
                     <a:lnL w="6350" cap="flat" cmpd="sng" algn="ctr">
                       <a:solidFill>
                         <a:srgbClr val="BFBFBF"/>
@@ -10718,7 +10730,7 @@
                         <a:buNone/>
                       </a:pPr>
                       <a:r>
-                        <a:rPr lang="en-US" sz="1050" dirty="0">
+                        <a:rPr lang="en-US" sz="1000" dirty="0">
                           <a:solidFill>
                             <a:srgbClr val="1F1F1F"/>
                           </a:solidFill>
@@ -10728,14 +10740,14 @@
                         </a:rPr>
                         <a:t>0.880</a:t>
                       </a:r>
-                      <a:endParaRPr lang="en-US" sz="1050" dirty="0">
+                      <a:endParaRPr lang="en-US" sz="1000" dirty="0">
                         <a:latin typeface="Calibri" charset="0"/>
                         <a:ea typeface="Calibri" charset="0"/>
                         <a:cs typeface="Calibri" charset="0"/>
                       </a:endParaRPr>
                     </a:p>
                   </a:txBody>
-                  <a:tcPr marL="36576" marR="36576" marT="36576" marB="36576" anchor="ctr">
+                  <a:tcPr marL="27432" marR="27432" marT="27432" marB="27432" anchor="ctr">
                     <a:lnL w="6350" cap="flat" cmpd="sng" algn="ctr">
                       <a:solidFill>
                         <a:srgbClr val="BFBFBF"/>
@@ -10783,7 +10795,7 @@
                         <a:buNone/>
                       </a:pPr>
                       <a:r>
-                        <a:rPr lang="en-US" sz="1050" dirty="0">
+                        <a:rPr lang="en-US" sz="1000" dirty="0">
                           <a:solidFill>
                             <a:srgbClr val="1F1F1F"/>
                           </a:solidFill>
@@ -10793,14 +10805,14 @@
                         </a:rPr>
                         <a:t>0.907</a:t>
                       </a:r>
-                      <a:endParaRPr lang="en-US" sz="1050" dirty="0">
+                      <a:endParaRPr lang="en-US" sz="1000" dirty="0">
                         <a:latin typeface="Calibri" charset="0"/>
                         <a:ea typeface="Calibri" charset="0"/>
                         <a:cs typeface="Calibri" charset="0"/>
                       </a:endParaRPr>
                     </a:p>
                   </a:txBody>
-                  <a:tcPr marL="36576" marR="36576" marT="36576" marB="36576" anchor="ctr">
+                  <a:tcPr marL="27432" marR="27432" marT="27432" marB="27432" anchor="ctr">
                     <a:lnL w="6350" cap="flat" cmpd="sng" algn="ctr">
                       <a:solidFill>
                         <a:srgbClr val="BFBFBF"/>
@@ -10848,7 +10860,7 @@
                         <a:buNone/>
                       </a:pPr>
                       <a:r>
-                        <a:rPr lang="en-US" sz="1050" dirty="0">
+                        <a:rPr lang="en-US" sz="1000" dirty="0">
                           <a:solidFill>
                             <a:srgbClr val="1F1F1F"/>
                           </a:solidFill>
@@ -10858,14 +10870,14 @@
                         </a:rPr>
                         <a:t>0.643</a:t>
                       </a:r>
-                      <a:endParaRPr lang="en-US" sz="1050" dirty="0">
+                      <a:endParaRPr lang="en-US" sz="1000" dirty="0">
                         <a:latin typeface="Calibri" charset="0"/>
                         <a:ea typeface="Calibri" charset="0"/>
                         <a:cs typeface="Calibri" charset="0"/>
                       </a:endParaRPr>
                     </a:p>
                   </a:txBody>
-                  <a:tcPr marL="36576" marR="36576" marT="36576" marB="36576" anchor="ctr">
+                  <a:tcPr marL="27432" marR="27432" marT="27432" marB="27432" anchor="ctr">
                     <a:lnL w="6350" cap="flat" cmpd="sng" algn="ctr">
                       <a:solidFill>
                         <a:srgbClr val="BFBFBF"/>
@@ -10905,7 +10917,7 @@
                   </a:tcPr>
                 </a:tc>
               </a:tr>
-              <a:tr h="301752">
+              <a:tr h="274320">
                 <a:tc>
                   <a:txBody>
                     <a:bodyPr/>
@@ -10915,7 +10927,7 @@
                         <a:buNone/>
                       </a:pPr>
                       <a:r>
-                        <a:rPr lang="en-US" sz="1050" dirty="0">
+                        <a:rPr lang="en-US" sz="1000" dirty="0">
                           <a:solidFill>
                             <a:srgbClr val="1F1F1F"/>
                           </a:solidFill>
@@ -10925,14 +10937,14 @@
                         </a:rPr>
                         <a:t>Logistic Regression (balanced)</a:t>
                       </a:r>
-                      <a:endParaRPr lang="en-US" sz="1050" dirty="0">
+                      <a:endParaRPr lang="en-US" sz="1000" dirty="0">
                         <a:latin typeface="Calibri" charset="0"/>
                         <a:ea typeface="Calibri" charset="0"/>
                         <a:cs typeface="Calibri" charset="0"/>
                       </a:endParaRPr>
                     </a:p>
                   </a:txBody>
-                  <a:tcPr marL="36576" marR="36576" marT="36576" marB="36576" anchor="ctr">
+                  <a:tcPr marL="27432" marR="27432" marT="27432" marB="27432" anchor="ctr">
                     <a:lnL w="6350" cap="flat" cmpd="sng" algn="ctr">
                       <a:solidFill>
                         <a:srgbClr val="BFBFBF"/>
@@ -10980,7 +10992,7 @@
                         <a:buNone/>
                       </a:pPr>
                       <a:r>
-                        <a:rPr lang="en-US" sz="1050" dirty="0">
+                        <a:rPr lang="en-US" sz="1000" dirty="0">
                           <a:solidFill>
                             <a:srgbClr val="1F1F1F"/>
                           </a:solidFill>
@@ -10990,14 +11002,14 @@
                         </a:rPr>
                         <a:t>0.798</a:t>
                       </a:r>
-                      <a:endParaRPr lang="en-US" sz="1050" dirty="0">
+                      <a:endParaRPr lang="en-US" sz="1000" dirty="0">
                         <a:latin typeface="Calibri" charset="0"/>
                         <a:ea typeface="Calibri" charset="0"/>
                         <a:cs typeface="Calibri" charset="0"/>
                       </a:endParaRPr>
                     </a:p>
                   </a:txBody>
-                  <a:tcPr marL="36576" marR="36576" marT="36576" marB="36576" anchor="ctr">
+                  <a:tcPr marL="27432" marR="27432" marT="27432" marB="27432" anchor="ctr">
                     <a:lnL w="6350" cap="flat" cmpd="sng" algn="ctr">
                       <a:solidFill>
                         <a:srgbClr val="BFBFBF"/>
@@ -11045,7 +11057,7 @@
                         <a:buNone/>
                       </a:pPr>
                       <a:r>
-                        <a:rPr lang="en-US" sz="1050" dirty="0">
+                        <a:rPr lang="en-US" sz="1000" dirty="0">
                           <a:solidFill>
                             <a:srgbClr val="1F1F1F"/>
                           </a:solidFill>
@@ -11055,14 +11067,14 @@
                         </a:rPr>
                         <a:t>0.612</a:t>
                       </a:r>
-                      <a:endParaRPr lang="en-US" sz="1050" dirty="0">
+                      <a:endParaRPr lang="en-US" sz="1000" dirty="0">
                         <a:latin typeface="Calibri" charset="0"/>
                         <a:ea typeface="Calibri" charset="0"/>
                         <a:cs typeface="Calibri" charset="0"/>
                       </a:endParaRPr>
                     </a:p>
                   </a:txBody>
-                  <a:tcPr marL="36576" marR="36576" marT="36576" marB="36576" anchor="ctr">
+                  <a:tcPr marL="27432" marR="27432" marT="27432" marB="27432" anchor="ctr">
                     <a:lnL w="6350" cap="flat" cmpd="sng" algn="ctr">
                       <a:solidFill>
                         <a:srgbClr val="BFBFBF"/>
@@ -11110,7 +11122,7 @@
                         <a:buNone/>
                       </a:pPr>
                       <a:r>
-                        <a:rPr lang="en-US" sz="1050" dirty="0">
+                        <a:rPr lang="en-US" sz="1000" dirty="0">
                           <a:solidFill>
                             <a:srgbClr val="1F1F1F"/>
                           </a:solidFill>
@@ -11120,14 +11132,14 @@
                         </a:rPr>
                         <a:t>0.693</a:t>
                       </a:r>
-                      <a:endParaRPr lang="en-US" sz="1050" dirty="0">
+                      <a:endParaRPr lang="en-US" sz="1000" dirty="0">
                         <a:latin typeface="Calibri" charset="0"/>
                         <a:ea typeface="Calibri" charset="0"/>
                         <a:cs typeface="Calibri" charset="0"/>
                       </a:endParaRPr>
                     </a:p>
                   </a:txBody>
-                  <a:tcPr marL="36576" marR="36576" marT="36576" marB="36576" anchor="ctr">
+                  <a:tcPr marL="27432" marR="27432" marT="27432" marB="27432" anchor="ctr">
                     <a:lnL w="6350" cap="flat" cmpd="sng" algn="ctr">
                       <a:solidFill>
                         <a:srgbClr val="BFBFBF"/>
@@ -11175,7 +11187,7 @@
                         <a:buNone/>
                       </a:pPr>
                       <a:r>
-                        <a:rPr lang="en-US" sz="1050" dirty="0">
+                        <a:rPr lang="en-US" sz="1000" dirty="0">
                           <a:solidFill>
                             <a:srgbClr val="1F1F1F"/>
                           </a:solidFill>
@@ -11185,14 +11197,14 @@
                         </a:rPr>
                         <a:t>0.859</a:t>
                       </a:r>
-                      <a:endParaRPr lang="en-US" sz="1050" dirty="0">
+                      <a:endParaRPr lang="en-US" sz="1000" dirty="0">
                         <a:latin typeface="Calibri" charset="0"/>
                         <a:ea typeface="Calibri" charset="0"/>
                         <a:cs typeface="Calibri" charset="0"/>
                       </a:endParaRPr>
                     </a:p>
                   </a:txBody>
-                  <a:tcPr marL="36576" marR="36576" marT="36576" marB="36576" anchor="ctr">
+                  <a:tcPr marL="27432" marR="27432" marT="27432" marB="27432" anchor="ctr">
                     <a:lnL w="6350" cap="flat" cmpd="sng" algn="ctr">
                       <a:solidFill>
                         <a:srgbClr val="BFBFBF"/>
@@ -11240,7 +11252,7 @@
                         <a:buNone/>
                       </a:pPr>
                       <a:r>
-                        <a:rPr lang="en-US" sz="1050" dirty="0">
+                        <a:rPr lang="en-US" sz="1000" dirty="0">
                           <a:solidFill>
                             <a:srgbClr val="1F1F1F"/>
                           </a:solidFill>
@@ -11250,14 +11262,14 @@
                         </a:rPr>
                         <a:t>0.906</a:t>
                       </a:r>
-                      <a:endParaRPr lang="en-US" sz="1050" dirty="0">
+                      <a:endParaRPr lang="en-US" sz="1000" dirty="0">
                         <a:latin typeface="Calibri" charset="0"/>
                         <a:ea typeface="Calibri" charset="0"/>
                         <a:cs typeface="Calibri" charset="0"/>
                       </a:endParaRPr>
                     </a:p>
                   </a:txBody>
-                  <a:tcPr marL="36576" marR="36576" marT="36576" marB="36576" anchor="ctr">
+                  <a:tcPr marL="27432" marR="27432" marT="27432" marB="27432" anchor="ctr">
                     <a:lnL w="6350" cap="flat" cmpd="sng" algn="ctr">
                       <a:solidFill>
                         <a:srgbClr val="BFBFBF"/>
@@ -11305,7 +11317,7 @@
                         <a:buNone/>
                       </a:pPr>
                       <a:r>
-                        <a:rPr lang="en-US" sz="1050" dirty="0">
+                        <a:rPr lang="en-US" sz="1000" dirty="0">
                           <a:solidFill>
                             <a:srgbClr val="1F1F1F"/>
                           </a:solidFill>
@@ -11315,14 +11327,14 @@
                         </a:rPr>
                         <a:t>0.823</a:t>
                       </a:r>
-                      <a:endParaRPr lang="en-US" sz="1050" dirty="0">
+                      <a:endParaRPr lang="en-US" sz="1000" dirty="0">
                         <a:latin typeface="Calibri" charset="0"/>
                         <a:ea typeface="Calibri" charset="0"/>
                         <a:cs typeface="Calibri" charset="0"/>
                       </a:endParaRPr>
                     </a:p>
                   </a:txBody>
-                  <a:tcPr marL="36576" marR="36576" marT="36576" marB="36576" anchor="ctr">
+                  <a:tcPr marL="27432" marR="27432" marT="27432" marB="27432" anchor="ctr">
                     <a:lnL w="6350" cap="flat" cmpd="sng" algn="ctr">
                       <a:solidFill>
                         <a:srgbClr val="BFBFBF"/>
@@ -11362,7 +11374,7 @@
                   </a:tcPr>
                 </a:tc>
               </a:tr>
-              <a:tr h="301752">
+              <a:tr h="274320">
                 <a:tc>
                   <a:txBody>
                     <a:bodyPr/>
@@ -11372,7 +11384,7 @@
                         <a:buNone/>
                       </a:pPr>
                       <a:r>
-                        <a:rPr lang="en-US" sz="1050" dirty="0">
+                        <a:rPr lang="en-US" sz="1000" dirty="0">
                           <a:solidFill>
                             <a:srgbClr val="1F1F1F"/>
                           </a:solidFill>
@@ -11382,14 +11394,14 @@
                         </a:rPr>
                         <a:t>Decision Tree (default)</a:t>
                       </a:r>
-                      <a:endParaRPr lang="en-US" sz="1050" dirty="0">
+                      <a:endParaRPr lang="en-US" sz="1000" dirty="0">
                         <a:latin typeface="Calibri" charset="0"/>
                         <a:ea typeface="Calibri" charset="0"/>
                         <a:cs typeface="Calibri" charset="0"/>
                       </a:endParaRPr>
                     </a:p>
                   </a:txBody>
-                  <a:tcPr marL="36576" marR="36576" marT="36576" marB="36576" anchor="ctr">
+                  <a:tcPr marL="27432" marR="27432" marT="27432" marB="27432" anchor="ctr">
                     <a:lnL w="6350" cap="flat" cmpd="sng" algn="ctr">
                       <a:solidFill>
                         <a:srgbClr val="BFBFBF"/>
@@ -11437,7 +11449,7 @@
                         <a:buNone/>
                       </a:pPr>
                       <a:r>
-                        <a:rPr lang="en-US" sz="1050" dirty="0">
+                        <a:rPr lang="en-US" sz="1000" dirty="0">
                           <a:solidFill>
                             <a:srgbClr val="1F1F1F"/>
                           </a:solidFill>
@@ -11447,14 +11459,14 @@
                         </a:rPr>
                         <a:t>0.686</a:t>
                       </a:r>
-                      <a:endParaRPr lang="en-US" sz="1050" dirty="0">
+                      <a:endParaRPr lang="en-US" sz="1000" dirty="0">
                         <a:latin typeface="Calibri" charset="0"/>
                         <a:ea typeface="Calibri" charset="0"/>
                         <a:cs typeface="Calibri" charset="0"/>
                       </a:endParaRPr>
                     </a:p>
                   </a:txBody>
-                  <a:tcPr marL="36576" marR="36576" marT="36576" marB="36576" anchor="ctr">
+                  <a:tcPr marL="27432" marR="27432" marT="27432" marB="27432" anchor="ctr">
                     <a:lnL w="6350" cap="flat" cmpd="sng" algn="ctr">
                       <a:solidFill>
                         <a:srgbClr val="BFBFBF"/>
@@ -11502,7 +11514,7 @@
                         <a:buNone/>
                       </a:pPr>
                       <a:r>
-                        <a:rPr lang="en-US" sz="1050" dirty="0">
+                        <a:rPr lang="en-US" sz="1000" dirty="0">
                           <a:solidFill>
                             <a:srgbClr val="1F1F1F"/>
                           </a:solidFill>
@@ -11512,14 +11524,14 @@
                         </a:rPr>
                         <a:t>0.706</a:t>
                       </a:r>
-                      <a:endParaRPr lang="en-US" sz="1050" dirty="0">
+                      <a:endParaRPr lang="en-US" sz="1000" dirty="0">
                         <a:latin typeface="Calibri" charset="0"/>
                         <a:ea typeface="Calibri" charset="0"/>
                         <a:cs typeface="Calibri" charset="0"/>
                       </a:endParaRPr>
                     </a:p>
                   </a:txBody>
-                  <a:tcPr marL="36576" marR="36576" marT="36576" marB="36576" anchor="ctr">
+                  <a:tcPr marL="27432" marR="27432" marT="27432" marB="27432" anchor="ctr">
                     <a:lnL w="6350" cap="flat" cmpd="sng" algn="ctr">
                       <a:solidFill>
                         <a:srgbClr val="BFBFBF"/>
@@ -11567,7 +11579,7 @@
                         <a:buNone/>
                       </a:pPr>
                       <a:r>
-                        <a:rPr lang="en-US" sz="1050" dirty="0">
+                        <a:rPr lang="en-US" sz="1000" dirty="0">
                           <a:solidFill>
                             <a:srgbClr val="1F1F1F"/>
                           </a:solidFill>
@@ -11577,14 +11589,14 @@
                         </a:rPr>
                         <a:t>0.696</a:t>
                       </a:r>
-                      <a:endParaRPr lang="en-US" sz="1050" dirty="0">
+                      <a:endParaRPr lang="en-US" sz="1000" dirty="0">
                         <a:latin typeface="Calibri" charset="0"/>
                         <a:ea typeface="Calibri" charset="0"/>
                         <a:cs typeface="Calibri" charset="0"/>
                       </a:endParaRPr>
                     </a:p>
                   </a:txBody>
-                  <a:tcPr marL="36576" marR="36576" marT="36576" marB="36576" anchor="ctr">
+                  <a:tcPr marL="27432" marR="27432" marT="27432" marB="27432" anchor="ctr">
                     <a:lnL w="6350" cap="flat" cmpd="sng" algn="ctr">
                       <a:solidFill>
                         <a:srgbClr val="BFBFBF"/>
@@ -11632,7 +11644,7 @@
                         <a:buNone/>
                       </a:pPr>
                       <a:r>
-                        <a:rPr lang="en-US" sz="1050" dirty="0">
+                        <a:rPr lang="en-US" sz="1000" dirty="0">
                           <a:solidFill>
                             <a:srgbClr val="1F1F1F"/>
                           </a:solidFill>
@@ -11642,14 +11654,14 @@
                         </a:rPr>
                         <a:t>0.880</a:t>
                       </a:r>
-                      <a:endParaRPr lang="en-US" sz="1050" dirty="0">
+                      <a:endParaRPr lang="en-US" sz="1000" dirty="0">
                         <a:latin typeface="Calibri" charset="0"/>
                         <a:ea typeface="Calibri" charset="0"/>
                         <a:cs typeface="Calibri" charset="0"/>
                       </a:endParaRPr>
                     </a:p>
                   </a:txBody>
-                  <a:tcPr marL="36576" marR="36576" marT="36576" marB="36576" anchor="ctr">
+                  <a:tcPr marL="27432" marR="27432" marT="27432" marB="27432" anchor="ctr">
                     <a:lnL w="6350" cap="flat" cmpd="sng" algn="ctr">
                       <a:solidFill>
                         <a:srgbClr val="BFBFBF"/>
@@ -11697,7 +11709,7 @@
                         <a:buNone/>
                       </a:pPr>
                       <a:r>
-                        <a:rPr lang="en-US" sz="1050" dirty="0">
+                        <a:rPr lang="en-US" sz="1000" dirty="0">
                           <a:solidFill>
                             <a:srgbClr val="1F1F1F"/>
                           </a:solidFill>
@@ -11707,14 +11719,14 @@
                         </a:rPr>
                         <a:t>0.807</a:t>
                       </a:r>
-                      <a:endParaRPr lang="en-US" sz="1050" dirty="0">
+                      <a:endParaRPr lang="en-US" sz="1000" dirty="0">
                         <a:latin typeface="Calibri" charset="0"/>
                         <a:ea typeface="Calibri" charset="0"/>
                         <a:cs typeface="Calibri" charset="0"/>
                       </a:endParaRPr>
                     </a:p>
                   </a:txBody>
-                  <a:tcPr marL="36576" marR="36576" marT="36576" marB="36576" anchor="ctr">
+                  <a:tcPr marL="27432" marR="27432" marT="27432" marB="27432" anchor="ctr">
                     <a:lnL w="6350" cap="flat" cmpd="sng" algn="ctr">
                       <a:solidFill>
                         <a:srgbClr val="BFBFBF"/>
@@ -11762,7 +11774,7 @@
                         <a:buNone/>
                       </a:pPr>
                       <a:r>
-                        <a:rPr lang="en-US" sz="1050" dirty="0">
+                        <a:rPr lang="en-US" sz="1000" dirty="0">
                           <a:solidFill>
                             <a:srgbClr val="1F1F1F"/>
                           </a:solidFill>
@@ -11772,14 +11784,14 @@
                         </a:rPr>
                         <a:t>1.000</a:t>
                       </a:r>
-                      <a:endParaRPr lang="en-US" sz="1050" dirty="0">
+                      <a:endParaRPr lang="en-US" sz="1000" dirty="0">
                         <a:latin typeface="Calibri" charset="0"/>
                         <a:ea typeface="Calibri" charset="0"/>
                         <a:cs typeface="Calibri" charset="0"/>
                       </a:endParaRPr>
                     </a:p>
                   </a:txBody>
-                  <a:tcPr marL="36576" marR="36576" marT="36576" marB="36576" anchor="ctr">
+                  <a:tcPr marL="27432" marR="27432" marT="27432" marB="27432" anchor="ctr">
                     <a:lnL w="6350" cap="flat" cmpd="sng" algn="ctr">
                       <a:solidFill>
                         <a:srgbClr val="BFBFBF"/>
@@ -11819,7 +11831,7 @@
                   </a:tcPr>
                 </a:tc>
               </a:tr>
-              <a:tr h="301752">
+              <a:tr h="274320">
                 <a:tc>
                   <a:txBody>
                     <a:bodyPr/>
@@ -11829,7 +11841,7 @@
                         <a:buNone/>
                       </a:pPr>
                       <a:r>
-                        <a:rPr lang="en-US" sz="1050" dirty="0">
+                        <a:rPr lang="en-US" sz="1000" dirty="0">
                           <a:solidFill>
                             <a:srgbClr val="1F1F1F"/>
                           </a:solidFill>
@@ -11839,14 +11851,14 @@
                         </a:rPr>
                         <a:t>Decision Tree (class weights)</a:t>
                       </a:r>
-                      <a:endParaRPr lang="en-US" sz="1050" dirty="0">
+                      <a:endParaRPr lang="en-US" sz="1000" dirty="0">
                         <a:latin typeface="Calibri" charset="0"/>
                         <a:ea typeface="Calibri" charset="0"/>
                         <a:cs typeface="Calibri" charset="0"/>
                       </a:endParaRPr>
                     </a:p>
                   </a:txBody>
-                  <a:tcPr marL="36576" marR="36576" marT="36576" marB="36576" anchor="ctr">
+                  <a:tcPr marL="27432" marR="27432" marT="27432" marB="27432" anchor="ctr">
                     <a:lnL w="6350" cap="flat" cmpd="sng" algn="ctr">
                       <a:solidFill>
                         <a:srgbClr val="BFBFBF"/>
@@ -11894,7 +11906,7 @@
                         <a:buNone/>
                       </a:pPr>
                       <a:r>
-                        <a:rPr lang="en-US" sz="1050" dirty="0">
+                        <a:rPr lang="en-US" sz="1000" dirty="0">
                           <a:solidFill>
                             <a:srgbClr val="1F1F1F"/>
                           </a:solidFill>
@@ -11904,14 +11916,14 @@
                         </a:rPr>
                         <a:t>0.616</a:t>
                       </a:r>
-                      <a:endParaRPr lang="en-US" sz="1050" dirty="0">
+                      <a:endParaRPr lang="en-US" sz="1000" dirty="0">
                         <a:latin typeface="Calibri" charset="0"/>
                         <a:ea typeface="Calibri" charset="0"/>
                         <a:cs typeface="Calibri" charset="0"/>
                       </a:endParaRPr>
                     </a:p>
                   </a:txBody>
-                  <a:tcPr marL="36576" marR="36576" marT="36576" marB="36576" anchor="ctr">
+                  <a:tcPr marL="27432" marR="27432" marT="27432" marB="27432" anchor="ctr">
                     <a:lnL w="6350" cap="flat" cmpd="sng" algn="ctr">
                       <a:solidFill>
                         <a:srgbClr val="BFBFBF"/>
@@ -11959,7 +11971,7 @@
                         <a:buNone/>
                       </a:pPr>
                       <a:r>
-                        <a:rPr lang="en-US" sz="1050" dirty="0">
+                        <a:rPr lang="en-US" sz="1000" dirty="0">
                           <a:solidFill>
                             <a:srgbClr val="1F1F1F"/>
                           </a:solidFill>
@@ -11969,14 +11981,14 @@
                         </a:rPr>
                         <a:t>0.728</a:t>
                       </a:r>
-                      <a:endParaRPr lang="en-US" sz="1050" dirty="0">
+                      <a:endParaRPr lang="en-US" sz="1000" dirty="0">
                         <a:latin typeface="Calibri" charset="0"/>
                         <a:ea typeface="Calibri" charset="0"/>
                         <a:cs typeface="Calibri" charset="0"/>
                       </a:endParaRPr>
                     </a:p>
                   </a:txBody>
-                  <a:tcPr marL="36576" marR="36576" marT="36576" marB="36576" anchor="ctr">
+                  <a:tcPr marL="27432" marR="27432" marT="27432" marB="27432" anchor="ctr">
                     <a:lnL w="6350" cap="flat" cmpd="sng" algn="ctr">
                       <a:solidFill>
                         <a:srgbClr val="BFBFBF"/>
@@ -12024,7 +12036,7 @@
                         <a:buNone/>
                       </a:pPr>
                       <a:r>
-                        <a:rPr lang="en-US" sz="1050" dirty="0">
+                        <a:rPr lang="en-US" sz="1000" dirty="0">
                           <a:solidFill>
                             <a:srgbClr val="1F1F1F"/>
                           </a:solidFill>
@@ -12034,14 +12046,14 @@
                         </a:rPr>
                         <a:t>0.668</a:t>
                       </a:r>
-                      <a:endParaRPr lang="en-US" sz="1050" dirty="0">
+                      <a:endParaRPr lang="en-US" sz="1000" dirty="0">
                         <a:latin typeface="Calibri" charset="0"/>
                         <a:ea typeface="Calibri" charset="0"/>
                         <a:cs typeface="Calibri" charset="0"/>
                       </a:endParaRPr>
                     </a:p>
                   </a:txBody>
-                  <a:tcPr marL="36576" marR="36576" marT="36576" marB="36576" anchor="ctr">
+                  <a:tcPr marL="27432" marR="27432" marT="27432" marB="27432" anchor="ctr">
                     <a:lnL w="6350" cap="flat" cmpd="sng" algn="ctr">
                       <a:solidFill>
                         <a:srgbClr val="BFBFBF"/>
@@ -12089,7 +12101,7 @@
                         <a:buNone/>
                       </a:pPr>
                       <a:r>
-                        <a:rPr lang="en-US" sz="1050" dirty="0">
+                        <a:rPr lang="en-US" sz="1000" dirty="0">
                           <a:solidFill>
                             <a:srgbClr val="1F1F1F"/>
                           </a:solidFill>
@@ -12099,14 +12111,14 @@
                         </a:rPr>
                         <a:t>0.878</a:t>
                       </a:r>
-                      <a:endParaRPr lang="en-US" sz="1050" dirty="0">
+                      <a:endParaRPr lang="en-US" sz="1000" dirty="0">
                         <a:latin typeface="Calibri" charset="0"/>
                         <a:ea typeface="Calibri" charset="0"/>
                         <a:cs typeface="Calibri" charset="0"/>
                       </a:endParaRPr>
                     </a:p>
                   </a:txBody>
-                  <a:tcPr marL="36576" marR="36576" marT="36576" marB="36576" anchor="ctr">
+                  <a:tcPr marL="27432" marR="27432" marT="27432" marB="27432" anchor="ctr">
                     <a:lnL w="6350" cap="flat" cmpd="sng" algn="ctr">
                       <a:solidFill>
                         <a:srgbClr val="BFBFBF"/>
@@ -12154,7 +12166,7 @@
                         <a:buNone/>
                       </a:pPr>
                       <a:r>
-                        <a:rPr lang="en-US" sz="1050" dirty="0">
+                        <a:rPr lang="en-US" sz="1000" dirty="0">
                           <a:solidFill>
                             <a:srgbClr val="1F1F1F"/>
                           </a:solidFill>
@@ -12164,14 +12176,14 @@
                         </a:rPr>
                         <a:t>0.779</a:t>
                       </a:r>
-                      <a:endParaRPr lang="en-US" sz="1050" dirty="0">
+                      <a:endParaRPr lang="en-US" sz="1000" dirty="0">
                         <a:latin typeface="Calibri" charset="0"/>
                         <a:ea typeface="Calibri" charset="0"/>
                         <a:cs typeface="Calibri" charset="0"/>
                       </a:endParaRPr>
                     </a:p>
                   </a:txBody>
-                  <a:tcPr marL="36576" marR="36576" marT="36576" marB="36576" anchor="ctr">
+                  <a:tcPr marL="27432" marR="27432" marT="27432" marB="27432" anchor="ctr">
                     <a:lnL w="6350" cap="flat" cmpd="sng" algn="ctr">
                       <a:solidFill>
                         <a:srgbClr val="BFBFBF"/>
@@ -12219,7 +12231,7 @@
                         <a:buNone/>
                       </a:pPr>
                       <a:r>
-                        <a:rPr lang="en-US" sz="1050" dirty="0">
+                        <a:rPr lang="en-US" sz="1000" dirty="0">
                           <a:solidFill>
                             <a:srgbClr val="1F1F1F"/>
                           </a:solidFill>
@@ -12229,14 +12241,14 @@
                         </a:rPr>
                         <a:t>1.000</a:t>
                       </a:r>
-                      <a:endParaRPr lang="en-US" sz="1050" dirty="0">
+                      <a:endParaRPr lang="en-US" sz="1000" dirty="0">
                         <a:latin typeface="Calibri" charset="0"/>
                         <a:ea typeface="Calibri" charset="0"/>
                         <a:cs typeface="Calibri" charset="0"/>
                       </a:endParaRPr>
                     </a:p>
                   </a:txBody>
-                  <a:tcPr marL="36576" marR="36576" marT="36576" marB="36576" anchor="ctr">
+                  <a:tcPr marL="27432" marR="27432" marT="27432" marB="27432" anchor="ctr">
                     <a:lnL w="6350" cap="flat" cmpd="sng" algn="ctr">
                       <a:solidFill>
                         <a:srgbClr val="BFBFBF"/>
@@ -12276,7 +12288,7 @@
                   </a:tcPr>
                 </a:tc>
               </a:tr>
-              <a:tr h="301752">
+              <a:tr h="274320">
                 <a:tc>
                   <a:txBody>
                     <a:bodyPr/>
@@ -12286,7 +12298,7 @@
                         <a:buNone/>
                       </a:pPr>
                       <a:r>
-                        <a:rPr lang="en-US" sz="1050" dirty="0">
+                        <a:rPr lang="en-US" sz="1000" dirty="0">
                           <a:solidFill>
                             <a:srgbClr val="1F1F1F"/>
                           </a:solidFill>
@@ -12296,14 +12308,14 @@
                         </a:rPr>
                         <a:t>Decision Tree (tuned: balanced, min 20 per leaf)</a:t>
                       </a:r>
-                      <a:endParaRPr lang="en-US" sz="1050" dirty="0">
+                      <a:endParaRPr lang="en-US" sz="1000" dirty="0">
                         <a:latin typeface="Calibri" charset="0"/>
                         <a:ea typeface="Calibri" charset="0"/>
                         <a:cs typeface="Calibri" charset="0"/>
                       </a:endParaRPr>
                     </a:p>
                   </a:txBody>
-                  <a:tcPr marL="36576" marR="36576" marT="36576" marB="36576" anchor="ctr">
+                  <a:tcPr marL="27432" marR="27432" marT="27432" marB="27432" anchor="ctr">
                     <a:lnL w="6350" cap="flat" cmpd="sng" algn="ctr">
                       <a:solidFill>
                         <a:srgbClr val="BFBFBF"/>
@@ -12351,7 +12363,7 @@
                         <a:buNone/>
                       </a:pPr>
                       <a:r>
-                        <a:rPr lang="en-US" sz="1050" dirty="0">
+                        <a:rPr lang="en-US" sz="1000" dirty="0">
                           <a:solidFill>
                             <a:srgbClr val="1F1F1F"/>
                           </a:solidFill>
@@ -12361,14 +12373,14 @@
                         </a:rPr>
                         <a:t>0.818</a:t>
                       </a:r>
-                      <a:endParaRPr lang="en-US" sz="1050" dirty="0">
+                      <a:endParaRPr lang="en-US" sz="1000" dirty="0">
                         <a:latin typeface="Calibri" charset="0"/>
                         <a:ea typeface="Calibri" charset="0"/>
                         <a:cs typeface="Calibri" charset="0"/>
                       </a:endParaRPr>
                     </a:p>
                   </a:txBody>
-                  <a:tcPr marL="36576" marR="36576" marT="36576" marB="36576" anchor="ctr">
+                  <a:tcPr marL="27432" marR="27432" marT="27432" marB="27432" anchor="ctr">
                     <a:lnL w="6350" cap="flat" cmpd="sng" algn="ctr">
                       <a:solidFill>
                         <a:srgbClr val="BFBFBF"/>
@@ -12416,7 +12428,7 @@
                         <a:buNone/>
                       </a:pPr>
                       <a:r>
-                        <a:rPr lang="en-US" sz="1050" dirty="0">
+                        <a:rPr lang="en-US" sz="1000" dirty="0">
                           <a:solidFill>
                             <a:srgbClr val="1F1F1F"/>
                           </a:solidFill>
@@ -12426,14 +12438,14 @@
                         </a:rPr>
                         <a:t>0.533</a:t>
                       </a:r>
-                      <a:endParaRPr lang="en-US" sz="1050" dirty="0">
+                      <a:endParaRPr lang="en-US" sz="1000" dirty="0">
                         <a:latin typeface="Calibri" charset="0"/>
                         <a:ea typeface="Calibri" charset="0"/>
                         <a:cs typeface="Calibri" charset="0"/>
                       </a:endParaRPr>
                     </a:p>
                   </a:txBody>
-                  <a:tcPr marL="36576" marR="36576" marT="36576" marB="36576" anchor="ctr">
+                  <a:tcPr marL="27432" marR="27432" marT="27432" marB="27432" anchor="ctr">
                     <a:lnL w="6350" cap="flat" cmpd="sng" algn="ctr">
                       <a:solidFill>
                         <a:srgbClr val="BFBFBF"/>
@@ -12481,7 +12493,7 @@
                         <a:buNone/>
                       </a:pPr>
                       <a:r>
-                        <a:rPr lang="en-US" sz="1050" dirty="0">
+                        <a:rPr lang="en-US" sz="1000" dirty="0">
                           <a:solidFill>
                             <a:srgbClr val="1F1F1F"/>
                           </a:solidFill>
@@ -12491,14 +12503,14 @@
                         </a:rPr>
                         <a:t>0.645</a:t>
                       </a:r>
-                      <a:endParaRPr lang="en-US" sz="1050" dirty="0">
+                      <a:endParaRPr lang="en-US" sz="1000" dirty="0">
                         <a:latin typeface="Calibri" charset="0"/>
                         <a:ea typeface="Calibri" charset="0"/>
                         <a:cs typeface="Calibri" charset="0"/>
                       </a:endParaRPr>
                     </a:p>
                   </a:txBody>
-                  <a:tcPr marL="36576" marR="36576" marT="36576" marB="36576" anchor="ctr">
+                  <a:tcPr marL="27432" marR="27432" marT="27432" marB="27432" anchor="ctr">
                     <a:lnL w="6350" cap="flat" cmpd="sng" algn="ctr">
                       <a:solidFill>
                         <a:srgbClr val="BFBFBF"/>
@@ -12546,7 +12558,7 @@
                         <a:buNone/>
                       </a:pPr>
                       <a:r>
-                        <a:rPr lang="en-US" sz="1050" dirty="0">
+                        <a:rPr lang="en-US" sz="1000" dirty="0">
                           <a:solidFill>
                             <a:srgbClr val="1F1F1F"/>
                           </a:solidFill>
@@ -12556,14 +12568,14 @@
                         </a:rPr>
                         <a:t>0.820</a:t>
                       </a:r>
-                      <a:endParaRPr lang="en-US" sz="1050" dirty="0">
+                      <a:endParaRPr lang="en-US" sz="1000" dirty="0">
                         <a:latin typeface="Calibri" charset="0"/>
                         <a:ea typeface="Calibri" charset="0"/>
                         <a:cs typeface="Calibri" charset="0"/>
                       </a:endParaRPr>
                     </a:p>
                   </a:txBody>
-                  <a:tcPr marL="36576" marR="36576" marT="36576" marB="36576" anchor="ctr">
+                  <a:tcPr marL="27432" marR="27432" marT="27432" marB="27432" anchor="ctr">
                     <a:lnL w="6350" cap="flat" cmpd="sng" algn="ctr">
                       <a:solidFill>
                         <a:srgbClr val="BFBFBF"/>
@@ -12611,7 +12623,7 @@
                         <a:buNone/>
                       </a:pPr>
                       <a:r>
-                        <a:rPr lang="en-US" sz="1050" dirty="0">
+                        <a:rPr lang="en-US" sz="1000" dirty="0">
                           <a:solidFill>
                             <a:srgbClr val="1F1F1F"/>
                           </a:solidFill>
@@ -12621,14 +12633,14 @@
                         </a:rPr>
                         <a:t>0.879</a:t>
                       </a:r>
-                      <a:endParaRPr lang="en-US" sz="1050" dirty="0">
+                      <a:endParaRPr lang="en-US" sz="1000" dirty="0">
                         <a:latin typeface="Calibri" charset="0"/>
                         <a:ea typeface="Calibri" charset="0"/>
                         <a:cs typeface="Calibri" charset="0"/>
                       </a:endParaRPr>
                     </a:p>
                   </a:txBody>
-                  <a:tcPr marL="36576" marR="36576" marT="36576" marB="36576" anchor="ctr">
+                  <a:tcPr marL="27432" marR="27432" marT="27432" marB="27432" anchor="ctr">
                     <a:lnL w="6350" cap="flat" cmpd="sng" algn="ctr">
                       <a:solidFill>
                         <a:srgbClr val="BFBFBF"/>
@@ -12676,7 +12688,7 @@
                         <a:buNone/>
                       </a:pPr>
                       <a:r>
-                        <a:rPr lang="en-US" sz="1050" dirty="0">
+                        <a:rPr lang="en-US" sz="1000" dirty="0">
                           <a:solidFill>
                             <a:srgbClr val="1F1F1F"/>
                           </a:solidFill>
@@ -12686,14 +12698,14 @@
                         </a:rPr>
                         <a:t>0.924</a:t>
                       </a:r>
-                      <a:endParaRPr lang="en-US" sz="1050" dirty="0">
+                      <a:endParaRPr lang="en-US" sz="1000" dirty="0">
                         <a:latin typeface="Calibri" charset="0"/>
                         <a:ea typeface="Calibri" charset="0"/>
                         <a:cs typeface="Calibri" charset="0"/>
                       </a:endParaRPr>
                     </a:p>
                   </a:txBody>
-                  <a:tcPr marL="36576" marR="36576" marT="36576" marB="36576" anchor="ctr">
+                  <a:tcPr marL="27432" marR="27432" marT="27432" marB="27432" anchor="ctr">
                     <a:lnL w="6350" cap="flat" cmpd="sng" algn="ctr">
                       <a:solidFill>
                         <a:srgbClr val="BFBFBF"/>
@@ -12733,7 +12745,7 @@
                   </a:tcPr>
                 </a:tc>
               </a:tr>
-              <a:tr h="301752">
+              <a:tr h="274320">
                 <a:tc>
                   <a:txBody>
                     <a:bodyPr/>
@@ -12743,7 +12755,7 @@
                         <a:buNone/>
                       </a:pPr>
                       <a:r>
-                        <a:rPr lang="en-US" sz="1050" dirty="0">
+                        <a:rPr lang="en-US" sz="1000" dirty="0">
                           <a:solidFill>
                             <a:srgbClr val="1F1F1F"/>
                           </a:solidFill>
@@ -12751,16 +12763,16 @@
                           <a:ea typeface="Calibri" pitchFamily="34" charset="-122"/>
                           <a:cs typeface="Calibri" pitchFamily="34" charset="-120"/>
                         </a:rPr>
-                        <a:t>Random Forest (default, 200 trees)</a:t>
+                        <a:t>Bagging (200 fully grown trees)</a:t>
                       </a:r>
-                      <a:endParaRPr lang="en-US" sz="1050" dirty="0">
+                      <a:endParaRPr lang="en-US" sz="1000" dirty="0">
                         <a:latin typeface="Calibri" charset="0"/>
                         <a:ea typeface="Calibri" charset="0"/>
                         <a:cs typeface="Calibri" charset="0"/>
                       </a:endParaRPr>
                     </a:p>
                   </a:txBody>
-                  <a:tcPr marL="36576" marR="36576" marT="36576" marB="36576" anchor="ctr">
+                  <a:tcPr marL="27432" marR="27432" marT="27432" marB="27432" anchor="ctr">
                     <a:lnL w="6350" cap="flat" cmpd="sng" algn="ctr">
                       <a:solidFill>
                         <a:srgbClr val="BFBFBF"/>
@@ -12808,7 +12820,7 @@
                         <a:buNone/>
                       </a:pPr>
                       <a:r>
-                        <a:rPr lang="en-US" sz="1050" dirty="0">
+                        <a:rPr lang="en-US" sz="1000" dirty="0">
                           <a:solidFill>
                             <a:srgbClr val="1F1F1F"/>
                           </a:solidFill>
@@ -12816,16 +12828,16 @@
                           <a:ea typeface="Calibri" pitchFamily="34" charset="-122"/>
                           <a:cs typeface="Calibri" pitchFamily="34" charset="-120"/>
                         </a:rPr>
-                        <a:t>0.689</a:t>
+                        <a:t>0.678</a:t>
                       </a:r>
-                      <a:endParaRPr lang="en-US" sz="1050" dirty="0">
+                      <a:endParaRPr lang="en-US" sz="1000" dirty="0">
                         <a:latin typeface="Calibri" charset="0"/>
                         <a:ea typeface="Calibri" charset="0"/>
                         <a:cs typeface="Calibri" charset="0"/>
                       </a:endParaRPr>
                     </a:p>
                   </a:txBody>
-                  <a:tcPr marL="36576" marR="36576" marT="36576" marB="36576" anchor="ctr">
+                  <a:tcPr marL="27432" marR="27432" marT="27432" marB="27432" anchor="ctr">
                     <a:lnL w="6350" cap="flat" cmpd="sng" algn="ctr">
                       <a:solidFill>
                         <a:srgbClr val="BFBFBF"/>
@@ -12873,7 +12885,7 @@
                         <a:buNone/>
                       </a:pPr>
                       <a:r>
-                        <a:rPr lang="en-US" sz="1050" dirty="0">
+                        <a:rPr lang="en-US" sz="1000" dirty="0">
                           <a:solidFill>
                             <a:srgbClr val="1F1F1F"/>
                           </a:solidFill>
@@ -12881,16 +12893,16 @@
                           <a:ea typeface="Calibri" pitchFamily="34" charset="-122"/>
                           <a:cs typeface="Calibri" pitchFamily="34" charset="-120"/>
                         </a:rPr>
-                        <a:t>0.845</a:t>
+                        <a:t>0.826</a:t>
                       </a:r>
-                      <a:endParaRPr lang="en-US" sz="1050" dirty="0">
+                      <a:endParaRPr lang="en-US" sz="1000" dirty="0">
                         <a:latin typeface="Calibri" charset="0"/>
                         <a:ea typeface="Calibri" charset="0"/>
                         <a:cs typeface="Calibri" charset="0"/>
                       </a:endParaRPr>
                     </a:p>
                   </a:txBody>
-                  <a:tcPr marL="36576" marR="36576" marT="36576" marB="36576" anchor="ctr">
+                  <a:tcPr marL="27432" marR="27432" marT="27432" marB="27432" anchor="ctr">
                     <a:lnL w="6350" cap="flat" cmpd="sng" algn="ctr">
                       <a:solidFill>
                         <a:srgbClr val="BFBFBF"/>
@@ -12938,7 +12950,7 @@
                         <a:buNone/>
                       </a:pPr>
                       <a:r>
-                        <a:rPr lang="en-US" sz="1050" dirty="0">
+                        <a:rPr lang="en-US" sz="1000" dirty="0">
                           <a:solidFill>
                             <a:srgbClr val="1F1F1F"/>
                           </a:solidFill>
@@ -12946,16 +12958,16 @@
                           <a:ea typeface="Calibri" pitchFamily="34" charset="-122"/>
                           <a:cs typeface="Calibri" pitchFamily="34" charset="-120"/>
                         </a:rPr>
-                        <a:t>0.759</a:t>
+                        <a:t>0.745</a:t>
                       </a:r>
-                      <a:endParaRPr lang="en-US" sz="1050" dirty="0">
+                      <a:endParaRPr lang="en-US" sz="1000" dirty="0">
                         <a:latin typeface="Calibri" charset="0"/>
                         <a:ea typeface="Calibri" charset="0"/>
                         <a:cs typeface="Calibri" charset="0"/>
                       </a:endParaRPr>
                     </a:p>
                   </a:txBody>
-                  <a:tcPr marL="36576" marR="36576" marT="36576" marB="36576" anchor="ctr">
+                  <a:tcPr marL="27432" marR="27432" marT="27432" marB="27432" anchor="ctr">
                     <a:lnL w="6350" cap="flat" cmpd="sng" algn="ctr">
                       <a:solidFill>
                         <a:srgbClr val="BFBFBF"/>
@@ -13003,7 +13015,7 @@
                         <a:buNone/>
                       </a:pPr>
                       <a:r>
-                        <a:rPr lang="en-US" sz="1050" dirty="0">
+                        <a:rPr lang="en-US" sz="1000" dirty="0">
                           <a:solidFill>
                             <a:srgbClr val="1F1F1F"/>
                           </a:solidFill>
@@ -13011,16 +13023,16 @@
                           <a:ea typeface="Calibri" pitchFamily="34" charset="-122"/>
                           <a:cs typeface="Calibri" pitchFamily="34" charset="-120"/>
                         </a:rPr>
-                        <a:t>0.913</a:t>
+                        <a:t>0.907</a:t>
                       </a:r>
-                      <a:endParaRPr lang="en-US" sz="1050" dirty="0">
+                      <a:endParaRPr lang="en-US" sz="1000" dirty="0">
                         <a:latin typeface="Calibri" charset="0"/>
                         <a:ea typeface="Calibri" charset="0"/>
                         <a:cs typeface="Calibri" charset="0"/>
                       </a:endParaRPr>
                     </a:p>
                   </a:txBody>
-                  <a:tcPr marL="36576" marR="36576" marT="36576" marB="36576" anchor="ctr">
+                  <a:tcPr marL="27432" marR="27432" marT="27432" marB="27432" anchor="ctr">
                     <a:lnL w="6350" cap="flat" cmpd="sng" algn="ctr">
                       <a:solidFill>
                         <a:srgbClr val="BFBFBF"/>
@@ -13068,7 +13080,7 @@
                         <a:buNone/>
                       </a:pPr>
                       <a:r>
-                        <a:rPr lang="en-US" sz="1050" dirty="0">
+                        <a:rPr lang="en-US" sz="1000" dirty="0">
                           <a:solidFill>
                             <a:srgbClr val="1F1F1F"/>
                           </a:solidFill>
@@ -13076,16 +13088,16 @@
                           <a:ea typeface="Calibri" pitchFamily="34" charset="-122"/>
                           <a:cs typeface="Calibri" pitchFamily="34" charset="-120"/>
                         </a:rPr>
-                        <a:t>0.962</a:t>
+                        <a:t>0.946</a:t>
                       </a:r>
-                      <a:endParaRPr lang="en-US" sz="1050" dirty="0">
+                      <a:endParaRPr lang="en-US" sz="1000" dirty="0">
                         <a:latin typeface="Calibri" charset="0"/>
                         <a:ea typeface="Calibri" charset="0"/>
                         <a:cs typeface="Calibri" charset="0"/>
                       </a:endParaRPr>
                     </a:p>
                   </a:txBody>
-                  <a:tcPr marL="36576" marR="36576" marT="36576" marB="36576" anchor="ctr">
+                  <a:tcPr marL="27432" marR="27432" marT="27432" marB="27432" anchor="ctr">
                     <a:lnL w="6350" cap="flat" cmpd="sng" algn="ctr">
                       <a:solidFill>
                         <a:srgbClr val="BFBFBF"/>
@@ -13133,7 +13145,7 @@
                         <a:buNone/>
                       </a:pPr>
                       <a:r>
-                        <a:rPr lang="en-US" sz="1050" dirty="0">
+                        <a:rPr lang="en-US" sz="1000" dirty="0">
                           <a:solidFill>
                             <a:srgbClr val="1F1F1F"/>
                           </a:solidFill>
@@ -13143,14 +13155,14 @@
                         </a:rPr>
                         <a:t>1.000</a:t>
                       </a:r>
-                      <a:endParaRPr lang="en-US" sz="1050" dirty="0">
+                      <a:endParaRPr lang="en-US" sz="1000" dirty="0">
                         <a:latin typeface="Calibri" charset="0"/>
                         <a:ea typeface="Calibri" charset="0"/>
                         <a:cs typeface="Calibri" charset="0"/>
                       </a:endParaRPr>
                     </a:p>
                   </a:txBody>
-                  <a:tcPr marL="36576" marR="36576" marT="36576" marB="36576" anchor="ctr">
+                  <a:tcPr marL="27432" marR="27432" marT="27432" marB="27432" anchor="ctr">
                     <a:lnL w="6350" cap="flat" cmpd="sng" algn="ctr">
                       <a:solidFill>
                         <a:srgbClr val="BFBFBF"/>
@@ -13190,7 +13202,7 @@
                   </a:tcPr>
                 </a:tc>
               </a:tr>
-              <a:tr h="301752">
+              <a:tr h="274320">
                 <a:tc>
                   <a:txBody>
                     <a:bodyPr/>
@@ -13200,7 +13212,7 @@
                         <a:buNone/>
                       </a:pPr>
                       <a:r>
-                        <a:rPr lang="en-US" sz="1050" dirty="0">
+                        <a:rPr lang="en-US" sz="1000" dirty="0">
                           <a:solidFill>
                             <a:srgbClr val="1F1F1F"/>
                           </a:solidFill>
@@ -13208,16 +13220,16 @@
                           <a:ea typeface="Calibri" pitchFamily="34" charset="-122"/>
                           <a:cs typeface="Calibri" pitchFamily="34" charset="-120"/>
                         </a:rPr>
-                        <a:t>Random Forest (class weights 0.2/0.8)</a:t>
+                        <a:t>Random Forest (default, 200 trees)</a:t>
                       </a:r>
-                      <a:endParaRPr lang="en-US" sz="1050" dirty="0">
+                      <a:endParaRPr lang="en-US" sz="1000" dirty="0">
                         <a:latin typeface="Calibri" charset="0"/>
                         <a:ea typeface="Calibri" charset="0"/>
                         <a:cs typeface="Calibri" charset="0"/>
                       </a:endParaRPr>
                     </a:p>
                   </a:txBody>
-                  <a:tcPr marL="36576" marR="36576" marT="36576" marB="36576" anchor="ctr">
+                  <a:tcPr marL="27432" marR="27432" marT="27432" marB="27432" anchor="ctr">
                     <a:lnL w="6350" cap="flat" cmpd="sng" algn="ctr">
                       <a:solidFill>
                         <a:srgbClr val="BFBFBF"/>
@@ -13265,7 +13277,7 @@
                         <a:buNone/>
                       </a:pPr>
                       <a:r>
-                        <a:rPr lang="en-US" sz="1050" dirty="0">
+                        <a:rPr lang="en-US" sz="1000" dirty="0">
                           <a:solidFill>
                             <a:srgbClr val="1F1F1F"/>
                           </a:solidFill>
@@ -13273,16 +13285,16 @@
                           <a:ea typeface="Calibri" pitchFamily="34" charset="-122"/>
                           <a:cs typeface="Calibri" pitchFamily="34" charset="-120"/>
                         </a:rPr>
-                        <a:t>0.784</a:t>
+                        <a:t>0.689</a:t>
                       </a:r>
-                      <a:endParaRPr lang="en-US" sz="1050" dirty="0">
+                      <a:endParaRPr lang="en-US" sz="1000" dirty="0">
                         <a:latin typeface="Calibri" charset="0"/>
                         <a:ea typeface="Calibri" charset="0"/>
                         <a:cs typeface="Calibri" charset="0"/>
                       </a:endParaRPr>
                     </a:p>
                   </a:txBody>
-                  <a:tcPr marL="36576" marR="36576" marT="36576" marB="36576" anchor="ctr">
+                  <a:tcPr marL="27432" marR="27432" marT="27432" marB="27432" anchor="ctr">
                     <a:lnL w="6350" cap="flat" cmpd="sng" algn="ctr">
                       <a:solidFill>
                         <a:srgbClr val="BFBFBF"/>
@@ -13330,7 +13342,7 @@
                         <a:buNone/>
                       </a:pPr>
                       <a:r>
-                        <a:rPr lang="en-US" sz="1050" dirty="0">
+                        <a:rPr lang="en-US" sz="1000" dirty="0">
                           <a:solidFill>
                             <a:srgbClr val="1F1F1F"/>
                           </a:solidFill>
@@ -13338,16 +13350,16 @@
                           <a:ea typeface="Calibri" pitchFamily="34" charset="-122"/>
                           <a:cs typeface="Calibri" pitchFamily="34" charset="-120"/>
                         </a:rPr>
-                        <a:t>0.773</a:t>
+                        <a:t>0.845</a:t>
                       </a:r>
-                      <a:endParaRPr lang="en-US" sz="1050" dirty="0">
+                      <a:endParaRPr lang="en-US" sz="1000" dirty="0">
                         <a:latin typeface="Calibri" charset="0"/>
                         <a:ea typeface="Calibri" charset="0"/>
                         <a:cs typeface="Calibri" charset="0"/>
                       </a:endParaRPr>
                     </a:p>
                   </a:txBody>
-                  <a:tcPr marL="36576" marR="36576" marT="36576" marB="36576" anchor="ctr">
+                  <a:tcPr marL="27432" marR="27432" marT="27432" marB="27432" anchor="ctr">
                     <a:lnL w="6350" cap="flat" cmpd="sng" algn="ctr">
                       <a:solidFill>
                         <a:srgbClr val="BFBFBF"/>
@@ -13395,7 +13407,7 @@
                         <a:buNone/>
                       </a:pPr>
                       <a:r>
-                        <a:rPr lang="en-US" sz="1050" dirty="0">
+                        <a:rPr lang="en-US" sz="1000" dirty="0">
                           <a:solidFill>
                             <a:srgbClr val="1F1F1F"/>
                           </a:solidFill>
@@ -13403,16 +13415,16 @@
                           <a:ea typeface="Calibri" pitchFamily="34" charset="-122"/>
                           <a:cs typeface="Calibri" pitchFamily="34" charset="-120"/>
                         </a:rPr>
-                        <a:t>0.779</a:t>
+                        <a:t>0.759</a:t>
                       </a:r>
-                      <a:endParaRPr lang="en-US" sz="1050" dirty="0">
+                      <a:endParaRPr lang="en-US" sz="1000" dirty="0">
                         <a:latin typeface="Calibri" charset="0"/>
                         <a:ea typeface="Calibri" charset="0"/>
                         <a:cs typeface="Calibri" charset="0"/>
                       </a:endParaRPr>
                     </a:p>
                   </a:txBody>
-                  <a:tcPr marL="36576" marR="36576" marT="36576" marB="36576" anchor="ctr">
+                  <a:tcPr marL="27432" marR="27432" marT="27432" marB="27432" anchor="ctr">
                     <a:lnL w="6350" cap="flat" cmpd="sng" algn="ctr">
                       <a:solidFill>
                         <a:srgbClr val="BFBFBF"/>
@@ -13460,7 +13472,7 @@
                         <a:buNone/>
                       </a:pPr>
                       <a:r>
-                        <a:rPr lang="en-US" sz="1050" dirty="0">
+                        <a:rPr lang="en-US" sz="1000" dirty="0">
                           <a:solidFill>
                             <a:srgbClr val="1F1F1F"/>
                           </a:solidFill>
@@ -13468,16 +13480,16 @@
                           <a:ea typeface="Calibri" pitchFamily="34" charset="-122"/>
                           <a:cs typeface="Calibri" pitchFamily="34" charset="-120"/>
                         </a:rPr>
-                        <a:t>0.911</a:t>
+                        <a:t>0.913</a:t>
                       </a:r>
-                      <a:endParaRPr lang="en-US" sz="1050" dirty="0">
+                      <a:endParaRPr lang="en-US" sz="1000" dirty="0">
                         <a:latin typeface="Calibri" charset="0"/>
                         <a:ea typeface="Calibri" charset="0"/>
                         <a:cs typeface="Calibri" charset="0"/>
                       </a:endParaRPr>
                     </a:p>
                   </a:txBody>
-                  <a:tcPr marL="36576" marR="36576" marT="36576" marB="36576" anchor="ctr">
+                  <a:tcPr marL="27432" marR="27432" marT="27432" marB="27432" anchor="ctr">
                     <a:lnL w="6350" cap="flat" cmpd="sng" algn="ctr">
                       <a:solidFill>
                         <a:srgbClr val="BFBFBF"/>
@@ -13525,7 +13537,7 @@
                         <a:buNone/>
                       </a:pPr>
                       <a:r>
-                        <a:rPr lang="en-US" sz="1050" dirty="0">
+                        <a:rPr lang="en-US" sz="1000" dirty="0">
                           <a:solidFill>
                             <a:srgbClr val="1F1F1F"/>
                           </a:solidFill>
@@ -13533,16 +13545,16 @@
                           <a:ea typeface="Calibri" pitchFamily="34" charset="-122"/>
                           <a:cs typeface="Calibri" pitchFamily="34" charset="-120"/>
                         </a:rPr>
-                        <a:t>0.958</a:t>
+                        <a:t>0.962</a:t>
                       </a:r>
-                      <a:endParaRPr lang="en-US" sz="1050" dirty="0">
+                      <a:endParaRPr lang="en-US" sz="1000" dirty="0">
                         <a:latin typeface="Calibri" charset="0"/>
                         <a:ea typeface="Calibri" charset="0"/>
                         <a:cs typeface="Calibri" charset="0"/>
                       </a:endParaRPr>
                     </a:p>
                   </a:txBody>
-                  <a:tcPr marL="36576" marR="36576" marT="36576" marB="36576" anchor="ctr">
+                  <a:tcPr marL="27432" marR="27432" marT="27432" marB="27432" anchor="ctr">
                     <a:lnL w="6350" cap="flat" cmpd="sng" algn="ctr">
                       <a:solidFill>
                         <a:srgbClr val="BFBFBF"/>
@@ -13590,7 +13602,7 @@
                         <a:buNone/>
                       </a:pPr>
                       <a:r>
-                        <a:rPr lang="en-US" sz="1050" dirty="0">
+                        <a:rPr lang="en-US" sz="1000" dirty="0">
                           <a:solidFill>
                             <a:srgbClr val="1F1F1F"/>
                           </a:solidFill>
@@ -13600,14 +13612,14 @@
                         </a:rPr>
                         <a:t>1.000</a:t>
                       </a:r>
-                      <a:endParaRPr lang="en-US" sz="1050" dirty="0">
+                      <a:endParaRPr lang="en-US" sz="1000" dirty="0">
                         <a:latin typeface="Calibri" charset="0"/>
                         <a:ea typeface="Calibri" charset="0"/>
                         <a:cs typeface="Calibri" charset="0"/>
                       </a:endParaRPr>
                     </a:p>
                   </a:txBody>
-                  <a:tcPr marL="36576" marR="36576" marT="36576" marB="36576" anchor="ctr">
+                  <a:tcPr marL="27432" marR="27432" marT="27432" marB="27432" anchor="ctr">
                     <a:lnL w="6350" cap="flat" cmpd="sng" algn="ctr">
                       <a:solidFill>
                         <a:srgbClr val="BFBFBF"/>
@@ -13647,7 +13659,7 @@
                   </a:tcPr>
                 </a:tc>
               </a:tr>
-              <a:tr h="301752">
+              <a:tr h="274320">
                 <a:tc>
                   <a:txBody>
                     <a:bodyPr/>
@@ -13657,7 +13669,7 @@
                         <a:buNone/>
                       </a:pPr>
                       <a:r>
-                        <a:rPr lang="en-US" sz="1050" dirty="0">
+                        <a:rPr lang="en-US" sz="1000" dirty="0">
                           <a:solidFill>
                             <a:srgbClr val="1F1F1F"/>
                           </a:solidFill>
@@ -13665,16 +13677,16 @@
                           <a:ea typeface="Calibri" pitchFamily="34" charset="-122"/>
                           <a:cs typeface="Calibri" pitchFamily="34" charset="-120"/>
                         </a:rPr>
-                        <a:t>Random Forest (tuned for recall)</a:t>
+                        <a:t>Random Forest (class weights 0.2/0.8)</a:t>
                       </a:r>
-                      <a:endParaRPr lang="en-US" sz="1050" dirty="0">
+                      <a:endParaRPr lang="en-US" sz="1000" dirty="0">
                         <a:latin typeface="Calibri" charset="0"/>
                         <a:ea typeface="Calibri" charset="0"/>
                         <a:cs typeface="Calibri" charset="0"/>
                       </a:endParaRPr>
                     </a:p>
                   </a:txBody>
-                  <a:tcPr marL="36576" marR="36576" marT="36576" marB="36576" anchor="ctr">
+                  <a:tcPr marL="27432" marR="27432" marT="27432" marB="27432" anchor="ctr">
                     <a:lnL w="6350" cap="flat" cmpd="sng" algn="ctr">
                       <a:solidFill>
                         <a:srgbClr val="BFBFBF"/>
@@ -13722,7 +13734,7 @@
                         <a:buNone/>
                       </a:pPr>
                       <a:r>
-                        <a:rPr lang="en-US" sz="1050" dirty="0">
+                        <a:rPr lang="en-US" sz="1000" dirty="0">
                           <a:solidFill>
                             <a:srgbClr val="1F1F1F"/>
                           </a:solidFill>
@@ -13732,14 +13744,14 @@
                         </a:rPr>
                         <a:t>0.784</a:t>
                       </a:r>
-                      <a:endParaRPr lang="en-US" sz="1050" dirty="0">
+                      <a:endParaRPr lang="en-US" sz="1000" dirty="0">
                         <a:latin typeface="Calibri" charset="0"/>
                         <a:ea typeface="Calibri" charset="0"/>
                         <a:cs typeface="Calibri" charset="0"/>
                       </a:endParaRPr>
                     </a:p>
                   </a:txBody>
-                  <a:tcPr marL="36576" marR="36576" marT="36576" marB="36576" anchor="ctr">
+                  <a:tcPr marL="27432" marR="27432" marT="27432" marB="27432" anchor="ctr">
                     <a:lnL w="6350" cap="flat" cmpd="sng" algn="ctr">
                       <a:solidFill>
                         <a:srgbClr val="BFBFBF"/>
@@ -13787,7 +13799,7 @@
                         <a:buNone/>
                       </a:pPr>
                       <a:r>
-                        <a:rPr lang="en-US" sz="1050" dirty="0">
+                        <a:rPr lang="en-US" sz="1000" dirty="0">
                           <a:solidFill>
                             <a:srgbClr val="1F1F1F"/>
                           </a:solidFill>
@@ -13795,16 +13807,16 @@
                           <a:ea typeface="Calibri" pitchFamily="34" charset="-122"/>
                           <a:cs typeface="Calibri" pitchFamily="34" charset="-120"/>
                         </a:rPr>
-                        <a:t>0.653</a:t>
+                        <a:t>0.773</a:t>
                       </a:r>
-                      <a:endParaRPr lang="en-US" sz="1050" dirty="0">
+                      <a:endParaRPr lang="en-US" sz="1000" dirty="0">
                         <a:latin typeface="Calibri" charset="0"/>
                         <a:ea typeface="Calibri" charset="0"/>
                         <a:cs typeface="Calibri" charset="0"/>
                       </a:endParaRPr>
                     </a:p>
                   </a:txBody>
-                  <a:tcPr marL="36576" marR="36576" marT="36576" marB="36576" anchor="ctr">
+                  <a:tcPr marL="27432" marR="27432" marT="27432" marB="27432" anchor="ctr">
                     <a:lnL w="6350" cap="flat" cmpd="sng" algn="ctr">
                       <a:solidFill>
                         <a:srgbClr val="BFBFBF"/>
@@ -13852,7 +13864,7 @@
                         <a:buNone/>
                       </a:pPr>
                       <a:r>
-                        <a:rPr lang="en-US" sz="1050" dirty="0">
+                        <a:rPr lang="en-US" sz="1000" dirty="0">
                           <a:solidFill>
                             <a:srgbClr val="1F1F1F"/>
                           </a:solidFill>
@@ -13860,16 +13872,16 @@
                           <a:ea typeface="Calibri" pitchFamily="34" charset="-122"/>
                           <a:cs typeface="Calibri" pitchFamily="34" charset="-120"/>
                         </a:rPr>
-                        <a:t>0.712</a:t>
+                        <a:t>0.779</a:t>
                       </a:r>
-                      <a:endParaRPr lang="en-US" sz="1050" dirty="0">
+                      <a:endParaRPr lang="en-US" sz="1000" dirty="0">
                         <a:latin typeface="Calibri" charset="0"/>
                         <a:ea typeface="Calibri" charset="0"/>
                         <a:cs typeface="Calibri" charset="0"/>
                       </a:endParaRPr>
                     </a:p>
                   </a:txBody>
-                  <a:tcPr marL="36576" marR="36576" marT="36576" marB="36576" anchor="ctr">
+                  <a:tcPr marL="27432" marR="27432" marT="27432" marB="27432" anchor="ctr">
                     <a:lnL w="6350" cap="flat" cmpd="sng" algn="ctr">
                       <a:solidFill>
                         <a:srgbClr val="BFBFBF"/>
@@ -13917,7 +13929,7 @@
                         <a:buNone/>
                       </a:pPr>
                       <a:r>
-                        <a:rPr lang="en-US" sz="1050" dirty="0">
+                        <a:rPr lang="en-US" sz="1000" dirty="0">
                           <a:solidFill>
                             <a:srgbClr val="1F1F1F"/>
                           </a:solidFill>
@@ -13925,16 +13937,16 @@
                           <a:ea typeface="Calibri" pitchFamily="34" charset="-122"/>
                           <a:cs typeface="Calibri" pitchFamily="34" charset="-120"/>
                         </a:rPr>
-                        <a:t>0.874</a:t>
+                        <a:t>0.911</a:t>
                       </a:r>
-                      <a:endParaRPr lang="en-US" sz="1050" dirty="0">
+                      <a:endParaRPr lang="en-US" sz="1000" dirty="0">
                         <a:latin typeface="Calibri" charset="0"/>
                         <a:ea typeface="Calibri" charset="0"/>
                         <a:cs typeface="Calibri" charset="0"/>
                       </a:endParaRPr>
                     </a:p>
                   </a:txBody>
-                  <a:tcPr marL="36576" marR="36576" marT="36576" marB="36576" anchor="ctr">
+                  <a:tcPr marL="27432" marR="27432" marT="27432" marB="27432" anchor="ctr">
                     <a:lnL w="6350" cap="flat" cmpd="sng" algn="ctr">
                       <a:solidFill>
                         <a:srgbClr val="BFBFBF"/>
@@ -13982,7 +13994,7 @@
                         <a:buNone/>
                       </a:pPr>
                       <a:r>
-                        <a:rPr lang="en-US" sz="1050" dirty="0">
+                        <a:rPr lang="en-US" sz="1000" dirty="0">
                           <a:solidFill>
                             <a:srgbClr val="1F1F1F"/>
                           </a:solidFill>
@@ -13990,16 +14002,16 @@
                           <a:ea typeface="Calibri" pitchFamily="34" charset="-122"/>
                           <a:cs typeface="Calibri" pitchFamily="34" charset="-120"/>
                         </a:rPr>
-                        <a:t>0.933</a:t>
+                        <a:t>0.958</a:t>
                       </a:r>
-                      <a:endParaRPr lang="en-US" sz="1050" dirty="0">
+                      <a:endParaRPr lang="en-US" sz="1000" dirty="0">
                         <a:latin typeface="Calibri" charset="0"/>
                         <a:ea typeface="Calibri" charset="0"/>
                         <a:cs typeface="Calibri" charset="0"/>
                       </a:endParaRPr>
                     </a:p>
                   </a:txBody>
-                  <a:tcPr marL="36576" marR="36576" marT="36576" marB="36576" anchor="ctr">
+                  <a:tcPr marL="27432" marR="27432" marT="27432" marB="27432" anchor="ctr">
                     <a:lnL w="6350" cap="flat" cmpd="sng" algn="ctr">
                       <a:solidFill>
                         <a:srgbClr val="BFBFBF"/>
@@ -14047,7 +14059,7 @@
                         <a:buNone/>
                       </a:pPr>
                       <a:r>
-                        <a:rPr lang="en-US" sz="1050" dirty="0">
+                        <a:rPr lang="en-US" sz="1000" dirty="0">
                           <a:solidFill>
                             <a:srgbClr val="1F1F1F"/>
                           </a:solidFill>
@@ -14055,16 +14067,16 @@
                           <a:ea typeface="Calibri" pitchFamily="34" charset="-122"/>
                           <a:cs typeface="Calibri" pitchFamily="34" charset="-120"/>
                         </a:rPr>
-                        <a:t>0.921</a:t>
+                        <a:t>1.000</a:t>
                       </a:r>
-                      <a:endParaRPr lang="en-US" sz="1050" dirty="0">
+                      <a:endParaRPr lang="en-US" sz="1000" dirty="0">
                         <a:latin typeface="Calibri" charset="0"/>
                         <a:ea typeface="Calibri" charset="0"/>
                         <a:cs typeface="Calibri" charset="0"/>
                       </a:endParaRPr>
                     </a:p>
                   </a:txBody>
-                  <a:tcPr marL="36576" marR="36576" marT="36576" marB="36576" anchor="ctr">
+                  <a:tcPr marL="27432" marR="27432" marT="27432" marB="27432" anchor="ctr">
                     <a:lnL w="6350" cap="flat" cmpd="sng" algn="ctr">
                       <a:solidFill>
                         <a:srgbClr val="BFBFBF"/>
@@ -14104,7 +14116,7 @@
                   </a:tcPr>
                 </a:tc>
               </a:tr>
-              <a:tr h="301752">
+              <a:tr h="274320">
                 <a:tc>
                   <a:txBody>
                     <a:bodyPr/>
@@ -14114,7 +14126,7 @@
                         <a:buNone/>
                       </a:pPr>
                       <a:r>
-                        <a:rPr lang="en-US" sz="1050" dirty="0">
+                        <a:rPr lang="en-US" sz="1000" dirty="0">
                           <a:solidFill>
                             <a:srgbClr val="1F1F1F"/>
                           </a:solidFill>
@@ -14122,16 +14134,16 @@
                           <a:ea typeface="Calibri" pitchFamily="34" charset="-122"/>
                           <a:cs typeface="Calibri" pitchFamily="34" charset="-120"/>
                         </a:rPr>
-                        <a:t>Random Forest (tuned, 12 features)</a:t>
+                        <a:t>Random Forest (tuned for recall)</a:t>
                       </a:r>
-                      <a:endParaRPr lang="en-US" sz="1050" dirty="0">
+                      <a:endParaRPr lang="en-US" sz="1000" dirty="0">
                         <a:latin typeface="Calibri" charset="0"/>
                         <a:ea typeface="Calibri" charset="0"/>
                         <a:cs typeface="Calibri" charset="0"/>
                       </a:endParaRPr>
                     </a:p>
                   </a:txBody>
-                  <a:tcPr marL="36576" marR="36576" marT="36576" marB="36576" anchor="ctr">
+                  <a:tcPr marL="27432" marR="27432" marT="27432" marB="27432" anchor="ctr">
                     <a:lnL w="6350" cap="flat" cmpd="sng" algn="ctr">
                       <a:solidFill>
                         <a:srgbClr val="BFBFBF"/>
@@ -14179,7 +14191,7 @@
                         <a:buNone/>
                       </a:pPr>
                       <a:r>
-                        <a:rPr lang="en-US" sz="1050" dirty="0">
+                        <a:rPr lang="en-US" sz="1000" dirty="0">
                           <a:solidFill>
                             <a:srgbClr val="1F1F1F"/>
                           </a:solidFill>
@@ -14187,16 +14199,16 @@
                           <a:ea typeface="Calibri" pitchFamily="34" charset="-122"/>
                           <a:cs typeface="Calibri" pitchFamily="34" charset="-120"/>
                         </a:rPr>
-                        <a:t>0.782</a:t>
+                        <a:t>0.784</a:t>
                       </a:r>
-                      <a:endParaRPr lang="en-US" sz="1050" dirty="0">
+                      <a:endParaRPr lang="en-US" sz="1000" dirty="0">
                         <a:latin typeface="Calibri" charset="0"/>
                         <a:ea typeface="Calibri" charset="0"/>
                         <a:cs typeface="Calibri" charset="0"/>
                       </a:endParaRPr>
                     </a:p>
                   </a:txBody>
-                  <a:tcPr marL="36576" marR="36576" marT="36576" marB="36576" anchor="ctr">
+                  <a:tcPr marL="27432" marR="27432" marT="27432" marB="27432" anchor="ctr">
                     <a:lnL w="6350" cap="flat" cmpd="sng" algn="ctr">
                       <a:solidFill>
                         <a:srgbClr val="BFBFBF"/>
@@ -14244,7 +14256,7 @@
                         <a:buNone/>
                       </a:pPr>
                       <a:r>
-                        <a:rPr lang="en-US" sz="1050" dirty="0">
+                        <a:rPr lang="en-US" sz="1000" dirty="0">
                           <a:solidFill>
                             <a:srgbClr val="1F1F1F"/>
                           </a:solidFill>
@@ -14252,16 +14264,16 @@
                           <a:ea typeface="Calibri" pitchFamily="34" charset="-122"/>
                           <a:cs typeface="Calibri" pitchFamily="34" charset="-120"/>
                         </a:rPr>
-                        <a:t>0.664</a:t>
+                        <a:t>0.653</a:t>
                       </a:r>
-                      <a:endParaRPr lang="en-US" sz="1050" dirty="0">
+                      <a:endParaRPr lang="en-US" sz="1000" dirty="0">
                         <a:latin typeface="Calibri" charset="0"/>
                         <a:ea typeface="Calibri" charset="0"/>
                         <a:cs typeface="Calibri" charset="0"/>
                       </a:endParaRPr>
                     </a:p>
                   </a:txBody>
-                  <a:tcPr marL="36576" marR="36576" marT="36576" marB="36576" anchor="ctr">
+                  <a:tcPr marL="27432" marR="27432" marT="27432" marB="27432" anchor="ctr">
                     <a:lnL w="6350" cap="flat" cmpd="sng" algn="ctr">
                       <a:solidFill>
                         <a:srgbClr val="BFBFBF"/>
@@ -14309,7 +14321,7 @@
                         <a:buNone/>
                       </a:pPr>
                       <a:r>
-                        <a:rPr lang="en-US" sz="1050" dirty="0">
+                        <a:rPr lang="en-US" sz="1000" dirty="0">
                           <a:solidFill>
                             <a:srgbClr val="1F1F1F"/>
                           </a:solidFill>
@@ -14317,16 +14329,16 @@
                           <a:ea typeface="Calibri" pitchFamily="34" charset="-122"/>
                           <a:cs typeface="Calibri" pitchFamily="34" charset="-120"/>
                         </a:rPr>
-                        <a:t>0.718</a:t>
+                        <a:t>0.712</a:t>
                       </a:r>
-                      <a:endParaRPr lang="en-US" sz="1050" dirty="0">
+                      <a:endParaRPr lang="en-US" sz="1000" dirty="0">
                         <a:latin typeface="Calibri" charset="0"/>
                         <a:ea typeface="Calibri" charset="0"/>
                         <a:cs typeface="Calibri" charset="0"/>
                       </a:endParaRPr>
                     </a:p>
                   </a:txBody>
-                  <a:tcPr marL="36576" marR="36576" marT="36576" marB="36576" anchor="ctr">
+                  <a:tcPr marL="27432" marR="27432" marT="27432" marB="27432" anchor="ctr">
                     <a:lnL w="6350" cap="flat" cmpd="sng" algn="ctr">
                       <a:solidFill>
                         <a:srgbClr val="BFBFBF"/>
@@ -14374,7 +14386,7 @@
                         <a:buNone/>
                       </a:pPr>
                       <a:r>
-                        <a:rPr lang="en-US" sz="1050" dirty="0">
+                        <a:rPr lang="en-US" sz="1000" dirty="0">
                           <a:solidFill>
                             <a:srgbClr val="1F1F1F"/>
                           </a:solidFill>
@@ -14382,16 +14394,16 @@
                           <a:ea typeface="Calibri" pitchFamily="34" charset="-122"/>
                           <a:cs typeface="Calibri" pitchFamily="34" charset="-120"/>
                         </a:rPr>
-                        <a:t>0.878</a:t>
+                        <a:t>0.874</a:t>
                       </a:r>
-                      <a:endParaRPr lang="en-US" sz="1050" dirty="0">
+                      <a:endParaRPr lang="en-US" sz="1000" dirty="0">
                         <a:latin typeface="Calibri" charset="0"/>
                         <a:ea typeface="Calibri" charset="0"/>
                         <a:cs typeface="Calibri" charset="0"/>
                       </a:endParaRPr>
                     </a:p>
                   </a:txBody>
-                  <a:tcPr marL="36576" marR="36576" marT="36576" marB="36576" anchor="ctr">
+                  <a:tcPr marL="27432" marR="27432" marT="27432" marB="27432" anchor="ctr">
                     <a:lnL w="6350" cap="flat" cmpd="sng" algn="ctr">
                       <a:solidFill>
                         <a:srgbClr val="BFBFBF"/>
@@ -14439,7 +14451,7 @@
                         <a:buNone/>
                       </a:pPr>
                       <a:r>
-                        <a:rPr lang="en-US" sz="1050" dirty="0">
+                        <a:rPr lang="en-US" sz="1000" dirty="0">
                           <a:solidFill>
                             <a:srgbClr val="1F1F1F"/>
                           </a:solidFill>
@@ -14447,16 +14459,16 @@
                           <a:ea typeface="Calibri" pitchFamily="34" charset="-122"/>
                           <a:cs typeface="Calibri" pitchFamily="34" charset="-120"/>
                         </a:rPr>
-                        <a:t>0.928</a:t>
+                        <a:t>0.933</a:t>
                       </a:r>
-                      <a:endParaRPr lang="en-US" sz="1050" dirty="0">
+                      <a:endParaRPr lang="en-US" sz="1000" dirty="0">
                         <a:latin typeface="Calibri" charset="0"/>
                         <a:ea typeface="Calibri" charset="0"/>
                         <a:cs typeface="Calibri" charset="0"/>
                       </a:endParaRPr>
                     </a:p>
                   </a:txBody>
-                  <a:tcPr marL="36576" marR="36576" marT="36576" marB="36576" anchor="ctr">
+                  <a:tcPr marL="27432" marR="27432" marT="27432" marB="27432" anchor="ctr">
                     <a:lnL w="6350" cap="flat" cmpd="sng" algn="ctr">
                       <a:solidFill>
                         <a:srgbClr val="BFBFBF"/>
@@ -14504,7 +14516,7 @@
                         <a:buNone/>
                       </a:pPr>
                       <a:r>
-                        <a:rPr lang="en-US" sz="1050" dirty="0">
+                        <a:rPr lang="en-US" sz="1000" dirty="0">
                           <a:solidFill>
                             <a:srgbClr val="1F1F1F"/>
                           </a:solidFill>
@@ -14512,16 +14524,16 @@
                           <a:ea typeface="Calibri" pitchFamily="34" charset="-122"/>
                           <a:cs typeface="Calibri" pitchFamily="34" charset="-120"/>
                         </a:rPr>
-                        <a:t>0.917</a:t>
+                        <a:t>0.921</a:t>
                       </a:r>
-                      <a:endParaRPr lang="en-US" sz="1050" dirty="0">
+                      <a:endParaRPr lang="en-US" sz="1000" dirty="0">
                         <a:latin typeface="Calibri" charset="0"/>
                         <a:ea typeface="Calibri" charset="0"/>
                         <a:cs typeface="Calibri" charset="0"/>
                       </a:endParaRPr>
                     </a:p>
                   </a:txBody>
-                  <a:tcPr marL="36576" marR="36576" marT="36576" marB="36576" anchor="ctr">
+                  <a:tcPr marL="27432" marR="27432" marT="27432" marB="27432" anchor="ctr">
                     <a:lnL w="6350" cap="flat" cmpd="sng" algn="ctr">
                       <a:solidFill>
                         <a:srgbClr val="BFBFBF"/>
@@ -14561,7 +14573,7 @@
                   </a:tcPr>
                 </a:tc>
               </a:tr>
-              <a:tr h="301752">
+              <a:tr h="274320">
                 <a:tc>
                   <a:txBody>
                     <a:bodyPr/>
@@ -14571,7 +14583,7 @@
                         <a:buNone/>
                       </a:pPr>
                       <a:r>
-                        <a:rPr lang="en-US" sz="1050" b="1" dirty="0">
+                        <a:rPr lang="en-US" sz="1000" dirty="0">
                           <a:solidFill>
                             <a:srgbClr val="1F1F1F"/>
                           </a:solidFill>
@@ -14579,16 +14591,16 @@
                           <a:ea typeface="Calibri" pitchFamily="34" charset="-122"/>
                           <a:cs typeface="Calibri" pitchFamily="34" charset="-120"/>
                         </a:rPr>
-                        <a:t>Proposed: RF class weights, threshold 0.25</a:t>
+                        <a:t>Random Forest (tuned, 12 features)</a:t>
                       </a:r>
-                      <a:endParaRPr lang="en-US" sz="1050" dirty="0">
+                      <a:endParaRPr lang="en-US" sz="1000" dirty="0">
                         <a:latin typeface="Calibri" charset="0"/>
                         <a:ea typeface="Calibri" charset="0"/>
                         <a:cs typeface="Calibri" charset="0"/>
                       </a:endParaRPr>
                     </a:p>
                   </a:txBody>
-                  <a:tcPr marL="36576" marR="36576" marT="36576" marB="36576" anchor="ctr">
+                  <a:tcPr marL="27432" marR="27432" marT="27432" marB="27432" anchor="ctr">
                     <a:lnL w="6350" cap="flat" cmpd="sng" algn="ctr">
                       <a:solidFill>
                         <a:srgbClr val="BFBFBF"/>
@@ -14636,7 +14648,7 @@
                         <a:buNone/>
                       </a:pPr>
                       <a:r>
-                        <a:rPr lang="en-US" sz="1050" b="1" dirty="0">
+                        <a:rPr lang="en-US" sz="1000" dirty="0">
                           <a:solidFill>
                             <a:srgbClr val="1F1F1F"/>
                           </a:solidFill>
@@ -14644,16 +14656,16 @@
                           <a:ea typeface="Calibri" pitchFamily="34" charset="-122"/>
                           <a:cs typeface="Calibri" pitchFamily="34" charset="-120"/>
                         </a:rPr>
-                        <a:t>0.933</a:t>
+                        <a:t>0.782</a:t>
                       </a:r>
-                      <a:endParaRPr lang="en-US" sz="1050" dirty="0">
+                      <a:endParaRPr lang="en-US" sz="1000" dirty="0">
                         <a:latin typeface="Calibri" charset="0"/>
                         <a:ea typeface="Calibri" charset="0"/>
                         <a:cs typeface="Calibri" charset="0"/>
                       </a:endParaRPr>
                     </a:p>
                   </a:txBody>
-                  <a:tcPr marL="36576" marR="36576" marT="36576" marB="36576" anchor="ctr">
+                  <a:tcPr marL="27432" marR="27432" marT="27432" marB="27432" anchor="ctr">
                     <a:lnL w="6350" cap="flat" cmpd="sng" algn="ctr">
                       <a:solidFill>
                         <a:srgbClr val="BFBFBF"/>
@@ -14701,7 +14713,7 @@
                         <a:buNone/>
                       </a:pPr>
                       <a:r>
-                        <a:rPr lang="en-US" sz="1050" b="1" dirty="0">
+                        <a:rPr lang="en-US" sz="1000" dirty="0">
                           <a:solidFill>
                             <a:srgbClr val="1F1F1F"/>
                           </a:solidFill>
@@ -14709,16 +14721,16 @@
                           <a:ea typeface="Calibri" pitchFamily="34" charset="-122"/>
                           <a:cs typeface="Calibri" pitchFamily="34" charset="-120"/>
                         </a:rPr>
-                        <a:t>0.670</a:t>
+                        <a:t>0.664</a:t>
                       </a:r>
-                      <a:endParaRPr lang="en-US" sz="1050" dirty="0">
+                      <a:endParaRPr lang="en-US" sz="1000" dirty="0">
                         <a:latin typeface="Calibri" charset="0"/>
                         <a:ea typeface="Calibri" charset="0"/>
                         <a:cs typeface="Calibri" charset="0"/>
                       </a:endParaRPr>
                     </a:p>
                   </a:txBody>
-                  <a:tcPr marL="36576" marR="36576" marT="36576" marB="36576" anchor="ctr">
+                  <a:tcPr marL="27432" marR="27432" marT="27432" marB="27432" anchor="ctr">
                     <a:lnL w="6350" cap="flat" cmpd="sng" algn="ctr">
                       <a:solidFill>
                         <a:srgbClr val="BFBFBF"/>
@@ -14766,7 +14778,7 @@
                         <a:buNone/>
                       </a:pPr>
                       <a:r>
-                        <a:rPr lang="en-US" sz="1050" b="1" dirty="0">
+                        <a:rPr lang="en-US" sz="1000" dirty="0">
                           <a:solidFill>
                             <a:srgbClr val="1F1F1F"/>
                           </a:solidFill>
@@ -14774,16 +14786,16 @@
                           <a:ea typeface="Calibri" pitchFamily="34" charset="-122"/>
                           <a:cs typeface="Calibri" pitchFamily="34" charset="-120"/>
                         </a:rPr>
-                        <a:t>0.780</a:t>
+                        <a:t>0.718</a:t>
                       </a:r>
-                      <a:endParaRPr lang="en-US" sz="1050" dirty="0">
+                      <a:endParaRPr lang="en-US" sz="1000" dirty="0">
                         <a:latin typeface="Calibri" charset="0"/>
                         <a:ea typeface="Calibri" charset="0"/>
                         <a:cs typeface="Calibri" charset="0"/>
                       </a:endParaRPr>
                     </a:p>
                   </a:txBody>
-                  <a:tcPr marL="36576" marR="36576" marT="36576" marB="36576" anchor="ctr">
+                  <a:tcPr marL="27432" marR="27432" marT="27432" marB="27432" anchor="ctr">
                     <a:lnL w="6350" cap="flat" cmpd="sng" algn="ctr">
                       <a:solidFill>
                         <a:srgbClr val="BFBFBF"/>
@@ -14831,7 +14843,7 @@
                         <a:buNone/>
                       </a:pPr>
                       <a:r>
-                        <a:rPr lang="en-US" sz="1050" b="1" dirty="0">
+                        <a:rPr lang="en-US" sz="1000" dirty="0">
                           <a:solidFill>
                             <a:srgbClr val="1F1F1F"/>
                           </a:solidFill>
@@ -14839,16 +14851,16 @@
                           <a:ea typeface="Calibri" pitchFamily="34" charset="-122"/>
                           <a:cs typeface="Calibri" pitchFamily="34" charset="-120"/>
                         </a:rPr>
-                        <a:t>0.895</a:t>
+                        <a:t>0.878</a:t>
                       </a:r>
-                      <a:endParaRPr lang="en-US" sz="1050" dirty="0">
+                      <a:endParaRPr lang="en-US" sz="1000" dirty="0">
                         <a:latin typeface="Calibri" charset="0"/>
                         <a:ea typeface="Calibri" charset="0"/>
                         <a:cs typeface="Calibri" charset="0"/>
                       </a:endParaRPr>
                     </a:p>
                   </a:txBody>
-                  <a:tcPr marL="36576" marR="36576" marT="36576" marB="36576" anchor="ctr">
+                  <a:tcPr marL="27432" marR="27432" marT="27432" marB="27432" anchor="ctr">
                     <a:lnL w="6350" cap="flat" cmpd="sng" algn="ctr">
                       <a:solidFill>
                         <a:srgbClr val="BFBFBF"/>
@@ -14896,7 +14908,7 @@
                         <a:buNone/>
                       </a:pPr>
                       <a:r>
-                        <a:rPr lang="en-US" sz="1050" b="1" dirty="0">
+                        <a:rPr lang="en-US" sz="1000" dirty="0">
                           <a:solidFill>
                             <a:srgbClr val="1F1F1F"/>
                           </a:solidFill>
@@ -14904,16 +14916,16 @@
                           <a:ea typeface="Calibri" pitchFamily="34" charset="-122"/>
                           <a:cs typeface="Calibri" pitchFamily="34" charset="-120"/>
                         </a:rPr>
-                        <a:t>0.958</a:t>
+                        <a:t>0.928</a:t>
                       </a:r>
-                      <a:endParaRPr lang="en-US" sz="1050" dirty="0">
+                      <a:endParaRPr lang="en-US" sz="1000" dirty="0">
                         <a:latin typeface="Calibri" charset="0"/>
                         <a:ea typeface="Calibri" charset="0"/>
                         <a:cs typeface="Calibri" charset="0"/>
                       </a:endParaRPr>
                     </a:p>
                   </a:txBody>
-                  <a:tcPr marL="36576" marR="36576" marT="36576" marB="36576" anchor="ctr">
+                  <a:tcPr marL="27432" marR="27432" marT="27432" marB="27432" anchor="ctr">
                     <a:lnL w="6350" cap="flat" cmpd="sng" algn="ctr">
                       <a:solidFill>
                         <a:srgbClr val="BFBFBF"/>
@@ -14961,7 +14973,464 @@
                         <a:buNone/>
                       </a:pPr>
                       <a:r>
-                        <a:rPr lang="en-US" sz="1050" dirty="0">
+                        <a:rPr lang="en-US" sz="1000" dirty="0">
+                          <a:solidFill>
+                            <a:srgbClr val="1F1F1F"/>
+                          </a:solidFill>
+                          <a:latin typeface="Calibri" pitchFamily="34" charset="0"/>
+                          <a:ea typeface="Calibri" pitchFamily="34" charset="-122"/>
+                          <a:cs typeface="Calibri" pitchFamily="34" charset="-120"/>
+                        </a:rPr>
+                        <a:t>0.917</a:t>
+                      </a:r>
+                      <a:endParaRPr lang="en-US" sz="1000" dirty="0">
+                        <a:latin typeface="Calibri" charset="0"/>
+                        <a:ea typeface="Calibri" charset="0"/>
+                        <a:cs typeface="Calibri" charset="0"/>
+                      </a:endParaRPr>
+                    </a:p>
+                  </a:txBody>
+                  <a:tcPr marL="27432" marR="27432" marT="27432" marB="27432" anchor="ctr">
+                    <a:lnL w="6350" cap="flat" cmpd="sng" algn="ctr">
+                      <a:solidFill>
+                        <a:srgbClr val="BFBFBF"/>
+                      </a:solidFill>
+                      <a:prstDash val="solid"/>
+                      <a:round/>
+                      <a:headEnd type="none" w="med" len="med"/>
+                      <a:tailEnd type="none" w="med" len="med"/>
+                    </a:lnL>
+                    <a:lnR w="6350" cap="flat" cmpd="sng" algn="ctr">
+                      <a:solidFill>
+                        <a:srgbClr val="BFBFBF"/>
+                      </a:solidFill>
+                      <a:prstDash val="solid"/>
+                      <a:round/>
+                      <a:headEnd type="none" w="med" len="med"/>
+                      <a:tailEnd type="none" w="med" len="med"/>
+                    </a:lnR>
+                    <a:lnT w="6350" cap="flat" cmpd="sng" algn="ctr">
+                      <a:solidFill>
+                        <a:srgbClr val="BFBFBF"/>
+                      </a:solidFill>
+                      <a:prstDash val="solid"/>
+                      <a:round/>
+                      <a:headEnd type="none" w="med" len="med"/>
+                      <a:tailEnd type="none" w="med" len="med"/>
+                    </a:lnT>
+                    <a:lnB w="6350" cap="flat" cmpd="sng" algn="ctr">
+                      <a:solidFill>
+                        <a:srgbClr val="BFBFBF"/>
+                      </a:solidFill>
+                      <a:prstDash val="solid"/>
+                      <a:round/>
+                      <a:headEnd type="none" w="med" len="med"/>
+                      <a:tailEnd type="none" w="med" len="med"/>
+                    </a:lnB>
+                  </a:tcPr>
+                </a:tc>
+              </a:tr>
+              <a:tr h="274320">
+                <a:tc>
+                  <a:txBody>
+                    <a:bodyPr/>
+                    <a:lstStyle/>
+                    <a:p>
+                      <a:pPr algn="l" indent="0" marL="0">
+                        <a:buNone/>
+                      </a:pPr>
+                      <a:r>
+                        <a:rPr lang="en-US" sz="1000" b="1" dirty="0">
+                          <a:solidFill>
+                            <a:srgbClr val="1F1F1F"/>
+                          </a:solidFill>
+                          <a:latin typeface="Calibri" pitchFamily="34" charset="0"/>
+                          <a:ea typeface="Calibri" pitchFamily="34" charset="-122"/>
+                          <a:cs typeface="Calibri" pitchFamily="34" charset="-120"/>
+                        </a:rPr>
+                        <a:t>Proposed: RF class weights, threshold 0.25</a:t>
+                      </a:r>
+                      <a:endParaRPr lang="en-US" sz="1000" dirty="0">
+                        <a:latin typeface="Calibri" charset="0"/>
+                        <a:ea typeface="Calibri" charset="0"/>
+                        <a:cs typeface="Calibri" charset="0"/>
+                      </a:endParaRPr>
+                    </a:p>
+                  </a:txBody>
+                  <a:tcPr marL="27432" marR="27432" marT="27432" marB="27432" anchor="ctr">
+                    <a:lnL w="6350" cap="flat" cmpd="sng" algn="ctr">
+                      <a:solidFill>
+                        <a:srgbClr val="BFBFBF"/>
+                      </a:solidFill>
+                      <a:prstDash val="solid"/>
+                      <a:round/>
+                      <a:headEnd type="none" w="med" len="med"/>
+                      <a:tailEnd type="none" w="med" len="med"/>
+                    </a:lnL>
+                    <a:lnR w="6350" cap="flat" cmpd="sng" algn="ctr">
+                      <a:solidFill>
+                        <a:srgbClr val="BFBFBF"/>
+                      </a:solidFill>
+                      <a:prstDash val="solid"/>
+                      <a:round/>
+                      <a:headEnd type="none" w="med" len="med"/>
+                      <a:tailEnd type="none" w="med" len="med"/>
+                    </a:lnR>
+                    <a:lnT w="6350" cap="flat" cmpd="sng" algn="ctr">
+                      <a:solidFill>
+                        <a:srgbClr val="BFBFBF"/>
+                      </a:solidFill>
+                      <a:prstDash val="solid"/>
+                      <a:round/>
+                      <a:headEnd type="none" w="med" len="med"/>
+                      <a:tailEnd type="none" w="med" len="med"/>
+                    </a:lnT>
+                    <a:lnB w="6350" cap="flat" cmpd="sng" algn="ctr">
+                      <a:solidFill>
+                        <a:srgbClr val="BFBFBF"/>
+                      </a:solidFill>
+                      <a:prstDash val="solid"/>
+                      <a:round/>
+                      <a:headEnd type="none" w="med" len="med"/>
+                      <a:tailEnd type="none" w="med" len="med"/>
+                    </a:lnB>
+                  </a:tcPr>
+                </a:tc>
+                <a:tc>
+                  <a:txBody>
+                    <a:bodyPr/>
+                    <a:lstStyle/>
+                    <a:p>
+                      <a:pPr algn="l" indent="0" marL="0">
+                        <a:buNone/>
+                      </a:pPr>
+                      <a:r>
+                        <a:rPr lang="en-US" sz="1000" b="1" dirty="0">
+                          <a:solidFill>
+                            <a:srgbClr val="1F1F1F"/>
+                          </a:solidFill>
+                          <a:latin typeface="Calibri" pitchFamily="34" charset="0"/>
+                          <a:ea typeface="Calibri" pitchFamily="34" charset="-122"/>
+                          <a:cs typeface="Calibri" pitchFamily="34" charset="-120"/>
+                        </a:rPr>
+                        <a:t>0.933</a:t>
+                      </a:r>
+                      <a:endParaRPr lang="en-US" sz="1000" dirty="0">
+                        <a:latin typeface="Calibri" charset="0"/>
+                        <a:ea typeface="Calibri" charset="0"/>
+                        <a:cs typeface="Calibri" charset="0"/>
+                      </a:endParaRPr>
+                    </a:p>
+                  </a:txBody>
+                  <a:tcPr marL="27432" marR="27432" marT="27432" marB="27432" anchor="ctr">
+                    <a:lnL w="6350" cap="flat" cmpd="sng" algn="ctr">
+                      <a:solidFill>
+                        <a:srgbClr val="BFBFBF"/>
+                      </a:solidFill>
+                      <a:prstDash val="solid"/>
+                      <a:round/>
+                      <a:headEnd type="none" w="med" len="med"/>
+                      <a:tailEnd type="none" w="med" len="med"/>
+                    </a:lnL>
+                    <a:lnR w="6350" cap="flat" cmpd="sng" algn="ctr">
+                      <a:solidFill>
+                        <a:srgbClr val="BFBFBF"/>
+                      </a:solidFill>
+                      <a:prstDash val="solid"/>
+                      <a:round/>
+                      <a:headEnd type="none" w="med" len="med"/>
+                      <a:tailEnd type="none" w="med" len="med"/>
+                    </a:lnR>
+                    <a:lnT w="6350" cap="flat" cmpd="sng" algn="ctr">
+                      <a:solidFill>
+                        <a:srgbClr val="BFBFBF"/>
+                      </a:solidFill>
+                      <a:prstDash val="solid"/>
+                      <a:round/>
+                      <a:headEnd type="none" w="med" len="med"/>
+                      <a:tailEnd type="none" w="med" len="med"/>
+                    </a:lnT>
+                    <a:lnB w="6350" cap="flat" cmpd="sng" algn="ctr">
+                      <a:solidFill>
+                        <a:srgbClr val="BFBFBF"/>
+                      </a:solidFill>
+                      <a:prstDash val="solid"/>
+                      <a:round/>
+                      <a:headEnd type="none" w="med" len="med"/>
+                      <a:tailEnd type="none" w="med" len="med"/>
+                    </a:lnB>
+                  </a:tcPr>
+                </a:tc>
+                <a:tc>
+                  <a:txBody>
+                    <a:bodyPr/>
+                    <a:lstStyle/>
+                    <a:p>
+                      <a:pPr algn="l" indent="0" marL="0">
+                        <a:buNone/>
+                      </a:pPr>
+                      <a:r>
+                        <a:rPr lang="en-US" sz="1000" b="1" dirty="0">
+                          <a:solidFill>
+                            <a:srgbClr val="1F1F1F"/>
+                          </a:solidFill>
+                          <a:latin typeface="Calibri" pitchFamily="34" charset="0"/>
+                          <a:ea typeface="Calibri" pitchFamily="34" charset="-122"/>
+                          <a:cs typeface="Calibri" pitchFamily="34" charset="-120"/>
+                        </a:rPr>
+                        <a:t>0.670</a:t>
+                      </a:r>
+                      <a:endParaRPr lang="en-US" sz="1000" dirty="0">
+                        <a:latin typeface="Calibri" charset="0"/>
+                        <a:ea typeface="Calibri" charset="0"/>
+                        <a:cs typeface="Calibri" charset="0"/>
+                      </a:endParaRPr>
+                    </a:p>
+                  </a:txBody>
+                  <a:tcPr marL="27432" marR="27432" marT="27432" marB="27432" anchor="ctr">
+                    <a:lnL w="6350" cap="flat" cmpd="sng" algn="ctr">
+                      <a:solidFill>
+                        <a:srgbClr val="BFBFBF"/>
+                      </a:solidFill>
+                      <a:prstDash val="solid"/>
+                      <a:round/>
+                      <a:headEnd type="none" w="med" len="med"/>
+                      <a:tailEnd type="none" w="med" len="med"/>
+                    </a:lnL>
+                    <a:lnR w="6350" cap="flat" cmpd="sng" algn="ctr">
+                      <a:solidFill>
+                        <a:srgbClr val="BFBFBF"/>
+                      </a:solidFill>
+                      <a:prstDash val="solid"/>
+                      <a:round/>
+                      <a:headEnd type="none" w="med" len="med"/>
+                      <a:tailEnd type="none" w="med" len="med"/>
+                    </a:lnR>
+                    <a:lnT w="6350" cap="flat" cmpd="sng" algn="ctr">
+                      <a:solidFill>
+                        <a:srgbClr val="BFBFBF"/>
+                      </a:solidFill>
+                      <a:prstDash val="solid"/>
+                      <a:round/>
+                      <a:headEnd type="none" w="med" len="med"/>
+                      <a:tailEnd type="none" w="med" len="med"/>
+                    </a:lnT>
+                    <a:lnB w="6350" cap="flat" cmpd="sng" algn="ctr">
+                      <a:solidFill>
+                        <a:srgbClr val="BFBFBF"/>
+                      </a:solidFill>
+                      <a:prstDash val="solid"/>
+                      <a:round/>
+                      <a:headEnd type="none" w="med" len="med"/>
+                      <a:tailEnd type="none" w="med" len="med"/>
+                    </a:lnB>
+                  </a:tcPr>
+                </a:tc>
+                <a:tc>
+                  <a:txBody>
+                    <a:bodyPr/>
+                    <a:lstStyle/>
+                    <a:p>
+                      <a:pPr algn="l" indent="0" marL="0">
+                        <a:buNone/>
+                      </a:pPr>
+                      <a:r>
+                        <a:rPr lang="en-US" sz="1000" b="1" dirty="0">
+                          <a:solidFill>
+                            <a:srgbClr val="1F1F1F"/>
+                          </a:solidFill>
+                          <a:latin typeface="Calibri" pitchFamily="34" charset="0"/>
+                          <a:ea typeface="Calibri" pitchFamily="34" charset="-122"/>
+                          <a:cs typeface="Calibri" pitchFamily="34" charset="-120"/>
+                        </a:rPr>
+                        <a:t>0.780</a:t>
+                      </a:r>
+                      <a:endParaRPr lang="en-US" sz="1000" dirty="0">
+                        <a:latin typeface="Calibri" charset="0"/>
+                        <a:ea typeface="Calibri" charset="0"/>
+                        <a:cs typeface="Calibri" charset="0"/>
+                      </a:endParaRPr>
+                    </a:p>
+                  </a:txBody>
+                  <a:tcPr marL="27432" marR="27432" marT="27432" marB="27432" anchor="ctr">
+                    <a:lnL w="6350" cap="flat" cmpd="sng" algn="ctr">
+                      <a:solidFill>
+                        <a:srgbClr val="BFBFBF"/>
+                      </a:solidFill>
+                      <a:prstDash val="solid"/>
+                      <a:round/>
+                      <a:headEnd type="none" w="med" len="med"/>
+                      <a:tailEnd type="none" w="med" len="med"/>
+                    </a:lnL>
+                    <a:lnR w="6350" cap="flat" cmpd="sng" algn="ctr">
+                      <a:solidFill>
+                        <a:srgbClr val="BFBFBF"/>
+                      </a:solidFill>
+                      <a:prstDash val="solid"/>
+                      <a:round/>
+                      <a:headEnd type="none" w="med" len="med"/>
+                      <a:tailEnd type="none" w="med" len="med"/>
+                    </a:lnR>
+                    <a:lnT w="6350" cap="flat" cmpd="sng" algn="ctr">
+                      <a:solidFill>
+                        <a:srgbClr val="BFBFBF"/>
+                      </a:solidFill>
+                      <a:prstDash val="solid"/>
+                      <a:round/>
+                      <a:headEnd type="none" w="med" len="med"/>
+                      <a:tailEnd type="none" w="med" len="med"/>
+                    </a:lnT>
+                    <a:lnB w="6350" cap="flat" cmpd="sng" algn="ctr">
+                      <a:solidFill>
+                        <a:srgbClr val="BFBFBF"/>
+                      </a:solidFill>
+                      <a:prstDash val="solid"/>
+                      <a:round/>
+                      <a:headEnd type="none" w="med" len="med"/>
+                      <a:tailEnd type="none" w="med" len="med"/>
+                    </a:lnB>
+                  </a:tcPr>
+                </a:tc>
+                <a:tc>
+                  <a:txBody>
+                    <a:bodyPr/>
+                    <a:lstStyle/>
+                    <a:p>
+                      <a:pPr algn="l" indent="0" marL="0">
+                        <a:buNone/>
+                      </a:pPr>
+                      <a:r>
+                        <a:rPr lang="en-US" sz="1000" b="1" dirty="0">
+                          <a:solidFill>
+                            <a:srgbClr val="1F1F1F"/>
+                          </a:solidFill>
+                          <a:latin typeface="Calibri" pitchFamily="34" charset="0"/>
+                          <a:ea typeface="Calibri" pitchFamily="34" charset="-122"/>
+                          <a:cs typeface="Calibri" pitchFamily="34" charset="-120"/>
+                        </a:rPr>
+                        <a:t>0.895</a:t>
+                      </a:r>
+                      <a:endParaRPr lang="en-US" sz="1000" dirty="0">
+                        <a:latin typeface="Calibri" charset="0"/>
+                        <a:ea typeface="Calibri" charset="0"/>
+                        <a:cs typeface="Calibri" charset="0"/>
+                      </a:endParaRPr>
+                    </a:p>
+                  </a:txBody>
+                  <a:tcPr marL="27432" marR="27432" marT="27432" marB="27432" anchor="ctr">
+                    <a:lnL w="6350" cap="flat" cmpd="sng" algn="ctr">
+                      <a:solidFill>
+                        <a:srgbClr val="BFBFBF"/>
+                      </a:solidFill>
+                      <a:prstDash val="solid"/>
+                      <a:round/>
+                      <a:headEnd type="none" w="med" len="med"/>
+                      <a:tailEnd type="none" w="med" len="med"/>
+                    </a:lnL>
+                    <a:lnR w="6350" cap="flat" cmpd="sng" algn="ctr">
+                      <a:solidFill>
+                        <a:srgbClr val="BFBFBF"/>
+                      </a:solidFill>
+                      <a:prstDash val="solid"/>
+                      <a:round/>
+                      <a:headEnd type="none" w="med" len="med"/>
+                      <a:tailEnd type="none" w="med" len="med"/>
+                    </a:lnR>
+                    <a:lnT w="6350" cap="flat" cmpd="sng" algn="ctr">
+                      <a:solidFill>
+                        <a:srgbClr val="BFBFBF"/>
+                      </a:solidFill>
+                      <a:prstDash val="solid"/>
+                      <a:round/>
+                      <a:headEnd type="none" w="med" len="med"/>
+                      <a:tailEnd type="none" w="med" len="med"/>
+                    </a:lnT>
+                    <a:lnB w="6350" cap="flat" cmpd="sng" algn="ctr">
+                      <a:solidFill>
+                        <a:srgbClr val="BFBFBF"/>
+                      </a:solidFill>
+                      <a:prstDash val="solid"/>
+                      <a:round/>
+                      <a:headEnd type="none" w="med" len="med"/>
+                      <a:tailEnd type="none" w="med" len="med"/>
+                    </a:lnB>
+                  </a:tcPr>
+                </a:tc>
+                <a:tc>
+                  <a:txBody>
+                    <a:bodyPr/>
+                    <a:lstStyle/>
+                    <a:p>
+                      <a:pPr algn="l" indent="0" marL="0">
+                        <a:buNone/>
+                      </a:pPr>
+                      <a:r>
+                        <a:rPr lang="en-US" sz="1000" b="1" dirty="0">
+                          <a:solidFill>
+                            <a:srgbClr val="1F1F1F"/>
+                          </a:solidFill>
+                          <a:latin typeface="Calibri" pitchFamily="34" charset="0"/>
+                          <a:ea typeface="Calibri" pitchFamily="34" charset="-122"/>
+                          <a:cs typeface="Calibri" pitchFamily="34" charset="-120"/>
+                        </a:rPr>
+                        <a:t>0.958</a:t>
+                      </a:r>
+                      <a:endParaRPr lang="en-US" sz="1000" dirty="0">
+                        <a:latin typeface="Calibri" charset="0"/>
+                        <a:ea typeface="Calibri" charset="0"/>
+                        <a:cs typeface="Calibri" charset="0"/>
+                      </a:endParaRPr>
+                    </a:p>
+                  </a:txBody>
+                  <a:tcPr marL="27432" marR="27432" marT="27432" marB="27432" anchor="ctr">
+                    <a:lnL w="6350" cap="flat" cmpd="sng" algn="ctr">
+                      <a:solidFill>
+                        <a:srgbClr val="BFBFBF"/>
+                      </a:solidFill>
+                      <a:prstDash val="solid"/>
+                      <a:round/>
+                      <a:headEnd type="none" w="med" len="med"/>
+                      <a:tailEnd type="none" w="med" len="med"/>
+                    </a:lnL>
+                    <a:lnR w="6350" cap="flat" cmpd="sng" algn="ctr">
+                      <a:solidFill>
+                        <a:srgbClr val="BFBFBF"/>
+                      </a:solidFill>
+                      <a:prstDash val="solid"/>
+                      <a:round/>
+                      <a:headEnd type="none" w="med" len="med"/>
+                      <a:tailEnd type="none" w="med" len="med"/>
+                    </a:lnR>
+                    <a:lnT w="6350" cap="flat" cmpd="sng" algn="ctr">
+                      <a:solidFill>
+                        <a:srgbClr val="BFBFBF"/>
+                      </a:solidFill>
+                      <a:prstDash val="solid"/>
+                      <a:round/>
+                      <a:headEnd type="none" w="med" len="med"/>
+                      <a:tailEnd type="none" w="med" len="med"/>
+                    </a:lnT>
+                    <a:lnB w="6350" cap="flat" cmpd="sng" algn="ctr">
+                      <a:solidFill>
+                        <a:srgbClr val="BFBFBF"/>
+                      </a:solidFill>
+                      <a:prstDash val="solid"/>
+                      <a:round/>
+                      <a:headEnd type="none" w="med" len="med"/>
+                      <a:tailEnd type="none" w="med" len="med"/>
+                    </a:lnB>
+                  </a:tcPr>
+                </a:tc>
+                <a:tc>
+                  <a:txBody>
+                    <a:bodyPr/>
+                    <a:lstStyle/>
+                    <a:p>
+                      <a:pPr algn="l" indent="0" marL="0">
+                        <a:buNone/>
+                      </a:pPr>
+                      <a:r>
+                        <a:rPr lang="en-US" sz="1000" dirty="0">
                           <a:solidFill>
                             <a:srgbClr val="1F1F1F"/>
                           </a:solidFill>
@@ -14971,14 +15440,14 @@
                         </a:rPr>
                         <a:t>-</a:t>
                       </a:r>
-                      <a:endParaRPr lang="en-US" sz="1050" dirty="0">
+                      <a:endParaRPr lang="en-US" sz="1000" dirty="0">
                         <a:latin typeface="Calibri" charset="0"/>
                         <a:ea typeface="Calibri" charset="0"/>
                         <a:cs typeface="Calibri" charset="0"/>
                       </a:endParaRPr>
                     </a:p>
                   </a:txBody>
-                  <a:tcPr marL="36576" marR="36576" marT="36576" marB="36576" anchor="ctr">
+                  <a:tcPr marL="27432" marR="27432" marT="27432" marB="27432" anchor="ctr">
                     <a:lnL w="6350" cap="flat" cmpd="sng" algn="ctr">
                       <a:solidFill>
                         <a:srgbClr val="BFBFBF"/>
@@ -19425,7 +19894,7 @@
                   <a:schemeClr val="tx1"/>
                 </a:solidFill>
               </a:rPr>
-              <a:t>Logistic Regression (linear benchmark), Decision Tree, Random Forest; class weights; cross-validated grid search</a:t>
+              <a:t>Logistic Regression (linear benchmark), Decision Tree, Bagging, Random Forest; class weights; cross-validated grid search</a:t>
             </a:r>
             <a:endParaRPr lang="en-US" sz="1100" dirty="0"/>
           </a:p>
@@ -21035,7 +21504,7 @@
                   <a:schemeClr val="tx1"/>
                 </a:solidFill>
               </a:rPr>
-              <a:t>Single tree vs forest: the tuned tree catches 82% but declines almost one good customer per defaulter caught (53% precision).</a:t>
+              <a:t>Single tree vs ensembles: the tuned tree catches 82% but declines almost one good customer per defaulter caught (53% precision). Bagging 200 trees lifts precision to 83% and AUC to 0.95 at 68% recall.</a:t>
             </a:r>
             <a:endParaRPr lang="en-US" sz="1200" dirty="0"/>
           </a:p>

--- a/presentation/Loan_Default_Prediction_Presentation.pptx
+++ b/presentation/Loan_Default_Prediction_Presentation.pptx
@@ -125,26 +125,26 @@
   <p:extLst>
     <p:ext uri="{521415D9-36F7-43E2-AB2F-B90AF26B5E84}">
       <p14:sectionLst xmlns:p14="http://schemas.microsoft.com/office/powerpoint/2010/main">
-        <p14:section name="Opening" id="{94860cd5-43ef-ee06-8049-37938167717a}">
+        <p14:section name="Opening" id="{e9f32e46-5cce-d3e0-1a47-1e9b4d1efeea}">
           <p14:sldIdLst>
             <p14:sldId id="256"/>
             <p14:sldId id="257"/>
           </p14:sldIdLst>
         </p14:section>
-        <p14:section name="Problem and approach" id="{b8e3ba4e-2566-0604-1b7c-1bf7fa7a922a}">
+        <p14:section name="Problem and approach" id="{9d38b4db-6c16-6d52-c047-ea45597019ed}">
           <p14:sldIdLst>
             <p14:sldId id="258"/>
             <p14:sldId id="259"/>
           </p14:sldIdLst>
         </p14:section>
-        <p14:section name="Key insights" id="{062fa8cf-80e6-52a2-5522-4a9b3c374866}">
+        <p14:section name="Key insights" id="{d688c42a-1a10-07e5-d541-edfb80ce9baf}">
           <p14:sldIdLst>
             <p14:sldId id="260"/>
             <p14:sldId id="261"/>
             <p14:sldId id="262"/>
           </p14:sldIdLst>
         </p14:section>
-        <p14:section name="Modelling" id="{ad2a4126-587f-a781-e790-e4f86936d131}">
+        <p14:section name="Modelling" id="{bbe3d4e1-4dfa-02e6-e325-602865790267}">
           <p14:sldIdLst>
             <p14:sldId id="263"/>
             <p14:sldId id="264"/>
@@ -152,7 +152,7 @@
             <p14:sldId id="266"/>
           </p14:sldIdLst>
         </p14:section>
-        <p14:section name="Recommendations" id="{44a977be-9c89-7117-8ac5-43238303b891}">
+        <p14:section name="Recommendations" id="{21924011-da29-d5e4-21b5-4fa2a1e783a6}">
           <p14:sldIdLst>
             <p14:sldId id="267"/>
             <p14:sldId id="268"/>
@@ -160,7 +160,7 @@
             <p14:sldId id="270"/>
           </p14:sldIdLst>
         </p14:section>
-        <p14:section name="Appendix" id="{3a967d96-123c-ed07-9e28-a66ad70eae32}">
+        <p14:section name="Appendix" id="{4c3f13bf-1fec-2ba4-4d08-2a8210c80d34}">
           <p14:sldIdLst>
             <p14:sldId id="271"/>
             <p14:sldId id="272"/>
@@ -1295,7 +1295,7 @@
                 <c:formatCode>General</c:formatCode>
                 <c:ptCount val="6"/>
                 <c:pt idx="0">
-                  <c:v>43.4</c:v>
+                  <c:v>44</c:v>
                 </c:pt>
                 <c:pt idx="1">
                   <c:v>26.2</c:v>
@@ -2162,22 +2162,22 @@
                 <c:formatCode>General</c:formatCode>
                 <c:ptCount val="6"/>
                 <c:pt idx="0">
-                  <c:v>79.8</c:v>
+                  <c:v>79.6</c:v>
                 </c:pt>
                 <c:pt idx="1">
-                  <c:v>81.8</c:v>
+                  <c:v>82.1</c:v>
                 </c:pt>
                 <c:pt idx="2">
-                  <c:v>67.8</c:v>
+                  <c:v>68.3</c:v>
                 </c:pt>
                 <c:pt idx="3">
-                  <c:v>68.9</c:v>
+                  <c:v>68.6</c:v>
                 </c:pt>
                 <c:pt idx="4">
-                  <c:v>78.4</c:v>
+                  <c:v>77.3</c:v>
                 </c:pt>
                 <c:pt idx="5">
-                  <c:v>93.3</c:v>
+                  <c:v>92.7</c:v>
                 </c:pt>
               </c:numCache>
             </c:numRef>
@@ -2263,22 +2263,22 @@
                 <c:formatCode>General</c:formatCode>
                 <c:ptCount val="6"/>
                 <c:pt idx="0">
-                  <c:v>61.2</c:v>
+                  <c:v>60.8</c:v>
                 </c:pt>
                 <c:pt idx="1">
-                  <c:v>53.3</c:v>
+                  <c:v>53.1</c:v>
                 </c:pt>
                 <c:pt idx="2">
-                  <c:v>82.6</c:v>
+                  <c:v>82.7</c:v>
                 </c:pt>
                 <c:pt idx="3">
-                  <c:v>84.5</c:v>
+                  <c:v>84.2</c:v>
                 </c:pt>
                 <c:pt idx="4">
-                  <c:v>77.3</c:v>
+                  <c:v>76.9</c:v>
                 </c:pt>
                 <c:pt idx="5">
-                  <c:v>67</c:v>
+                  <c:v>66.9</c:v>
                 </c:pt>
               </c:numCache>
             </c:numRef>
@@ -2474,7 +2474,7 @@
                 </a:solidFill>
                 <a:latin typeface="+mj-lt"/>
               </a:rPr>
-              <a:t>Class-weighted Random Forest on the test set</a:t>
+              <a:t>Class-weighted Random Forest, out-of-fold on training rows</a:t>
             </a:r>
           </a:p>
         </c:rich>
@@ -2606,37 +2606,37 @@
                 <c:formatCode>General</c:formatCode>
                 <c:ptCount val="11"/>
                 <c:pt idx="0">
-                  <c:v>94.1</c:v>
+                  <c:v>95.6</c:v>
                 </c:pt>
                 <c:pt idx="1">
-                  <c:v>93.3</c:v>
+                  <c:v>93.5</c:v>
                 </c:pt>
                 <c:pt idx="2">
-                  <c:v>90.2</c:v>
+                  <c:v>90.3</c:v>
                 </c:pt>
                 <c:pt idx="3">
-                  <c:v>88.2</c:v>
+                  <c:v>87.6</c:v>
                 </c:pt>
                 <c:pt idx="4">
-                  <c:v>85.2</c:v>
+                  <c:v>84.7</c:v>
                 </c:pt>
                 <c:pt idx="5">
                   <c:v>82.6</c:v>
                 </c:pt>
                 <c:pt idx="6">
-                  <c:v>78.4</c:v>
+                  <c:v>80.2</c:v>
                 </c:pt>
                 <c:pt idx="7">
-                  <c:v>73.7</c:v>
+                  <c:v>76.7</c:v>
                 </c:pt>
                 <c:pt idx="8">
-                  <c:v>68.9</c:v>
+                  <c:v>72.1</c:v>
                 </c:pt>
                 <c:pt idx="9">
-                  <c:v>63.6</c:v>
+                  <c:v>68</c:v>
                 </c:pt>
                 <c:pt idx="10">
-                  <c:v>57.4</c:v>
+                  <c:v>62.3</c:v>
                 </c:pt>
               </c:numCache>
             </c:numRef>
@@ -2762,37 +2762,37 @@
                 <c:formatCode>General</c:formatCode>
                 <c:ptCount val="11"/>
                 <c:pt idx="0">
-                  <c:v>63.8</c:v>
+                  <c:v>60.3</c:v>
                 </c:pt>
                 <c:pt idx="1">
-                  <c:v>67</c:v>
+                  <c:v>65.2</c:v>
                 </c:pt>
                 <c:pt idx="2">
-                  <c:v>68.8</c:v>
+                  <c:v>67.8</c:v>
                 </c:pt>
                 <c:pt idx="3">
-                  <c:v>70.8</c:v>
+                  <c:v>69.9</c:v>
                 </c:pt>
                 <c:pt idx="4">
-                  <c:v>72.7</c:v>
+                  <c:v>71.5</c:v>
                 </c:pt>
                 <c:pt idx="5">
-                  <c:v>75.1</c:v>
+                  <c:v>73.3</c:v>
                 </c:pt>
                 <c:pt idx="6">
-                  <c:v>77.3</c:v>
+                  <c:v>75.9</c:v>
                 </c:pt>
                 <c:pt idx="7">
-                  <c:v>80.7</c:v>
+                  <c:v>78.2</c:v>
                 </c:pt>
                 <c:pt idx="8">
-                  <c:v>82.6</c:v>
+                  <c:v>80.9</c:v>
                 </c:pt>
                 <c:pt idx="9">
-                  <c:v>82.5</c:v>
+                  <c:v>83.2</c:v>
                 </c:pt>
                 <c:pt idx="10">
-                  <c:v>84</c:v>
+                  <c:v>84.5</c:v>
                 </c:pt>
               </c:numCache>
             </c:numRef>
@@ -3017,7 +3017,7 @@
                 </a:solidFill>
                 <a:latin typeface="+mj-lt"/>
               </a:rPr>
-              <a:t>Feature importance (%), tuned Random Forest</a:t>
+              <a:t>Impurity-based importance (%), final Random Forest</a:t>
             </a:r>
           </a:p>
         </c:rich>
@@ -3090,28 +3090,28 @@
                     <c:v>Debt-to-income ratio</c:v>
                   </c:pt>
                   <c:pt idx="2">
+                    <c:v>Age of oldest credit line</c:v>
+                  </c:pt>
+                  <c:pt idx="3">
                     <c:v>Delinquent credit lines</c:v>
                   </c:pt>
-                  <c:pt idx="3">
-                    <c:v>Age of oldest credit line</c:v>
-                  </c:pt>
                   <c:pt idx="4">
-                    <c:v>Derogatory reports</c:v>
+                    <c:v>Property value</c:v>
                   </c:pt>
                   <c:pt idx="5">
                     <c:v>Loan amount</c:v>
                   </c:pt>
                   <c:pt idx="6">
-                    <c:v>Property value</c:v>
+                    <c:v>Mortgage due</c:v>
                   </c:pt>
                   <c:pt idx="7">
-                    <c:v>Mortgage due</c:v>
+                    <c:v>Number of credit lines</c:v>
                   </c:pt>
                   <c:pt idx="8">
-                    <c:v>Number of credit lines</c:v>
+                    <c:v>Years at job</c:v>
                   </c:pt>
                   <c:pt idx="9">
-                    <c:v>Years at job</c:v>
+                    <c:v>Derogatory reports</c:v>
                   </c:pt>
                   <c:pt idx="10">
                     <c:v>Recent inquiries</c:v>
@@ -3130,40 +3130,40 @@
                 <c:formatCode>General</c:formatCode>
                 <c:ptCount val="12"/>
                 <c:pt idx="0">
-                  <c:v>28.4</c:v>
+                  <c:v>18.7</c:v>
                 </c:pt>
                 <c:pt idx="1">
-                  <c:v>24.2</c:v>
+                  <c:v>17.8</c:v>
                 </c:pt>
                 <c:pt idx="2">
-                  <c:v>9.7</c:v>
+                  <c:v>8.4</c:v>
                 </c:pt>
                 <c:pt idx="3">
                   <c:v>7.2</c:v>
                 </c:pt>
                 <c:pt idx="4">
-                  <c:v>4.9</c:v>
+                  <c:v>6.8</c:v>
                 </c:pt>
                 <c:pt idx="5">
-                  <c:v>4.2</c:v>
+                  <c:v>6.4</c:v>
                 </c:pt>
                 <c:pt idx="6">
-                  <c:v>3.8</c:v>
+                  <c:v>6.2</c:v>
                 </c:pt>
                 <c:pt idx="7">
-                  <c:v>3.6</c:v>
+                  <c:v>5.9</c:v>
                 </c:pt>
                 <c:pt idx="8">
-                  <c:v>3.2</c:v>
+                  <c:v>5.1</c:v>
                 </c:pt>
                 <c:pt idx="9">
-                  <c:v>2.9</c:v>
+                  <c:v>3.7</c:v>
                 </c:pt>
                 <c:pt idx="10">
-                  <c:v>1.9</c:v>
+                  <c:v>3.1</c:v>
                 </c:pt>
                 <c:pt idx="11">
-                  <c:v>1.8</c:v>
+                  <c:v>1.9</c:v>
                 </c:pt>
               </c:numCache>
             </c:numRef>
@@ -3244,7 +3244,7 @@
         <c:axId val="2094734552"/>
         <c:scaling>
           <c:orientation val="minMax"/>
-          <c:max val="35"/>
+          <c:max val="24"/>
           <c:min val="0"/>
         </c:scaling>
         <c:delete val="0"/>
@@ -3799,7 +3799,7 @@
           <a:p>
             <a:r>
               <a:rPr lang="en-US" dirty="0"/>
-              <a:t>The proposal. A Random Forest does the scoring; a pruned decision tree built on the same data provides the plain-language reasons for every decline. On unseen applicants it catches 93 percent of defaulters and two out of three flagged applicants really would have defaulted.</a:t>
+              <a:t>The proposal. A Random Forest does the scoring; a surrogate decision tree fitted to the forest's own decisions, which reproduces ninety percent of them, provides the plain-language reasons for every decline. On unseen applicants the forest catches 93 percent of defaulters and two out of three flagged applicants really would have defaulted.</a:t>
             </a:r>
             <a:endParaRPr lang="en-US" dirty="0"/>
           </a:p>
@@ -3887,7 +3887,7 @@
           <a:p>
             <a:r>
               <a:rPr lang="en-US" dirty="0"/>
-              <a:t>The model outputs a probability, and 0.5 is only a convention. Moving the cut-off to 0.25 cuts missed defaulters from 43 to 13 per thousand applicants, at the price of declining 92 instead of 46 good customers. Under the cost assumptions that is the cheapest operating point, and it is robust: anything between 0.2 and 0.3 is within 12 percent of it.</a:t>
+              <a:t>The model outputs a probability, and 0.5 is only a convention. The cut-off was chosen on out-of-fold predictions of the training data, so the test set played no part. Moving it to 0.25 cuts missed defaulters from 45 to 15 per thousand applicants on the test set, at the price of declining 92 instead of 46 good customers. It is the cheapest operating point for any cost ratio between three and six to one.</a:t>
             </a:r>
             <a:endParaRPr lang="en-US" dirty="0"/>
           </a:p>
@@ -3975,7 +3975,7 @@
           <a:p>
             <a:r>
               <a:rPr lang="en-US" dirty="0"/>
-              <a:t>Put together with round-number assumptions, the bank's default-related cost falls from about 10.8 million to about 1.8 million a year on 6,000 applications. Even if the real benefit were a quarter of that, the project pays back inside a year. Finance should replace these assumptions with actual loss and margin figures.</a:t>
+              <a:t>Put together with round-number assumptions, the bank's default-related cost falls from about 10.8 million to about 1.9 million a year on 6,000 applications. Even if the real benefit were a quarter of that, the project pays back inside a year. Finance should replace these assumptions with actual loss and margin figures.</a:t>
             </a:r>
             <a:endParaRPr lang="en-US" dirty="0"/>
           </a:p>
@@ -5031,7 +5031,7 @@
           <a:p>
             <a:r>
               <a:rPr lang="en-US" dirty="0"/>
-              <a:t>Two more drivers that are easy to explain. The debt-to-income ratio is not a slope but a cliff: under 40 percent, 4 to 7 percent default; above 45 percent, 87 to 100 percent. And repayment history repeats: each delinquent credit line roughly doubles the default rate.</a:t>
+              <a:t>Two more drivers that are easy to explain. The debt-to-income ratio is not a slope but a cliff: between 20 and 40 percent, 4 to 7 percent default; above 45 percent, 87 to 100 percent. And repayment history repeats: each delinquent credit line roughly doubles the default rate.</a:t>
             </a:r>
             <a:endParaRPr lang="en-US" dirty="0"/>
           </a:p>
@@ -5119,7 +5119,7 @@
           <a:p>
             <a:r>
               <a:rPr lang="en-US" dirty="0"/>
-              <a:t>Three supporting drivers. A long credit history protects. Small loans are the riskiest, not the safest. Occupation matters a little, but removing it from the final model changed performance by at most a point, which is good news for fair lending.</a:t>
+              <a:t>Three supporting drivers. A long credit history protects. Small loans are the riskiest, not the safest. Occupation matters a little; at the usual threshold removing it changes performance by about a point, and the fair-lending review decides whether it stays in.</a:t>
             </a:r>
             <a:endParaRPr lang="en-US" dirty="0"/>
           </a:p>
@@ -5295,7 +5295,7 @@
           <a:p>
             <a:r>
               <a:rPr lang="en-US" dirty="0"/>
-              <a:t>Eight model variants were built; these are the five that matter. The forest with class weights has the best balance and the best ranking ability. Because it ranks applicants so well, we can lower its decision threshold and catch 93 percent of defaulters while two thirds of the flagged applicants really would have defaulted.</a:t>
+              <a:t>Eleven model variants were built; these six tell the story. The forest with class weights has the best balance and ranks applicants among the best. It was selected, together with its threshold, on out-of-fold expected cost using training data only; on the test set it then catches 93 percent of defaulters while two thirds of the flagged applicants really would have defaulted.</a:t>
             </a:r>
             <a:endParaRPr lang="en-US" dirty="0"/>
           </a:p>
@@ -6277,7 +6277,7 @@
                   <a:schemeClr val="tx1"/>
                 </a:solidFill>
               </a:rPr>
-              <a:t>Inputs: the 10 financial attributes plus 'debt-to-income missing' and 'property value missing' flags. Occupation and loan purpose are not needed.</a:t>
+              <a:t>Inputs: all 27 (10 financial attributes, 11 missing-value flags, occupation and loan purpose). Fallback without occupation and purpose: 12 inputs, about a sixth more credit-error cost.</a:t>
             </a:r>
             <a:endParaRPr lang="en-US" sz="1150" dirty="0"/>
           </a:p>
@@ -6295,7 +6295,7 @@
                   <a:schemeClr val="tx1"/>
                 </a:solidFill>
               </a:rPr>
-              <a:t>Decision threshold 0.25 (cost-minimising) instead of the default 0.5; approve / refer / decline bands keep an underwriter in the loop near the threshold.</a:t>
+              <a:t>Decision threshold 0.25, chosen by minimising expected cost on out-of-fold predictions of the training rows (stable for cost ratios 3:1 to 6:1); approve / refer / decline bands keep an underwriter in the loop.</a:t>
             </a:r>
             <a:endParaRPr lang="en-US" sz="1150" dirty="0"/>
           </a:p>
@@ -6313,7 +6313,7 @@
                   <a:schemeClr val="tx1"/>
                 </a:solidFill>
               </a:rPr>
-              <a:t>Explanation layer: a pruned Decision Tree built on the same data. Its rules (ratio missing, ratio above 44%, delinquencies, derogatory reports, credit-history length) supply the adverse-action reasons the ECOA requires.</a:t>
+              <a:t>Explanation layer: a depth-4 surrogate tree fitted to the forest's own decisions reproduces 90% of them; its rules (ratio missing or above 44%, delinquent lines, credit-history length, loan size, job tenure) supply the ECOA adverse-action reasons.</a:t>
             </a:r>
             <a:endParaRPr lang="en-US" sz="1150" dirty="0"/>
           </a:p>
@@ -6331,7 +6331,7 @@
                   <a:schemeClr val="tx1"/>
                 </a:solidFill>
               </a:rPr>
-              <a:t>Validated on a 30% hold-out; hyper-parameters chosen by stratified cross-validation.</a:t>
+              <a:t>Test set held out before any pre-processing; scored once, after all choices were made on training data.</a:t>
             </a:r>
             <a:endParaRPr lang="en-US" sz="1150" dirty="0"/>
           </a:p>
@@ -6655,7 +6655,7 @@
                   <a:schemeClr val="tx1"/>
                 </a:solidFill>
               </a:rPr>
-              <a:t>Per 1,000 applicants: about 187 of 200 defaulters flagged in advance, 13 missed, 92 good customers referred or declined.</a:t>
+              <a:t>Per 1,000 applicants: about 185 of 200 defaulters flagged in advance, 15 missed, 92 good customers referred or declined.</a:t>
             </a:r>
             <a:endParaRPr lang="en-US" sz="1150" dirty="0"/>
           </a:p>
@@ -6882,7 +6882,7 @@
                   <a:schemeClr val="tx1"/>
                 </a:solidFill>
               </a:rPr>
-              <a:t>43 missed defaulters</a:t>
+              <a:t>45 missed defaulters</a:t>
             </a:r>
             <a:endParaRPr lang="en-US" sz="1200" dirty="0"/>
           </a:p>
@@ -6918,7 +6918,7 @@
                   <a:schemeClr val="tx1"/>
                 </a:solidFill>
               </a:rPr>
-              <a:t>$479k indicative cost</a:t>
+              <a:t>$501k indicative cost</a:t>
             </a:r>
             <a:endParaRPr lang="en-US" sz="1200" dirty="0"/>
           </a:p>
@@ -7021,7 +7021,7 @@
                   <a:schemeClr val="tx1"/>
                 </a:solidFill>
               </a:rPr>
-              <a:t>13 missed defaulters</a:t>
+              <a:t>15 missed defaulters</a:t>
             </a:r>
             <a:endParaRPr lang="en-US" sz="1200" dirty="0"/>
           </a:p>
@@ -7057,7 +7057,7 @@
                   <a:schemeClr val="tx1"/>
                 </a:solidFill>
               </a:rPr>
-              <a:t>$304k indicative cost</a:t>
+              <a:t>$314k indicative cost</a:t>
             </a:r>
             <a:endParaRPr lang="en-US" sz="1200" dirty="0"/>
           </a:p>
@@ -7093,7 +7093,7 @@
                   <a:schemeClr val="accent6"/>
                 </a:solidFill>
               </a:rPr>
-              <a:t>Per 1,000 applicants; cost assumes $9,000 per missed defaulter and $2,000 per wrongly declined customer. Thresholds 0.20-0.30 are all within 12% of the minimum, so the choice is robust.</a:t>
+              <a:t>Curves: out-of-fold predictions on the training rows, which is where the threshold was chosen. Cards: test set, per 1,000 applicants; cost assumes $9,000 per missed defaulter and $2,000 per wrongly declined customer. The optimum stays at 0.25 for cost ratios from 3:1 to 6:1.</a:t>
             </a:r>
             <a:endParaRPr lang="en-US" sz="900" dirty="0"/>
           </a:p>
@@ -7588,7 +7588,7 @@
                           <a:ea typeface="Calibri" pitchFamily="34" charset="-122"/>
                           <a:cs typeface="Calibri" pitchFamily="34" charset="-120"/>
                         </a:rPr>
-                        <a:t>about 80 slip through</a:t>
+                        <a:t>about 90 slip through</a:t>
                       </a:r>
                       <a:endParaRPr lang="en-US" sz="1150" dirty="0">
                         <a:latin typeface="Calibri" charset="0"/>
@@ -7785,7 +7785,7 @@
                           <a:ea typeface="Calibri" pitchFamily="34" charset="-122"/>
                           <a:cs typeface="Calibri" pitchFamily="34" charset="-120"/>
                         </a:rPr>
-                        <a:t>about $0.7M</a:t>
+                        <a:t>about $0.8M</a:t>
                       </a:r>
                       <a:endParaRPr lang="en-US" sz="1150" dirty="0">
                         <a:latin typeface="Calibri" charset="0"/>
@@ -8179,7 +8179,7 @@
                           <a:ea typeface="Calibri" pitchFamily="34" charset="-122"/>
                           <a:cs typeface="Calibri" pitchFamily="34" charset="-120"/>
                         </a:rPr>
-                        <a:t>about $1.8M</a:t>
+                        <a:t>about $1.9M</a:t>
                       </a:r>
                       <a:endParaRPr lang="en-US" sz="1150" dirty="0">
                         <a:latin typeface="Calibri" charset="0"/>
@@ -8325,7 +8325,7 @@
                   <a:schemeClr val="bg2"/>
                 </a:solidFill>
               </a:rPr>
-              <a:t>indicative gross annual benefit; about $8.5M after running costs</a:t>
+              <a:t>indicative gross annual benefit; about $8.8M after running costs, $8.5M in year one</a:t>
             </a:r>
             <a:endParaRPr lang="en-US" sz="1200" dirty="0"/>
           </a:p>
@@ -8365,7 +8365,7 @@
                   <a:schemeClr val="tx1"/>
                 </a:solidFill>
               </a:rPr>
-              <a:t>Assumptions: 6,000 applications a year, average loan $18,600, loss given default about 50%, forgone margin about $2,000 per declined good customer, production performance equal to test performance.</a:t>
+              <a:t>Assumptions: 6,000 applications a year, defaulted loans average $16,900 with about half recovered ($9,000 per missed defaulter), forgone margin about $2,000 per declined good customer, production performance equal to test performance.</a:t>
             </a:r>
             <a:endParaRPr lang="en-US" sz="1100" dirty="0"/>
           </a:p>
@@ -9432,7 +9432,7 @@
                   <a:schemeClr val="tx1"/>
                 </a:solidFill>
               </a:rPr>
-              <a:t>Selection bias: data covers approved loans only. Mitigate with a shadow period on all applications and reject inference.</a:t>
+              <a:t>Selection bias: the data covers only loans the old process approved. Mitigate with a shadow period on all applications and reject inference.</a:t>
             </a:r>
             <a:endParaRPr lang="en-US" sz="1100" dirty="0"/>
           </a:p>
@@ -9486,7 +9486,7 @@
                   <a:schemeClr val="tx1"/>
                 </a:solidFill>
               </a:rPr>
-              <a:t>Fair lending: keep occupation out of the model; disparate-impact testing before launch and annually.</a:t>
+              <a:t>Fair lending: disparate-impact testing before launch and annually; a 12-input fallback without occupation and loan purpose is ready if required.</a:t>
             </a:r>
             <a:endParaRPr lang="en-US" sz="1100" dirty="0"/>
           </a:p>
@@ -9982,7 +9982,7 @@
                 <a:gridCol w="868680"/>
                 <a:gridCol w="868680"/>
               </a:tblGrid>
-              <a:tr h="274320">
+              <a:tr h="246888">
                 <a:tc>
                   <a:txBody>
                     <a:bodyPr/>
@@ -9992,7 +9992,7 @@
                         <a:buNone/>
                       </a:pPr>
                       <a:r>
-                        <a:rPr lang="en-US" sz="1000" b="1" dirty="0">
+                        <a:rPr lang="en-US" sz="950" b="1" dirty="0">
                           <a:solidFill>
                             <a:srgbClr val="FFFFFF"/>
                           </a:solidFill>
@@ -10002,7 +10002,7 @@
                         </a:rPr>
                         <a:t>Model</a:t>
                       </a:r>
-                      <a:endParaRPr lang="en-US" sz="1000" dirty="0">
+                      <a:endParaRPr lang="en-US" sz="950" dirty="0">
                         <a:latin typeface="Calibri" charset="0"/>
                         <a:ea typeface="Calibri" charset="0"/>
                         <a:cs typeface="Calibri" charset="0"/>
@@ -10060,7 +10060,7 @@
                         <a:buNone/>
                       </a:pPr>
                       <a:r>
-                        <a:rPr lang="en-US" sz="1000" b="1" dirty="0">
+                        <a:rPr lang="en-US" sz="950" b="1" dirty="0">
                           <a:solidFill>
                             <a:srgbClr val="FFFFFF"/>
                           </a:solidFill>
@@ -10070,7 +10070,7 @@
                         </a:rPr>
                         <a:t>Recall</a:t>
                       </a:r>
-                      <a:endParaRPr lang="en-US" sz="1000" dirty="0">
+                      <a:endParaRPr lang="en-US" sz="950" dirty="0">
                         <a:latin typeface="Calibri" charset="0"/>
                         <a:ea typeface="Calibri" charset="0"/>
                         <a:cs typeface="Calibri" charset="0"/>
@@ -10128,7 +10128,7 @@
                         <a:buNone/>
                       </a:pPr>
                       <a:r>
-                        <a:rPr lang="en-US" sz="1000" b="1" dirty="0">
+                        <a:rPr lang="en-US" sz="950" b="1" dirty="0">
                           <a:solidFill>
                             <a:srgbClr val="FFFFFF"/>
                           </a:solidFill>
@@ -10138,7 +10138,7 @@
                         </a:rPr>
                         <a:t>Precision</a:t>
                       </a:r>
-                      <a:endParaRPr lang="en-US" sz="1000" dirty="0">
+                      <a:endParaRPr lang="en-US" sz="950" dirty="0">
                         <a:latin typeface="Calibri" charset="0"/>
                         <a:ea typeface="Calibri" charset="0"/>
                         <a:cs typeface="Calibri" charset="0"/>
@@ -10196,7 +10196,7 @@
                         <a:buNone/>
                       </a:pPr>
                       <a:r>
-                        <a:rPr lang="en-US" sz="1000" b="1" dirty="0">
+                        <a:rPr lang="en-US" sz="950" b="1" dirty="0">
                           <a:solidFill>
                             <a:srgbClr val="FFFFFF"/>
                           </a:solidFill>
@@ -10206,7 +10206,7 @@
                         </a:rPr>
                         <a:t>F1</a:t>
                       </a:r>
-                      <a:endParaRPr lang="en-US" sz="1000" dirty="0">
+                      <a:endParaRPr lang="en-US" sz="950" dirty="0">
                         <a:latin typeface="Calibri" charset="0"/>
                         <a:ea typeface="Calibri" charset="0"/>
                         <a:cs typeface="Calibri" charset="0"/>
@@ -10264,7 +10264,7 @@
                         <a:buNone/>
                       </a:pPr>
                       <a:r>
-                        <a:rPr lang="en-US" sz="1000" b="1" dirty="0">
+                        <a:rPr lang="en-US" sz="950" b="1" dirty="0">
                           <a:solidFill>
                             <a:srgbClr val="FFFFFF"/>
                           </a:solidFill>
@@ -10274,7 +10274,7 @@
                         </a:rPr>
                         <a:t>Accuracy</a:t>
                       </a:r>
-                      <a:endParaRPr lang="en-US" sz="1000" dirty="0">
+                      <a:endParaRPr lang="en-US" sz="950" dirty="0">
                         <a:latin typeface="Calibri" charset="0"/>
                         <a:ea typeface="Calibri" charset="0"/>
                         <a:cs typeface="Calibri" charset="0"/>
@@ -10332,7 +10332,7 @@
                         <a:buNone/>
                       </a:pPr>
                       <a:r>
-                        <a:rPr lang="en-US" sz="1000" b="1" dirty="0">
+                        <a:rPr lang="en-US" sz="950" b="1" dirty="0">
                           <a:solidFill>
                             <a:srgbClr val="FFFFFF"/>
                           </a:solidFill>
@@ -10342,7 +10342,7 @@
                         </a:rPr>
                         <a:t>ROC-AUC</a:t>
                       </a:r>
-                      <a:endParaRPr lang="en-US" sz="1000" dirty="0">
+                      <a:endParaRPr lang="en-US" sz="950" dirty="0">
                         <a:latin typeface="Calibri" charset="0"/>
                         <a:ea typeface="Calibri" charset="0"/>
                         <a:cs typeface="Calibri" charset="0"/>
@@ -10400,7 +10400,7 @@
                         <a:buNone/>
                       </a:pPr>
                       <a:r>
-                        <a:rPr lang="en-US" sz="1000" b="1" dirty="0">
+                        <a:rPr lang="en-US" sz="950" b="1" dirty="0">
                           <a:solidFill>
                             <a:srgbClr val="FFFFFF"/>
                           </a:solidFill>
@@ -10410,7 +10410,7 @@
                         </a:rPr>
                         <a:t>Train recall</a:t>
                       </a:r>
-                      <a:endParaRPr lang="en-US" sz="1000" dirty="0">
+                      <a:endParaRPr lang="en-US" sz="950" dirty="0">
                         <a:latin typeface="Calibri" charset="0"/>
                         <a:ea typeface="Calibri" charset="0"/>
                         <a:cs typeface="Calibri" charset="0"/>
@@ -10460,7 +10460,7 @@
                   </a:tcPr>
                 </a:tc>
               </a:tr>
-              <a:tr h="274320">
+              <a:tr h="246888">
                 <a:tc>
                   <a:txBody>
                     <a:bodyPr/>
@@ -10470,7 +10470,7 @@
                         <a:buNone/>
                       </a:pPr>
                       <a:r>
-                        <a:rPr lang="en-US" sz="1000" dirty="0">
+                        <a:rPr lang="en-US" sz="950" dirty="0">
                           <a:solidFill>
                             <a:srgbClr val="1F1F1F"/>
                           </a:solidFill>
@@ -10480,7 +10480,7 @@
                         </a:rPr>
                         <a:t>Logistic Regression (plain)</a:t>
                       </a:r>
-                      <a:endParaRPr lang="en-US" sz="1000" dirty="0">
+                      <a:endParaRPr lang="en-US" sz="950" dirty="0">
                         <a:latin typeface="Calibri" charset="0"/>
                         <a:ea typeface="Calibri" charset="0"/>
                         <a:cs typeface="Calibri" charset="0"/>
@@ -10535,7 +10535,7 @@
                         <a:buNone/>
                       </a:pPr>
                       <a:r>
-                        <a:rPr lang="en-US" sz="1000" dirty="0">
+                        <a:rPr lang="en-US" sz="950" dirty="0">
                           <a:solidFill>
                             <a:srgbClr val="1F1F1F"/>
                           </a:solidFill>
@@ -10543,9 +10543,9 @@
                           <a:ea typeface="Calibri" pitchFamily="34" charset="-122"/>
                           <a:cs typeface="Calibri" pitchFamily="34" charset="-120"/>
                         </a:rPr>
-                        <a:t>0.569</a:t>
+                        <a:t>0.566</a:t>
                       </a:r>
-                      <a:endParaRPr lang="en-US" sz="1000" dirty="0">
+                      <a:endParaRPr lang="en-US" sz="950" dirty="0">
                         <a:latin typeface="Calibri" charset="0"/>
                         <a:ea typeface="Calibri" charset="0"/>
                         <a:cs typeface="Calibri" charset="0"/>
@@ -10600,7 +10600,7 @@
                         <a:buNone/>
                       </a:pPr>
                       <a:r>
-                        <a:rPr lang="en-US" sz="1000" dirty="0">
+                        <a:rPr lang="en-US" sz="950" dirty="0">
                           <a:solidFill>
                             <a:srgbClr val="1F1F1F"/>
                           </a:solidFill>
@@ -10608,9 +10608,9 @@
                           <a:ea typeface="Calibri" pitchFamily="34" charset="-122"/>
                           <a:cs typeface="Calibri" pitchFamily="34" charset="-120"/>
                         </a:rPr>
-                        <a:t>0.772</a:t>
+                        <a:t>0.774</a:t>
                       </a:r>
-                      <a:endParaRPr lang="en-US" sz="1000" dirty="0">
+                      <a:endParaRPr lang="en-US" sz="950" dirty="0">
                         <a:latin typeface="Calibri" charset="0"/>
                         <a:ea typeface="Calibri" charset="0"/>
                         <a:cs typeface="Calibri" charset="0"/>
@@ -10665,7 +10665,7 @@
                         <a:buNone/>
                       </a:pPr>
                       <a:r>
-                        <a:rPr lang="en-US" sz="1000" dirty="0">
+                        <a:rPr lang="en-US" sz="950" dirty="0">
                           <a:solidFill>
                             <a:srgbClr val="1F1F1F"/>
                           </a:solidFill>
@@ -10673,9 +10673,9 @@
                           <a:ea typeface="Calibri" pitchFamily="34" charset="-122"/>
                           <a:cs typeface="Calibri" pitchFamily="34" charset="-120"/>
                         </a:rPr>
-                        <a:t>0.655</a:t>
+                        <a:t>0.654</a:t>
                       </a:r>
-                      <a:endParaRPr lang="en-US" sz="1000" dirty="0">
+                      <a:endParaRPr lang="en-US" sz="950" dirty="0">
                         <a:latin typeface="Calibri" charset="0"/>
                         <a:ea typeface="Calibri" charset="0"/>
                         <a:cs typeface="Calibri" charset="0"/>
@@ -10730,7 +10730,7 @@
                         <a:buNone/>
                       </a:pPr>
                       <a:r>
-                        <a:rPr lang="en-US" sz="1000" dirty="0">
+                        <a:rPr lang="en-US" sz="950" dirty="0">
                           <a:solidFill>
                             <a:srgbClr val="1F1F1F"/>
                           </a:solidFill>
@@ -10740,7 +10740,7 @@
                         </a:rPr>
                         <a:t>0.880</a:t>
                       </a:r>
-                      <a:endParaRPr lang="en-US" sz="1000" dirty="0">
+                      <a:endParaRPr lang="en-US" sz="950" dirty="0">
                         <a:latin typeface="Calibri" charset="0"/>
                         <a:ea typeface="Calibri" charset="0"/>
                         <a:cs typeface="Calibri" charset="0"/>
@@ -10795,7 +10795,7 @@
                         <a:buNone/>
                       </a:pPr>
                       <a:r>
-                        <a:rPr lang="en-US" sz="1000" dirty="0">
+                        <a:rPr lang="en-US" sz="950" dirty="0">
                           <a:solidFill>
                             <a:srgbClr val="1F1F1F"/>
                           </a:solidFill>
@@ -10805,7 +10805,7 @@
                         </a:rPr>
                         <a:t>0.907</a:t>
                       </a:r>
-                      <a:endParaRPr lang="en-US" sz="1000" dirty="0">
+                      <a:endParaRPr lang="en-US" sz="950" dirty="0">
                         <a:latin typeface="Calibri" charset="0"/>
                         <a:ea typeface="Calibri" charset="0"/>
                         <a:cs typeface="Calibri" charset="0"/>
@@ -10860,7 +10860,7 @@
                         <a:buNone/>
                       </a:pPr>
                       <a:r>
-                        <a:rPr lang="en-US" sz="1000" dirty="0">
+                        <a:rPr lang="en-US" sz="950" dirty="0">
                           <a:solidFill>
                             <a:srgbClr val="1F1F1F"/>
                           </a:solidFill>
@@ -10868,9 +10868,9 @@
                           <a:ea typeface="Calibri" pitchFamily="34" charset="-122"/>
                           <a:cs typeface="Calibri" pitchFamily="34" charset="-120"/>
                         </a:rPr>
-                        <a:t>0.643</a:t>
+                        <a:t>0.635</a:t>
                       </a:r>
-                      <a:endParaRPr lang="en-US" sz="1000" dirty="0">
+                      <a:endParaRPr lang="en-US" sz="950" dirty="0">
                         <a:latin typeface="Calibri" charset="0"/>
                         <a:ea typeface="Calibri" charset="0"/>
                         <a:cs typeface="Calibri" charset="0"/>
@@ -10917,7 +10917,7 @@
                   </a:tcPr>
                 </a:tc>
               </a:tr>
-              <a:tr h="274320">
+              <a:tr h="246888">
                 <a:tc>
                   <a:txBody>
                     <a:bodyPr/>
@@ -10927,7 +10927,7 @@
                         <a:buNone/>
                       </a:pPr>
                       <a:r>
-                        <a:rPr lang="en-US" sz="1000" dirty="0">
+                        <a:rPr lang="en-US" sz="950" dirty="0">
                           <a:solidFill>
                             <a:srgbClr val="1F1F1F"/>
                           </a:solidFill>
@@ -10935,9 +10935,9 @@
                           <a:ea typeface="Calibri" pitchFamily="34" charset="-122"/>
                           <a:cs typeface="Calibri" pitchFamily="34" charset="-120"/>
                         </a:rPr>
-                        <a:t>Logistic Regression (balanced)</a:t>
+                        <a:t>Logistic Regression (balanced, C tuned)</a:t>
                       </a:r>
-                      <a:endParaRPr lang="en-US" sz="1000" dirty="0">
+                      <a:endParaRPr lang="en-US" sz="950" dirty="0">
                         <a:latin typeface="Calibri" charset="0"/>
                         <a:ea typeface="Calibri" charset="0"/>
                         <a:cs typeface="Calibri" charset="0"/>
@@ -10992,7 +10992,7 @@
                         <a:buNone/>
                       </a:pPr>
                       <a:r>
-                        <a:rPr lang="en-US" sz="1000" dirty="0">
+                        <a:rPr lang="en-US" sz="950" dirty="0">
                           <a:solidFill>
                             <a:srgbClr val="1F1F1F"/>
                           </a:solidFill>
@@ -11000,9 +11000,9 @@
                           <a:ea typeface="Calibri" pitchFamily="34" charset="-122"/>
                           <a:cs typeface="Calibri" pitchFamily="34" charset="-120"/>
                         </a:rPr>
-                        <a:t>0.798</a:t>
+                        <a:t>0.796</a:t>
                       </a:r>
-                      <a:endParaRPr lang="en-US" sz="1000" dirty="0">
+                      <a:endParaRPr lang="en-US" sz="950" dirty="0">
                         <a:latin typeface="Calibri" charset="0"/>
                         <a:ea typeface="Calibri" charset="0"/>
                         <a:cs typeface="Calibri" charset="0"/>
@@ -11057,7 +11057,7 @@
                         <a:buNone/>
                       </a:pPr>
                       <a:r>
-                        <a:rPr lang="en-US" sz="1000" dirty="0">
+                        <a:rPr lang="en-US" sz="950" dirty="0">
                           <a:solidFill>
                             <a:srgbClr val="1F1F1F"/>
                           </a:solidFill>
@@ -11065,9 +11065,9 @@
                           <a:ea typeface="Calibri" pitchFamily="34" charset="-122"/>
                           <a:cs typeface="Calibri" pitchFamily="34" charset="-120"/>
                         </a:rPr>
-                        <a:t>0.612</a:t>
+                        <a:t>0.608</a:t>
                       </a:r>
-                      <a:endParaRPr lang="en-US" sz="1000" dirty="0">
+                      <a:endParaRPr lang="en-US" sz="950" dirty="0">
                         <a:latin typeface="Calibri" charset="0"/>
                         <a:ea typeface="Calibri" charset="0"/>
                         <a:cs typeface="Calibri" charset="0"/>
@@ -11122,7 +11122,7 @@
                         <a:buNone/>
                       </a:pPr>
                       <a:r>
-                        <a:rPr lang="en-US" sz="1000" dirty="0">
+                        <a:rPr lang="en-US" sz="950" dirty="0">
                           <a:solidFill>
                             <a:srgbClr val="1F1F1F"/>
                           </a:solidFill>
@@ -11130,9 +11130,9 @@
                           <a:ea typeface="Calibri" pitchFamily="34" charset="-122"/>
                           <a:cs typeface="Calibri" pitchFamily="34" charset="-120"/>
                         </a:rPr>
-                        <a:t>0.693</a:t>
+                        <a:t>0.689</a:t>
                       </a:r>
-                      <a:endParaRPr lang="en-US" sz="1000" dirty="0">
+                      <a:endParaRPr lang="en-US" sz="950" dirty="0">
                         <a:latin typeface="Calibri" charset="0"/>
                         <a:ea typeface="Calibri" charset="0"/>
                         <a:cs typeface="Calibri" charset="0"/>
@@ -11187,7 +11187,7 @@
                         <a:buNone/>
                       </a:pPr>
                       <a:r>
-                        <a:rPr lang="en-US" sz="1000" dirty="0">
+                        <a:rPr lang="en-US" sz="950" dirty="0">
                           <a:solidFill>
                             <a:srgbClr val="1F1F1F"/>
                           </a:solidFill>
@@ -11195,9 +11195,9 @@
                           <a:ea typeface="Calibri" pitchFamily="34" charset="-122"/>
                           <a:cs typeface="Calibri" pitchFamily="34" charset="-120"/>
                         </a:rPr>
-                        <a:t>0.859</a:t>
+                        <a:t>0.857</a:t>
                       </a:r>
-                      <a:endParaRPr lang="en-US" sz="1000" dirty="0">
+                      <a:endParaRPr lang="en-US" sz="950" dirty="0">
                         <a:latin typeface="Calibri" charset="0"/>
                         <a:ea typeface="Calibri" charset="0"/>
                         <a:cs typeface="Calibri" charset="0"/>
@@ -11252,7 +11252,7 @@
                         <a:buNone/>
                       </a:pPr>
                       <a:r>
-                        <a:rPr lang="en-US" sz="1000" dirty="0">
+                        <a:rPr lang="en-US" sz="950" dirty="0">
                           <a:solidFill>
                             <a:srgbClr val="1F1F1F"/>
                           </a:solidFill>
@@ -11262,7 +11262,7 @@
                         </a:rPr>
                         <a:t>0.906</a:t>
                       </a:r>
-                      <a:endParaRPr lang="en-US" sz="1000" dirty="0">
+                      <a:endParaRPr lang="en-US" sz="950" dirty="0">
                         <a:latin typeface="Calibri" charset="0"/>
                         <a:ea typeface="Calibri" charset="0"/>
                         <a:cs typeface="Calibri" charset="0"/>
@@ -11317,7 +11317,7 @@
                         <a:buNone/>
                       </a:pPr>
                       <a:r>
-                        <a:rPr lang="en-US" sz="1000" dirty="0">
+                        <a:rPr lang="en-US" sz="950" dirty="0">
                           <a:solidFill>
                             <a:srgbClr val="1F1F1F"/>
                           </a:solidFill>
@@ -11325,9 +11325,9 @@
                           <a:ea typeface="Calibri" pitchFamily="34" charset="-122"/>
                           <a:cs typeface="Calibri" pitchFamily="34" charset="-120"/>
                         </a:rPr>
-                        <a:t>0.823</a:t>
+                        <a:t>0.821</a:t>
                       </a:r>
-                      <a:endParaRPr lang="en-US" sz="1000" dirty="0">
+                      <a:endParaRPr lang="en-US" sz="950" dirty="0">
                         <a:latin typeface="Calibri" charset="0"/>
                         <a:ea typeface="Calibri" charset="0"/>
                         <a:cs typeface="Calibri" charset="0"/>
@@ -11374,7 +11374,7 @@
                   </a:tcPr>
                 </a:tc>
               </a:tr>
-              <a:tr h="274320">
+              <a:tr h="246888">
                 <a:tc>
                   <a:txBody>
                     <a:bodyPr/>
@@ -11384,7 +11384,7 @@
                         <a:buNone/>
                       </a:pPr>
                       <a:r>
-                        <a:rPr lang="en-US" sz="1000" dirty="0">
+                        <a:rPr lang="en-US" sz="950" dirty="0">
                           <a:solidFill>
                             <a:srgbClr val="1F1F1F"/>
                           </a:solidFill>
@@ -11394,7 +11394,7 @@
                         </a:rPr>
                         <a:t>Decision Tree (default)</a:t>
                       </a:r>
-                      <a:endParaRPr lang="en-US" sz="1000" dirty="0">
+                      <a:endParaRPr lang="en-US" sz="950" dirty="0">
                         <a:latin typeface="Calibri" charset="0"/>
                         <a:ea typeface="Calibri" charset="0"/>
                         <a:cs typeface="Calibri" charset="0"/>
@@ -11449,7 +11449,7 @@
                         <a:buNone/>
                       </a:pPr>
                       <a:r>
-                        <a:rPr lang="en-US" sz="1000" dirty="0">
+                        <a:rPr lang="en-US" sz="950" dirty="0">
                           <a:solidFill>
                             <a:srgbClr val="1F1F1F"/>
                           </a:solidFill>
@@ -11459,7 +11459,7 @@
                         </a:rPr>
                         <a:t>0.686</a:t>
                       </a:r>
-                      <a:endParaRPr lang="en-US" sz="1000" dirty="0">
+                      <a:endParaRPr lang="en-US" sz="950" dirty="0">
                         <a:latin typeface="Calibri" charset="0"/>
                         <a:ea typeface="Calibri" charset="0"/>
                         <a:cs typeface="Calibri" charset="0"/>
@@ -11514,7 +11514,7 @@
                         <a:buNone/>
                       </a:pPr>
                       <a:r>
-                        <a:rPr lang="en-US" sz="1000" dirty="0">
+                        <a:rPr lang="en-US" sz="950" dirty="0">
                           <a:solidFill>
                             <a:srgbClr val="1F1F1F"/>
                           </a:solidFill>
@@ -11524,7 +11524,7 @@
                         </a:rPr>
                         <a:t>0.706</a:t>
                       </a:r>
-                      <a:endParaRPr lang="en-US" sz="1000" dirty="0">
+                      <a:endParaRPr lang="en-US" sz="950" dirty="0">
                         <a:latin typeface="Calibri" charset="0"/>
                         <a:ea typeface="Calibri" charset="0"/>
                         <a:cs typeface="Calibri" charset="0"/>
@@ -11579,7 +11579,7 @@
                         <a:buNone/>
                       </a:pPr>
                       <a:r>
-                        <a:rPr lang="en-US" sz="1000" dirty="0">
+                        <a:rPr lang="en-US" sz="950" dirty="0">
                           <a:solidFill>
                             <a:srgbClr val="1F1F1F"/>
                           </a:solidFill>
@@ -11589,7 +11589,7 @@
                         </a:rPr>
                         <a:t>0.696</a:t>
                       </a:r>
-                      <a:endParaRPr lang="en-US" sz="1000" dirty="0">
+                      <a:endParaRPr lang="en-US" sz="950" dirty="0">
                         <a:latin typeface="Calibri" charset="0"/>
                         <a:ea typeface="Calibri" charset="0"/>
                         <a:cs typeface="Calibri" charset="0"/>
@@ -11644,7 +11644,7 @@
                         <a:buNone/>
                       </a:pPr>
                       <a:r>
-                        <a:rPr lang="en-US" sz="1000" dirty="0">
+                        <a:rPr lang="en-US" sz="950" dirty="0">
                           <a:solidFill>
                             <a:srgbClr val="1F1F1F"/>
                           </a:solidFill>
@@ -11654,7 +11654,7 @@
                         </a:rPr>
                         <a:t>0.880</a:t>
                       </a:r>
-                      <a:endParaRPr lang="en-US" sz="1000" dirty="0">
+                      <a:endParaRPr lang="en-US" sz="950" dirty="0">
                         <a:latin typeface="Calibri" charset="0"/>
                         <a:ea typeface="Calibri" charset="0"/>
                         <a:cs typeface="Calibri" charset="0"/>
@@ -11709,7 +11709,7 @@
                         <a:buNone/>
                       </a:pPr>
                       <a:r>
-                        <a:rPr lang="en-US" sz="1000" dirty="0">
+                        <a:rPr lang="en-US" sz="950" dirty="0">
                           <a:solidFill>
                             <a:srgbClr val="1F1F1F"/>
                           </a:solidFill>
@@ -11719,7 +11719,7 @@
                         </a:rPr>
                         <a:t>0.807</a:t>
                       </a:r>
-                      <a:endParaRPr lang="en-US" sz="1000" dirty="0">
+                      <a:endParaRPr lang="en-US" sz="950" dirty="0">
                         <a:latin typeface="Calibri" charset="0"/>
                         <a:ea typeface="Calibri" charset="0"/>
                         <a:cs typeface="Calibri" charset="0"/>
@@ -11774,7 +11774,7 @@
                         <a:buNone/>
                       </a:pPr>
                       <a:r>
-                        <a:rPr lang="en-US" sz="1000" dirty="0">
+                        <a:rPr lang="en-US" sz="950" dirty="0">
                           <a:solidFill>
                             <a:srgbClr val="1F1F1F"/>
                           </a:solidFill>
@@ -11784,7 +11784,7 @@
                         </a:rPr>
                         <a:t>1.000</a:t>
                       </a:r>
-                      <a:endParaRPr lang="en-US" sz="1000" dirty="0">
+                      <a:endParaRPr lang="en-US" sz="950" dirty="0">
                         <a:latin typeface="Calibri" charset="0"/>
                         <a:ea typeface="Calibri" charset="0"/>
                         <a:cs typeface="Calibri" charset="0"/>
@@ -11831,7 +11831,7 @@
                   </a:tcPr>
                 </a:tc>
               </a:tr>
-              <a:tr h="274320">
+              <a:tr h="246888">
                 <a:tc>
                   <a:txBody>
                     <a:bodyPr/>
@@ -11841,7 +11841,7 @@
                         <a:buNone/>
                       </a:pPr>
                       <a:r>
-                        <a:rPr lang="en-US" sz="1000" dirty="0">
+                        <a:rPr lang="en-US" sz="950" dirty="0">
                           <a:solidFill>
                             <a:srgbClr val="1F1F1F"/>
                           </a:solidFill>
@@ -11851,7 +11851,7 @@
                         </a:rPr>
                         <a:t>Decision Tree (class weights)</a:t>
                       </a:r>
-                      <a:endParaRPr lang="en-US" sz="1000" dirty="0">
+                      <a:endParaRPr lang="en-US" sz="950" dirty="0">
                         <a:latin typeface="Calibri" charset="0"/>
                         <a:ea typeface="Calibri" charset="0"/>
                         <a:cs typeface="Calibri" charset="0"/>
@@ -11906,7 +11906,7 @@
                         <a:buNone/>
                       </a:pPr>
                       <a:r>
-                        <a:rPr lang="en-US" sz="1000" dirty="0">
+                        <a:rPr lang="en-US" sz="950" dirty="0">
                           <a:solidFill>
                             <a:srgbClr val="1F1F1F"/>
                           </a:solidFill>
@@ -11916,7 +11916,7 @@
                         </a:rPr>
                         <a:t>0.616</a:t>
                       </a:r>
-                      <a:endParaRPr lang="en-US" sz="1000" dirty="0">
+                      <a:endParaRPr lang="en-US" sz="950" dirty="0">
                         <a:latin typeface="Calibri" charset="0"/>
                         <a:ea typeface="Calibri" charset="0"/>
                         <a:cs typeface="Calibri" charset="0"/>
@@ -11971,7 +11971,7 @@
                         <a:buNone/>
                       </a:pPr>
                       <a:r>
-                        <a:rPr lang="en-US" sz="1000" dirty="0">
+                        <a:rPr lang="en-US" sz="950" dirty="0">
                           <a:solidFill>
                             <a:srgbClr val="1F1F1F"/>
                           </a:solidFill>
@@ -11979,9 +11979,9 @@
                           <a:ea typeface="Calibri" pitchFamily="34" charset="-122"/>
                           <a:cs typeface="Calibri" pitchFamily="34" charset="-120"/>
                         </a:rPr>
-                        <a:t>0.728</a:t>
+                        <a:t>0.719</a:t>
                       </a:r>
-                      <a:endParaRPr lang="en-US" sz="1000" dirty="0">
+                      <a:endParaRPr lang="en-US" sz="950" dirty="0">
                         <a:latin typeface="Calibri" charset="0"/>
                         <a:ea typeface="Calibri" charset="0"/>
                         <a:cs typeface="Calibri" charset="0"/>
@@ -12036,7 +12036,7 @@
                         <a:buNone/>
                       </a:pPr>
                       <a:r>
-                        <a:rPr lang="en-US" sz="1000" dirty="0">
+                        <a:rPr lang="en-US" sz="950" dirty="0">
                           <a:solidFill>
                             <a:srgbClr val="1F1F1F"/>
                           </a:solidFill>
@@ -12044,9 +12044,9 @@
                           <a:ea typeface="Calibri" pitchFamily="34" charset="-122"/>
                           <a:cs typeface="Calibri" pitchFamily="34" charset="-120"/>
                         </a:rPr>
-                        <a:t>0.668</a:t>
+                        <a:t>0.664</a:t>
                       </a:r>
-                      <a:endParaRPr lang="en-US" sz="1000" dirty="0">
+                      <a:endParaRPr lang="en-US" sz="950" dirty="0">
                         <a:latin typeface="Calibri" charset="0"/>
                         <a:ea typeface="Calibri" charset="0"/>
                         <a:cs typeface="Calibri" charset="0"/>
@@ -12101,7 +12101,7 @@
                         <a:buNone/>
                       </a:pPr>
                       <a:r>
-                        <a:rPr lang="en-US" sz="1000" dirty="0">
+                        <a:rPr lang="en-US" sz="950" dirty="0">
                           <a:solidFill>
                             <a:srgbClr val="1F1F1F"/>
                           </a:solidFill>
@@ -12109,9 +12109,9 @@
                           <a:ea typeface="Calibri" pitchFamily="34" charset="-122"/>
                           <a:cs typeface="Calibri" pitchFamily="34" charset="-120"/>
                         </a:rPr>
-                        <a:t>0.878</a:t>
+                        <a:t>0.875</a:t>
                       </a:r>
-                      <a:endParaRPr lang="en-US" sz="1000" dirty="0">
+                      <a:endParaRPr lang="en-US" sz="950" dirty="0">
                         <a:latin typeface="Calibri" charset="0"/>
                         <a:ea typeface="Calibri" charset="0"/>
                         <a:cs typeface="Calibri" charset="0"/>
@@ -12166,7 +12166,7 @@
                         <a:buNone/>
                       </a:pPr>
                       <a:r>
-                        <a:rPr lang="en-US" sz="1000" dirty="0">
+                        <a:rPr lang="en-US" sz="950" dirty="0">
                           <a:solidFill>
                             <a:srgbClr val="1F1F1F"/>
                           </a:solidFill>
@@ -12174,9 +12174,9 @@
                           <a:ea typeface="Calibri" pitchFamily="34" charset="-122"/>
                           <a:cs typeface="Calibri" pitchFamily="34" charset="-120"/>
                         </a:rPr>
-                        <a:t>0.779</a:t>
+                        <a:t>0.778</a:t>
                       </a:r>
-                      <a:endParaRPr lang="en-US" sz="1000" dirty="0">
+                      <a:endParaRPr lang="en-US" sz="950" dirty="0">
                         <a:latin typeface="Calibri" charset="0"/>
                         <a:ea typeface="Calibri" charset="0"/>
                         <a:cs typeface="Calibri" charset="0"/>
@@ -12231,7 +12231,7 @@
                         <a:buNone/>
                       </a:pPr>
                       <a:r>
-                        <a:rPr lang="en-US" sz="1000" dirty="0">
+                        <a:rPr lang="en-US" sz="950" dirty="0">
                           <a:solidFill>
                             <a:srgbClr val="1F1F1F"/>
                           </a:solidFill>
@@ -12241,7 +12241,7 @@
                         </a:rPr>
                         <a:t>1.000</a:t>
                       </a:r>
-                      <a:endParaRPr lang="en-US" sz="1000" dirty="0">
+                      <a:endParaRPr lang="en-US" sz="950" dirty="0">
                         <a:latin typeface="Calibri" charset="0"/>
                         <a:ea typeface="Calibri" charset="0"/>
                         <a:cs typeface="Calibri" charset="0"/>
@@ -12288,7 +12288,7 @@
                   </a:tcPr>
                 </a:tc>
               </a:tr>
-              <a:tr h="274320">
+              <a:tr h="246888">
                 <a:tc>
                   <a:txBody>
                     <a:bodyPr/>
@@ -12298,7 +12298,7 @@
                         <a:buNone/>
                       </a:pPr>
                       <a:r>
-                        <a:rPr lang="en-US" sz="1000" dirty="0">
+                        <a:rPr lang="en-US" sz="950" dirty="0">
                           <a:solidFill>
                             <a:srgbClr val="1F1F1F"/>
                           </a:solidFill>
@@ -12308,7 +12308,7 @@
                         </a:rPr>
                         <a:t>Decision Tree (tuned: balanced, min 20 per leaf)</a:t>
                       </a:r>
-                      <a:endParaRPr lang="en-US" sz="1000" dirty="0">
+                      <a:endParaRPr lang="en-US" sz="950" dirty="0">
                         <a:latin typeface="Calibri" charset="0"/>
                         <a:ea typeface="Calibri" charset="0"/>
                         <a:cs typeface="Calibri" charset="0"/>
@@ -12363,7 +12363,7 @@
                         <a:buNone/>
                       </a:pPr>
                       <a:r>
-                        <a:rPr lang="en-US" sz="1000" dirty="0">
+                        <a:rPr lang="en-US" sz="950" dirty="0">
                           <a:solidFill>
                             <a:srgbClr val="1F1F1F"/>
                           </a:solidFill>
@@ -12371,9 +12371,9 @@
                           <a:ea typeface="Calibri" pitchFamily="34" charset="-122"/>
                           <a:cs typeface="Calibri" pitchFamily="34" charset="-120"/>
                         </a:rPr>
-                        <a:t>0.818</a:t>
+                        <a:t>0.821</a:t>
                       </a:r>
-                      <a:endParaRPr lang="en-US" sz="1000" dirty="0">
+                      <a:endParaRPr lang="en-US" sz="950" dirty="0">
                         <a:latin typeface="Calibri" charset="0"/>
                         <a:ea typeface="Calibri" charset="0"/>
                         <a:cs typeface="Calibri" charset="0"/>
@@ -12428,7 +12428,7 @@
                         <a:buNone/>
                       </a:pPr>
                       <a:r>
-                        <a:rPr lang="en-US" sz="1000" dirty="0">
+                        <a:rPr lang="en-US" sz="950" dirty="0">
                           <a:solidFill>
                             <a:srgbClr val="1F1F1F"/>
                           </a:solidFill>
@@ -12436,9 +12436,9 @@
                           <a:ea typeface="Calibri" pitchFamily="34" charset="-122"/>
                           <a:cs typeface="Calibri" pitchFamily="34" charset="-120"/>
                         </a:rPr>
-                        <a:t>0.533</a:t>
+                        <a:t>0.531</a:t>
                       </a:r>
-                      <a:endParaRPr lang="en-US" sz="1000" dirty="0">
+                      <a:endParaRPr lang="en-US" sz="950" dirty="0">
                         <a:latin typeface="Calibri" charset="0"/>
                         <a:ea typeface="Calibri" charset="0"/>
                         <a:cs typeface="Calibri" charset="0"/>
@@ -12493,7 +12493,7 @@
                         <a:buNone/>
                       </a:pPr>
                       <a:r>
-                        <a:rPr lang="en-US" sz="1000" dirty="0">
+                        <a:rPr lang="en-US" sz="950" dirty="0">
                           <a:solidFill>
                             <a:srgbClr val="1F1F1F"/>
                           </a:solidFill>
@@ -12503,7 +12503,7 @@
                         </a:rPr>
                         <a:t>0.645</a:t>
                       </a:r>
-                      <a:endParaRPr lang="en-US" sz="1000" dirty="0">
+                      <a:endParaRPr lang="en-US" sz="950" dirty="0">
                         <a:latin typeface="Calibri" charset="0"/>
                         <a:ea typeface="Calibri" charset="0"/>
                         <a:cs typeface="Calibri" charset="0"/>
@@ -12558,7 +12558,7 @@
                         <a:buNone/>
                       </a:pPr>
                       <a:r>
-                        <a:rPr lang="en-US" sz="1000" dirty="0">
+                        <a:rPr lang="en-US" sz="950" dirty="0">
                           <a:solidFill>
                             <a:srgbClr val="1F1F1F"/>
                           </a:solidFill>
@@ -12566,9 +12566,9 @@
                           <a:ea typeface="Calibri" pitchFamily="34" charset="-122"/>
                           <a:cs typeface="Calibri" pitchFamily="34" charset="-120"/>
                         </a:rPr>
-                        <a:t>0.820</a:t>
+                        <a:t>0.819</a:t>
                       </a:r>
-                      <a:endParaRPr lang="en-US" sz="1000" dirty="0">
+                      <a:endParaRPr lang="en-US" sz="950" dirty="0">
                         <a:latin typeface="Calibri" charset="0"/>
                         <a:ea typeface="Calibri" charset="0"/>
                         <a:cs typeface="Calibri" charset="0"/>
@@ -12623,7 +12623,7 @@
                         <a:buNone/>
                       </a:pPr>
                       <a:r>
-                        <a:rPr lang="en-US" sz="1000" dirty="0">
+                        <a:rPr lang="en-US" sz="950" dirty="0">
                           <a:solidFill>
                             <a:srgbClr val="1F1F1F"/>
                           </a:solidFill>
@@ -12631,9 +12631,9 @@
                           <a:ea typeface="Calibri" pitchFamily="34" charset="-122"/>
                           <a:cs typeface="Calibri" pitchFamily="34" charset="-120"/>
                         </a:rPr>
-                        <a:t>0.879</a:t>
+                        <a:t>0.877</a:t>
                       </a:r>
-                      <a:endParaRPr lang="en-US" sz="1000" dirty="0">
+                      <a:endParaRPr lang="en-US" sz="950" dirty="0">
                         <a:latin typeface="Calibri" charset="0"/>
                         <a:ea typeface="Calibri" charset="0"/>
                         <a:cs typeface="Calibri" charset="0"/>
@@ -12688,7 +12688,7 @@
                         <a:buNone/>
                       </a:pPr>
                       <a:r>
-                        <a:rPr lang="en-US" sz="1000" dirty="0">
+                        <a:rPr lang="en-US" sz="950" dirty="0">
                           <a:solidFill>
                             <a:srgbClr val="1F1F1F"/>
                           </a:solidFill>
@@ -12696,9 +12696,9 @@
                           <a:ea typeface="Calibri" pitchFamily="34" charset="-122"/>
                           <a:cs typeface="Calibri" pitchFamily="34" charset="-120"/>
                         </a:rPr>
-                        <a:t>0.924</a:t>
+                        <a:t>0.921</a:t>
                       </a:r>
-                      <a:endParaRPr lang="en-US" sz="1000" dirty="0">
+                      <a:endParaRPr lang="en-US" sz="950" dirty="0">
                         <a:latin typeface="Calibri" charset="0"/>
                         <a:ea typeface="Calibri" charset="0"/>
                         <a:cs typeface="Calibri" charset="0"/>
@@ -12745,7 +12745,7 @@
                   </a:tcPr>
                 </a:tc>
               </a:tr>
-              <a:tr h="274320">
+              <a:tr h="246888">
                 <a:tc>
                   <a:txBody>
                     <a:bodyPr/>
@@ -12755,7 +12755,7 @@
                         <a:buNone/>
                       </a:pPr>
                       <a:r>
-                        <a:rPr lang="en-US" sz="1000" dirty="0">
+                        <a:rPr lang="en-US" sz="950" dirty="0">
                           <a:solidFill>
                             <a:srgbClr val="1F1F1F"/>
                           </a:solidFill>
@@ -12765,7 +12765,7 @@
                         </a:rPr>
                         <a:t>Bagging (200 fully grown trees)</a:t>
                       </a:r>
-                      <a:endParaRPr lang="en-US" sz="1000" dirty="0">
+                      <a:endParaRPr lang="en-US" sz="950" dirty="0">
                         <a:latin typeface="Calibri" charset="0"/>
                         <a:ea typeface="Calibri" charset="0"/>
                         <a:cs typeface="Calibri" charset="0"/>
@@ -12820,7 +12820,7 @@
                         <a:buNone/>
                       </a:pPr>
                       <a:r>
-                        <a:rPr lang="en-US" sz="1000" dirty="0">
+                        <a:rPr lang="en-US" sz="950" dirty="0">
                           <a:solidFill>
                             <a:srgbClr val="1F1F1F"/>
                           </a:solidFill>
@@ -12828,9 +12828,9 @@
                           <a:ea typeface="Calibri" pitchFamily="34" charset="-122"/>
                           <a:cs typeface="Calibri" pitchFamily="34" charset="-120"/>
                         </a:rPr>
-                        <a:t>0.678</a:t>
+                        <a:t>0.683</a:t>
                       </a:r>
-                      <a:endParaRPr lang="en-US" sz="1000" dirty="0">
+                      <a:endParaRPr lang="en-US" sz="950" dirty="0">
                         <a:latin typeface="Calibri" charset="0"/>
                         <a:ea typeface="Calibri" charset="0"/>
                         <a:cs typeface="Calibri" charset="0"/>
@@ -12885,7 +12885,7 @@
                         <a:buNone/>
                       </a:pPr>
                       <a:r>
-                        <a:rPr lang="en-US" sz="1000" dirty="0">
+                        <a:rPr lang="en-US" sz="950" dirty="0">
                           <a:solidFill>
                             <a:srgbClr val="1F1F1F"/>
                           </a:solidFill>
@@ -12893,9 +12893,9 @@
                           <a:ea typeface="Calibri" pitchFamily="34" charset="-122"/>
                           <a:cs typeface="Calibri" pitchFamily="34" charset="-120"/>
                         </a:rPr>
-                        <a:t>0.826</a:t>
+                        <a:t>0.827</a:t>
                       </a:r>
-                      <a:endParaRPr lang="en-US" sz="1000" dirty="0">
+                      <a:endParaRPr lang="en-US" sz="950" dirty="0">
                         <a:latin typeface="Calibri" charset="0"/>
                         <a:ea typeface="Calibri" charset="0"/>
                         <a:cs typeface="Calibri" charset="0"/>
@@ -12950,7 +12950,7 @@
                         <a:buNone/>
                       </a:pPr>
                       <a:r>
-                        <a:rPr lang="en-US" sz="1000" dirty="0">
+                        <a:rPr lang="en-US" sz="950" dirty="0">
                           <a:solidFill>
                             <a:srgbClr val="1F1F1F"/>
                           </a:solidFill>
@@ -12958,9 +12958,9 @@
                           <a:ea typeface="Calibri" pitchFamily="34" charset="-122"/>
                           <a:cs typeface="Calibri" pitchFamily="34" charset="-120"/>
                         </a:rPr>
-                        <a:t>0.745</a:t>
+                        <a:t>0.748</a:t>
                       </a:r>
-                      <a:endParaRPr lang="en-US" sz="1000" dirty="0">
+                      <a:endParaRPr lang="en-US" sz="950" dirty="0">
                         <a:latin typeface="Calibri" charset="0"/>
                         <a:ea typeface="Calibri" charset="0"/>
                         <a:cs typeface="Calibri" charset="0"/>
@@ -13015,7 +13015,7 @@
                         <a:buNone/>
                       </a:pPr>
                       <a:r>
-                        <a:rPr lang="en-US" sz="1000" dirty="0">
+                        <a:rPr lang="en-US" sz="950" dirty="0">
                           <a:solidFill>
                             <a:srgbClr val="1F1F1F"/>
                           </a:solidFill>
@@ -13023,9 +13023,9 @@
                           <a:ea typeface="Calibri" pitchFamily="34" charset="-122"/>
                           <a:cs typeface="Calibri" pitchFamily="34" charset="-120"/>
                         </a:rPr>
-                        <a:t>0.907</a:t>
+                        <a:t>0.908</a:t>
                       </a:r>
-                      <a:endParaRPr lang="en-US" sz="1000" dirty="0">
+                      <a:endParaRPr lang="en-US" sz="950" dirty="0">
                         <a:latin typeface="Calibri" charset="0"/>
                         <a:ea typeface="Calibri" charset="0"/>
                         <a:cs typeface="Calibri" charset="0"/>
@@ -13080,7 +13080,7 @@
                         <a:buNone/>
                       </a:pPr>
                       <a:r>
-                        <a:rPr lang="en-US" sz="1000" dirty="0">
+                        <a:rPr lang="en-US" sz="950" dirty="0">
                           <a:solidFill>
                             <a:srgbClr val="1F1F1F"/>
                           </a:solidFill>
@@ -13088,9 +13088,9 @@
                           <a:ea typeface="Calibri" pitchFamily="34" charset="-122"/>
                           <a:cs typeface="Calibri" pitchFamily="34" charset="-120"/>
                         </a:rPr>
-                        <a:t>0.946</a:t>
+                        <a:t>0.945</a:t>
                       </a:r>
-                      <a:endParaRPr lang="en-US" sz="1000" dirty="0">
+                      <a:endParaRPr lang="en-US" sz="950" dirty="0">
                         <a:latin typeface="Calibri" charset="0"/>
                         <a:ea typeface="Calibri" charset="0"/>
                         <a:cs typeface="Calibri" charset="0"/>
@@ -13145,7 +13145,7 @@
                         <a:buNone/>
                       </a:pPr>
                       <a:r>
-                        <a:rPr lang="en-US" sz="1000" dirty="0">
+                        <a:rPr lang="en-US" sz="950" dirty="0">
                           <a:solidFill>
                             <a:srgbClr val="1F1F1F"/>
                           </a:solidFill>
@@ -13155,7 +13155,7 @@
                         </a:rPr>
                         <a:t>1.000</a:t>
                       </a:r>
-                      <a:endParaRPr lang="en-US" sz="1000" dirty="0">
+                      <a:endParaRPr lang="en-US" sz="950" dirty="0">
                         <a:latin typeface="Calibri" charset="0"/>
                         <a:ea typeface="Calibri" charset="0"/>
                         <a:cs typeface="Calibri" charset="0"/>
@@ -13202,7 +13202,7 @@
                   </a:tcPr>
                 </a:tc>
               </a:tr>
-              <a:tr h="274320">
+              <a:tr h="246888">
                 <a:tc>
                   <a:txBody>
                     <a:bodyPr/>
@@ -13212,7 +13212,7 @@
                         <a:buNone/>
                       </a:pPr>
                       <a:r>
-                        <a:rPr lang="en-US" sz="1000" dirty="0">
+                        <a:rPr lang="en-US" sz="950" dirty="0">
                           <a:solidFill>
                             <a:srgbClr val="1F1F1F"/>
                           </a:solidFill>
@@ -13220,9 +13220,9 @@
                           <a:ea typeface="Calibri" pitchFamily="34" charset="-122"/>
                           <a:cs typeface="Calibri" pitchFamily="34" charset="-120"/>
                         </a:rPr>
-                        <a:t>Random Forest (default, 200 trees)</a:t>
+                        <a:t>Bagging (class-weighted trees)</a:t>
                       </a:r>
-                      <a:endParaRPr lang="en-US" sz="1000" dirty="0">
+                      <a:endParaRPr lang="en-US" sz="950" dirty="0">
                         <a:latin typeface="Calibri" charset="0"/>
                         <a:ea typeface="Calibri" charset="0"/>
                         <a:cs typeface="Calibri" charset="0"/>
@@ -13277,7 +13277,7 @@
                         <a:buNone/>
                       </a:pPr>
                       <a:r>
-                        <a:rPr lang="en-US" sz="1000" dirty="0">
+                        <a:rPr lang="en-US" sz="950" dirty="0">
                           <a:solidFill>
                             <a:srgbClr val="1F1F1F"/>
                           </a:solidFill>
@@ -13285,9 +13285,9 @@
                           <a:ea typeface="Calibri" pitchFamily="34" charset="-122"/>
                           <a:cs typeface="Calibri" pitchFamily="34" charset="-120"/>
                         </a:rPr>
-                        <a:t>0.689</a:t>
+                        <a:t>0.597</a:t>
                       </a:r>
-                      <a:endParaRPr lang="en-US" sz="1000" dirty="0">
+                      <a:endParaRPr lang="en-US" sz="950" dirty="0">
                         <a:latin typeface="Calibri" charset="0"/>
                         <a:ea typeface="Calibri" charset="0"/>
                         <a:cs typeface="Calibri" charset="0"/>
@@ -13342,7 +13342,7 @@
                         <a:buNone/>
                       </a:pPr>
                       <a:r>
-                        <a:rPr lang="en-US" sz="1000" dirty="0">
+                        <a:rPr lang="en-US" sz="950" dirty="0">
                           <a:solidFill>
                             <a:srgbClr val="1F1F1F"/>
                           </a:solidFill>
@@ -13350,9 +13350,9 @@
                           <a:ea typeface="Calibri" pitchFamily="34" charset="-122"/>
                           <a:cs typeface="Calibri" pitchFamily="34" charset="-120"/>
                         </a:rPr>
-                        <a:t>0.845</a:t>
+                        <a:t>0.810</a:t>
                       </a:r>
-                      <a:endParaRPr lang="en-US" sz="1000" dirty="0">
+                      <a:endParaRPr lang="en-US" sz="950" dirty="0">
                         <a:latin typeface="Calibri" charset="0"/>
                         <a:ea typeface="Calibri" charset="0"/>
                         <a:cs typeface="Calibri" charset="0"/>
@@ -13407,7 +13407,7 @@
                         <a:buNone/>
                       </a:pPr>
                       <a:r>
-                        <a:rPr lang="en-US" sz="1000" dirty="0">
+                        <a:rPr lang="en-US" sz="950" dirty="0">
                           <a:solidFill>
                             <a:srgbClr val="1F1F1F"/>
                           </a:solidFill>
@@ -13415,9 +13415,9 @@
                           <a:ea typeface="Calibri" pitchFamily="34" charset="-122"/>
                           <a:cs typeface="Calibri" pitchFamily="34" charset="-120"/>
                         </a:rPr>
-                        <a:t>0.759</a:t>
+                        <a:t>0.687</a:t>
                       </a:r>
-                      <a:endParaRPr lang="en-US" sz="1000" dirty="0">
+                      <a:endParaRPr lang="en-US" sz="950" dirty="0">
                         <a:latin typeface="Calibri" charset="0"/>
                         <a:ea typeface="Calibri" charset="0"/>
                         <a:cs typeface="Calibri" charset="0"/>
@@ -13472,7 +13472,7 @@
                         <a:buNone/>
                       </a:pPr>
                       <a:r>
-                        <a:rPr lang="en-US" sz="1000" dirty="0">
+                        <a:rPr lang="en-US" sz="950" dirty="0">
                           <a:solidFill>
                             <a:srgbClr val="1F1F1F"/>
                           </a:solidFill>
@@ -13480,9 +13480,9 @@
                           <a:ea typeface="Calibri" pitchFamily="34" charset="-122"/>
                           <a:cs typeface="Calibri" pitchFamily="34" charset="-120"/>
                         </a:rPr>
-                        <a:t>0.913</a:t>
+                        <a:t>0.891</a:t>
                       </a:r>
-                      <a:endParaRPr lang="en-US" sz="1000" dirty="0">
+                      <a:endParaRPr lang="en-US" sz="950" dirty="0">
                         <a:latin typeface="Calibri" charset="0"/>
                         <a:ea typeface="Calibri" charset="0"/>
                         <a:cs typeface="Calibri" charset="0"/>
@@ -13537,7 +13537,7 @@
                         <a:buNone/>
                       </a:pPr>
                       <a:r>
-                        <a:rPr lang="en-US" sz="1000" dirty="0">
+                        <a:rPr lang="en-US" sz="950" dirty="0">
                           <a:solidFill>
                             <a:srgbClr val="1F1F1F"/>
                           </a:solidFill>
@@ -13545,9 +13545,9 @@
                           <a:ea typeface="Calibri" pitchFamily="34" charset="-122"/>
                           <a:cs typeface="Calibri" pitchFamily="34" charset="-120"/>
                         </a:rPr>
-                        <a:t>0.962</a:t>
+                        <a:t>0.946</a:t>
                       </a:r>
-                      <a:endParaRPr lang="en-US" sz="1000" dirty="0">
+                      <a:endParaRPr lang="en-US" sz="950" dirty="0">
                         <a:latin typeface="Calibri" charset="0"/>
                         <a:ea typeface="Calibri" charset="0"/>
                         <a:cs typeface="Calibri" charset="0"/>
@@ -13602,7 +13602,7 @@
                         <a:buNone/>
                       </a:pPr>
                       <a:r>
-                        <a:rPr lang="en-US" sz="1000" dirty="0">
+                        <a:rPr lang="en-US" sz="950" dirty="0">
                           <a:solidFill>
                             <a:srgbClr val="1F1F1F"/>
                           </a:solidFill>
@@ -13612,7 +13612,7 @@
                         </a:rPr>
                         <a:t>1.000</a:t>
                       </a:r>
-                      <a:endParaRPr lang="en-US" sz="1000" dirty="0">
+                      <a:endParaRPr lang="en-US" sz="950" dirty="0">
                         <a:latin typeface="Calibri" charset="0"/>
                         <a:ea typeface="Calibri" charset="0"/>
                         <a:cs typeface="Calibri" charset="0"/>
@@ -13659,7 +13659,7 @@
                   </a:tcPr>
                 </a:tc>
               </a:tr>
-              <a:tr h="274320">
+              <a:tr h="246888">
                 <a:tc>
                   <a:txBody>
                     <a:bodyPr/>
@@ -13669,7 +13669,7 @@
                         <a:buNone/>
                       </a:pPr>
                       <a:r>
-                        <a:rPr lang="en-US" sz="1000" dirty="0">
+                        <a:rPr lang="en-US" sz="950" dirty="0">
                           <a:solidFill>
                             <a:srgbClr val="1F1F1F"/>
                           </a:solidFill>
@@ -13677,9 +13677,9 @@
                           <a:ea typeface="Calibri" pitchFamily="34" charset="-122"/>
                           <a:cs typeface="Calibri" pitchFamily="34" charset="-120"/>
                         </a:rPr>
-                        <a:t>Random Forest (class weights 0.2/0.8)</a:t>
+                        <a:t>Random Forest (default, 200 trees)</a:t>
                       </a:r>
-                      <a:endParaRPr lang="en-US" sz="1000" dirty="0">
+                      <a:endParaRPr lang="en-US" sz="950" dirty="0">
                         <a:latin typeface="Calibri" charset="0"/>
                         <a:ea typeface="Calibri" charset="0"/>
                         <a:cs typeface="Calibri" charset="0"/>
@@ -13734,7 +13734,7 @@
                         <a:buNone/>
                       </a:pPr>
                       <a:r>
-                        <a:rPr lang="en-US" sz="1000" dirty="0">
+                        <a:rPr lang="en-US" sz="950" dirty="0">
                           <a:solidFill>
                             <a:srgbClr val="1F1F1F"/>
                           </a:solidFill>
@@ -13742,9 +13742,9 @@
                           <a:ea typeface="Calibri" pitchFamily="34" charset="-122"/>
                           <a:cs typeface="Calibri" pitchFamily="34" charset="-120"/>
                         </a:rPr>
-                        <a:t>0.784</a:t>
+                        <a:t>0.686</a:t>
                       </a:r>
-                      <a:endParaRPr lang="en-US" sz="1000" dirty="0">
+                      <a:endParaRPr lang="en-US" sz="950" dirty="0">
                         <a:latin typeface="Calibri" charset="0"/>
                         <a:ea typeface="Calibri" charset="0"/>
                         <a:cs typeface="Calibri" charset="0"/>
@@ -13799,7 +13799,7 @@
                         <a:buNone/>
                       </a:pPr>
                       <a:r>
-                        <a:rPr lang="en-US" sz="1000" dirty="0">
+                        <a:rPr lang="en-US" sz="950" dirty="0">
                           <a:solidFill>
                             <a:srgbClr val="1F1F1F"/>
                           </a:solidFill>
@@ -13807,9 +13807,9 @@
                           <a:ea typeface="Calibri" pitchFamily="34" charset="-122"/>
                           <a:cs typeface="Calibri" pitchFamily="34" charset="-120"/>
                         </a:rPr>
-                        <a:t>0.773</a:t>
+                        <a:t>0.842</a:t>
                       </a:r>
-                      <a:endParaRPr lang="en-US" sz="1000" dirty="0">
+                      <a:endParaRPr lang="en-US" sz="950" dirty="0">
                         <a:latin typeface="Calibri" charset="0"/>
                         <a:ea typeface="Calibri" charset="0"/>
                         <a:cs typeface="Calibri" charset="0"/>
@@ -13864,7 +13864,7 @@
                         <a:buNone/>
                       </a:pPr>
                       <a:r>
-                        <a:rPr lang="en-US" sz="1000" dirty="0">
+                        <a:rPr lang="en-US" sz="950" dirty="0">
                           <a:solidFill>
                             <a:srgbClr val="1F1F1F"/>
                           </a:solidFill>
@@ -13872,9 +13872,9 @@
                           <a:ea typeface="Calibri" pitchFamily="34" charset="-122"/>
                           <a:cs typeface="Calibri" pitchFamily="34" charset="-120"/>
                         </a:rPr>
-                        <a:t>0.779</a:t>
+                        <a:t>0.756</a:t>
                       </a:r>
-                      <a:endParaRPr lang="en-US" sz="1000" dirty="0">
+                      <a:endParaRPr lang="en-US" sz="950" dirty="0">
                         <a:latin typeface="Calibri" charset="0"/>
                         <a:ea typeface="Calibri" charset="0"/>
                         <a:cs typeface="Calibri" charset="0"/>
@@ -13929,7 +13929,7 @@
                         <a:buNone/>
                       </a:pPr>
                       <a:r>
-                        <a:rPr lang="en-US" sz="1000" dirty="0">
+                        <a:rPr lang="en-US" sz="950" dirty="0">
                           <a:solidFill>
                             <a:srgbClr val="1F1F1F"/>
                           </a:solidFill>
@@ -13937,9 +13937,9 @@
                           <a:ea typeface="Calibri" pitchFamily="34" charset="-122"/>
                           <a:cs typeface="Calibri" pitchFamily="34" charset="-120"/>
                         </a:rPr>
-                        <a:t>0.911</a:t>
+                        <a:t>0.912</a:t>
                       </a:r>
-                      <a:endParaRPr lang="en-US" sz="1000" dirty="0">
+                      <a:endParaRPr lang="en-US" sz="950" dirty="0">
                         <a:latin typeface="Calibri" charset="0"/>
                         <a:ea typeface="Calibri" charset="0"/>
                         <a:cs typeface="Calibri" charset="0"/>
@@ -13994,7 +13994,7 @@
                         <a:buNone/>
                       </a:pPr>
                       <a:r>
-                        <a:rPr lang="en-US" sz="1000" dirty="0">
+                        <a:rPr lang="en-US" sz="950" dirty="0">
                           <a:solidFill>
                             <a:srgbClr val="1F1F1F"/>
                           </a:solidFill>
@@ -14002,9 +14002,9 @@
                           <a:ea typeface="Calibri" pitchFamily="34" charset="-122"/>
                           <a:cs typeface="Calibri" pitchFamily="34" charset="-120"/>
                         </a:rPr>
-                        <a:t>0.958</a:t>
+                        <a:t>0.963</a:t>
                       </a:r>
-                      <a:endParaRPr lang="en-US" sz="1000" dirty="0">
+                      <a:endParaRPr lang="en-US" sz="950" dirty="0">
                         <a:latin typeface="Calibri" charset="0"/>
                         <a:ea typeface="Calibri" charset="0"/>
                         <a:cs typeface="Calibri" charset="0"/>
@@ -14059,7 +14059,7 @@
                         <a:buNone/>
                       </a:pPr>
                       <a:r>
-                        <a:rPr lang="en-US" sz="1000" dirty="0">
+                        <a:rPr lang="en-US" sz="950" dirty="0">
                           <a:solidFill>
                             <a:srgbClr val="1F1F1F"/>
                           </a:solidFill>
@@ -14069,7 +14069,7 @@
                         </a:rPr>
                         <a:t>1.000</a:t>
                       </a:r>
-                      <a:endParaRPr lang="en-US" sz="1000" dirty="0">
+                      <a:endParaRPr lang="en-US" sz="950" dirty="0">
                         <a:latin typeface="Calibri" charset="0"/>
                         <a:ea typeface="Calibri" charset="0"/>
                         <a:cs typeface="Calibri" charset="0"/>
@@ -14116,7 +14116,7 @@
                   </a:tcPr>
                 </a:tc>
               </a:tr>
-              <a:tr h="274320">
+              <a:tr h="246888">
                 <a:tc>
                   <a:txBody>
                     <a:bodyPr/>
@@ -14126,7 +14126,7 @@
                         <a:buNone/>
                       </a:pPr>
                       <a:r>
-                        <a:rPr lang="en-US" sz="1000" dirty="0">
+                        <a:rPr lang="en-US" sz="950" dirty="0">
                           <a:solidFill>
                             <a:srgbClr val="1F1F1F"/>
                           </a:solidFill>
@@ -14134,9 +14134,9 @@
                           <a:ea typeface="Calibri" pitchFamily="34" charset="-122"/>
                           <a:cs typeface="Calibri" pitchFamily="34" charset="-120"/>
                         </a:rPr>
-                        <a:t>Random Forest (tuned for recall)</a:t>
+                        <a:t>Random Forest (class weights 0.2/0.8)</a:t>
                       </a:r>
-                      <a:endParaRPr lang="en-US" sz="1000" dirty="0">
+                      <a:endParaRPr lang="en-US" sz="950" dirty="0">
                         <a:latin typeface="Calibri" charset="0"/>
                         <a:ea typeface="Calibri" charset="0"/>
                         <a:cs typeface="Calibri" charset="0"/>
@@ -14191,7 +14191,7 @@
                         <a:buNone/>
                       </a:pPr>
                       <a:r>
-                        <a:rPr lang="en-US" sz="1000" dirty="0">
+                        <a:rPr lang="en-US" sz="950" dirty="0">
                           <a:solidFill>
                             <a:srgbClr val="1F1F1F"/>
                           </a:solidFill>
@@ -14199,9 +14199,9 @@
                           <a:ea typeface="Calibri" pitchFamily="34" charset="-122"/>
                           <a:cs typeface="Calibri" pitchFamily="34" charset="-120"/>
                         </a:rPr>
-                        <a:t>0.784</a:t>
+                        <a:t>0.773</a:t>
                       </a:r>
-                      <a:endParaRPr lang="en-US" sz="1000" dirty="0">
+                      <a:endParaRPr lang="en-US" sz="950" dirty="0">
                         <a:latin typeface="Calibri" charset="0"/>
                         <a:ea typeface="Calibri" charset="0"/>
                         <a:cs typeface="Calibri" charset="0"/>
@@ -14256,7 +14256,7 @@
                         <a:buNone/>
                       </a:pPr>
                       <a:r>
-                        <a:rPr lang="en-US" sz="1000" dirty="0">
+                        <a:rPr lang="en-US" sz="950" dirty="0">
                           <a:solidFill>
                             <a:srgbClr val="1F1F1F"/>
                           </a:solidFill>
@@ -14264,9 +14264,9 @@
                           <a:ea typeface="Calibri" pitchFamily="34" charset="-122"/>
                           <a:cs typeface="Calibri" pitchFamily="34" charset="-120"/>
                         </a:rPr>
-                        <a:t>0.653</a:t>
+                        <a:t>0.769</a:t>
                       </a:r>
-                      <a:endParaRPr lang="en-US" sz="1000" dirty="0">
+                      <a:endParaRPr lang="en-US" sz="950" dirty="0">
                         <a:latin typeface="Calibri" charset="0"/>
                         <a:ea typeface="Calibri" charset="0"/>
                         <a:cs typeface="Calibri" charset="0"/>
@@ -14321,7 +14321,7 @@
                         <a:buNone/>
                       </a:pPr>
                       <a:r>
-                        <a:rPr lang="en-US" sz="1000" dirty="0">
+                        <a:rPr lang="en-US" sz="950" dirty="0">
                           <a:solidFill>
                             <a:srgbClr val="1F1F1F"/>
                           </a:solidFill>
@@ -14329,9 +14329,9 @@
                           <a:ea typeface="Calibri" pitchFamily="34" charset="-122"/>
                           <a:cs typeface="Calibri" pitchFamily="34" charset="-120"/>
                         </a:rPr>
-                        <a:t>0.712</a:t>
+                        <a:t>0.771</a:t>
                       </a:r>
-                      <a:endParaRPr lang="en-US" sz="1000" dirty="0">
+                      <a:endParaRPr lang="en-US" sz="950" dirty="0">
                         <a:latin typeface="Calibri" charset="0"/>
                         <a:ea typeface="Calibri" charset="0"/>
                         <a:cs typeface="Calibri" charset="0"/>
@@ -14386,7 +14386,7 @@
                         <a:buNone/>
                       </a:pPr>
                       <a:r>
-                        <a:rPr lang="en-US" sz="1000" dirty="0">
+                        <a:rPr lang="en-US" sz="950" dirty="0">
                           <a:solidFill>
                             <a:srgbClr val="1F1F1F"/>
                           </a:solidFill>
@@ -14394,9 +14394,9 @@
                           <a:ea typeface="Calibri" pitchFamily="34" charset="-122"/>
                           <a:cs typeface="Calibri" pitchFamily="34" charset="-120"/>
                         </a:rPr>
-                        <a:t>0.874</a:t>
+                        <a:t>0.908</a:t>
                       </a:r>
-                      <a:endParaRPr lang="en-US" sz="1000" dirty="0">
+                      <a:endParaRPr lang="en-US" sz="950" dirty="0">
                         <a:latin typeface="Calibri" charset="0"/>
                         <a:ea typeface="Calibri" charset="0"/>
                         <a:cs typeface="Calibri" charset="0"/>
@@ -14451,7 +14451,7 @@
                         <a:buNone/>
                       </a:pPr>
                       <a:r>
-                        <a:rPr lang="en-US" sz="1000" dirty="0">
+                        <a:rPr lang="en-US" sz="950" dirty="0">
                           <a:solidFill>
                             <a:srgbClr val="1F1F1F"/>
                           </a:solidFill>
@@ -14459,9 +14459,9 @@
                           <a:ea typeface="Calibri" pitchFamily="34" charset="-122"/>
                           <a:cs typeface="Calibri" pitchFamily="34" charset="-120"/>
                         </a:rPr>
-                        <a:t>0.933</a:t>
+                        <a:t>0.959</a:t>
                       </a:r>
-                      <a:endParaRPr lang="en-US" sz="1000" dirty="0">
+                      <a:endParaRPr lang="en-US" sz="950" dirty="0">
                         <a:latin typeface="Calibri" charset="0"/>
                         <a:ea typeface="Calibri" charset="0"/>
                         <a:cs typeface="Calibri" charset="0"/>
@@ -14516,7 +14516,7 @@
                         <a:buNone/>
                       </a:pPr>
                       <a:r>
-                        <a:rPr lang="en-US" sz="1000" dirty="0">
+                        <a:rPr lang="en-US" sz="950" dirty="0">
                           <a:solidFill>
                             <a:srgbClr val="1F1F1F"/>
                           </a:solidFill>
@@ -14524,9 +14524,9 @@
                           <a:ea typeface="Calibri" pitchFamily="34" charset="-122"/>
                           <a:cs typeface="Calibri" pitchFamily="34" charset="-120"/>
                         </a:rPr>
-                        <a:t>0.921</a:t>
+                        <a:t>1.000</a:t>
                       </a:r>
-                      <a:endParaRPr lang="en-US" sz="1000" dirty="0">
+                      <a:endParaRPr lang="en-US" sz="950" dirty="0">
                         <a:latin typeface="Calibri" charset="0"/>
                         <a:ea typeface="Calibri" charset="0"/>
                         <a:cs typeface="Calibri" charset="0"/>
@@ -14573,7 +14573,7 @@
                   </a:tcPr>
                 </a:tc>
               </a:tr>
-              <a:tr h="274320">
+              <a:tr h="246888">
                 <a:tc>
                   <a:txBody>
                     <a:bodyPr/>
@@ -14583,7 +14583,7 @@
                         <a:buNone/>
                       </a:pPr>
                       <a:r>
-                        <a:rPr lang="en-US" sz="1000" dirty="0">
+                        <a:rPr lang="en-US" sz="950" dirty="0">
                           <a:solidFill>
                             <a:srgbClr val="1F1F1F"/>
                           </a:solidFill>
@@ -14591,9 +14591,9 @@
                           <a:ea typeface="Calibri" pitchFamily="34" charset="-122"/>
                           <a:cs typeface="Calibri" pitchFamily="34" charset="-120"/>
                         </a:rPr>
-                        <a:t>Random Forest (tuned, 12 features)</a:t>
+                        <a:t>Random Forest (tuned for recall)</a:t>
                       </a:r>
-                      <a:endParaRPr lang="en-US" sz="1000" dirty="0">
+                      <a:endParaRPr lang="en-US" sz="950" dirty="0">
                         <a:latin typeface="Calibri" charset="0"/>
                         <a:ea typeface="Calibri" charset="0"/>
                         <a:cs typeface="Calibri" charset="0"/>
@@ -14648,7 +14648,7 @@
                         <a:buNone/>
                       </a:pPr>
                       <a:r>
-                        <a:rPr lang="en-US" sz="1000" dirty="0">
+                        <a:rPr lang="en-US" sz="950" dirty="0">
                           <a:solidFill>
                             <a:srgbClr val="1F1F1F"/>
                           </a:solidFill>
@@ -14656,9 +14656,9 @@
                           <a:ea typeface="Calibri" pitchFamily="34" charset="-122"/>
                           <a:cs typeface="Calibri" pitchFamily="34" charset="-120"/>
                         </a:rPr>
-                        <a:t>0.782</a:t>
+                        <a:t>0.790</a:t>
                       </a:r>
-                      <a:endParaRPr lang="en-US" sz="1000" dirty="0">
+                      <a:endParaRPr lang="en-US" sz="950" dirty="0">
                         <a:latin typeface="Calibri" charset="0"/>
                         <a:ea typeface="Calibri" charset="0"/>
                         <a:cs typeface="Calibri" charset="0"/>
@@ -14713,7 +14713,7 @@
                         <a:buNone/>
                       </a:pPr>
                       <a:r>
-                        <a:rPr lang="en-US" sz="1000" dirty="0">
+                        <a:rPr lang="en-US" sz="950" dirty="0">
                           <a:solidFill>
                             <a:srgbClr val="1F1F1F"/>
                           </a:solidFill>
@@ -14721,9 +14721,9 @@
                           <a:ea typeface="Calibri" pitchFamily="34" charset="-122"/>
                           <a:cs typeface="Calibri" pitchFamily="34" charset="-120"/>
                         </a:rPr>
-                        <a:t>0.664</a:t>
+                        <a:t>0.656</a:t>
                       </a:r>
-                      <a:endParaRPr lang="en-US" sz="1000" dirty="0">
+                      <a:endParaRPr lang="en-US" sz="950" dirty="0">
                         <a:latin typeface="Calibri" charset="0"/>
                         <a:ea typeface="Calibri" charset="0"/>
                         <a:cs typeface="Calibri" charset="0"/>
@@ -14778,7 +14778,7 @@
                         <a:buNone/>
                       </a:pPr>
                       <a:r>
-                        <a:rPr lang="en-US" sz="1000" dirty="0">
+                        <a:rPr lang="en-US" sz="950" dirty="0">
                           <a:solidFill>
                             <a:srgbClr val="1F1F1F"/>
                           </a:solidFill>
@@ -14786,9 +14786,9 @@
                           <a:ea typeface="Calibri" pitchFamily="34" charset="-122"/>
                           <a:cs typeface="Calibri" pitchFamily="34" charset="-120"/>
                         </a:rPr>
-                        <a:t>0.718</a:t>
+                        <a:t>0.717</a:t>
                       </a:r>
-                      <a:endParaRPr lang="en-US" sz="1000" dirty="0">
+                      <a:endParaRPr lang="en-US" sz="950" dirty="0">
                         <a:latin typeface="Calibri" charset="0"/>
                         <a:ea typeface="Calibri" charset="0"/>
                         <a:cs typeface="Calibri" charset="0"/>
@@ -14843,7 +14843,7 @@
                         <a:buNone/>
                       </a:pPr>
                       <a:r>
-                        <a:rPr lang="en-US" sz="1000" dirty="0">
+                        <a:rPr lang="en-US" sz="950" dirty="0">
                           <a:solidFill>
                             <a:srgbClr val="1F1F1F"/>
                           </a:solidFill>
@@ -14851,9 +14851,9 @@
                           <a:ea typeface="Calibri" pitchFamily="34" charset="-122"/>
                           <a:cs typeface="Calibri" pitchFamily="34" charset="-120"/>
                         </a:rPr>
-                        <a:t>0.878</a:t>
+                        <a:t>0.875</a:t>
                       </a:r>
-                      <a:endParaRPr lang="en-US" sz="1000" dirty="0">
+                      <a:endParaRPr lang="en-US" sz="950" dirty="0">
                         <a:latin typeface="Calibri" charset="0"/>
                         <a:ea typeface="Calibri" charset="0"/>
                         <a:cs typeface="Calibri" charset="0"/>
@@ -14908,7 +14908,7 @@
                         <a:buNone/>
                       </a:pPr>
                       <a:r>
-                        <a:rPr lang="en-US" sz="1000" dirty="0">
+                        <a:rPr lang="en-US" sz="950" dirty="0">
                           <a:solidFill>
                             <a:srgbClr val="1F1F1F"/>
                           </a:solidFill>
@@ -14916,9 +14916,9 @@
                           <a:ea typeface="Calibri" pitchFamily="34" charset="-122"/>
                           <a:cs typeface="Calibri" pitchFamily="34" charset="-120"/>
                         </a:rPr>
-                        <a:t>0.928</a:t>
+                        <a:t>0.932</a:t>
                       </a:r>
-                      <a:endParaRPr lang="en-US" sz="1000" dirty="0">
+                      <a:endParaRPr lang="en-US" sz="950" dirty="0">
                         <a:latin typeface="Calibri" charset="0"/>
                         <a:ea typeface="Calibri" charset="0"/>
                         <a:cs typeface="Calibri" charset="0"/>
@@ -14973,7 +14973,7 @@
                         <a:buNone/>
                       </a:pPr>
                       <a:r>
-                        <a:rPr lang="en-US" sz="1000" dirty="0">
+                        <a:rPr lang="en-US" sz="950" dirty="0">
                           <a:solidFill>
                             <a:srgbClr val="1F1F1F"/>
                           </a:solidFill>
@@ -14981,9 +14981,9 @@
                           <a:ea typeface="Calibri" pitchFamily="34" charset="-122"/>
                           <a:cs typeface="Calibri" pitchFamily="34" charset="-120"/>
                         </a:rPr>
-                        <a:t>0.917</a:t>
+                        <a:t>0.918</a:t>
                       </a:r>
-                      <a:endParaRPr lang="en-US" sz="1000" dirty="0">
+                      <a:endParaRPr lang="en-US" sz="950" dirty="0">
                         <a:latin typeface="Calibri" charset="0"/>
                         <a:ea typeface="Calibri" charset="0"/>
                         <a:cs typeface="Calibri" charset="0"/>
@@ -15030,7 +15030,7 @@
                   </a:tcPr>
                 </a:tc>
               </a:tr>
-              <a:tr h="274320">
+              <a:tr h="246888">
                 <a:tc>
                   <a:txBody>
                     <a:bodyPr/>
@@ -15040,7 +15040,7 @@
                         <a:buNone/>
                       </a:pPr>
                       <a:r>
-                        <a:rPr lang="en-US" sz="1000" b="1" dirty="0">
+                        <a:rPr lang="en-US" sz="950" dirty="0">
                           <a:solidFill>
                             <a:srgbClr val="1F1F1F"/>
                           </a:solidFill>
@@ -15048,9 +15048,9 @@
                           <a:ea typeface="Calibri" pitchFamily="34" charset="-122"/>
                           <a:cs typeface="Calibri" pitchFamily="34" charset="-120"/>
                         </a:rPr>
-                        <a:t>Proposed: RF class weights, threshold 0.25</a:t>
+                        <a:t>Random Forest (tuned, 12 features)</a:t>
                       </a:r>
-                      <a:endParaRPr lang="en-US" sz="1000" dirty="0">
+                      <a:endParaRPr lang="en-US" sz="950" dirty="0">
                         <a:latin typeface="Calibri" charset="0"/>
                         <a:ea typeface="Calibri" charset="0"/>
                         <a:cs typeface="Calibri" charset="0"/>
@@ -15105,7 +15105,7 @@
                         <a:buNone/>
                       </a:pPr>
                       <a:r>
-                        <a:rPr lang="en-US" sz="1000" b="1" dirty="0">
+                        <a:rPr lang="en-US" sz="950" dirty="0">
                           <a:solidFill>
                             <a:srgbClr val="1F1F1F"/>
                           </a:solidFill>
@@ -15113,9 +15113,9 @@
                           <a:ea typeface="Calibri" pitchFamily="34" charset="-122"/>
                           <a:cs typeface="Calibri" pitchFamily="34" charset="-120"/>
                         </a:rPr>
-                        <a:t>0.933</a:t>
+                        <a:t>0.784</a:t>
                       </a:r>
-                      <a:endParaRPr lang="en-US" sz="1000" dirty="0">
+                      <a:endParaRPr lang="en-US" sz="950" dirty="0">
                         <a:latin typeface="Calibri" charset="0"/>
                         <a:ea typeface="Calibri" charset="0"/>
                         <a:cs typeface="Calibri" charset="0"/>
@@ -15170,7 +15170,7 @@
                         <a:buNone/>
                       </a:pPr>
                       <a:r>
-                        <a:rPr lang="en-US" sz="1000" b="1" dirty="0">
+                        <a:rPr lang="en-US" sz="950" dirty="0">
                           <a:solidFill>
                             <a:srgbClr val="1F1F1F"/>
                           </a:solidFill>
@@ -15178,9 +15178,9 @@
                           <a:ea typeface="Calibri" pitchFamily="34" charset="-122"/>
                           <a:cs typeface="Calibri" pitchFamily="34" charset="-120"/>
                         </a:rPr>
-                        <a:t>0.670</a:t>
+                        <a:t>0.660</a:t>
                       </a:r>
-                      <a:endParaRPr lang="en-US" sz="1000" dirty="0">
+                      <a:endParaRPr lang="en-US" sz="950" dirty="0">
                         <a:latin typeface="Calibri" charset="0"/>
                         <a:ea typeface="Calibri" charset="0"/>
                         <a:cs typeface="Calibri" charset="0"/>
@@ -15235,7 +15235,7 @@
                         <a:buNone/>
                       </a:pPr>
                       <a:r>
-                        <a:rPr lang="en-US" sz="1000" b="1" dirty="0">
+                        <a:rPr lang="en-US" sz="950" dirty="0">
                           <a:solidFill>
                             <a:srgbClr val="1F1F1F"/>
                           </a:solidFill>
@@ -15243,9 +15243,9 @@
                           <a:ea typeface="Calibri" pitchFamily="34" charset="-122"/>
                           <a:cs typeface="Calibri" pitchFamily="34" charset="-120"/>
                         </a:rPr>
-                        <a:t>0.780</a:t>
+                        <a:t>0.717</a:t>
                       </a:r>
-                      <a:endParaRPr lang="en-US" sz="1000" dirty="0">
+                      <a:endParaRPr lang="en-US" sz="950" dirty="0">
                         <a:latin typeface="Calibri" charset="0"/>
                         <a:ea typeface="Calibri" charset="0"/>
                         <a:cs typeface="Calibri" charset="0"/>
@@ -15300,7 +15300,7 @@
                         <a:buNone/>
                       </a:pPr>
                       <a:r>
-                        <a:rPr lang="en-US" sz="1000" b="1" dirty="0">
+                        <a:rPr lang="en-US" sz="950" dirty="0">
                           <a:solidFill>
                             <a:srgbClr val="1F1F1F"/>
                           </a:solidFill>
@@ -15308,9 +15308,9 @@
                           <a:ea typeface="Calibri" pitchFamily="34" charset="-122"/>
                           <a:cs typeface="Calibri" pitchFamily="34" charset="-120"/>
                         </a:rPr>
-                        <a:t>0.895</a:t>
+                        <a:t>0.876</a:t>
                       </a:r>
-                      <a:endParaRPr lang="en-US" sz="1000" dirty="0">
+                      <a:endParaRPr lang="en-US" sz="950" dirty="0">
                         <a:latin typeface="Calibri" charset="0"/>
                         <a:ea typeface="Calibri" charset="0"/>
                         <a:cs typeface="Calibri" charset="0"/>
@@ -15365,7 +15365,7 @@
                         <a:buNone/>
                       </a:pPr>
                       <a:r>
-                        <a:rPr lang="en-US" sz="1000" b="1" dirty="0">
+                        <a:rPr lang="en-US" sz="950" dirty="0">
                           <a:solidFill>
                             <a:srgbClr val="1F1F1F"/>
                           </a:solidFill>
@@ -15373,9 +15373,9 @@
                           <a:ea typeface="Calibri" pitchFamily="34" charset="-122"/>
                           <a:cs typeface="Calibri" pitchFamily="34" charset="-120"/>
                         </a:rPr>
-                        <a:t>0.958</a:t>
+                        <a:t>0.929</a:t>
                       </a:r>
-                      <a:endParaRPr lang="en-US" sz="1000" dirty="0">
+                      <a:endParaRPr lang="en-US" sz="950" dirty="0">
                         <a:latin typeface="Calibri" charset="0"/>
                         <a:ea typeface="Calibri" charset="0"/>
                         <a:cs typeface="Calibri" charset="0"/>
@@ -15430,7 +15430,464 @@
                         <a:buNone/>
                       </a:pPr>
                       <a:r>
-                        <a:rPr lang="en-US" sz="1000" dirty="0">
+                        <a:rPr lang="en-US" sz="950" dirty="0">
+                          <a:solidFill>
+                            <a:srgbClr val="1F1F1F"/>
+                          </a:solidFill>
+                          <a:latin typeface="Calibri" pitchFamily="34" charset="0"/>
+                          <a:ea typeface="Calibri" pitchFamily="34" charset="-122"/>
+                          <a:cs typeface="Calibri" pitchFamily="34" charset="-120"/>
+                        </a:rPr>
+                        <a:t>0.916</a:t>
+                      </a:r>
+                      <a:endParaRPr lang="en-US" sz="950" dirty="0">
+                        <a:latin typeface="Calibri" charset="0"/>
+                        <a:ea typeface="Calibri" charset="0"/>
+                        <a:cs typeface="Calibri" charset="0"/>
+                      </a:endParaRPr>
+                    </a:p>
+                  </a:txBody>
+                  <a:tcPr marL="27432" marR="27432" marT="27432" marB="27432" anchor="ctr">
+                    <a:lnL w="6350" cap="flat" cmpd="sng" algn="ctr">
+                      <a:solidFill>
+                        <a:srgbClr val="BFBFBF"/>
+                      </a:solidFill>
+                      <a:prstDash val="solid"/>
+                      <a:round/>
+                      <a:headEnd type="none" w="med" len="med"/>
+                      <a:tailEnd type="none" w="med" len="med"/>
+                    </a:lnL>
+                    <a:lnR w="6350" cap="flat" cmpd="sng" algn="ctr">
+                      <a:solidFill>
+                        <a:srgbClr val="BFBFBF"/>
+                      </a:solidFill>
+                      <a:prstDash val="solid"/>
+                      <a:round/>
+                      <a:headEnd type="none" w="med" len="med"/>
+                      <a:tailEnd type="none" w="med" len="med"/>
+                    </a:lnR>
+                    <a:lnT w="6350" cap="flat" cmpd="sng" algn="ctr">
+                      <a:solidFill>
+                        <a:srgbClr val="BFBFBF"/>
+                      </a:solidFill>
+                      <a:prstDash val="solid"/>
+                      <a:round/>
+                      <a:headEnd type="none" w="med" len="med"/>
+                      <a:tailEnd type="none" w="med" len="med"/>
+                    </a:lnT>
+                    <a:lnB w="6350" cap="flat" cmpd="sng" algn="ctr">
+                      <a:solidFill>
+                        <a:srgbClr val="BFBFBF"/>
+                      </a:solidFill>
+                      <a:prstDash val="solid"/>
+                      <a:round/>
+                      <a:headEnd type="none" w="med" len="med"/>
+                      <a:tailEnd type="none" w="med" len="med"/>
+                    </a:lnB>
+                  </a:tcPr>
+                </a:tc>
+              </a:tr>
+              <a:tr h="246888">
+                <a:tc>
+                  <a:txBody>
+                    <a:bodyPr/>
+                    <a:lstStyle/>
+                    <a:p>
+                      <a:pPr algn="l" indent="0" marL="0">
+                        <a:buNone/>
+                      </a:pPr>
+                      <a:r>
+                        <a:rPr lang="en-US" sz="950" b="1" dirty="0">
+                          <a:solidFill>
+                            <a:srgbClr val="1F1F1F"/>
+                          </a:solidFill>
+                          <a:latin typeface="Calibri" pitchFamily="34" charset="0"/>
+                          <a:ea typeface="Calibri" pitchFamily="34" charset="-122"/>
+                          <a:cs typeface="Calibri" pitchFamily="34" charset="-120"/>
+                        </a:rPr>
+                        <a:t>Proposed: RF class weights, 27 inputs, threshold 0.25</a:t>
+                      </a:r>
+                      <a:endParaRPr lang="en-US" sz="950" dirty="0">
+                        <a:latin typeface="Calibri" charset="0"/>
+                        <a:ea typeface="Calibri" charset="0"/>
+                        <a:cs typeface="Calibri" charset="0"/>
+                      </a:endParaRPr>
+                    </a:p>
+                  </a:txBody>
+                  <a:tcPr marL="27432" marR="27432" marT="27432" marB="27432" anchor="ctr">
+                    <a:lnL w="6350" cap="flat" cmpd="sng" algn="ctr">
+                      <a:solidFill>
+                        <a:srgbClr val="BFBFBF"/>
+                      </a:solidFill>
+                      <a:prstDash val="solid"/>
+                      <a:round/>
+                      <a:headEnd type="none" w="med" len="med"/>
+                      <a:tailEnd type="none" w="med" len="med"/>
+                    </a:lnL>
+                    <a:lnR w="6350" cap="flat" cmpd="sng" algn="ctr">
+                      <a:solidFill>
+                        <a:srgbClr val="BFBFBF"/>
+                      </a:solidFill>
+                      <a:prstDash val="solid"/>
+                      <a:round/>
+                      <a:headEnd type="none" w="med" len="med"/>
+                      <a:tailEnd type="none" w="med" len="med"/>
+                    </a:lnR>
+                    <a:lnT w="6350" cap="flat" cmpd="sng" algn="ctr">
+                      <a:solidFill>
+                        <a:srgbClr val="BFBFBF"/>
+                      </a:solidFill>
+                      <a:prstDash val="solid"/>
+                      <a:round/>
+                      <a:headEnd type="none" w="med" len="med"/>
+                      <a:tailEnd type="none" w="med" len="med"/>
+                    </a:lnT>
+                    <a:lnB w="6350" cap="flat" cmpd="sng" algn="ctr">
+                      <a:solidFill>
+                        <a:srgbClr val="BFBFBF"/>
+                      </a:solidFill>
+                      <a:prstDash val="solid"/>
+                      <a:round/>
+                      <a:headEnd type="none" w="med" len="med"/>
+                      <a:tailEnd type="none" w="med" len="med"/>
+                    </a:lnB>
+                  </a:tcPr>
+                </a:tc>
+                <a:tc>
+                  <a:txBody>
+                    <a:bodyPr/>
+                    <a:lstStyle/>
+                    <a:p>
+                      <a:pPr algn="l" indent="0" marL="0">
+                        <a:buNone/>
+                      </a:pPr>
+                      <a:r>
+                        <a:rPr lang="en-US" sz="950" b="1" dirty="0">
+                          <a:solidFill>
+                            <a:srgbClr val="1F1F1F"/>
+                          </a:solidFill>
+                          <a:latin typeface="Calibri" pitchFamily="34" charset="0"/>
+                          <a:ea typeface="Calibri" pitchFamily="34" charset="-122"/>
+                          <a:cs typeface="Calibri" pitchFamily="34" charset="-120"/>
+                        </a:rPr>
+                        <a:t>0.927</a:t>
+                      </a:r>
+                      <a:endParaRPr lang="en-US" sz="950" dirty="0">
+                        <a:latin typeface="Calibri" charset="0"/>
+                        <a:ea typeface="Calibri" charset="0"/>
+                        <a:cs typeface="Calibri" charset="0"/>
+                      </a:endParaRPr>
+                    </a:p>
+                  </a:txBody>
+                  <a:tcPr marL="27432" marR="27432" marT="27432" marB="27432" anchor="ctr">
+                    <a:lnL w="6350" cap="flat" cmpd="sng" algn="ctr">
+                      <a:solidFill>
+                        <a:srgbClr val="BFBFBF"/>
+                      </a:solidFill>
+                      <a:prstDash val="solid"/>
+                      <a:round/>
+                      <a:headEnd type="none" w="med" len="med"/>
+                      <a:tailEnd type="none" w="med" len="med"/>
+                    </a:lnL>
+                    <a:lnR w="6350" cap="flat" cmpd="sng" algn="ctr">
+                      <a:solidFill>
+                        <a:srgbClr val="BFBFBF"/>
+                      </a:solidFill>
+                      <a:prstDash val="solid"/>
+                      <a:round/>
+                      <a:headEnd type="none" w="med" len="med"/>
+                      <a:tailEnd type="none" w="med" len="med"/>
+                    </a:lnR>
+                    <a:lnT w="6350" cap="flat" cmpd="sng" algn="ctr">
+                      <a:solidFill>
+                        <a:srgbClr val="BFBFBF"/>
+                      </a:solidFill>
+                      <a:prstDash val="solid"/>
+                      <a:round/>
+                      <a:headEnd type="none" w="med" len="med"/>
+                      <a:tailEnd type="none" w="med" len="med"/>
+                    </a:lnT>
+                    <a:lnB w="6350" cap="flat" cmpd="sng" algn="ctr">
+                      <a:solidFill>
+                        <a:srgbClr val="BFBFBF"/>
+                      </a:solidFill>
+                      <a:prstDash val="solid"/>
+                      <a:round/>
+                      <a:headEnd type="none" w="med" len="med"/>
+                      <a:tailEnd type="none" w="med" len="med"/>
+                    </a:lnB>
+                  </a:tcPr>
+                </a:tc>
+                <a:tc>
+                  <a:txBody>
+                    <a:bodyPr/>
+                    <a:lstStyle/>
+                    <a:p>
+                      <a:pPr algn="l" indent="0" marL="0">
+                        <a:buNone/>
+                      </a:pPr>
+                      <a:r>
+                        <a:rPr lang="en-US" sz="950" b="1" dirty="0">
+                          <a:solidFill>
+                            <a:srgbClr val="1F1F1F"/>
+                          </a:solidFill>
+                          <a:latin typeface="Calibri" pitchFamily="34" charset="0"/>
+                          <a:ea typeface="Calibri" pitchFamily="34" charset="-122"/>
+                          <a:cs typeface="Calibri" pitchFamily="34" charset="-120"/>
+                        </a:rPr>
+                        <a:t>0.669</a:t>
+                      </a:r>
+                      <a:endParaRPr lang="en-US" sz="950" dirty="0">
+                        <a:latin typeface="Calibri" charset="0"/>
+                        <a:ea typeface="Calibri" charset="0"/>
+                        <a:cs typeface="Calibri" charset="0"/>
+                      </a:endParaRPr>
+                    </a:p>
+                  </a:txBody>
+                  <a:tcPr marL="27432" marR="27432" marT="27432" marB="27432" anchor="ctr">
+                    <a:lnL w="6350" cap="flat" cmpd="sng" algn="ctr">
+                      <a:solidFill>
+                        <a:srgbClr val="BFBFBF"/>
+                      </a:solidFill>
+                      <a:prstDash val="solid"/>
+                      <a:round/>
+                      <a:headEnd type="none" w="med" len="med"/>
+                      <a:tailEnd type="none" w="med" len="med"/>
+                    </a:lnL>
+                    <a:lnR w="6350" cap="flat" cmpd="sng" algn="ctr">
+                      <a:solidFill>
+                        <a:srgbClr val="BFBFBF"/>
+                      </a:solidFill>
+                      <a:prstDash val="solid"/>
+                      <a:round/>
+                      <a:headEnd type="none" w="med" len="med"/>
+                      <a:tailEnd type="none" w="med" len="med"/>
+                    </a:lnR>
+                    <a:lnT w="6350" cap="flat" cmpd="sng" algn="ctr">
+                      <a:solidFill>
+                        <a:srgbClr val="BFBFBF"/>
+                      </a:solidFill>
+                      <a:prstDash val="solid"/>
+                      <a:round/>
+                      <a:headEnd type="none" w="med" len="med"/>
+                      <a:tailEnd type="none" w="med" len="med"/>
+                    </a:lnT>
+                    <a:lnB w="6350" cap="flat" cmpd="sng" algn="ctr">
+                      <a:solidFill>
+                        <a:srgbClr val="BFBFBF"/>
+                      </a:solidFill>
+                      <a:prstDash val="solid"/>
+                      <a:round/>
+                      <a:headEnd type="none" w="med" len="med"/>
+                      <a:tailEnd type="none" w="med" len="med"/>
+                    </a:lnB>
+                  </a:tcPr>
+                </a:tc>
+                <a:tc>
+                  <a:txBody>
+                    <a:bodyPr/>
+                    <a:lstStyle/>
+                    <a:p>
+                      <a:pPr algn="l" indent="0" marL="0">
+                        <a:buNone/>
+                      </a:pPr>
+                      <a:r>
+                        <a:rPr lang="en-US" sz="950" b="1" dirty="0">
+                          <a:solidFill>
+                            <a:srgbClr val="1F1F1F"/>
+                          </a:solidFill>
+                          <a:latin typeface="Calibri" pitchFamily="34" charset="0"/>
+                          <a:ea typeface="Calibri" pitchFamily="34" charset="-122"/>
+                          <a:cs typeface="Calibri" pitchFamily="34" charset="-120"/>
+                        </a:rPr>
+                        <a:t>0.777</a:t>
+                      </a:r>
+                      <a:endParaRPr lang="en-US" sz="950" dirty="0">
+                        <a:latin typeface="Calibri" charset="0"/>
+                        <a:ea typeface="Calibri" charset="0"/>
+                        <a:cs typeface="Calibri" charset="0"/>
+                      </a:endParaRPr>
+                    </a:p>
+                  </a:txBody>
+                  <a:tcPr marL="27432" marR="27432" marT="27432" marB="27432" anchor="ctr">
+                    <a:lnL w="6350" cap="flat" cmpd="sng" algn="ctr">
+                      <a:solidFill>
+                        <a:srgbClr val="BFBFBF"/>
+                      </a:solidFill>
+                      <a:prstDash val="solid"/>
+                      <a:round/>
+                      <a:headEnd type="none" w="med" len="med"/>
+                      <a:tailEnd type="none" w="med" len="med"/>
+                    </a:lnL>
+                    <a:lnR w="6350" cap="flat" cmpd="sng" algn="ctr">
+                      <a:solidFill>
+                        <a:srgbClr val="BFBFBF"/>
+                      </a:solidFill>
+                      <a:prstDash val="solid"/>
+                      <a:round/>
+                      <a:headEnd type="none" w="med" len="med"/>
+                      <a:tailEnd type="none" w="med" len="med"/>
+                    </a:lnR>
+                    <a:lnT w="6350" cap="flat" cmpd="sng" algn="ctr">
+                      <a:solidFill>
+                        <a:srgbClr val="BFBFBF"/>
+                      </a:solidFill>
+                      <a:prstDash val="solid"/>
+                      <a:round/>
+                      <a:headEnd type="none" w="med" len="med"/>
+                      <a:tailEnd type="none" w="med" len="med"/>
+                    </a:lnT>
+                    <a:lnB w="6350" cap="flat" cmpd="sng" algn="ctr">
+                      <a:solidFill>
+                        <a:srgbClr val="BFBFBF"/>
+                      </a:solidFill>
+                      <a:prstDash val="solid"/>
+                      <a:round/>
+                      <a:headEnd type="none" w="med" len="med"/>
+                      <a:tailEnd type="none" w="med" len="med"/>
+                    </a:lnB>
+                  </a:tcPr>
+                </a:tc>
+                <a:tc>
+                  <a:txBody>
+                    <a:bodyPr/>
+                    <a:lstStyle/>
+                    <a:p>
+                      <a:pPr algn="l" indent="0" marL="0">
+                        <a:buNone/>
+                      </a:pPr>
+                      <a:r>
+                        <a:rPr lang="en-US" sz="950" b="1" dirty="0">
+                          <a:solidFill>
+                            <a:srgbClr val="1F1F1F"/>
+                          </a:solidFill>
+                          <a:latin typeface="Calibri" pitchFamily="34" charset="0"/>
+                          <a:ea typeface="Calibri" pitchFamily="34" charset="-122"/>
+                          <a:cs typeface="Calibri" pitchFamily="34" charset="-120"/>
+                        </a:rPr>
+                        <a:t>0.894</a:t>
+                      </a:r>
+                      <a:endParaRPr lang="en-US" sz="950" dirty="0">
+                        <a:latin typeface="Calibri" charset="0"/>
+                        <a:ea typeface="Calibri" charset="0"/>
+                        <a:cs typeface="Calibri" charset="0"/>
+                      </a:endParaRPr>
+                    </a:p>
+                  </a:txBody>
+                  <a:tcPr marL="27432" marR="27432" marT="27432" marB="27432" anchor="ctr">
+                    <a:lnL w="6350" cap="flat" cmpd="sng" algn="ctr">
+                      <a:solidFill>
+                        <a:srgbClr val="BFBFBF"/>
+                      </a:solidFill>
+                      <a:prstDash val="solid"/>
+                      <a:round/>
+                      <a:headEnd type="none" w="med" len="med"/>
+                      <a:tailEnd type="none" w="med" len="med"/>
+                    </a:lnL>
+                    <a:lnR w="6350" cap="flat" cmpd="sng" algn="ctr">
+                      <a:solidFill>
+                        <a:srgbClr val="BFBFBF"/>
+                      </a:solidFill>
+                      <a:prstDash val="solid"/>
+                      <a:round/>
+                      <a:headEnd type="none" w="med" len="med"/>
+                      <a:tailEnd type="none" w="med" len="med"/>
+                    </a:lnR>
+                    <a:lnT w="6350" cap="flat" cmpd="sng" algn="ctr">
+                      <a:solidFill>
+                        <a:srgbClr val="BFBFBF"/>
+                      </a:solidFill>
+                      <a:prstDash val="solid"/>
+                      <a:round/>
+                      <a:headEnd type="none" w="med" len="med"/>
+                      <a:tailEnd type="none" w="med" len="med"/>
+                    </a:lnT>
+                    <a:lnB w="6350" cap="flat" cmpd="sng" algn="ctr">
+                      <a:solidFill>
+                        <a:srgbClr val="BFBFBF"/>
+                      </a:solidFill>
+                      <a:prstDash val="solid"/>
+                      <a:round/>
+                      <a:headEnd type="none" w="med" len="med"/>
+                      <a:tailEnd type="none" w="med" len="med"/>
+                    </a:lnB>
+                  </a:tcPr>
+                </a:tc>
+                <a:tc>
+                  <a:txBody>
+                    <a:bodyPr/>
+                    <a:lstStyle/>
+                    <a:p>
+                      <a:pPr algn="l" indent="0" marL="0">
+                        <a:buNone/>
+                      </a:pPr>
+                      <a:r>
+                        <a:rPr lang="en-US" sz="950" b="1" dirty="0">
+                          <a:solidFill>
+                            <a:srgbClr val="1F1F1F"/>
+                          </a:solidFill>
+                          <a:latin typeface="Calibri" pitchFamily="34" charset="0"/>
+                          <a:ea typeface="Calibri" pitchFamily="34" charset="-122"/>
+                          <a:cs typeface="Calibri" pitchFamily="34" charset="-120"/>
+                        </a:rPr>
+                        <a:t>0.959</a:t>
+                      </a:r>
+                      <a:endParaRPr lang="en-US" sz="950" dirty="0">
+                        <a:latin typeface="Calibri" charset="0"/>
+                        <a:ea typeface="Calibri" charset="0"/>
+                        <a:cs typeface="Calibri" charset="0"/>
+                      </a:endParaRPr>
+                    </a:p>
+                  </a:txBody>
+                  <a:tcPr marL="27432" marR="27432" marT="27432" marB="27432" anchor="ctr">
+                    <a:lnL w="6350" cap="flat" cmpd="sng" algn="ctr">
+                      <a:solidFill>
+                        <a:srgbClr val="BFBFBF"/>
+                      </a:solidFill>
+                      <a:prstDash val="solid"/>
+                      <a:round/>
+                      <a:headEnd type="none" w="med" len="med"/>
+                      <a:tailEnd type="none" w="med" len="med"/>
+                    </a:lnL>
+                    <a:lnR w="6350" cap="flat" cmpd="sng" algn="ctr">
+                      <a:solidFill>
+                        <a:srgbClr val="BFBFBF"/>
+                      </a:solidFill>
+                      <a:prstDash val="solid"/>
+                      <a:round/>
+                      <a:headEnd type="none" w="med" len="med"/>
+                      <a:tailEnd type="none" w="med" len="med"/>
+                    </a:lnR>
+                    <a:lnT w="6350" cap="flat" cmpd="sng" algn="ctr">
+                      <a:solidFill>
+                        <a:srgbClr val="BFBFBF"/>
+                      </a:solidFill>
+                      <a:prstDash val="solid"/>
+                      <a:round/>
+                      <a:headEnd type="none" w="med" len="med"/>
+                      <a:tailEnd type="none" w="med" len="med"/>
+                    </a:lnT>
+                    <a:lnB w="6350" cap="flat" cmpd="sng" algn="ctr">
+                      <a:solidFill>
+                        <a:srgbClr val="BFBFBF"/>
+                      </a:solidFill>
+                      <a:prstDash val="solid"/>
+                      <a:round/>
+                      <a:headEnd type="none" w="med" len="med"/>
+                      <a:tailEnd type="none" w="med" len="med"/>
+                    </a:lnB>
+                  </a:tcPr>
+                </a:tc>
+                <a:tc>
+                  <a:txBody>
+                    <a:bodyPr/>
+                    <a:lstStyle/>
+                    <a:p>
+                      <a:pPr algn="l" indent="0" marL="0">
+                        <a:buNone/>
+                      </a:pPr>
+                      <a:r>
+                        <a:rPr lang="en-US" sz="950" dirty="0">
                           <a:solidFill>
                             <a:srgbClr val="1F1F1F"/>
                           </a:solidFill>
@@ -15440,7 +15897,7 @@
                         </a:rPr>
                         <a:t>-</a:t>
                       </a:r>
-                      <a:endParaRPr lang="en-US" sz="1000" dirty="0">
+                      <a:endParaRPr lang="en-US" sz="950" dirty="0">
                         <a:latin typeface="Calibri" charset="0"/>
                         <a:ea typeface="Calibri" charset="0"/>
                         <a:cs typeface="Calibri" charset="0"/>
@@ -15521,7 +15978,7 @@
                   <a:schemeClr val="accent6"/>
                 </a:solidFill>
               </a:rPr>
-              <a:t>Train recall of 1.000 marks the un-pruned models that memorised the training data. Grid search used stratified cross-validation on the training set only, scoring on recall.</a:t>
+              <a:t>Test set of 1,788 applicants at the 0.5 threshold except the proposed model. Train recall of 1.000 marks un-pruned models that memorised the training data. The proposed model and its threshold were selected on out-of-fold expected cost (training rows only); its out-of-fold ROC-AUC was 0.959, the same as on test.</a:t>
             </a:r>
             <a:endParaRPr lang="en-US" sz="900" dirty="0"/>
           </a:p>
@@ -15685,7 +16142,7 @@
                   <a:schemeClr val="tx1"/>
                 </a:solidFill>
               </a:rPr>
-              <a:t>The debt-to-income ratio and its missing flag carry more than half (53%) of the forest's decision power.</a:t>
+              <a:t>The debt-to-income ratio and its missing flag carry more than a third (36%) of the final forest's decision power; with delinquent lines and credit-history length, about half.</a:t>
             </a:r>
             <a:endParaRPr lang="en-US" sz="1200" dirty="0"/>
           </a:p>
@@ -15703,7 +16160,7 @@
                   <a:schemeClr val="tx1"/>
                 </a:solidFill>
               </a:rPr>
-              <a:t>Next come repayment history (delinquencies, derogatory reports) and depth of credit history.</a:t>
+              <a:t>Permutation importance (drop in ranking quality when a column is shuffled) ranks the same four at the top, with delinquent credit lines first.</a:t>
             </a:r>
             <a:endParaRPr lang="en-US" sz="1200" dirty="0"/>
           </a:p>
@@ -15739,7 +16196,7 @@
                   <a:schemeClr val="tx1"/>
                 </a:solidFill>
               </a:rPr>
-              <a:t>Occupation and loan-purpose dummies rank at the bottom; removing them and nine minor flags left performance unchanged (12-feature model).</a:t>
+              <a:t>Occupation, loan-purpose and minor missing flags matter little individually, yet dropping them raised out-of-fold expected cost by about a sixth, so they stay subject to the fair-lending review.</a:t>
             </a:r>
             <a:endParaRPr lang="en-US" sz="1200" dirty="0"/>
           </a:p>
@@ -15757,7 +16214,7 @@
                   <a:schemeClr val="tx1"/>
                 </a:solidFill>
               </a:rPr>
-              <a:t>Logistic-regression coefficients and the decision-tree rules point to the same drivers, so the signal is stable across techniques.</a:t>
+              <a:t>Logistic-regression coefficients, the decision-tree rules and the surrogate tree point to the same drivers, so the signal is stable across techniques.</a:t>
             </a:r>
             <a:endParaRPr lang="en-US" sz="1200" dirty="0"/>
           </a:p>
@@ -15865,7 +16322,7 @@
                   <a:srgbClr val="1E2761"/>
                 </a:solidFill>
               </a:rPr>
-              <a:t>Appendix C: the explanation layer, rules read from the pruned Decision Tree</a:t>
+              <a:t>Appendix C: the explanation layer, rules of the surrogate tree that follows the forest</a:t>
             </a:r>
             <a:endParaRPr lang="en-US" sz="2400" dirty="0"/>
           </a:p>
@@ -15998,7 +16455,7 @@
                   <a:schemeClr val="tx1"/>
                 </a:solidFill>
               </a:rPr>
-              <a:t>Yes: highest-risk branch (62% historical default). Verify income or decline.</a:t>
+              <a:t>Yes: high-risk branch (62% of these applicants defaulted). Verify income or decline; short credit history or any delinquency in this branch means flag.</a:t>
             </a:r>
             <a:endParaRPr lang="en-US" sz="1200" dirty="0"/>
           </a:p>
@@ -16154,7 +16611,7 @@
                   <a:schemeClr val="tx1"/>
                 </a:solidFill>
               </a:rPr>
-              <a:t>Yes: almost certain default in the data (87-100%). Decline.</a:t>
+              <a:t>Yes: about three in four defaulted (87-100% above 45%). Flag unless the credit history is very long (over about 17 years).</a:t>
             </a:r>
             <a:endParaRPr lang="en-US" sz="1200" dirty="0"/>
           </a:p>
@@ -16274,7 +16731,7 @@
                   <a:schemeClr val="accent1"/>
                 </a:solidFill>
               </a:rPr>
-              <a:t>Any delinquent credit lines?</a:t>
+              <a:t>How many delinquent credit lines?</a:t>
             </a:r>
             <a:endParaRPr lang="en-US" sz="1250" dirty="0"/>
           </a:p>
@@ -16310,7 +16767,7 @@
                   <a:schemeClr val="tx1"/>
                 </a:solidFill>
               </a:rPr>
-              <a:t>One or more pushes the applicant back into the risky branch, even with a healthy ratio.</a:t>
+              <a:t>Two or more with a modest mortgage balance: flag. None: only about 4-5% default, the safest group.</a:t>
             </a:r>
             <a:endParaRPr lang="en-US" sz="1200" dirty="0"/>
           </a:p>
@@ -16430,7 +16887,7 @@
                   <a:schemeClr val="accent1"/>
                 </a:solidFill>
               </a:rPr>
-              <a:t>Any major derogatory reports, and how long is the credit history?</a:t>
+              <a:t>How long is the credit history, how many years at the job?</a:t>
             </a:r>
             <a:endParaRPr lang="en-US" sz="1250" dirty="0"/>
           </a:p>
@@ -16466,7 +16923,7 @@
                   <a:schemeClr val="tx1"/>
                 </a:solidFill>
               </a:rPr>
-              <a:t>Short history (under about 15 years) with a derogatory report is risky; long clean histories are safe.</a:t>
+              <a:t>Under about 15 years of history or under about 3 years in the job tilts a borderline case towards flag.</a:t>
             </a:r>
             <a:endParaRPr lang="en-US" sz="1200" dirty="0"/>
           </a:p>
@@ -16586,7 +17043,7 @@
                   <a:schemeClr val="accent1"/>
                 </a:solidFill>
               </a:rPr>
-              <a:t>Loan size, mortgage balance and property value</a:t>
+              <a:t>Loan size</a:t>
             </a:r>
             <a:endParaRPr lang="en-US" sz="1250" dirty="0"/>
           </a:p>
@@ -16622,7 +17079,7 @@
                   <a:schemeClr val="tx1"/>
                 </a:solidFill>
               </a:rPr>
-              <a:t>Refine the decision deeper in the tree; small loans with weak history lean towards default.</a:t>
+              <a:t>Small loans with an unverified ratio are flagged; the loan amount refines borderline cases.</a:t>
             </a:r>
             <a:endParaRPr lang="en-US" sz="1200" dirty="0"/>
           </a:p>
@@ -16658,7 +17115,7 @@
                   <a:schemeClr val="accent6"/>
                 </a:solidFill>
               </a:rPr>
-              <a:t>Tuned tree: Gini criterion, balanced class weights, minimum 20 applicants per leaf, depth 14, 105 leaves. Test recall 82%, precision 53%: used for explanations, not for scoring.</a:t>
+              <a:t>Surrogate: depth-4 tree, minimum 20 applicants per leaf, fitted to the forest's flag/clear decisions at threshold 0.25 on the training rows; it agrees with the forest on 90% of test decisions. The stand-alone tuned tree (test recall 82%, precision 53%) found the same drivers.</a:t>
             </a:r>
             <a:endParaRPr lang="en-US" sz="900" dirty="0"/>
           </a:p>
@@ -17285,7 +17742,7 @@
                           <a:ea typeface="Calibri" pitchFamily="34" charset="-122"/>
                           <a:cs typeface="Calibri" pitchFamily="34" charset="-120"/>
                         </a:rPr>
-                        <a:t>A 0/1 'was missing' flag per column, then median (numeric) or mode (categorical) imputation</a:t>
+                        <a:t>A 0/1 'was missing' flag per column, then median (numeric) or mode (categorical) imputation learned on the training rows</a:t>
                       </a:r>
                       <a:endParaRPr lang="en-US" sz="1050" dirty="0">
                         <a:latin typeface="Calibri" charset="0"/>
@@ -17679,7 +18136,7 @@
                           <a:ea typeface="Calibri" pitchFamily="34" charset="-122"/>
                           <a:cs typeface="Calibri" pitchFamily="34" charset="-120"/>
                         </a:rPr>
-                        <a:t>One-hot encoding of REASON and JOB (drop first); standard scaling for the linear model only</a:t>
+                        <a:t>One-hot encoding of REASON and JOB (drop first); standard scaling of the continuous inputs for the linear model only, flags left as 0/1</a:t>
                       </a:r>
                       <a:endParaRPr lang="en-US" sz="1050" dirty="0">
                         <a:latin typeface="Calibri" charset="0"/>
@@ -17744,7 +18201,7 @@
                           <a:ea typeface="Calibri" pitchFamily="34" charset="-122"/>
                           <a:cs typeface="Calibri" pitchFamily="34" charset="-120"/>
                         </a:rPr>
-                        <a:t>Comparable coefficients and stable convergence for logistic regression</a:t>
+                        <a:t>Comparable coefficients, odds ratios for flags read as the effect of the flag</a:t>
                       </a:r>
                       <a:endParaRPr lang="en-US" sz="1050" dirty="0">
                         <a:latin typeface="Calibri" charset="0"/>
@@ -17876,7 +18333,7 @@
                           <a:ea typeface="Calibri" pitchFamily="34" charset="-122"/>
                           <a:cs typeface="Calibri" pitchFamily="34" charset="-120"/>
                         </a:rPr>
-                        <a:t>70% train / 30% test, stratified on the target, fixed seed; identical applicants in both data versions</a:t>
+                        <a:t>70% train / 30% test, stratified on the target, fixed seed, held out before any statistic was fitted; identical applicants in both data versions</a:t>
                       </a:r>
                       <a:endParaRPr lang="en-US" sz="1050" dirty="0">
                         <a:latin typeface="Calibri" charset="0"/>
@@ -17941,7 +18398,7 @@
                           <a:ea typeface="Calibri" pitchFamily="34" charset="-122"/>
                           <a:cs typeface="Calibri" pitchFamily="34" charset="-120"/>
                         </a:rPr>
-                        <a:t>Both sets keep the 20% default rate; results comparable across models</a:t>
+                        <a:t>No leakage from test rows into fences, medians or scaling; results comparable across models</a:t>
                       </a:r>
                       <a:endParaRPr lang="en-US" sz="1050" dirty="0">
                         <a:latin typeface="Calibri" charset="0"/>
@@ -18138,7 +18595,7 @@
                           <a:ea typeface="Calibri" pitchFamily="34" charset="-122"/>
                           <a:cs typeface="Calibri" pitchFamily="34" charset="-120"/>
                         </a:rPr>
-                        <a:t>Keeps every real applicant; lifted recall by 23 points for logistic regression and 10 for the forest</a:t>
+                        <a:t>Keeps every real applicant; lifted recall by 23 points for logistic regression and 9 for the forest</a:t>
                       </a:r>
                       <a:endParaRPr lang="en-US" sz="1050" dirty="0">
                         <a:latin typeface="Calibri" charset="0"/>
@@ -18611,7 +19068,7 @@
                   <a:schemeClr val="tx1"/>
                 </a:solidFill>
               </a:rPr>
-              <a:t>of future defaulters are caught by the proposed Random Forest model, while 2 of every 3 applicants it flags really would have defaulted.</a:t>
+              <a:t>of future defaulters are caught by the proposed Random Forest model on unseen applicants, while 2 of every 3 applicants it flags really would have defaulted.</a:t>
             </a:r>
             <a:endParaRPr lang="en-US" sz="1250" dirty="0"/>
           </a:p>
@@ -18717,7 +19174,7 @@
                   <a:schemeClr val="tx1"/>
                 </a:solidFill>
               </a:rPr>
-              <a:t>indicative annual benefit on 6,000 applications, from roughly $10.8M of default-related cost down to about $1.8M.</a:t>
+              <a:t>indicative annual benefit on 6,000 applications, from roughly $10.8M of default-related cost down to about $1.9M.</a:t>
             </a:r>
             <a:endParaRPr lang="en-US" sz="1250" dirty="0"/>
           </a:p>
@@ -19734,7 +20191,7 @@
                   <a:schemeClr val="tx1"/>
                 </a:solidFill>
               </a:rPr>
-              <a:t>Flag every missing field, impute median/mode, cap outliers for the linear model only, one-hot encode, 70/30 stratified split</a:t>
+              <a:t>Hold out a stratified 30% test set first; flag every missing field; impute median/mode learned on training rows; cap outliers for the linear model only; one-hot encode</a:t>
             </a:r>
             <a:endParaRPr lang="en-US" sz="1100" dirty="0"/>
           </a:p>
@@ -20054,7 +20511,7 @@
                   <a:schemeClr val="tx1"/>
                 </a:solidFill>
               </a:rPr>
-              <a:t>Recall on defaulters as the primary metric; precision, F1, ROC-AUC as guard-rails; cost-based threshold</a:t>
+              <a:t>Recall on defaulters as the primary metric; precision, F1, ROC-AUC as guard-rails; final model and threshold chosen on out-of-fold expected cost</a:t>
             </a:r>
             <a:endParaRPr lang="en-US" sz="1100" dirty="0"/>
           </a:p>
@@ -20626,7 +21083,7 @@
                   <a:schemeClr val="tx1"/>
                 </a:solidFill>
               </a:rPr>
-              <a:t>Below a 40% ratio only 4-7% default; above 45% almost everyone does. Each delinquent line or derogatory report roughly doubles the risk (0 reports: 17%, 1: 39%, 2: 51%, 3+: 70%+). Both are plain-language rules an applicant can be given.</a:t>
+              <a:t>Between a 20% and a 40% ratio only 4-7% default; above 45% almost everyone does. Each delinquent line or derogatory report roughly doubles the risk (0 reports: 17%, 1: 39%, 2: 51%, 3+: about 73%). Both are plain-language rules an applicant can be given.</a:t>
             </a:r>
             <a:endParaRPr lang="en-US" sz="1200" dirty="0"/>
           </a:p>
@@ -20818,7 +21275,7 @@
                   <a:schemeClr val="tx1"/>
                 </a:solidFill>
               </a:rPr>
-              <a:t>Default rate (%) by group. Applicants with under five years of credit history default four times as often as those with twenty-plus years. Loans under $5,000 default 57% of the time. Occupation shifts risk moderately but adds almost nothing once financial behaviour is known, so the final model does not need it.</a:t>
+              <a:t>Default rate (%) by group. Applicants with under five years of credit history default four times as often as those with twenty-plus years. Loans under $5,000 default 57% of the time. Occupation shifts risk moderately; on its own it adds little once financial behaviour is known, and it stays in the model only subject to the fair-lending review.</a:t>
             </a:r>
             <a:endParaRPr lang="en-US" sz="1200" dirty="0"/>
           </a:p>
@@ -21322,7 +21779,7 @@
                   <a:schemeClr val="tx1"/>
                 </a:solidFill>
               </a:rPr>
-              <a:t>All models are tuned by cross-validated grid search on recall and judged on a held-out 30% of applicants the models never saw.</a:t>
+              <a:t>Individual models are tuned by cross-validated grid search on recall; the final model and its threshold are chosen on out-of-fold expected cost, training data only; the held-out 30% is scored once.</a:t>
             </a:r>
             <a:endParaRPr lang="en-US" sz="1250" dirty="0"/>
           </a:p>
@@ -21522,7 +21979,7 @@
                   <a:schemeClr val="tx1"/>
                 </a:solidFill>
               </a:rPr>
-              <a:t>The class-weighted forest catches 78% at 77% precision, with the best ROC-AUC (0.96): it ranks applicants by risk most accurately.</a:t>
+              <a:t>The class-weighted forest catches 77% at 77% precision with a ROC-AUC of 0.96: among the best at ranking applicants by risk.</a:t>
             </a:r>
             <a:endParaRPr lang="en-US" sz="1200" dirty="0"/>
           </a:p>
@@ -21540,7 +21997,7 @@
                   <a:schemeClr val="tx1"/>
                 </a:solidFill>
               </a:rPr>
-              <a:t>Because it ranks so well, lowering its threshold to 0.25 lifts recall to 93% at 67% precision, the lowest expected cost of any option.</a:t>
+              <a:t>Chosen on out-of-fold expected cost (training data only), with its threshold moved to 0.25, it catches 93% at 67% precision on the test set: the lowest cost of any option.</a:t>
             </a:r>
             <a:endParaRPr lang="en-US" sz="1200" dirty="0"/>
           </a:p>

--- a/presentation/Loan_Default_Prediction_Presentation.pptx
+++ b/presentation/Loan_Default_Prediction_Presentation.pptx
@@ -125,26 +125,26 @@
   <p:extLst>
     <p:ext uri="{521415D9-36F7-43E2-AB2F-B90AF26B5E84}">
       <p14:sectionLst xmlns:p14="http://schemas.microsoft.com/office/powerpoint/2010/main">
-        <p14:section name="Opening" id="{e9f32e46-5cce-d3e0-1a47-1e9b4d1efeea}">
+        <p14:section name="Opening" id="{a0b407fb-7976-054a-bed4-c80fb637a218}">
           <p14:sldIdLst>
             <p14:sldId id="256"/>
             <p14:sldId id="257"/>
           </p14:sldIdLst>
         </p14:section>
-        <p14:section name="Problem and approach" id="{9d38b4db-6c16-6d52-c047-ea45597019ed}">
+        <p14:section name="Problem and approach" id="{8852ca1e-0760-5a78-6174-efdf1f89da96}">
           <p14:sldIdLst>
             <p14:sldId id="258"/>
             <p14:sldId id="259"/>
           </p14:sldIdLst>
         </p14:section>
-        <p14:section name="Key insights" id="{d688c42a-1a10-07e5-d541-edfb80ce9baf}">
+        <p14:section name="Key insights" id="{c5e05691-4be5-7c78-28dc-e5a0c661318e}">
           <p14:sldIdLst>
             <p14:sldId id="260"/>
             <p14:sldId id="261"/>
             <p14:sldId id="262"/>
           </p14:sldIdLst>
         </p14:section>
-        <p14:section name="Modelling" id="{bbe3d4e1-4dfa-02e6-e325-602865790267}">
+        <p14:section name="Modelling" id="{7b3597a8-3463-ffaa-5de6-914e7c7bbe61}">
           <p14:sldIdLst>
             <p14:sldId id="263"/>
             <p14:sldId id="264"/>
@@ -152,7 +152,7 @@
             <p14:sldId id="266"/>
           </p14:sldIdLst>
         </p14:section>
-        <p14:section name="Recommendations" id="{21924011-da29-d5e4-21b5-4fa2a1e783a6}">
+        <p14:section name="Recommendations" id="{41a1dd9a-8f68-57ec-fa26-a513904c674d}">
           <p14:sldIdLst>
             <p14:sldId id="267"/>
             <p14:sldId id="268"/>
@@ -160,7 +160,7 @@
             <p14:sldId id="270"/>
           </p14:sldIdLst>
         </p14:section>
-        <p14:section name="Appendix" id="{4c3f13bf-1fec-2ba4-4d08-2a8210c80d34}">
+        <p14:section name="Appendix" id="{f5ed4a6e-f6a5-0665-d738-ff4909fc6255}">
           <p14:sldIdLst>
             <p14:sldId id="271"/>
             <p14:sldId id="272"/>
@@ -6156,7 +6156,7 @@
                   <a:srgbClr val="1E2761"/>
                 </a:solidFill>
               </a:rPr>
-              <a:t>Proposed solution: a Random Forest scorer with a Decision Tree explanation layer</a:t>
+              <a:t>Proposed solution: a Random Forest scorer explained by a surrogate decision tree</a:t>
             </a:r>
             <a:endParaRPr lang="en-US" sz="2400" dirty="0"/>
           </a:p>
@@ -6555,7 +6555,7 @@
       </p:sp>
       <p:sp>
         <p:nvSpPr>
-          <p:cNvPr id="12" name="stat 90%"/>
+          <p:cNvPr id="12" name="stat 89%"/>
           <p:cNvSpPr txBox="1"/>
           <p:nvPr/>
         </p:nvSpPr>
@@ -6583,7 +6583,7 @@
                   <a:schemeClr val="accent1"/>
                 </a:solidFill>
               </a:rPr>
-              <a:t>90%</a:t>
+              <a:t>89%</a:t>
             </a:r>
             <a:endParaRPr lang="en-US" sz="3400" dirty="0"/>
           </a:p>
@@ -16137,14 +16137,14 @@
               <a:buChar char="•"/>
             </a:pPr>
             <a:r>
-              <a:rPr lang="en-US" sz="1200" dirty="0">
+              <a:rPr lang="en-US" sz="1100" dirty="0">
                 <a:solidFill>
                   <a:schemeClr val="tx1"/>
                 </a:solidFill>
               </a:rPr>
-              <a:t>The debt-to-income ratio and its missing flag carry more than a third (36%) of the final forest's decision power; with delinquent lines and credit-history length, about half.</a:t>
+              <a:t>The debt-to-income ratio and its missing flag carry 36% of the final forest's decision power; with delinquent lines and credit-history length, about half.</a:t>
             </a:r>
-            <a:endParaRPr lang="en-US" sz="1200" dirty="0"/>
+            <a:endParaRPr lang="en-US" sz="1100" dirty="0"/>
           </a:p>
           <a:p>
             <a:pPr marL="177800" indent="-177800">
@@ -16155,14 +16155,14 @@
               <a:buChar char="•"/>
             </a:pPr>
             <a:r>
-              <a:rPr lang="en-US" sz="1200" dirty="0">
+              <a:rPr lang="en-US" sz="1100" dirty="0">
                 <a:solidFill>
                   <a:schemeClr val="tx1"/>
                 </a:solidFill>
               </a:rPr>
-              <a:t>Permutation importance (drop in ranking quality when a column is shuffled) ranks the same four at the top, with delinquent credit lines first.</a:t>
+              <a:t>Permutation importance (drop in ranking quality when a column is shuffled) ranks the same four at the top, delinquent credit lines first.</a:t>
             </a:r>
-            <a:endParaRPr lang="en-US" sz="1200" dirty="0"/>
+            <a:endParaRPr lang="en-US" sz="1100" dirty="0"/>
           </a:p>
           <a:p>
             <a:pPr marL="177800" indent="-177800">
@@ -16173,14 +16173,14 @@
               <a:buChar char="•"/>
             </a:pPr>
             <a:r>
-              <a:rPr lang="en-US" sz="1200" dirty="0">
+              <a:rPr lang="en-US" sz="1100" dirty="0">
                 <a:solidFill>
                   <a:schemeClr val="tx1"/>
                 </a:solidFill>
               </a:rPr>
-              <a:t>Loan, property and mortgage amounts matter in combination but are weak on their own.</a:t>
+              <a:t>Loan, property and mortgage amounts matter in combination, little on their own.</a:t>
             </a:r>
-            <a:endParaRPr lang="en-US" sz="1200" dirty="0"/>
+            <a:endParaRPr lang="en-US" sz="1100" dirty="0"/>
           </a:p>
           <a:p>
             <a:pPr marL="177800" indent="-177800">
@@ -16191,14 +16191,14 @@
               <a:buChar char="•"/>
             </a:pPr>
             <a:r>
-              <a:rPr lang="en-US" sz="1200" dirty="0">
+              <a:rPr lang="en-US" sz="1100" dirty="0">
                 <a:solidFill>
                   <a:schemeClr val="tx1"/>
                 </a:solidFill>
               </a:rPr>
-              <a:t>Occupation, loan-purpose and minor missing flags matter little individually, yet dropping them raised out-of-fold expected cost by about a sixth, so they stay subject to the fair-lending review.</a:t>
+              <a:t>Occupation, loan purpose and minor flags matter little individually, yet dropping them raised out-of-fold expected cost by about a sixth, so they stay subject to the fair-lending review.</a:t>
             </a:r>
-            <a:endParaRPr lang="en-US" sz="1200" dirty="0"/>
+            <a:endParaRPr lang="en-US" sz="1100" dirty="0"/>
           </a:p>
           <a:p>
             <a:pPr marL="177800" indent="-177800">
@@ -16209,14 +16209,14 @@
               <a:buChar char="•"/>
             </a:pPr>
             <a:r>
-              <a:rPr lang="en-US" sz="1200" dirty="0">
+              <a:rPr lang="en-US" sz="1100" dirty="0">
                 <a:solidFill>
                   <a:schemeClr val="tx1"/>
                 </a:solidFill>
               </a:rPr>
-              <a:t>Logistic-regression coefficients, the decision-tree rules and the surrogate tree point to the same drivers, so the signal is stable across techniques.</a:t>
+              <a:t>Logistic-regression coefficients, tree rules and the surrogate tree all point to the same drivers.</a:t>
             </a:r>
-            <a:endParaRPr lang="en-US" sz="1200" dirty="0"/>
+            <a:endParaRPr lang="en-US" sz="1100" dirty="0"/>
           </a:p>
         </p:txBody>
       </p:sp>
@@ -21543,7 +21543,7 @@
                   <a:schemeClr val="tx1"/>
                 </a:solidFill>
               </a:rPr>
-              <a:t>Bank loses most of the principal plus collection cost: about $9,000 on a typical $18,600 loan.</a:t>
+              <a:t>Bank loses most of the principal plus collection cost: about $9,000 on a typical $16,900 defaulted loan.</a:t>
             </a:r>
             <a:endParaRPr lang="en-US" sz="1200" dirty="0"/>
           </a:p>

--- a/presentation/Loan_Default_Prediction_Presentation.pptx
+++ b/presentation/Loan_Default_Prediction_Presentation.pptx
@@ -125,26 +125,26 @@
   <p:extLst>
     <p:ext uri="{521415D9-36F7-43E2-AB2F-B90AF26B5E84}">
       <p14:sectionLst xmlns:p14="http://schemas.microsoft.com/office/powerpoint/2010/main">
-        <p14:section name="Opening" id="{a0b407fb-7976-054a-bed4-c80fb637a218}">
+        <p14:section name="Opening" id="{37de1b48-ac53-7ec6-04b8-dca1473fde2e}">
           <p14:sldIdLst>
             <p14:sldId id="256"/>
             <p14:sldId id="257"/>
           </p14:sldIdLst>
         </p14:section>
-        <p14:section name="Problem and approach" id="{8852ca1e-0760-5a78-6174-efdf1f89da96}">
+        <p14:section name="Problem and approach" id="{ac8bfee5-f84f-1fc3-0094-da35085e4ed7}">
           <p14:sldIdLst>
             <p14:sldId id="258"/>
             <p14:sldId id="259"/>
           </p14:sldIdLst>
         </p14:section>
-        <p14:section name="Key insights" id="{c5e05691-4be5-7c78-28dc-e5a0c661318e}">
+        <p14:section name="Key insights" id="{44915eb0-19fa-5373-41b2-8bd07b656af0}">
           <p14:sldIdLst>
             <p14:sldId id="260"/>
             <p14:sldId id="261"/>
             <p14:sldId id="262"/>
           </p14:sldIdLst>
         </p14:section>
-        <p14:section name="Modelling" id="{7b3597a8-3463-ffaa-5de6-914e7c7bbe61}">
+        <p14:section name="Modelling" id="{8f8a1990-512d-0021-2c5b-f8cec339d339}">
           <p14:sldIdLst>
             <p14:sldId id="263"/>
             <p14:sldId id="264"/>
@@ -152,7 +152,7 @@
             <p14:sldId id="266"/>
           </p14:sldIdLst>
         </p14:section>
-        <p14:section name="Recommendations" id="{41a1dd9a-8f68-57ec-fa26-a513904c674d}">
+        <p14:section name="Recommendations" id="{a1e64938-fa53-f4b3-c3b1-9ffbc78f19f4}">
           <p14:sldIdLst>
             <p14:sldId id="267"/>
             <p14:sldId id="268"/>
@@ -160,7 +160,7 @@
             <p14:sldId id="270"/>
           </p14:sldIdLst>
         </p14:section>
-        <p14:section name="Appendix" id="{f5ed4a6e-f6a5-0665-d738-ff4909fc6255}">
+        <p14:section name="Appendix" id="{92693547-47b2-2b2a-80db-050972555ab0}">
           <p14:sldIdLst>
             <p14:sldId id="271"/>
             <p14:sldId id="272"/>
@@ -17079,7 +17079,7 @@
                   <a:schemeClr val="tx1"/>
                 </a:solidFill>
               </a:rPr>
-              <a:t>Small loans with an unverified ratio are flagged; the loan amount refines borderline cases.</a:t>
+              <a:t>Appears as a split under an unverified ratio and short history, but every applicant on that path is flagged whatever the amount; the amount does not change the decision at this depth.</a:t>
             </a:r>
             <a:endParaRPr lang="en-US" sz="1200" dirty="0"/>
           </a:p>
@@ -21083,7 +21083,7 @@
                   <a:schemeClr val="tx1"/>
                 </a:solidFill>
               </a:rPr>
-              <a:t>Between a 20% and a 40% ratio only 4-7% default; above 45% almost everyone does. Each delinquent line or derogatory report roughly doubles the risk (0 reports: 17%, 1: 39%, 2: 51%, 3+: about 73%). Both are plain-language rules an applicant can be given.</a:t>
+              <a:t>Between a 20% and a 40% ratio only 4-7% default; above 45% almost everyone does. Each delinquent line or derogatory report roughly doubles the risk (0 reports: 17%, 1: 39%, 2: 51%, 3+: about 75%). Both are plain-language rules an applicant can be given.</a:t>
             </a:r>
             <a:endParaRPr lang="en-US" sz="1200" dirty="0"/>
           </a:p>

--- a/presentation/Loan_Default_Prediction_Presentation.pptx
+++ b/presentation/Loan_Default_Prediction_Presentation.pptx
@@ -125,26 +125,26 @@
   <p:extLst>
     <p:ext uri="{521415D9-36F7-43E2-AB2F-B90AF26B5E84}">
       <p14:sectionLst xmlns:p14="http://schemas.microsoft.com/office/powerpoint/2010/main">
-        <p14:section name="Opening" id="{37de1b48-ac53-7ec6-04b8-dca1473fde2e}">
+        <p14:section name="Opening" id="{d39a6423-f61b-2f1b-9f56-2226631a42d8}">
           <p14:sldIdLst>
             <p14:sldId id="256"/>
             <p14:sldId id="257"/>
           </p14:sldIdLst>
         </p14:section>
-        <p14:section name="Problem and approach" id="{ac8bfee5-f84f-1fc3-0094-da35085e4ed7}">
+        <p14:section name="Problem and approach" id="{77b64ded-e811-a58f-bf76-166cf9d2f683}">
           <p14:sldIdLst>
             <p14:sldId id="258"/>
             <p14:sldId id="259"/>
           </p14:sldIdLst>
         </p14:section>
-        <p14:section name="Key insights" id="{44915eb0-19fa-5373-41b2-8bd07b656af0}">
+        <p14:section name="Key insights" id="{7eb9c2c9-21a1-2229-d92a-33ba2c93ae2f}">
           <p14:sldIdLst>
             <p14:sldId id="260"/>
             <p14:sldId id="261"/>
             <p14:sldId id="262"/>
           </p14:sldIdLst>
         </p14:section>
-        <p14:section name="Modelling" id="{8f8a1990-512d-0021-2c5b-f8cec339d339}">
+        <p14:section name="Modelling" id="{a045cb2a-956b-3451-05f8-1a774b70ae48}">
           <p14:sldIdLst>
             <p14:sldId id="263"/>
             <p14:sldId id="264"/>
@@ -152,7 +152,7 @@
             <p14:sldId id="266"/>
           </p14:sldIdLst>
         </p14:section>
-        <p14:section name="Recommendations" id="{a1e64938-fa53-f4b3-c3b1-9ffbc78f19f4}">
+        <p14:section name="Recommendations" id="{428c9c33-a703-851a-233b-a0878122dc10}">
           <p14:sldIdLst>
             <p14:sldId id="267"/>
             <p14:sldId id="268"/>
@@ -160,7 +160,7 @@
             <p14:sldId id="270"/>
           </p14:sldIdLst>
         </p14:section>
-        <p14:section name="Appendix" id="{92693547-47b2-2b2a-80db-050972555ab0}">
+        <p14:section name="Appendix" id="{b711a5d9-0451-47b8-367e-dadbb94a660c}">
           <p14:sldIdLst>
             <p14:sldId id="271"/>
             <p14:sldId id="272"/>
@@ -2149,7 +2149,7 @@
                     <c:v>Random Forest (class weights)</c:v>
                   </c:pt>
                   <c:pt idx="5">
-                    <c:v>Random Forest, threshold 0.25</c:v>
+                    <c:v>Random Forest, threshold 0.15</c:v>
                   </c:pt>
                 </c:lvl>
               </c:multiLvlStrCache>
@@ -2250,7 +2250,7 @@
                     <c:v>Random Forest (class weights)</c:v>
                   </c:pt>
                   <c:pt idx="5">
-                    <c:v>Random Forest, threshold 0.25</c:v>
+                    <c:v>Random Forest, threshold 0.15</c:v>
                   </c:pt>
                 </c:lvl>
               </c:multiLvlStrCache>
@@ -2278,7 +2278,7 @@
                   <c:v>76.9</c:v>
                 </c:pt>
                 <c:pt idx="5">
-                  <c:v>66.9</c:v>
+                  <c:v>68.1</c:v>
                 </c:pt>
               </c:numCache>
             </c:numRef>
@@ -2474,7 +2474,7 @@
                 </a:solidFill>
                 <a:latin typeface="+mj-lt"/>
               </a:rPr>
-              <a:t>Class-weighted Random Forest, out-of-fold on training rows</a:t>
+              <a:t>Selected Random Forest, out-of-fold on training rows</a:t>
             </a:r>
           </a:p>
         </c:rich>
@@ -2558,41 +2558,50 @@
           </c:marker>
           <c:cat>
             <c:multiLvlStrRef>
-              <c:f>Sheet1!$A$2:$A$12</c:f>
+              <c:f>Sheet1!$A$2:$A$15</c:f>
               <c:multiLvlStrCache>
-                <c:ptCount val="11"/>
+                <c:ptCount val="14"/>
                 <c:lvl>
                   <c:pt idx="0">
+                    <c:v>0.05</c:v>
+                  </c:pt>
+                  <c:pt idx="1">
+                    <c:v>0.10</c:v>
+                  </c:pt>
+                  <c:pt idx="2">
+                    <c:v>0.15</c:v>
+                  </c:pt>
+                  <c:pt idx="3">
                     <c:v>0.20</c:v>
                   </c:pt>
-                  <c:pt idx="1">
+                  <c:pt idx="4">
                     <c:v>0.25</c:v>
                   </c:pt>
-                  <c:pt idx="2">
+                  <c:pt idx="5">
                     <c:v>0.30</c:v>
                   </c:pt>
-                  <c:pt idx="3">
+                  <c:pt idx="6">
                     <c:v>0.35</c:v>
                   </c:pt>
-                  <c:pt idx="4">
+                  <c:pt idx="7">
                     <c:v>0.40</c:v>
                   </c:pt>
-                  <c:pt idx="5">
+                  <c:pt idx="8">
                     <c:v>0.45</c:v>
                   </c:pt>
-                  <c:pt idx="6">
+                  <c:pt idx="9">
                     <c:v>0.50</c:v>
                   </c:pt>
-                  <c:pt idx="7">
+                  <c:pt idx="10">
                     <c:v>0.55</c:v>
                   </c:pt>
-                  <c:pt idx="8">
+                  <c:pt idx="11">
                     <c:v>0.60</c:v>
                   </c:pt>
-                  <c:pt idx="9">
+                  <c:pt idx="12">
                     <c:v>0.65</c:v>
                   </c:pt>
-                  <c:pt idx="10">
+                  <c:pt idx="13">
                     <c:v>0.70</c:v>
                   </c:pt>
                 </c:lvl>
@@ -2601,42 +2610,51 @@
           </c:cat>
           <c:val>
             <c:numRef>
-              <c:f>Sheet1!$B$2:$B$12</c:f>
+              <c:f>Sheet1!$B$2:$B$15</c:f>
               <c:numCache>
                 <c:formatCode>General</c:formatCode>
-                <c:ptCount val="11"/>
+                <c:ptCount val="14"/>
                 <c:pt idx="0">
-                  <c:v>95.6</c:v>
+                  <c:v>98.6</c:v>
                 </c:pt>
                 <c:pt idx="1">
-                  <c:v>93.5</c:v>
+                  <c:v>96.4</c:v>
                 </c:pt>
                 <c:pt idx="2">
-                  <c:v>90.3</c:v>
+                  <c:v>93.7</c:v>
                 </c:pt>
                 <c:pt idx="3">
-                  <c:v>87.6</c:v>
+                  <c:v>90.4</c:v>
                 </c:pt>
                 <c:pt idx="4">
-                  <c:v>84.7</c:v>
+                  <c:v>87.1</c:v>
                 </c:pt>
                 <c:pt idx="5">
-                  <c:v>82.6</c:v>
+                  <c:v>83.9</c:v>
                 </c:pt>
                 <c:pt idx="6">
-                  <c:v>80.2</c:v>
+                  <c:v>80.8</c:v>
                 </c:pt>
                 <c:pt idx="7">
-                  <c:v>76.7</c:v>
+                  <c:v>78.4</c:v>
                 </c:pt>
                 <c:pt idx="8">
-                  <c:v>72.1</c:v>
+                  <c:v>75.1</c:v>
                 </c:pt>
                 <c:pt idx="9">
-                  <c:v>68</c:v>
+                  <c:v>71.4</c:v>
                 </c:pt>
                 <c:pt idx="10">
-                  <c:v>62.3</c:v>
+                  <c:v>67.2</c:v>
+                </c:pt>
+                <c:pt idx="11">
+                  <c:v>62</c:v>
+                </c:pt>
+                <c:pt idx="12">
+                  <c:v>55.3</c:v>
+                </c:pt>
+                <c:pt idx="13">
+                  <c:v>47.4</c:v>
                 </c:pt>
               </c:numCache>
             </c:numRef>
@@ -2714,41 +2732,50 @@
           </c:marker>
           <c:cat>
             <c:multiLvlStrRef>
-              <c:f>Sheet1!$A$2:$A$12</c:f>
+              <c:f>Sheet1!$A$2:$A$15</c:f>
               <c:multiLvlStrCache>
-                <c:ptCount val="11"/>
+                <c:ptCount val="14"/>
                 <c:lvl>
                   <c:pt idx="0">
+                    <c:v>0.05</c:v>
+                  </c:pt>
+                  <c:pt idx="1">
+                    <c:v>0.10</c:v>
+                  </c:pt>
+                  <c:pt idx="2">
+                    <c:v>0.15</c:v>
+                  </c:pt>
+                  <c:pt idx="3">
                     <c:v>0.20</c:v>
                   </c:pt>
-                  <c:pt idx="1">
+                  <c:pt idx="4">
                     <c:v>0.25</c:v>
                   </c:pt>
-                  <c:pt idx="2">
+                  <c:pt idx="5">
                     <c:v>0.30</c:v>
                   </c:pt>
-                  <c:pt idx="3">
+                  <c:pt idx="6">
                     <c:v>0.35</c:v>
                   </c:pt>
-                  <c:pt idx="4">
+                  <c:pt idx="7">
                     <c:v>0.40</c:v>
                   </c:pt>
-                  <c:pt idx="5">
+                  <c:pt idx="8">
                     <c:v>0.45</c:v>
                   </c:pt>
-                  <c:pt idx="6">
+                  <c:pt idx="9">
                     <c:v>0.50</c:v>
                   </c:pt>
-                  <c:pt idx="7">
+                  <c:pt idx="10">
                     <c:v>0.55</c:v>
                   </c:pt>
-                  <c:pt idx="8">
+                  <c:pt idx="11">
                     <c:v>0.60</c:v>
                   </c:pt>
-                  <c:pt idx="9">
+                  <c:pt idx="12">
                     <c:v>0.65</c:v>
                   </c:pt>
-                  <c:pt idx="10">
+                  <c:pt idx="13">
                     <c:v>0.70</c:v>
                   </c:pt>
                 </c:lvl>
@@ -2757,42 +2784,51 @@
           </c:cat>
           <c:val>
             <c:numRef>
-              <c:f>Sheet1!$C$2:$C$12</c:f>
+              <c:f>Sheet1!$C$2:$C$15</c:f>
               <c:numCache>
                 <c:formatCode>General</c:formatCode>
-                <c:ptCount val="11"/>
+                <c:ptCount val="14"/>
                 <c:pt idx="0">
-                  <c:v>60.3</c:v>
+                  <c:v>44.6</c:v>
                 </c:pt>
                 <c:pt idx="1">
-                  <c:v>65.2</c:v>
+                  <c:v>57.1</c:v>
                 </c:pt>
                 <c:pt idx="2">
-                  <c:v>67.8</c:v>
+                  <c:v>64.7</c:v>
                 </c:pt>
                 <c:pt idx="3">
-                  <c:v>69.9</c:v>
+                  <c:v>68.5</c:v>
                 </c:pt>
                 <c:pt idx="4">
-                  <c:v>71.5</c:v>
+                  <c:v>71.1</c:v>
                 </c:pt>
                 <c:pt idx="5">
-                  <c:v>73.3</c:v>
+                  <c:v>73.6</c:v>
                 </c:pt>
                 <c:pt idx="6">
-                  <c:v>75.9</c:v>
+                  <c:v>75.5</c:v>
                 </c:pt>
                 <c:pt idx="7">
-                  <c:v>78.2</c:v>
+                  <c:v>78.1</c:v>
                 </c:pt>
                 <c:pt idx="8">
-                  <c:v>80.9</c:v>
+                  <c:v>80.2</c:v>
                 </c:pt>
                 <c:pt idx="9">
-                  <c:v>83.2</c:v>
+                  <c:v>82.5</c:v>
                 </c:pt>
                 <c:pt idx="10">
-                  <c:v>84.5</c:v>
+                  <c:v>85.6</c:v>
+                </c:pt>
+                <c:pt idx="11">
+                  <c:v>87.6</c:v>
+                </c:pt>
+                <c:pt idx="12">
+                  <c:v>89.2</c:v>
+                </c:pt>
+                <c:pt idx="13">
+                  <c:v>91.5</c:v>
                 </c:pt>
               </c:numCache>
             </c:numRef>
@@ -2903,7 +2939,7 @@
         <c:scaling>
           <c:orientation val="minMax"/>
           <c:max val="100"/>
-          <c:min val="50"/>
+          <c:min val="40"/>
         </c:scaling>
         <c:delete val="0"/>
         <c:axPos val="l"/>
@@ -3102,10 +3138,10 @@
                     <c:v>Loan amount</c:v>
                   </c:pt>
                   <c:pt idx="6">
-                    <c:v>Mortgage due</c:v>
+                    <c:v>Number of credit lines</c:v>
                   </c:pt>
                   <c:pt idx="7">
-                    <c:v>Number of credit lines</c:v>
+                    <c:v>Mortgage due</c:v>
                   </c:pt>
                   <c:pt idx="8">
                     <c:v>Years at job</c:v>
@@ -3130,40 +3166,40 @@
                 <c:formatCode>General</c:formatCode>
                 <c:ptCount val="12"/>
                 <c:pt idx="0">
-                  <c:v>18.7</c:v>
+                  <c:v>18.6</c:v>
                 </c:pt>
                 <c:pt idx="1">
-                  <c:v>17.8</c:v>
+                  <c:v>14</c:v>
                 </c:pt>
                 <c:pt idx="2">
-                  <c:v>8.4</c:v>
+                  <c:v>8.6</c:v>
                 </c:pt>
                 <c:pt idx="3">
-                  <c:v>7.2</c:v>
+                  <c:v>8</c:v>
                 </c:pt>
                 <c:pt idx="4">
-                  <c:v>6.8</c:v>
+                  <c:v>6.9</c:v>
                 </c:pt>
                 <c:pt idx="5">
+                  <c:v>6.7</c:v>
+                </c:pt>
+                <c:pt idx="6">
                   <c:v>6.4</c:v>
                 </c:pt>
-                <c:pt idx="6">
-                  <c:v>6.2</c:v>
-                </c:pt>
                 <c:pt idx="7">
-                  <c:v>5.9</c:v>
+                  <c:v>6.4</c:v>
                 </c:pt>
                 <c:pt idx="8">
                   <c:v>5.1</c:v>
                 </c:pt>
                 <c:pt idx="9">
-                  <c:v>3.7</c:v>
+                  <c:v>4.4</c:v>
                 </c:pt>
                 <c:pt idx="10">
-                  <c:v>3.1</c:v>
+                  <c:v>3.4</c:v>
                 </c:pt>
                 <c:pt idx="11">
-                  <c:v>1.9</c:v>
+                  <c:v>2.6</c:v>
                 </c:pt>
               </c:numCache>
             </c:numRef>
@@ -3887,7 +3923,7 @@
           <a:p>
             <a:r>
               <a:rPr lang="en-US" dirty="0"/>
-              <a:t>The model outputs a probability, and 0.5 is only a convention. The cut-off was chosen on out-of-fold predictions of the training data, so the test set played no part. Moving it to 0.25 cuts missed defaulters from 45 to 15 per thousand applicants on the test set, at the price of declining 92 instead of 46 good customers. It is the cheapest operating point for any cost ratio between three and six to one.</a:t>
+              <a:t>The model outputs a probability, and 0.5 is only a convention. The cut-off was chosen on out-of-fold predictions of the training data, so the test set played no part. Moving it to 0.15 cuts missed defaulters from 63 to 15 per thousand applicants on the test set, at the price of declining 87 instead of 26 good customers. It is the cheapest operating point for any cost ratio between three and six to one, and it matches the textbook break-even for the stated costs, which tells us the forest's probabilities are meaningful.</a:t>
             </a:r>
             <a:endParaRPr lang="en-US" dirty="0"/>
           </a:p>
@@ -3975,7 +4011,7 @@
           <a:p>
             <a:r>
               <a:rPr lang="en-US" dirty="0"/>
-              <a:t>Put together with round-number assumptions, the bank's default-related cost falls from about 10.8 million to about 1.9 million a year on 6,000 applications. Even if the real benefit were a quarter of that, the project pays back inside a year. Finance should replace these assumptions with actual loss and margin figures.</a:t>
+              <a:t>Put together with round-number assumptions, the bank's default-related cost falls from about 10.8 million to about 1.8 million a year on 6,000 applications. Even if the real benefit were a quarter of that, the project pays back inside a year. Finance should replace these assumptions with actual loss and margin figures.</a:t>
             </a:r>
             <a:endParaRPr lang="en-US" dirty="0"/>
           </a:p>
@@ -5295,7 +5331,7 @@
           <a:p>
             <a:r>
               <a:rPr lang="en-US" dirty="0"/>
-              <a:t>Eleven model variants were built; these six tell the story. The forest with class weights has the best balance and ranks applicants among the best. It was selected, together with its threshold, on out-of-fold expected cost using training data only; on the test set it then catches 93 percent of defaulters while two thirds of the flagged applicants really would have defaulted.</a:t>
+              <a:t>Eleven model variants were built; these six tell the story. At the usual cut-off the forest with class weights has the best balance and ranks applicants among the best. The final configuration and its threshold were then selected together on repeated out-of-fold expected cost using training data only. Class weights turned out to add nothing once the cut-off is tuned, so the plain forest at a 0.15 cut-off was chosen; on the test set it catches 93 percent of defaulters while two thirds of the flagged applicants really would have defaulted.</a:t>
             </a:r>
             <a:endParaRPr lang="en-US" dirty="0"/>
           </a:p>
@@ -6259,7 +6295,7 @@
                   <a:schemeClr val="tx1"/>
                 </a:solidFill>
               </a:rPr>
-              <a:t>Scoring engine: Random Forest, 200 trees, class weights 0.2 (repaid) / 0.8 (default).</a:t>
+              <a:t>Scoring engine: Random Forest, 200 fully grown trees, no class weights: the decision threshold handles the imbalance.</a:t>
             </a:r>
             <a:endParaRPr lang="en-US" sz="1150" dirty="0"/>
           </a:p>
@@ -6277,7 +6313,7 @@
                   <a:schemeClr val="tx1"/>
                 </a:solidFill>
               </a:rPr>
-              <a:t>Inputs: all 27 (10 financial attributes, 11 missing-value flags, occupation and loan purpose). Fallback without occupation and purpose: 12 inputs, about a sixth more credit-error cost.</a:t>
+              <a:t>Inputs: all 27 (10 financial attributes, 11 missing-value flags, occupation and loan purpose). Fallback without occupation and purpose: 12 inputs, about a fifth more credit-error cost.</a:t>
             </a:r>
             <a:endParaRPr lang="en-US" sz="1150" dirty="0"/>
           </a:p>
@@ -6295,7 +6331,7 @@
                   <a:schemeClr val="tx1"/>
                 </a:solidFill>
               </a:rPr>
-              <a:t>Decision threshold 0.25, chosen by minimising expected cost on out-of-fold predictions of the training rows (stable for cost ratios 3:1 to 6:1); approve / refer / decline bands keep an underwriter in the loop.</a:t>
+              <a:t>Decision threshold 0.15, chosen together with the configuration by minimising expected cost on repeated out-of-fold predictions of the training rows (stable for cost ratios 3:1 to 6:1; matches the 0.18 break-even for the stated costs); approve / refer / decline bands keep an underwriter in the loop.</a:t>
             </a:r>
             <a:endParaRPr lang="en-US" sz="1150" dirty="0"/>
           </a:p>
@@ -6313,7 +6349,7 @@
                   <a:schemeClr val="tx1"/>
                 </a:solidFill>
               </a:rPr>
-              <a:t>Explanation layer: a depth-4 surrogate tree fitted to the forest's own decisions reproduces 90% of them; its rules (ratio missing or above 44%, delinquent lines, credit-history length, loan size, job tenure) supply the ECOA adverse-action reasons.</a:t>
+              <a:t>Explanation layer: a depth-4 surrogate tree fitted to the forest's own decisions reproduces 90% of them; its rules (ratio missing or above 45%, two or more delinquent lines, credit-history length, derogatory reports) supply the ECOA adverse-action reasons.</a:t>
             </a:r>
             <a:endParaRPr lang="en-US" sz="1150" dirty="0"/>
           </a:p>
@@ -6411,7 +6447,7 @@
       </p:sp>
       <p:sp>
         <p:nvSpPr>
-          <p:cNvPr id="8" name="stat 67%"/>
+          <p:cNvPr id="8" name="stat 68%"/>
           <p:cNvSpPr txBox="1"/>
           <p:nvPr/>
         </p:nvSpPr>
@@ -6439,7 +6475,7 @@
                   <a:schemeClr val="accent1"/>
                 </a:solidFill>
               </a:rPr>
-              <a:t>67%</a:t>
+              <a:t>68%</a:t>
             </a:r>
             <a:endParaRPr lang="en-US" sz="3400" dirty="0"/>
           </a:p>
@@ -6555,7 +6591,7 @@
       </p:sp>
       <p:sp>
         <p:nvSpPr>
-          <p:cNvPr id="12" name="stat 89%"/>
+          <p:cNvPr id="12" name="stat 90%"/>
           <p:cNvSpPr txBox="1"/>
           <p:nvPr/>
         </p:nvSpPr>
@@ -6583,7 +6619,7 @@
                   <a:schemeClr val="accent1"/>
                 </a:solidFill>
               </a:rPr>
-              <a:t>89%</a:t>
+              <a:t>90%</a:t>
             </a:r>
             <a:endParaRPr lang="en-US" sz="3400" dirty="0"/>
           </a:p>
@@ -6655,7 +6691,7 @@
                   <a:schemeClr val="tx1"/>
                 </a:solidFill>
               </a:rPr>
-              <a:t>Per 1,000 applicants: about 185 of 200 defaulters flagged in advance, 15 missed, 92 good customers referred or declined.</a:t>
+              <a:t>Per 1,000 applicants: about 185 of 200 defaulters flagged in advance, 15 missed, 87 good customers referred or declined.</a:t>
             </a:r>
             <a:endParaRPr lang="en-US" sz="1150" dirty="0"/>
           </a:p>
@@ -6763,7 +6799,7 @@
                   <a:srgbClr val="1E2761"/>
                 </a:solidFill>
               </a:rPr>
-              <a:t>Why a 0.25 threshold: the decision cut-off is a business dial, not a constant</a:t>
+              <a:t>Why a 0.15 threshold: the decision cut-off is a business dial, not a constant</a:t>
             </a:r>
             <a:endParaRPr lang="en-US" sz="2400" dirty="0"/>
           </a:p>
@@ -6882,7 +6918,7 @@
                   <a:schemeClr val="tx1"/>
                 </a:solidFill>
               </a:rPr>
-              <a:t>45 missed defaulters</a:t>
+              <a:t>63 missed defaulters</a:t>
             </a:r>
             <a:endParaRPr lang="en-US" sz="1200" dirty="0"/>
           </a:p>
@@ -6900,7 +6936,7 @@
                   <a:schemeClr val="tx1"/>
                 </a:solidFill>
               </a:rPr>
-              <a:t>46 good customers declined</a:t>
+              <a:t>26 good customers declined</a:t>
             </a:r>
             <a:endParaRPr lang="en-US" sz="1200" dirty="0"/>
           </a:p>
@@ -6918,7 +6954,7 @@
                   <a:schemeClr val="tx1"/>
                 </a:solidFill>
               </a:rPr>
-              <a:t>$501k indicative cost</a:t>
+              <a:t>$615k indicative cost</a:t>
             </a:r>
             <a:endParaRPr lang="en-US" sz="1200" dirty="0"/>
           </a:p>
@@ -6981,7 +7017,7 @@
                   <a:schemeClr val="accent5"/>
                 </a:solidFill>
               </a:rPr>
-              <a:t>At 0.25 (proposed)</a:t>
+              <a:t>At 0.15 (proposed)</a:t>
             </a:r>
             <a:endParaRPr lang="en-US" sz="1400" dirty="0"/>
           </a:p>
@@ -7039,7 +7075,7 @@
                   <a:schemeClr val="tx1"/>
                 </a:solidFill>
               </a:rPr>
-              <a:t>92 good customers declined</a:t>
+              <a:t>87 good customers declined</a:t>
             </a:r>
             <a:endParaRPr lang="en-US" sz="1200" dirty="0"/>
           </a:p>
@@ -7057,7 +7093,7 @@
                   <a:schemeClr val="tx1"/>
                 </a:solidFill>
               </a:rPr>
-              <a:t>$314k indicative cost</a:t>
+              <a:t>$304k indicative cost</a:t>
             </a:r>
             <a:endParaRPr lang="en-US" sz="1200" dirty="0"/>
           </a:p>
@@ -7093,7 +7129,7 @@
                   <a:schemeClr val="accent6"/>
                 </a:solidFill>
               </a:rPr>
-              <a:t>Curves: out-of-fold predictions on the training rows, which is where the threshold was chosen. Cards: test set, per 1,000 applicants; cost assumes $9,000 per missed defaulter and $2,000 per wrongly declined customer. The optimum stays at 0.25 for cost ratios from 3:1 to 6:1.</a:t>
+              <a:t>Curves: out-of-fold predictions on the training rows, which is where the threshold was chosen. Cards: test set, per 1,000 applicants; cost assumes $9,000 per missed defaulter and $2,000 per wrongly declined customer. The optimum stays at 0.15 for cost ratios from 3:1 to 6:1 and matches the textbook break-even (0.18) for these costs.</a:t>
             </a:r>
             <a:endParaRPr lang="en-US" sz="900" dirty="0"/>
           </a:p>
@@ -7982,7 +8018,7 @@
                           <a:ea typeface="Calibri" pitchFamily="34" charset="-122"/>
                           <a:cs typeface="Calibri" pitchFamily="34" charset="-120"/>
                         </a:rPr>
-                        <a:t>about 550, margin forgone about $1.1M</a:t>
+                        <a:t>about 520, margin forgone about $1.0M</a:t>
                       </a:r>
                       <a:endParaRPr lang="en-US" sz="1150" dirty="0">
                         <a:latin typeface="Calibri" charset="0"/>
@@ -8179,7 +8215,7 @@
                           <a:ea typeface="Calibri" pitchFamily="34" charset="-122"/>
                           <a:cs typeface="Calibri" pitchFamily="34" charset="-120"/>
                         </a:rPr>
-                        <a:t>about $1.9M</a:t>
+                        <a:t>about $1.8M</a:t>
                       </a:r>
                       <a:endParaRPr lang="en-US" sz="1150" dirty="0">
                         <a:latin typeface="Calibri" charset="0"/>
@@ -8325,7 +8361,7 @@
                   <a:schemeClr val="bg2"/>
                 </a:solidFill>
               </a:rPr>
-              <a:t>indicative gross annual benefit; about $8.8M after running costs, $8.5M in year one</a:t>
+              <a:t>indicative gross annual benefit; about $8.9M after running costs, $8.5M in year one</a:t>
             </a:r>
             <a:endParaRPr lang="en-US" sz="1200" dirty="0"/>
           </a:p>
@@ -9643,7 +9679,7 @@
                   <a:schemeClr val="tx1"/>
                 </a:solidFill>
               </a:rPr>
-              <a:t>Gradient boosting and probability calibration, so a score of 0.25 means a 25% chance of default.</a:t>
+              <a:t>Gradient boosting and probability calibration, so a score of 0.15 means exactly a 15% chance of default.</a:t>
             </a:r>
             <a:endParaRPr lang="en-US" sz="1100" dirty="0"/>
           </a:p>
@@ -15505,7 +15541,7 @@
                           <a:ea typeface="Calibri" pitchFamily="34" charset="-122"/>
                           <a:cs typeface="Calibri" pitchFamily="34" charset="-120"/>
                         </a:rPr>
-                        <a:t>Proposed: RF class weights, 27 inputs, threshold 0.25</a:t>
+                        <a:t>Proposed: RF unweighted, 27 inputs, threshold 0.15</a:t>
                       </a:r>
                       <a:endParaRPr lang="en-US" sz="950" dirty="0">
                         <a:latin typeface="Calibri" charset="0"/>
@@ -15635,7 +15671,7 @@
                           <a:ea typeface="Calibri" pitchFamily="34" charset="-122"/>
                           <a:cs typeface="Calibri" pitchFamily="34" charset="-120"/>
                         </a:rPr>
-                        <a:t>0.669</a:t>
+                        <a:t>0.681</a:t>
                       </a:r>
                       <a:endParaRPr lang="en-US" sz="950" dirty="0">
                         <a:latin typeface="Calibri" charset="0"/>
@@ -15700,7 +15736,7 @@
                           <a:ea typeface="Calibri" pitchFamily="34" charset="-122"/>
                           <a:cs typeface="Calibri" pitchFamily="34" charset="-120"/>
                         </a:rPr>
-                        <a:t>0.777</a:t>
+                        <a:t>0.785</a:t>
                       </a:r>
                       <a:endParaRPr lang="en-US" sz="950" dirty="0">
                         <a:latin typeface="Calibri" charset="0"/>
@@ -15765,7 +15801,7 @@
                           <a:ea typeface="Calibri" pitchFamily="34" charset="-122"/>
                           <a:cs typeface="Calibri" pitchFamily="34" charset="-120"/>
                         </a:rPr>
-                        <a:t>0.894</a:t>
+                        <a:t>0.899</a:t>
                       </a:r>
                       <a:endParaRPr lang="en-US" sz="950" dirty="0">
                         <a:latin typeface="Calibri" charset="0"/>
@@ -15830,7 +15866,7 @@
                           <a:ea typeface="Calibri" pitchFamily="34" charset="-122"/>
                           <a:cs typeface="Calibri" pitchFamily="34" charset="-120"/>
                         </a:rPr>
-                        <a:t>0.959</a:t>
+                        <a:t>0.963</a:t>
                       </a:r>
                       <a:endParaRPr lang="en-US" sz="950" dirty="0">
                         <a:latin typeface="Calibri" charset="0"/>
@@ -15978,7 +16014,7 @@
                   <a:schemeClr val="accent6"/>
                 </a:solidFill>
               </a:rPr>
-              <a:t>Test set of 1,788 applicants at the 0.5 threshold except the proposed model. Train recall of 1.000 marks un-pruned models that memorised the training data. The proposed model and its threshold were selected on out-of-fold expected cost (training rows only); its out-of-fold ROC-AUC was 0.959, the same as on test.</a:t>
+              <a:t>Test set of 1,788 applicants at the 0.5 threshold except the proposed model. Train recall of 1.000 marks un-pruned models that memorised the training data. The proposed model (the default forest with its threshold moved) and its threshold were selected on repeated out-of-fold expected cost (training rows only); its mean out-of-fold ROC-AUC was 0.961 against 0.963 on test.</a:t>
             </a:r>
             <a:endParaRPr lang="en-US" sz="900" dirty="0"/>
           </a:p>
@@ -16142,7 +16178,7 @@
                   <a:schemeClr val="tx1"/>
                 </a:solidFill>
               </a:rPr>
-              <a:t>The debt-to-income ratio and its missing flag carry 36% of the final forest's decision power; with delinquent lines and credit-history length, about half.</a:t>
+              <a:t>The debt-to-income ratio and its missing flag carry a third of the final forest's decision power; with delinquent lines and credit-history length, about half.</a:t>
             </a:r>
             <a:endParaRPr lang="en-US" sz="1100" dirty="0"/>
           </a:p>
@@ -16196,7 +16232,7 @@
                   <a:schemeClr val="tx1"/>
                 </a:solidFill>
               </a:rPr>
-              <a:t>Occupation, loan purpose and minor flags matter little individually, yet dropping them raised out-of-fold expected cost by about a sixth, so they stay subject to the fair-lending review.</a:t>
+              <a:t>Occupation, loan purpose and minor flags matter little individually, yet dropping them raised out-of-fold expected cost by about a fifth, so they stay subject to the fair-lending review.</a:t>
             </a:r>
             <a:endParaRPr lang="en-US" sz="1100" dirty="0"/>
           </a:p>
@@ -16455,7 +16491,7 @@
                   <a:schemeClr val="tx1"/>
                 </a:solidFill>
               </a:rPr>
-              <a:t>Yes: high-risk branch (62% of these applicants defaulted). Verify income or decline; short credit history or any delinquency in this branch means flag.</a:t>
+              <a:t>Yes: high-risk branch (62% defaulted). Flag, unless there is no delinquent line, no derogatory report and more than about 15 years of credit history.</a:t>
             </a:r>
             <a:endParaRPr lang="en-US" sz="1200" dirty="0"/>
           </a:p>
@@ -16575,7 +16611,7 @@
                   <a:schemeClr val="accent1"/>
                 </a:solidFill>
               </a:rPr>
-              <a:t>If recorded, is the ratio above about 44%?</a:t>
+              <a:t>If recorded, is the ratio above about 45%?</a:t>
             </a:r>
             <a:endParaRPr lang="en-US" sz="1250" dirty="0"/>
           </a:p>
@@ -16611,7 +16647,7 @@
                   <a:schemeClr val="tx1"/>
                 </a:solidFill>
               </a:rPr>
-              <a:t>Yes: about three in four defaulted (87-100% above 45%). Flag unless the credit history is very long (over about 17 years).</a:t>
+              <a:t>Yes: flag, whatever the credit history (87-100% of these applicants defaulted).</a:t>
             </a:r>
             <a:endParaRPr lang="en-US" sz="1200" dirty="0"/>
           </a:p>
@@ -16731,7 +16767,7 @@
                   <a:schemeClr val="accent1"/>
                 </a:solidFill>
               </a:rPr>
-              <a:t>How many delinquent credit lines?</a:t>
+              <a:t>Ratio at or below 45%: two or more delinquent credit lines?</a:t>
             </a:r>
             <a:endParaRPr lang="en-US" sz="1250" dirty="0"/>
           </a:p>
@@ -16767,7 +16803,7 @@
                   <a:schemeClr val="tx1"/>
                 </a:solidFill>
               </a:rPr>
-              <a:t>Two or more with a modest mortgage balance: flag. None: only about 4-5% default, the safest group.</a:t>
+              <a:t>Yes, with a mortgage balance below about $45,500: flag. None or one: clear; applicants with no delinquent line default only about 4-5% of the time.</a:t>
             </a:r>
             <a:endParaRPr lang="en-US" sz="1200" dirty="0"/>
           </a:p>
@@ -16887,7 +16923,7 @@
                   <a:schemeClr val="accent1"/>
                 </a:solidFill>
               </a:rPr>
-              <a:t>How long is the credit history, how many years at the job?</a:t>
+              <a:t>Unverified ratio: how long is the credit history, any derogatory report?</a:t>
             </a:r>
             <a:endParaRPr lang="en-US" sz="1250" dirty="0"/>
           </a:p>
@@ -16923,7 +16959,7 @@
                   <a:schemeClr val="tx1"/>
                 </a:solidFill>
               </a:rPr>
-              <a:t>Under about 15 years of history or under about 3 years in the job tilts a borderline case towards flag.</a:t>
+              <a:t>A history under about 15 years, or any derogatory report with a longer history, tips an unverified-ratio applicant to flag.</a:t>
             </a:r>
             <a:endParaRPr lang="en-US" sz="1200" dirty="0"/>
           </a:p>
@@ -17043,7 +17079,7 @@
                   <a:schemeClr val="accent1"/>
                 </a:solidFill>
               </a:rPr>
-              <a:t>Loan size</a:t>
+              <a:t>What the rules do not use</a:t>
             </a:r>
             <a:endParaRPr lang="en-US" sz="1250" dirty="0"/>
           </a:p>
@@ -17079,7 +17115,7 @@
                   <a:schemeClr val="tx1"/>
                 </a:solidFill>
               </a:rPr>
-              <a:t>Appears as a split under an unverified ratio and short history, but every applicant on that path is flagged whatever the amount; the amount does not change the decision at this depth.</a:t>
+              <a:t>Loan size, occupation and loan purpose do not appear: they matter only in combination inside the forest, which supplies the per-applicant reason codes.</a:t>
             </a:r>
             <a:endParaRPr lang="en-US" sz="1200" dirty="0"/>
           </a:p>
@@ -17115,7 +17151,7 @@
                   <a:schemeClr val="accent6"/>
                 </a:solidFill>
               </a:rPr>
-              <a:t>Surrogate: depth-4 tree, minimum 20 applicants per leaf, fitted to the forest's flag/clear decisions at threshold 0.25 on the training rows; it agrees with the forest on 90% of test decisions. The stand-alone tuned tree (test recall 82%, precision 53%) found the same drivers.</a:t>
+              <a:t>Surrogate: depth-4 tree, minimum 20 applicants per leaf, fitted to the forest's flag/clear decisions at threshold 0.15 on the training rows; it agrees with the forest on 90% of test decisions. The stand-alone tuned tree (test recall 82%, precision 53%) found the same drivers.</a:t>
             </a:r>
             <a:endParaRPr lang="en-US" sz="900" dirty="0"/>
           </a:p>
@@ -17266,7 +17302,7 @@
                         <a:buNone/>
                       </a:pPr>
                       <a:r>
-                        <a:rPr lang="en-US" sz="1050" b="1" dirty="0">
+                        <a:rPr lang="en-US" sz="950" b="1" dirty="0">
                           <a:solidFill>
                             <a:srgbClr val="FFFFFF"/>
                           </a:solidFill>
@@ -17276,14 +17312,14 @@
                         </a:rPr>
                         <a:t>Step</a:t>
                       </a:r>
-                      <a:endParaRPr lang="en-US" sz="1050" dirty="0">
+                      <a:endParaRPr lang="en-US" sz="950" dirty="0">
                         <a:latin typeface="Calibri" charset="0"/>
                         <a:ea typeface="Calibri" charset="0"/>
                         <a:cs typeface="Calibri" charset="0"/>
                       </a:endParaRPr>
                     </a:p>
                   </a:txBody>
-                  <a:tcPr marL="45720" marR="45720" marT="45720" marB="45720" anchor="ctr">
+                  <a:tcPr marL="36576" marR="36576" marT="36576" marB="36576" anchor="ctr">
                     <a:lnL w="6350" cap="flat" cmpd="sng" algn="ctr">
                       <a:solidFill>
                         <a:srgbClr val="BFBFBF"/>
@@ -17334,7 +17370,7 @@
                         <a:buNone/>
                       </a:pPr>
                       <a:r>
-                        <a:rPr lang="en-US" sz="1050" b="1" dirty="0">
+                        <a:rPr lang="en-US" sz="950" b="1" dirty="0">
                           <a:solidFill>
                             <a:srgbClr val="FFFFFF"/>
                           </a:solidFill>
@@ -17344,14 +17380,14 @@
                         </a:rPr>
                         <a:t>What was done</a:t>
                       </a:r>
-                      <a:endParaRPr lang="en-US" sz="1050" dirty="0">
+                      <a:endParaRPr lang="en-US" sz="950" dirty="0">
                         <a:latin typeface="Calibri" charset="0"/>
                         <a:ea typeface="Calibri" charset="0"/>
                         <a:cs typeface="Calibri" charset="0"/>
                       </a:endParaRPr>
                     </a:p>
                   </a:txBody>
-                  <a:tcPr marL="45720" marR="45720" marT="45720" marB="45720" anchor="ctr">
+                  <a:tcPr marL="36576" marR="36576" marT="36576" marB="36576" anchor="ctr">
                     <a:lnL w="6350" cap="flat" cmpd="sng" algn="ctr">
                       <a:solidFill>
                         <a:srgbClr val="BFBFBF"/>
@@ -17402,7 +17438,7 @@
                         <a:buNone/>
                       </a:pPr>
                       <a:r>
-                        <a:rPr lang="en-US" sz="1050" b="1" dirty="0">
+                        <a:rPr lang="en-US" sz="950" b="1" dirty="0">
                           <a:solidFill>
                             <a:srgbClr val="FFFFFF"/>
                           </a:solidFill>
@@ -17412,14 +17448,14 @@
                         </a:rPr>
                         <a:t>Why</a:t>
                       </a:r>
-                      <a:endParaRPr lang="en-US" sz="1050" dirty="0">
+                      <a:endParaRPr lang="en-US" sz="950" dirty="0">
                         <a:latin typeface="Calibri" charset="0"/>
                         <a:ea typeface="Calibri" charset="0"/>
                         <a:cs typeface="Calibri" charset="0"/>
                       </a:endParaRPr>
                     </a:p>
                   </a:txBody>
-                  <a:tcPr marL="45720" marR="45720" marT="45720" marB="45720" anchor="ctr">
+                  <a:tcPr marL="36576" marR="36576" marT="36576" marB="36576" anchor="ctr">
                     <a:lnL w="6350" cap="flat" cmpd="sng" algn="ctr">
                       <a:solidFill>
                         <a:srgbClr val="BFBFBF"/>
@@ -17472,7 +17508,7 @@
                         <a:buNone/>
                       </a:pPr>
                       <a:r>
-                        <a:rPr lang="en-US" sz="1050" dirty="0">
+                        <a:rPr lang="en-US" sz="950" dirty="0">
                           <a:solidFill>
                             <a:srgbClr val="1F1F1F"/>
                           </a:solidFill>
@@ -17482,14 +17518,14 @@
                         </a:rPr>
                         <a:t>Duplicates</a:t>
                       </a:r>
-                      <a:endParaRPr lang="en-US" sz="1050" dirty="0">
+                      <a:endParaRPr lang="en-US" sz="950" dirty="0">
                         <a:latin typeface="Calibri" charset="0"/>
                         <a:ea typeface="Calibri" charset="0"/>
                         <a:cs typeface="Calibri" charset="0"/>
                       </a:endParaRPr>
                     </a:p>
                   </a:txBody>
-                  <a:tcPr marL="45720" marR="45720" marT="45720" marB="45720" anchor="ctr">
+                  <a:tcPr marL="36576" marR="36576" marT="36576" marB="36576" anchor="ctr">
                     <a:lnL w="6350" cap="flat" cmpd="sng" algn="ctr">
                       <a:solidFill>
                         <a:srgbClr val="BFBFBF"/>
@@ -17537,7 +17573,7 @@
                         <a:buNone/>
                       </a:pPr>
                       <a:r>
-                        <a:rPr lang="en-US" sz="1050" dirty="0">
+                        <a:rPr lang="en-US" sz="950" dirty="0">
                           <a:solidFill>
                             <a:srgbClr val="1F1F1F"/>
                           </a:solidFill>
@@ -17547,14 +17583,14 @@
                         </a:rPr>
                         <a:t>None found; no rows dropped</a:t>
                       </a:r>
-                      <a:endParaRPr lang="en-US" sz="1050" dirty="0">
+                      <a:endParaRPr lang="en-US" sz="950" dirty="0">
                         <a:latin typeface="Calibri" charset="0"/>
                         <a:ea typeface="Calibri" charset="0"/>
                         <a:cs typeface="Calibri" charset="0"/>
                       </a:endParaRPr>
                     </a:p>
                   </a:txBody>
-                  <a:tcPr marL="45720" marR="45720" marT="45720" marB="45720" anchor="ctr">
+                  <a:tcPr marL="36576" marR="36576" marT="36576" marB="36576" anchor="ctr">
                     <a:lnL w="6350" cap="flat" cmpd="sng" algn="ctr">
                       <a:solidFill>
                         <a:srgbClr val="BFBFBF"/>
@@ -17602,7 +17638,7 @@
                         <a:buNone/>
                       </a:pPr>
                       <a:r>
-                        <a:rPr lang="en-US" sz="1050" dirty="0">
+                        <a:rPr lang="en-US" sz="950" dirty="0">
                           <a:solidFill>
                             <a:srgbClr val="1F1F1F"/>
                           </a:solidFill>
@@ -17612,14 +17648,14 @@
                         </a:rPr>
                         <a:t>5,960 loans retained, including 2 with only the loan amount recorded</a:t>
                       </a:r>
-                      <a:endParaRPr lang="en-US" sz="1050" dirty="0">
+                      <a:endParaRPr lang="en-US" sz="950" dirty="0">
                         <a:latin typeface="Calibri" charset="0"/>
                         <a:ea typeface="Calibri" charset="0"/>
                         <a:cs typeface="Calibri" charset="0"/>
                       </a:endParaRPr>
                     </a:p>
                   </a:txBody>
-                  <a:tcPr marL="45720" marR="45720" marT="45720" marB="45720" anchor="ctr">
+                  <a:tcPr marL="36576" marR="36576" marT="36576" marB="36576" anchor="ctr">
                     <a:lnL w="6350" cap="flat" cmpd="sng" algn="ctr">
                       <a:solidFill>
                         <a:srgbClr val="BFBFBF"/>
@@ -17669,7 +17705,7 @@
                         <a:buNone/>
                       </a:pPr>
                       <a:r>
-                        <a:rPr lang="en-US" sz="1050" dirty="0">
+                        <a:rPr lang="en-US" sz="950" dirty="0">
                           <a:solidFill>
                             <a:srgbClr val="1F1F1F"/>
                           </a:solidFill>
@@ -17679,14 +17715,14 @@
                         </a:rPr>
                         <a:t>Missing values</a:t>
                       </a:r>
-                      <a:endParaRPr lang="en-US" sz="1050" dirty="0">
+                      <a:endParaRPr lang="en-US" sz="950" dirty="0">
                         <a:latin typeface="Calibri" charset="0"/>
                         <a:ea typeface="Calibri" charset="0"/>
                         <a:cs typeface="Calibri" charset="0"/>
                       </a:endParaRPr>
                     </a:p>
                   </a:txBody>
-                  <a:tcPr marL="45720" marR="45720" marT="45720" marB="45720" anchor="ctr">
+                  <a:tcPr marL="36576" marR="36576" marT="36576" marB="36576" anchor="ctr">
                     <a:lnL w="6350" cap="flat" cmpd="sng" algn="ctr">
                       <a:solidFill>
                         <a:srgbClr val="BFBFBF"/>
@@ -17734,7 +17770,7 @@
                         <a:buNone/>
                       </a:pPr>
                       <a:r>
-                        <a:rPr lang="en-US" sz="1050" dirty="0">
+                        <a:rPr lang="en-US" sz="950" dirty="0">
                           <a:solidFill>
                             <a:srgbClr val="1F1F1F"/>
                           </a:solidFill>
@@ -17744,14 +17780,14 @@
                         </a:rPr>
                         <a:t>A 0/1 'was missing' flag per column, then median (numeric) or mode (categorical) imputation learned on the training rows</a:t>
                       </a:r>
-                      <a:endParaRPr lang="en-US" sz="1050" dirty="0">
+                      <a:endParaRPr lang="en-US" sz="950" dirty="0">
                         <a:latin typeface="Calibri" charset="0"/>
                         <a:ea typeface="Calibri" charset="0"/>
                         <a:cs typeface="Calibri" charset="0"/>
                       </a:endParaRPr>
                     </a:p>
                   </a:txBody>
-                  <a:tcPr marL="45720" marR="45720" marT="45720" marB="45720" anchor="ctr">
+                  <a:tcPr marL="36576" marR="36576" marT="36576" marB="36576" anchor="ctr">
                     <a:lnL w="6350" cap="flat" cmpd="sng" algn="ctr">
                       <a:solidFill>
                         <a:srgbClr val="BFBFBF"/>
@@ -17799,7 +17835,7 @@
                         <a:buNone/>
                       </a:pPr>
                       <a:r>
-                        <a:rPr lang="en-US" sz="1050" dirty="0">
+                        <a:rPr lang="en-US" sz="950" dirty="0">
                           <a:solidFill>
                             <a:srgbClr val="1F1F1F"/>
                           </a:solidFill>
@@ -17809,14 +17845,14 @@
                         </a:rPr>
                         <a:t>Missingness of debt-to-income and property value is the strongest default signal; dropping rows would lose 44% of the data</a:t>
                       </a:r>
-                      <a:endParaRPr lang="en-US" sz="1050" dirty="0">
+                      <a:endParaRPr lang="en-US" sz="950" dirty="0">
                         <a:latin typeface="Calibri" charset="0"/>
                         <a:ea typeface="Calibri" charset="0"/>
                         <a:cs typeface="Calibri" charset="0"/>
                       </a:endParaRPr>
                     </a:p>
                   </a:txBody>
-                  <a:tcPr marL="45720" marR="45720" marT="45720" marB="45720" anchor="ctr">
+                  <a:tcPr marL="36576" marR="36576" marT="36576" marB="36576" anchor="ctr">
                     <a:lnL w="6350" cap="flat" cmpd="sng" algn="ctr">
                       <a:solidFill>
                         <a:srgbClr val="BFBFBF"/>
@@ -17866,7 +17902,7 @@
                         <a:buNone/>
                       </a:pPr>
                       <a:r>
-                        <a:rPr lang="en-US" sz="1050" dirty="0">
+                        <a:rPr lang="en-US" sz="950" dirty="0">
                           <a:solidFill>
                             <a:srgbClr val="1F1F1F"/>
                           </a:solidFill>
@@ -17876,14 +17912,14 @@
                         </a:rPr>
                         <a:t>Outliers</a:t>
                       </a:r>
-                      <a:endParaRPr lang="en-US" sz="1050" dirty="0">
+                      <a:endParaRPr lang="en-US" sz="950" dirty="0">
                         <a:latin typeface="Calibri" charset="0"/>
                         <a:ea typeface="Calibri" charset="0"/>
                         <a:cs typeface="Calibri" charset="0"/>
                       </a:endParaRPr>
                     </a:p>
                   </a:txBody>
-                  <a:tcPr marL="45720" marR="45720" marT="45720" marB="45720" anchor="ctr">
+                  <a:tcPr marL="36576" marR="36576" marT="36576" marB="36576" anchor="ctr">
                     <a:lnL w="6350" cap="flat" cmpd="sng" algn="ctr">
                       <a:solidFill>
                         <a:srgbClr val="BFBFBF"/>
@@ -17931,7 +17967,7 @@
                         <a:buNone/>
                       </a:pPr>
                       <a:r>
-                        <a:rPr lang="en-US" sz="1050" dirty="0">
+                        <a:rPr lang="en-US" sz="950" dirty="0">
                           <a:solidFill>
                             <a:srgbClr val="1F1F1F"/>
                           </a:solidFill>
@@ -17941,14 +17977,14 @@
                         </a:rPr>
                         <a:t>IQR capping for the linear model only; DEROG and DELINQ capped at the 99th percentile; tree models use raw values</a:t>
                       </a:r>
-                      <a:endParaRPr lang="en-US" sz="1050" dirty="0">
+                      <a:endParaRPr lang="en-US" sz="950" dirty="0">
                         <a:latin typeface="Calibri" charset="0"/>
                         <a:ea typeface="Calibri" charset="0"/>
                         <a:cs typeface="Calibri" charset="0"/>
                       </a:endParaRPr>
                     </a:p>
                   </a:txBody>
-                  <a:tcPr marL="45720" marR="45720" marT="45720" marB="45720" anchor="ctr">
+                  <a:tcPr marL="36576" marR="36576" marT="36576" marB="36576" anchor="ctr">
                     <a:lnL w="6350" cap="flat" cmpd="sng" algn="ctr">
                       <a:solidFill>
                         <a:srgbClr val="BFBFBF"/>
@@ -17996,7 +18032,7 @@
                         <a:buNone/>
                       </a:pPr>
                       <a:r>
-                        <a:rPr lang="en-US" sz="1050" dirty="0">
+                        <a:rPr lang="en-US" sz="950" dirty="0">
                           <a:solidFill>
                             <a:srgbClr val="1F1F1F"/>
                           </a:solidFill>
@@ -18006,14 +18042,14 @@
                         </a:rPr>
                         <a:t>Linear models are pulled by extremes (debt-to-income 203%, credit history 97 years); trees split on rank order and keep the 'above 50% always defaults' signal</a:t>
                       </a:r>
-                      <a:endParaRPr lang="en-US" sz="1050" dirty="0">
+                      <a:endParaRPr lang="en-US" sz="950" dirty="0">
                         <a:latin typeface="Calibri" charset="0"/>
                         <a:ea typeface="Calibri" charset="0"/>
                         <a:cs typeface="Calibri" charset="0"/>
                       </a:endParaRPr>
                     </a:p>
                   </a:txBody>
-                  <a:tcPr marL="45720" marR="45720" marT="45720" marB="45720" anchor="ctr">
+                  <a:tcPr marL="36576" marR="36576" marT="36576" marB="36576" anchor="ctr">
                     <a:lnL w="6350" cap="flat" cmpd="sng" algn="ctr">
                       <a:solidFill>
                         <a:srgbClr val="BFBFBF"/>
@@ -18063,7 +18099,7 @@
                         <a:buNone/>
                       </a:pPr>
                       <a:r>
-                        <a:rPr lang="en-US" sz="1050" dirty="0">
+                        <a:rPr lang="en-US" sz="950" dirty="0">
                           <a:solidFill>
                             <a:srgbClr val="1F1F1F"/>
                           </a:solidFill>
@@ -18073,14 +18109,14 @@
                         </a:rPr>
                         <a:t>Encoding and scaling</a:t>
                       </a:r>
-                      <a:endParaRPr lang="en-US" sz="1050" dirty="0">
+                      <a:endParaRPr lang="en-US" sz="950" dirty="0">
                         <a:latin typeface="Calibri" charset="0"/>
                         <a:ea typeface="Calibri" charset="0"/>
                         <a:cs typeface="Calibri" charset="0"/>
                       </a:endParaRPr>
                     </a:p>
                   </a:txBody>
-                  <a:tcPr marL="45720" marR="45720" marT="45720" marB="45720" anchor="ctr">
+                  <a:tcPr marL="36576" marR="36576" marT="36576" marB="36576" anchor="ctr">
                     <a:lnL w="6350" cap="flat" cmpd="sng" algn="ctr">
                       <a:solidFill>
                         <a:srgbClr val="BFBFBF"/>
@@ -18128,7 +18164,7 @@
                         <a:buNone/>
                       </a:pPr>
                       <a:r>
-                        <a:rPr lang="en-US" sz="1050" dirty="0">
+                        <a:rPr lang="en-US" sz="950" dirty="0">
                           <a:solidFill>
                             <a:srgbClr val="1F1F1F"/>
                           </a:solidFill>
@@ -18138,14 +18174,14 @@
                         </a:rPr>
                         <a:t>One-hot encoding of REASON and JOB (drop first); standard scaling of the continuous inputs for the linear model only, flags left as 0/1</a:t>
                       </a:r>
-                      <a:endParaRPr lang="en-US" sz="1050" dirty="0">
+                      <a:endParaRPr lang="en-US" sz="950" dirty="0">
                         <a:latin typeface="Calibri" charset="0"/>
                         <a:ea typeface="Calibri" charset="0"/>
                         <a:cs typeface="Calibri" charset="0"/>
                       </a:endParaRPr>
                     </a:p>
                   </a:txBody>
-                  <a:tcPr marL="45720" marR="45720" marT="45720" marB="45720" anchor="ctr">
+                  <a:tcPr marL="36576" marR="36576" marT="36576" marB="36576" anchor="ctr">
                     <a:lnL w="6350" cap="flat" cmpd="sng" algn="ctr">
                       <a:solidFill>
                         <a:srgbClr val="BFBFBF"/>
@@ -18193,7 +18229,7 @@
                         <a:buNone/>
                       </a:pPr>
                       <a:r>
-                        <a:rPr lang="en-US" sz="1050" dirty="0">
+                        <a:rPr lang="en-US" sz="950" dirty="0">
                           <a:solidFill>
                             <a:srgbClr val="1F1F1F"/>
                           </a:solidFill>
@@ -18203,14 +18239,14 @@
                         </a:rPr>
                         <a:t>Comparable coefficients, odds ratios for flags read as the effect of the flag</a:t>
                       </a:r>
-                      <a:endParaRPr lang="en-US" sz="1050" dirty="0">
+                      <a:endParaRPr lang="en-US" sz="950" dirty="0">
                         <a:latin typeface="Calibri" charset="0"/>
                         <a:ea typeface="Calibri" charset="0"/>
                         <a:cs typeface="Calibri" charset="0"/>
                       </a:endParaRPr>
                     </a:p>
                   </a:txBody>
-                  <a:tcPr marL="45720" marR="45720" marT="45720" marB="45720" anchor="ctr">
+                  <a:tcPr marL="36576" marR="36576" marT="36576" marB="36576" anchor="ctr">
                     <a:lnL w="6350" cap="flat" cmpd="sng" algn="ctr">
                       <a:solidFill>
                         <a:srgbClr val="BFBFBF"/>
@@ -18260,7 +18296,7 @@
                         <a:buNone/>
                       </a:pPr>
                       <a:r>
-                        <a:rPr lang="en-US" sz="1050" dirty="0">
+                        <a:rPr lang="en-US" sz="950" dirty="0">
                           <a:solidFill>
                             <a:srgbClr val="1F1F1F"/>
                           </a:solidFill>
@@ -18270,14 +18306,14 @@
                         </a:rPr>
                         <a:t>Split</a:t>
                       </a:r>
-                      <a:endParaRPr lang="en-US" sz="1050" dirty="0">
+                      <a:endParaRPr lang="en-US" sz="950" dirty="0">
                         <a:latin typeface="Calibri" charset="0"/>
                         <a:ea typeface="Calibri" charset="0"/>
                         <a:cs typeface="Calibri" charset="0"/>
                       </a:endParaRPr>
                     </a:p>
                   </a:txBody>
-                  <a:tcPr marL="45720" marR="45720" marT="45720" marB="45720" anchor="ctr">
+                  <a:tcPr marL="36576" marR="36576" marT="36576" marB="36576" anchor="ctr">
                     <a:lnL w="6350" cap="flat" cmpd="sng" algn="ctr">
                       <a:solidFill>
                         <a:srgbClr val="BFBFBF"/>
@@ -18325,7 +18361,7 @@
                         <a:buNone/>
                       </a:pPr>
                       <a:r>
-                        <a:rPr lang="en-US" sz="1050" dirty="0">
+                        <a:rPr lang="en-US" sz="950" dirty="0">
                           <a:solidFill>
                             <a:srgbClr val="1F1F1F"/>
                           </a:solidFill>
@@ -18335,14 +18371,14 @@
                         </a:rPr>
                         <a:t>70% train / 30% test, stratified on the target, fixed seed, held out before any statistic was fitted; identical applicants in both data versions</a:t>
                       </a:r>
-                      <a:endParaRPr lang="en-US" sz="1050" dirty="0">
+                      <a:endParaRPr lang="en-US" sz="950" dirty="0">
                         <a:latin typeface="Calibri" charset="0"/>
                         <a:ea typeface="Calibri" charset="0"/>
                         <a:cs typeface="Calibri" charset="0"/>
                       </a:endParaRPr>
                     </a:p>
                   </a:txBody>
-                  <a:tcPr marL="45720" marR="45720" marT="45720" marB="45720" anchor="ctr">
+                  <a:tcPr marL="36576" marR="36576" marT="36576" marB="36576" anchor="ctr">
                     <a:lnL w="6350" cap="flat" cmpd="sng" algn="ctr">
                       <a:solidFill>
                         <a:srgbClr val="BFBFBF"/>
@@ -18390,7 +18426,7 @@
                         <a:buNone/>
                       </a:pPr>
                       <a:r>
-                        <a:rPr lang="en-US" sz="1050" dirty="0">
+                        <a:rPr lang="en-US" sz="950" dirty="0">
                           <a:solidFill>
                             <a:srgbClr val="1F1F1F"/>
                           </a:solidFill>
@@ -18400,14 +18436,14 @@
                         </a:rPr>
                         <a:t>No leakage from test rows into fences, medians or scaling; results comparable across models</a:t>
                       </a:r>
-                      <a:endParaRPr lang="en-US" sz="1050" dirty="0">
+                      <a:endParaRPr lang="en-US" sz="950" dirty="0">
                         <a:latin typeface="Calibri" charset="0"/>
                         <a:ea typeface="Calibri" charset="0"/>
                         <a:cs typeface="Calibri" charset="0"/>
                       </a:endParaRPr>
                     </a:p>
                   </a:txBody>
-                  <a:tcPr marL="45720" marR="45720" marT="45720" marB="45720" anchor="ctr">
+                  <a:tcPr marL="36576" marR="36576" marT="36576" marB="36576" anchor="ctr">
                     <a:lnL w="6350" cap="flat" cmpd="sng" algn="ctr">
                       <a:solidFill>
                         <a:srgbClr val="BFBFBF"/>
@@ -18457,7 +18493,7 @@
                         <a:buNone/>
                       </a:pPr>
                       <a:r>
-                        <a:rPr lang="en-US" sz="1050" dirty="0">
+                        <a:rPr lang="en-US" sz="950" dirty="0">
                           <a:solidFill>
                             <a:srgbClr val="1F1F1F"/>
                           </a:solidFill>
@@ -18467,14 +18503,14 @@
                         </a:rPr>
                         <a:t>Imbalance</a:t>
                       </a:r>
-                      <a:endParaRPr lang="en-US" sz="1050" dirty="0">
+                      <a:endParaRPr lang="en-US" sz="950" dirty="0">
                         <a:latin typeface="Calibri" charset="0"/>
                         <a:ea typeface="Calibri" charset="0"/>
                         <a:cs typeface="Calibri" charset="0"/>
                       </a:endParaRPr>
                     </a:p>
                   </a:txBody>
-                  <a:tcPr marL="45720" marR="45720" marT="45720" marB="45720" anchor="ctr">
+                  <a:tcPr marL="36576" marR="36576" marT="36576" marB="36576" anchor="ctr">
                     <a:lnL w="6350" cap="flat" cmpd="sng" algn="ctr">
                       <a:solidFill>
                         <a:srgbClr val="BFBFBF"/>
@@ -18522,7 +18558,7 @@
                         <a:buNone/>
                       </a:pPr>
                       <a:r>
-                        <a:rPr lang="en-US" sz="1050" dirty="0">
+                        <a:rPr lang="en-US" sz="950" dirty="0">
                           <a:solidFill>
                             <a:srgbClr val="1F1F1F"/>
                           </a:solidFill>
@@ -18530,16 +18566,16 @@
                           <a:ea typeface="Calibri" pitchFamily="34" charset="-122"/>
                           <a:cs typeface="Calibri" pitchFamily="34" charset="-120"/>
                         </a:rPr>
-                        <a:t>Class weights (balanced or 0.2/0.8) inside the models rather than resampling</a:t>
+                        <a:t>Class weights (balanced or 0.2/0.8) inside the individual models, then the decision threshold for the final model; no resampling</a:t>
                       </a:r>
-                      <a:endParaRPr lang="en-US" sz="1050" dirty="0">
+                      <a:endParaRPr lang="en-US" sz="950" dirty="0">
                         <a:latin typeface="Calibri" charset="0"/>
                         <a:ea typeface="Calibri" charset="0"/>
                         <a:cs typeface="Calibri" charset="0"/>
                       </a:endParaRPr>
                     </a:p>
                   </a:txBody>
-                  <a:tcPr marL="45720" marR="45720" marT="45720" marB="45720" anchor="ctr">
+                  <a:tcPr marL="36576" marR="36576" marT="36576" marB="36576" anchor="ctr">
                     <a:lnL w="6350" cap="flat" cmpd="sng" algn="ctr">
                       <a:solidFill>
                         <a:srgbClr val="BFBFBF"/>
@@ -18587,7 +18623,7 @@
                         <a:buNone/>
                       </a:pPr>
                       <a:r>
-                        <a:rPr lang="en-US" sz="1050" dirty="0">
+                        <a:rPr lang="en-US" sz="950" dirty="0">
                           <a:solidFill>
                             <a:srgbClr val="1F1F1F"/>
                           </a:solidFill>
@@ -18595,16 +18631,213 @@
                           <a:ea typeface="Calibri" pitchFamily="34" charset="-122"/>
                           <a:cs typeface="Calibri" pitchFamily="34" charset="-120"/>
                         </a:rPr>
-                        <a:t>Keeps every real applicant; lifted recall by 23 points for logistic regression and 9 for the forest</a:t>
+                        <a:t>Keeps every real applicant; class weights lifted recall by 23 points for logistic regression and 9 for the forest at the 0.5 cut-off, but added nothing once the threshold was chosen on cost, so the final forest is unweighted</a:t>
                       </a:r>
-                      <a:endParaRPr lang="en-US" sz="1050" dirty="0">
+                      <a:endParaRPr lang="en-US" sz="950" dirty="0">
                         <a:latin typeface="Calibri" charset="0"/>
                         <a:ea typeface="Calibri" charset="0"/>
                         <a:cs typeface="Calibri" charset="0"/>
                       </a:endParaRPr>
                     </a:p>
                   </a:txBody>
-                  <a:tcPr marL="45720" marR="45720" marT="45720" marB="45720" anchor="ctr">
+                  <a:tcPr marL="36576" marR="36576" marT="36576" marB="36576" anchor="ctr">
+                    <a:lnL w="6350" cap="flat" cmpd="sng" algn="ctr">
+                      <a:solidFill>
+                        <a:srgbClr val="BFBFBF"/>
+                      </a:solidFill>
+                      <a:prstDash val="solid"/>
+                      <a:round/>
+                      <a:headEnd type="none" w="med" len="med"/>
+                      <a:tailEnd type="none" w="med" len="med"/>
+                    </a:lnL>
+                    <a:lnR w="6350" cap="flat" cmpd="sng" algn="ctr">
+                      <a:solidFill>
+                        <a:srgbClr val="BFBFBF"/>
+                      </a:solidFill>
+                      <a:prstDash val="solid"/>
+                      <a:round/>
+                      <a:headEnd type="none" w="med" len="med"/>
+                      <a:tailEnd type="none" w="med" len="med"/>
+                    </a:lnR>
+                    <a:lnT w="6350" cap="flat" cmpd="sng" algn="ctr">
+                      <a:solidFill>
+                        <a:srgbClr val="BFBFBF"/>
+                      </a:solidFill>
+                      <a:prstDash val="solid"/>
+                      <a:round/>
+                      <a:headEnd type="none" w="med" len="med"/>
+                      <a:tailEnd type="none" w="med" len="med"/>
+                    </a:lnT>
+                    <a:lnB w="6350" cap="flat" cmpd="sng" algn="ctr">
+                      <a:solidFill>
+                        <a:srgbClr val="BFBFBF"/>
+                      </a:solidFill>
+                      <a:prstDash val="solid"/>
+                      <a:round/>
+                      <a:headEnd type="none" w="med" len="med"/>
+                      <a:tailEnd type="none" w="med" len="med"/>
+                    </a:lnB>
+                  </a:tcPr>
+                </a:tc>
+              </a:tr>
+              <a:tr h="0">
+                <a:tc>
+                  <a:txBody>
+                    <a:bodyPr/>
+                    <a:lstStyle/>
+                    <a:p>
+                      <a:pPr algn="l" indent="0" marL="0">
+                        <a:buNone/>
+                      </a:pPr>
+                      <a:r>
+                        <a:rPr lang="en-US" sz="950" dirty="0">
+                          <a:solidFill>
+                            <a:srgbClr val="1F1F1F"/>
+                          </a:solidFill>
+                          <a:latin typeface="Calibri" pitchFamily="34" charset="0"/>
+                          <a:ea typeface="Calibri" pitchFamily="34" charset="-122"/>
+                          <a:cs typeface="Calibri" pitchFamily="34" charset="-120"/>
+                        </a:rPr>
+                        <a:t>Model inputs</a:t>
+                      </a:r>
+                      <a:endParaRPr lang="en-US" sz="950" dirty="0">
+                        <a:latin typeface="Calibri" charset="0"/>
+                        <a:ea typeface="Calibri" charset="0"/>
+                        <a:cs typeface="Calibri" charset="0"/>
+                      </a:endParaRPr>
+                    </a:p>
+                  </a:txBody>
+                  <a:tcPr marL="36576" marR="36576" marT="36576" marB="36576" anchor="ctr">
+                    <a:lnL w="6350" cap="flat" cmpd="sng" algn="ctr">
+                      <a:solidFill>
+                        <a:srgbClr val="BFBFBF"/>
+                      </a:solidFill>
+                      <a:prstDash val="solid"/>
+                      <a:round/>
+                      <a:headEnd type="none" w="med" len="med"/>
+                      <a:tailEnd type="none" w="med" len="med"/>
+                    </a:lnL>
+                    <a:lnR w="6350" cap="flat" cmpd="sng" algn="ctr">
+                      <a:solidFill>
+                        <a:srgbClr val="BFBFBF"/>
+                      </a:solidFill>
+                      <a:prstDash val="solid"/>
+                      <a:round/>
+                      <a:headEnd type="none" w="med" len="med"/>
+                      <a:tailEnd type="none" w="med" len="med"/>
+                    </a:lnR>
+                    <a:lnT w="6350" cap="flat" cmpd="sng" algn="ctr">
+                      <a:solidFill>
+                        <a:srgbClr val="BFBFBF"/>
+                      </a:solidFill>
+                      <a:prstDash val="solid"/>
+                      <a:round/>
+                      <a:headEnd type="none" w="med" len="med"/>
+                      <a:tailEnd type="none" w="med" len="med"/>
+                    </a:lnT>
+                    <a:lnB w="6350" cap="flat" cmpd="sng" algn="ctr">
+                      <a:solidFill>
+                        <a:srgbClr val="BFBFBF"/>
+                      </a:solidFill>
+                      <a:prstDash val="solid"/>
+                      <a:round/>
+                      <a:headEnd type="none" w="med" len="med"/>
+                      <a:tailEnd type="none" w="med" len="med"/>
+                    </a:lnB>
+                  </a:tcPr>
+                </a:tc>
+                <a:tc>
+                  <a:txBody>
+                    <a:bodyPr/>
+                    <a:lstStyle/>
+                    <a:p>
+                      <a:pPr algn="l" indent="0" marL="0">
+                        <a:buNone/>
+                      </a:pPr>
+                      <a:r>
+                        <a:rPr lang="en-US" sz="950" dirty="0">
+                          <a:solidFill>
+                            <a:srgbClr val="1F1F1F"/>
+                          </a:solidFill>
+                          <a:latin typeface="Calibri" pitchFamily="34" charset="0"/>
+                          <a:ea typeface="Calibri" pitchFamily="34" charset="-122"/>
+                          <a:cs typeface="Calibri" pitchFamily="34" charset="-120"/>
+                        </a:rPr>
+                        <a:t>27 columns: the 10 attributes, 11 missing flags and 6 one-hot indicators (REASON HomeImp; JOB Office, Other, ProfExe, Sales, Self)</a:t>
+                      </a:r>
+                      <a:endParaRPr lang="en-US" sz="950" dirty="0">
+                        <a:latin typeface="Calibri" charset="0"/>
+                        <a:ea typeface="Calibri" charset="0"/>
+                        <a:cs typeface="Calibri" charset="0"/>
+                      </a:endParaRPr>
+                    </a:p>
+                  </a:txBody>
+                  <a:tcPr marL="36576" marR="36576" marT="36576" marB="36576" anchor="ctr">
+                    <a:lnL w="6350" cap="flat" cmpd="sng" algn="ctr">
+                      <a:solidFill>
+                        <a:srgbClr val="BFBFBF"/>
+                      </a:solidFill>
+                      <a:prstDash val="solid"/>
+                      <a:round/>
+                      <a:headEnd type="none" w="med" len="med"/>
+                      <a:tailEnd type="none" w="med" len="med"/>
+                    </a:lnL>
+                    <a:lnR w="6350" cap="flat" cmpd="sng" algn="ctr">
+                      <a:solidFill>
+                        <a:srgbClr val="BFBFBF"/>
+                      </a:solidFill>
+                      <a:prstDash val="solid"/>
+                      <a:round/>
+                      <a:headEnd type="none" w="med" len="med"/>
+                      <a:tailEnd type="none" w="med" len="med"/>
+                    </a:lnR>
+                    <a:lnT w="6350" cap="flat" cmpd="sng" algn="ctr">
+                      <a:solidFill>
+                        <a:srgbClr val="BFBFBF"/>
+                      </a:solidFill>
+                      <a:prstDash val="solid"/>
+                      <a:round/>
+                      <a:headEnd type="none" w="med" len="med"/>
+                      <a:tailEnd type="none" w="med" len="med"/>
+                    </a:lnT>
+                    <a:lnB w="6350" cap="flat" cmpd="sng" algn="ctr">
+                      <a:solidFill>
+                        <a:srgbClr val="BFBFBF"/>
+                      </a:solidFill>
+                      <a:prstDash val="solid"/>
+                      <a:round/>
+                      <a:headEnd type="none" w="med" len="med"/>
+                      <a:tailEnd type="none" w="med" len="med"/>
+                    </a:lnB>
+                  </a:tcPr>
+                </a:tc>
+                <a:tc>
+                  <a:txBody>
+                    <a:bodyPr/>
+                    <a:lstStyle/>
+                    <a:p>
+                      <a:pPr algn="l" indent="0" marL="0">
+                        <a:buNone/>
+                      </a:pPr>
+                      <a:r>
+                        <a:rPr lang="en-US" sz="950" dirty="0">
+                          <a:solidFill>
+                            <a:srgbClr val="1F1F1F"/>
+                          </a:solidFill>
+                          <a:latin typeface="Calibri" pitchFamily="34" charset="0"/>
+                          <a:ea typeface="Calibri" pitchFamily="34" charset="-122"/>
+                          <a:cs typeface="Calibri" pitchFamily="34" charset="-120"/>
+                        </a:rPr>
+                        <a:t>Every input to the final model is named in the notebook's final-pipeline cell, with the imputation values and model settings</a:t>
+                      </a:r>
+                      <a:endParaRPr lang="en-US" sz="950" dirty="0">
+                        <a:latin typeface="Calibri" charset="0"/>
+                        <a:ea typeface="Calibri" charset="0"/>
+                        <a:cs typeface="Calibri" charset="0"/>
+                      </a:endParaRPr>
+                    </a:p>
+                  </a:txBody>
+                  <a:tcPr marL="36576" marR="36576" marT="36576" marB="36576" anchor="ctr">
                     <a:lnL w="6350" cap="flat" cmpd="sng" algn="ctr">
                       <a:solidFill>
                         <a:srgbClr val="BFBFBF"/>
@@ -19174,7 +19407,7 @@
                   <a:schemeClr val="tx1"/>
                 </a:solidFill>
               </a:rPr>
-              <a:t>indicative annual benefit on 6,000 applications, from roughly $10.8M of default-related cost down to about $1.9M.</a:t>
+              <a:t>indicative annual benefit on 6,000 applications, from roughly $10.8M of default-related cost down to about $1.8M.</a:t>
             </a:r>
             <a:endParaRPr lang="en-US" sz="1250" dirty="0"/>
           </a:p>
@@ -21997,7 +22230,7 @@
                   <a:schemeClr val="tx1"/>
                 </a:solidFill>
               </a:rPr>
-              <a:t>Chosen on out-of-fold expected cost (training data only), with its threshold moved to 0.25, it catches 93% at 67% precision on the test set: the lowest cost of any option.</a:t>
+              <a:t>The final choice was made on repeated out-of-fold expected cost (training data only): once the threshold is tuned, class weights add nothing, and the plain forest at a 0.15 cut-off catches 93% at 68% precision on the test set, the lowest cost of any option.</a:t>
             </a:r>
             <a:endParaRPr lang="en-US" sz="1200" dirty="0"/>
           </a:p>

--- a/presentation/Loan_Default_Prediction_Presentation.pptx
+++ b/presentation/Loan_Default_Prediction_Presentation.pptx
@@ -125,26 +125,26 @@
   <p:extLst>
     <p:ext uri="{521415D9-36F7-43E2-AB2F-B90AF26B5E84}">
       <p14:sectionLst xmlns:p14="http://schemas.microsoft.com/office/powerpoint/2010/main">
-        <p14:section name="Opening" id="{d39a6423-f61b-2f1b-9f56-2226631a42d8}">
+        <p14:section name="Opening" id="{4c3d3f0e-b45f-31bc-534b-45cb677e9f0c}">
           <p14:sldIdLst>
             <p14:sldId id="256"/>
             <p14:sldId id="257"/>
           </p14:sldIdLst>
         </p14:section>
-        <p14:section name="Problem and approach" id="{77b64ded-e811-a58f-bf76-166cf9d2f683}">
+        <p14:section name="Problem and approach" id="{71200826-a01d-df3a-8a22-21288be01514}">
           <p14:sldIdLst>
             <p14:sldId id="258"/>
             <p14:sldId id="259"/>
           </p14:sldIdLst>
         </p14:section>
-        <p14:section name="Key insights" id="{7eb9c2c9-21a1-2229-d92a-33ba2c93ae2f}">
+        <p14:section name="Key insights" id="{f19c877a-acc0-e72a-31ab-e6488938562c}">
           <p14:sldIdLst>
             <p14:sldId id="260"/>
             <p14:sldId id="261"/>
             <p14:sldId id="262"/>
           </p14:sldIdLst>
         </p14:section>
-        <p14:section name="Modelling" id="{a045cb2a-956b-3451-05f8-1a774b70ae48}">
+        <p14:section name="Modelling" id="{61d367d4-085f-db42-cff0-c0f9ba0b7ae6}">
           <p14:sldIdLst>
             <p14:sldId id="263"/>
             <p14:sldId id="264"/>
@@ -152,7 +152,7 @@
             <p14:sldId id="266"/>
           </p14:sldIdLst>
         </p14:section>
-        <p14:section name="Recommendations" id="{428c9c33-a703-851a-233b-a0878122dc10}">
+        <p14:section name="Recommendations" id="{58f6ba84-b8b6-def5-64c8-46ee0e7bc70f}">
           <p14:sldIdLst>
             <p14:sldId id="267"/>
             <p14:sldId id="268"/>
@@ -160,7 +160,7 @@
             <p14:sldId id="270"/>
           </p14:sldIdLst>
         </p14:section>
-        <p14:section name="Appendix" id="{b711a5d9-0451-47b8-367e-dadbb94a660c}">
+        <p14:section name="Appendix" id="{d280a697-0b7b-9871-a73c-4e8258fb681c}">
           <p14:sldIdLst>
             <p14:sldId id="271"/>
             <p14:sldId id="272"/>
@@ -2143,7 +2143,7 @@
                     <c:v>Bagged trees (200)</c:v>
                   </c:pt>
                   <c:pt idx="3">
-                    <c:v>Random Forest (default)</c:v>
+                    <c:v>Random Forest (default; proposed at 0.5)</c:v>
                   </c:pt>
                   <c:pt idx="4">
                     <c:v>Random Forest (class weights)</c:v>
@@ -2244,7 +2244,7 @@
                     <c:v>Bagged trees (200)</c:v>
                   </c:pt>
                   <c:pt idx="3">
-                    <c:v>Random Forest (default)</c:v>
+                    <c:v>Random Forest (default; proposed at 0.5)</c:v>
                   </c:pt>
                   <c:pt idx="4">
                     <c:v>Random Forest (class weights)</c:v>
@@ -3747,7 +3747,7 @@
           <a:p>
             <a:r>
               <a:rPr lang="en-US" dirty="0"/>
-              <a:t>Good morning. In the next eight minutes I will show how a bank can cut its home-equity loan losses by more than three quarters with a model it can also explain to regulators and applicants.</a:t>
+              <a:t>Good morning. In the next eight minutes I will show how a bank can cut the default-related cost of the home-equity loans it approves today by about four fifths with a model it can also explain to regulators and applicants.</a:t>
             </a:r>
             <a:endParaRPr lang="en-US" dirty="0"/>
           </a:p>
@@ -3835,7 +3835,7 @@
           <a:p>
             <a:r>
               <a:rPr lang="en-US" dirty="0"/>
-              <a:t>The proposal. A Random Forest does the scoring; a surrogate decision tree fitted to the forest's own decisions, which reproduces ninety percent of them, provides the plain-language reasons for every decline. On unseen applicants the forest catches 93 percent of defaulters and two out of three flagged applicants really would have defaulted.</a:t>
+              <a:t>The proposal. A Random Forest does the scoring; a surrogate decision tree fitted to the forest's out-of-fold decisions, which reproduces ninety-three percent of them, provides the plain-language reasons for every decline. On unseen applicants the forest catches 93 percent of defaulters and two out of three flagged applicants really would have defaulted.</a:t>
             </a:r>
             <a:endParaRPr lang="en-US" dirty="0"/>
           </a:p>
@@ -3923,7 +3923,7 @@
           <a:p>
             <a:r>
               <a:rPr lang="en-US" dirty="0"/>
-              <a:t>The model outputs a probability, and 0.5 is only a convention. The cut-off was chosen on out-of-fold predictions of the training data, so the test set played no part. Moving it to 0.15 cuts missed defaulters from 63 to 15 per thousand applicants on the test set, at the price of declining 87 instead of 26 good customers. It is the cheapest operating point for any cost ratio between three and six to one, and it matches the textbook break-even for the stated costs, which tells us the forest's probabilities are meaningful.</a:t>
+              <a:t>The model outputs a probability, and 0.5 is only a convention. The cut-off was chosen on out-of-fold predictions of the training data, so the test set played no part. Moving it to 0.15 cuts missed defaulters from 63 to 15 per thousand applicants on the test set, at the price of declining 87 instead of 26 good customers. It is the cheapest operating point for any cost ratio between three and six to one, and it held on a finer grid and on other train/test splits. It sits just below the textbook break-even of 0.18 for a perfectly calibrated score because the forest's scores understate risk in the decision range: applicants scored fifteen to twenty percent defaulted about twenty-three percent of the time.</a:t>
             </a:r>
             <a:endParaRPr lang="en-US" dirty="0"/>
           </a:p>
@@ -4099,7 +4099,7 @@
           <a:p>
             <a:r>
               <a:rPr lang="en-US" dirty="0"/>
-              <a:t>Implementation in three phases: prepare, shadow and pilot, then scale. And two policy rules the bank can adopt immediately, with or without the model: a debt-to-income limit of 45 percent and a hard look at anyone with two or more delinquencies or derogatory reports.</a:t>
+              <a:t>Implementation in three phases: prepare, shadow and pilot, then scale. And two policy rules the bank can adopt immediately, with or without the model: a debt-to-income limit of 45 percent and a referral to an underwriter for anyone with two or more delinquencies or derogatory reports, cut-offs read straight from the observed default rates.</a:t>
             </a:r>
             <a:endParaRPr lang="en-US" dirty="0"/>
           </a:p>
@@ -5155,7 +5155,7 @@
           <a:p>
             <a:r>
               <a:rPr lang="en-US" dirty="0"/>
-              <a:t>Three supporting drivers. A long credit history protects. Small loans are the riskiest, not the safest. Occupation matters a little; at the usual threshold removing it changes performance by about a point, and the fair-lending review decides whether it stays in.</a:t>
+              <a:t>Three supporting drivers. A long credit history protects. Small loans are the riskiest, not the safest. Occupation matters a little: removing it raises the expected cost of credit errors by about 10 percent, and the fair-lending review decides whether it stays in.</a:t>
             </a:r>
             <a:endParaRPr lang="en-US" dirty="0"/>
           </a:p>
@@ -5331,7 +5331,7 @@
           <a:p>
             <a:r>
               <a:rPr lang="en-US" dirty="0"/>
-              <a:t>Eleven model variants were built; these six tell the story. At the usual cut-off the forest with class weights has the best balance and ranks applicants among the best. The final configuration and its threshold were then selected together on repeated out-of-fold expected cost using training data only. Class weights turned out to add nothing once the cut-off is tuned, so the plain forest at a 0.15 cut-off was chosen; on the test set it catches 93 percent of defaulters while two thirds of the flagged applicants really would have defaulted.</a:t>
+              <a:t>Eleven model variants were built; these six tell the story. At the usual cut-off the forest with class weights has the best balance and ranks applicants among the best. The final configuration and its threshold were then selected together on repeated out-of-fold expected cost using training data only. The rule was fixed beforehand: lowest average cost of mistakes, and the simplest set-up when several are within run-to-run noise. Three forests tied within that noise, so class weights made no measurable difference once the cut-off is tuned, and the plain forest at a 0.15 cut-off was chosen; on the test set it catches 93 percent of defaulters while two thirds of the flagged applicants really would have defaulted. At their own best cut-offs the logistic regression and the tree cost 550 and 607 thousand dollars per thousand applicants against 317 thousand for the forest, so the forest also wins on the cost yardstick.</a:t>
             </a:r>
             <a:endParaRPr lang="en-US" dirty="0"/>
           </a:p>
@@ -6313,7 +6313,7 @@
                   <a:schemeClr val="tx1"/>
                 </a:solidFill>
               </a:rPr>
-              <a:t>Inputs: all 27 (10 financial attributes, 11 missing-value flags, occupation and loan purpose). Fallback without occupation and purpose: 12 inputs, about a fifth more credit-error cost.</a:t>
+              <a:t>Inputs: all 27 (10 financial attributes, 11 missing-value flags, occupation and loan purpose). Fallback without occupation: 21 inputs, about 10% more credit-error cost.</a:t>
             </a:r>
             <a:endParaRPr lang="en-US" sz="1150" dirty="0"/>
           </a:p>
@@ -6331,7 +6331,7 @@
                   <a:schemeClr val="tx1"/>
                 </a:solidFill>
               </a:rPr>
-              <a:t>Decision threshold 0.15, chosen together with the configuration by minimising expected cost on repeated out-of-fold predictions of the training rows (stable for cost ratios 3:1 to 6:1; matches the 0.18 break-even for the stated costs); approve / refer / decline bands keep an underwriter in the loop.</a:t>
+              <a:t>Decision threshold 0.15, chosen together with the configuration by minimising expected cost on repeated out-of-fold predictions of the training rows (stable for cost ratios 3:1 to 6:1 and across train/test splits); approve / refer / decline bands (about 69% / 7% / 24% of applicants) keep an underwriter in the loop.</a:t>
             </a:r>
             <a:endParaRPr lang="en-US" sz="1150" dirty="0"/>
           </a:p>
@@ -6349,7 +6349,7 @@
                   <a:schemeClr val="tx1"/>
                 </a:solidFill>
               </a:rPr>
-              <a:t>Explanation layer: a depth-4 surrogate tree fitted to the forest's own decisions reproduces 90% of them; its rules (ratio missing or above 45%, two or more delinquent lines, credit-history length, derogatory reports) supply the ECOA adverse-action reasons.</a:t>
+              <a:t>Explanation layer: a depth-4 surrogate tree fitted to the forest's out-of-fold decisions reproduces 93% of them; its rules (ratio missing; ratio above 44%; a delinquent line together with a derogatory report) supply the ECOA adverse-action reasons.</a:t>
             </a:r>
             <a:endParaRPr lang="en-US" sz="1150" dirty="0"/>
           </a:p>
@@ -6691,7 +6691,7 @@
                   <a:schemeClr val="tx1"/>
                 </a:solidFill>
               </a:rPr>
-              <a:t>Per 1,000 applicants: about 185 of 200 defaulters flagged in advance, 15 missed, 87 good customers referred or declined.</a:t>
+              <a:t>Per 1,000 applicants: 185 of 200 defaulters flagged in advance, 15 missed, 87 good customers referred or declined; 27% of applicants flagged, 73% approved.</a:t>
             </a:r>
             <a:endParaRPr lang="en-US" sz="1150" dirty="0"/>
           </a:p>
@@ -7129,7 +7129,7 @@
                   <a:schemeClr val="accent6"/>
                 </a:solidFill>
               </a:rPr>
-              <a:t>Curves: out-of-fold predictions on the training rows, which is where the threshold was chosen. Cards: test set, per 1,000 applicants; cost assumes $9,000 per missed defaulter and $2,000 per wrongly declined customer. The optimum stays at 0.15 for cost ratios from 3:1 to 6:1 and matches the textbook break-even (0.18) for these costs.</a:t>
+              <a:t>Curves: out-of-fold predictions on the training rows, which is where the threshold was chosen. Cards: test set, per 1,000 applicants; cost assumes $9,000 per missed defaulter and $2,000 per wrongly declined customer. The optimum stays at 0.15 for cost ratios from 3:1 to 6:1, on a finer grid and on other train/test splits; it sits just below the textbook break-even (0.18) because the scores understate risk.</a:t>
             </a:r>
             <a:endParaRPr lang="en-US" sz="900" dirty="0"/>
           </a:p>
@@ -8401,7 +8401,7 @@
                   <a:schemeClr val="tx1"/>
                 </a:solidFill>
               </a:rPr>
-              <a:t>Assumptions: 6,000 applications a year, defaulted loans average $16,900 with about half recovered ($9,000 per missed defaulter), forgone margin about $2,000 per declined good customer, production performance equal to test performance.</a:t>
+              <a:t>Assumptions: 6,000 applications a year, defaulted loans average $16,900 with about half recovered ($9,000 per missed defaulter), forgone margin about $2,000 per declined good customer, production performance equal to test performance; measured as an extra screen on the loans the bank approves today, before mandatory income verification.</a:t>
             </a:r>
             <a:endParaRPr lang="en-US" sz="1100" dirty="0"/>
           </a:p>
@@ -8745,7 +8745,7 @@
                   <a:schemeClr val="tx1"/>
                 </a:solidFill>
               </a:rPr>
-              <a:t>Calibrate the threshold with real loss and margin figures</a:t>
+              <a:t>Confirm the threshold with real loss and margin figures</a:t>
             </a:r>
             <a:endParaRPr lang="en-US" sz="1100" dirty="0"/>
           </a:p>
@@ -8945,7 +8945,7 @@
                   <a:schemeClr val="tx1"/>
                 </a:solidFill>
               </a:rPr>
-              <a:t>Compare outcomes, tune the approve / refer / decline bands</a:t>
+              <a:t>Re-train once verified ratios flow in; tune the approve / refer / decline bands</a:t>
             </a:r>
             <a:endParaRPr lang="en-US" sz="1100" dirty="0"/>
           </a:p>
@@ -9239,7 +9239,7 @@
                   <a:schemeClr val="tx1"/>
                 </a:solidFill>
               </a:rPr>
-              <a:t>Decline or escalate when the debt-to-income ratio is above 45%, when there are two or more delinquent credit lines, or two or more major derogatory reports.</a:t>
+              <a:t>Decline or escalate above a 45% debt-to-income ratio; refer to an underwriter with two or more delinquent credit lines or two or more major derogatory reports (45% and 51%+ observed default). Hard rules take precedence over the score.</a:t>
             </a:r>
             <a:endParaRPr lang="en-US" sz="1150" dirty="0"/>
           </a:p>
@@ -9486,7 +9486,7 @@
                   <a:schemeClr val="tx1"/>
                 </a:solidFill>
               </a:rPr>
-              <a:t>The 'ratio missing' signal will change once verification is mandatory. Re-train after the rule is in place.</a:t>
+              <a:t>The 'ratio missing' signal will change once verification is mandatory: re-train on the verified population before go-live. On applicants with a recorded ratio the model already catches 83% at 80% precision.</a:t>
             </a:r>
             <a:endParaRPr lang="en-US" sz="1100" dirty="0"/>
           </a:p>
@@ -9522,7 +9522,7 @@
                   <a:schemeClr val="tx1"/>
                 </a:solidFill>
               </a:rPr>
-              <a:t>Fair lending: disparate-impact testing before launch and annually; a 12-input fallback without occupation and loan purpose is ready if required.</a:t>
+              <a:t>Fair lending: the 0.15 cut-off wrongly flags about 11% of creditworthy applicants (3% at 0.5), so disparate-impact testing before launch, annually and whenever the cut-off moves; a 21-input fallback without occupation is ready (about 10% more credit-error cost).</a:t>
             </a:r>
             <a:endParaRPr lang="en-US" sz="1100" dirty="0"/>
           </a:p>
@@ -16014,7 +16014,7 @@
                   <a:schemeClr val="accent6"/>
                 </a:solidFill>
               </a:rPr>
-              <a:t>Test set of 1,788 applicants at the 0.5 threshold except the proposed model. Train recall of 1.000 marks un-pruned models that memorised the training data. The proposed model (the default forest with its threshold moved) and its threshold were selected on repeated out-of-fold expected cost (training rows only); its mean out-of-fold ROC-AUC was 0.961 against 0.963 on test.</a:t>
+              <a:t>Test set of 1,788 applicants at the 0.5 threshold except the proposed model. Train recall of 1.000 marks un-pruned models that memorised the training data. The proposed model (the default forest with its threshold moved) and its threshold were selected on repeated out-of-fold expected cost (training rows only) under a rule fixed beforehand: lowest mean cost, simplest set-up among those within one standard error (about $10,500). Mean out-of-fold ROC-AUC 0.961 against 0.963 on test.</a:t>
             </a:r>
             <a:endParaRPr lang="en-US" sz="900" dirty="0"/>
           </a:p>
@@ -16232,7 +16232,7 @@
                   <a:schemeClr val="tx1"/>
                 </a:solidFill>
               </a:rPr>
-              <a:t>Occupation, loan purpose and minor flags matter little individually, yet dropping them raised out-of-fold expected cost by about a fifth, so they stay subject to the fair-lending review.</a:t>
+              <a:t>Occupation, loan purpose and minor flags matter little individually, yet dropping them raised out-of-fold expected cost by about a fifth, and dropping occupation alone by about 10%, so they stay subject to the fair-lending review.</a:t>
             </a:r>
             <a:endParaRPr lang="en-US" sz="1100" dirty="0"/>
           </a:p>
@@ -16491,7 +16491,7 @@
                   <a:schemeClr val="tx1"/>
                 </a:solidFill>
               </a:rPr>
-              <a:t>Yes: high-risk branch (62% defaulted). Flag, unless there is no delinquent line, no derogatory report and more than about 15 years of credit history.</a:t>
+              <a:t>Yes: flag, whatever the credit history (62% of these applicants defaulted). Verify income before approving.</a:t>
             </a:r>
             <a:endParaRPr lang="en-US" sz="1200" dirty="0"/>
           </a:p>
@@ -16611,7 +16611,7 @@
                   <a:schemeClr val="accent1"/>
                 </a:solidFill>
               </a:rPr>
-              <a:t>If recorded, is the ratio above about 45%?</a:t>
+              <a:t>If recorded, is the ratio above about 44%?</a:t>
             </a:r>
             <a:endParaRPr lang="en-US" sz="1250" dirty="0"/>
           </a:p>
@@ -16647,7 +16647,7 @@
                   <a:schemeClr val="tx1"/>
                 </a:solidFill>
               </a:rPr>
-              <a:t>Yes: flag, whatever the credit history (87-100% of these applicants defaulted).</a:t>
+              <a:t>Yes: flag (87-100% of applicants above 45% defaulted).</a:t>
             </a:r>
             <a:endParaRPr lang="en-US" sz="1200" dirty="0"/>
           </a:p>
@@ -16767,7 +16767,7 @@
                   <a:schemeClr val="accent1"/>
                 </a:solidFill>
               </a:rPr>
-              <a:t>Ratio at or below 45%: two or more delinquent credit lines?</a:t>
+              <a:t>Ratio at or below 44%: a delinquent credit line together with a major derogatory report?</a:t>
             </a:r>
             <a:endParaRPr lang="en-US" sz="1250" dirty="0"/>
           </a:p>
@@ -16803,7 +16803,7 @@
                   <a:schemeClr val="tx1"/>
                 </a:solidFill>
               </a:rPr>
-              <a:t>Yes, with a mortgage balance below about $45,500: flag. None or one: clear; applicants with no delinquent line default only about 4-5% of the time.</a:t>
+              <a:t>Yes: flag. Otherwise clear; applicants with no delinquent line default only about 4-5% of the time.</a:t>
             </a:r>
             <a:endParaRPr lang="en-US" sz="1200" dirty="0"/>
           </a:p>
@@ -16923,7 +16923,7 @@
                   <a:schemeClr val="accent1"/>
                 </a:solidFill>
               </a:rPr>
-              <a:t>Unverified ratio: how long is the credit history, any derogatory report?</a:t>
+              <a:t>How faithful are these rules?</a:t>
             </a:r>
             <a:endParaRPr lang="en-US" sz="1250" dirty="0"/>
           </a:p>
@@ -16959,7 +16959,7 @@
                   <a:schemeClr val="tx1"/>
                 </a:solidFill>
               </a:rPr>
-              <a:t>A history under about 15 years, or any derogatory report with a longer history, tips an unverified-ratio applicant to flag.</a:t>
+              <a:t>They reproduce 93% of the forest's decisions on unseen applicants (73% for never flagging; kappa 0.82); the forest's own top risk drivers explain the remaining 7%.</a:t>
             </a:r>
             <a:endParaRPr lang="en-US" sz="1200" dirty="0"/>
           </a:p>
@@ -17115,7 +17115,7 @@
                   <a:schemeClr val="tx1"/>
                 </a:solidFill>
               </a:rPr>
-              <a:t>Loan size, occupation and loan purpose do not appear: they matter only in combination inside the forest, which supplies the per-applicant reason codes.</a:t>
+              <a:t>Loan size, credit-history length, occupation and loan purpose do not change the outcome in the surrogate: they matter only in combination inside the forest, which supplies the per-applicant reason codes.</a:t>
             </a:r>
             <a:endParaRPr lang="en-US" sz="1200" dirty="0"/>
           </a:p>
@@ -17151,7 +17151,7 @@
                   <a:schemeClr val="accent6"/>
                 </a:solidFill>
               </a:rPr>
-              <a:t>Surrogate: depth-4 tree, minimum 20 applicants per leaf, fitted to the forest's flag/clear decisions at threshold 0.15 on the training rows; it agrees with the forest on 90% of test decisions. The stand-alone tuned tree (test recall 82%, precision 53%) found the same drivers.</a:t>
+              <a:t>Surrogate: depth-4 tree, minimum 20 applicants per leaf, fitted to the forest's out-of-fold flag/clear decisions at threshold 0.15 on the training rows; it agrees with the forest on 93% of test decisions (73% for a rule that never flags). The stand-alone tuned tree (test recall 82%, precision 53%) found the same drivers.</a:t>
             </a:r>
             <a:endParaRPr lang="en-US" sz="900" dirty="0"/>
           </a:p>
@@ -18631,7 +18631,7 @@
                           <a:ea typeface="Calibri" pitchFamily="34" charset="-122"/>
                           <a:cs typeface="Calibri" pitchFamily="34" charset="-120"/>
                         </a:rPr>
-                        <a:t>Keeps every real applicant; class weights lifted recall by 23 points for logistic regression and 9 for the forest at the 0.5 cut-off, but added nothing once the threshold was chosen on cost, so the final forest is unweighted</a:t>
+                        <a:t>Keeps every real applicant; class weights lifted recall by 23 points for logistic regression and 9 for the forest at the 0.5 cut-off, but made no measurable difference once the threshold was chosen on cost, so the final forest is unweighted</a:t>
                       </a:r>
                       <a:endParaRPr lang="en-US" sz="950" dirty="0">
                         <a:latin typeface="Calibri" charset="0"/>
@@ -21508,7 +21508,7 @@
                   <a:schemeClr val="tx1"/>
                 </a:solidFill>
               </a:rPr>
-              <a:t>Default rate (%) by group. Applicants with under five years of credit history default four times as often as those with twenty-plus years. Loans under $5,000 default 57% of the time. Occupation shifts risk moderately; on its own it adds little once financial behaviour is known, and it stays in the model only subject to the fair-lending review.</a:t>
+              <a:t>Default rate (%) by group. Applicants with under five years of credit history default four times as often as those with twenty-plus years. Loans under $5,000 default 57% of the time. Occupation shifts risk moderately; on its own it adds little at the usual cut-off, but removing it from the final model raises the expected cost of credit errors by about 10%, so it stays in, subject to the fair-lending review.</a:t>
             </a:r>
             <a:endParaRPr lang="en-US" sz="1200" dirty="0"/>
           </a:p>
@@ -22212,7 +22212,7 @@
                   <a:schemeClr val="tx1"/>
                 </a:solidFill>
               </a:rPr>
-              <a:t>The class-weighted forest catches 77% at 77% precision with a ROC-AUC of 0.96: among the best at ranking applicants by risk.</a:t>
+              <a:t>The class-weighted forest: 77% recall at 77% precision, ROC-AUC 0.96, among the best at ranking applicants by risk.</a:t>
             </a:r>
             <a:endParaRPr lang="en-US" sz="1200" dirty="0"/>
           </a:p>
@@ -22230,7 +22230,7 @@
                   <a:schemeClr val="tx1"/>
                 </a:solidFill>
               </a:rPr>
-              <a:t>The final choice was made on repeated out-of-fold expected cost (training data only): once the threshold is tuned, class weights add nothing, and the plain forest at a 0.15 cut-off catches 93% at 68% precision on the test set, the lowest cost of any option.</a:t>
+              <a:t>Final choice on the expected cost of mistakes (training data only), by a rule fixed beforehand: lowest average cost, simplest if within noise. Three forests tied; the plain forest at 0.15 catches 93% at 68% precision on test.</a:t>
             </a:r>
             <a:endParaRPr lang="en-US" sz="1200" dirty="0"/>
           </a:p>

--- a/presentation/Loan_Default_Prediction_Presentation.pptx
+++ b/presentation/Loan_Default_Prediction_Presentation.pptx
@@ -125,26 +125,26 @@
   <p:extLst>
     <p:ext uri="{521415D9-36F7-43E2-AB2F-B90AF26B5E84}">
       <p14:sectionLst xmlns:p14="http://schemas.microsoft.com/office/powerpoint/2010/main">
-        <p14:section name="Opening" id="{4c3d3f0e-b45f-31bc-534b-45cb677e9f0c}">
+        <p14:section name="Opening" id="{0922af18-7460-52ec-e2f5-8842d22753ab}">
           <p14:sldIdLst>
             <p14:sldId id="256"/>
             <p14:sldId id="257"/>
           </p14:sldIdLst>
         </p14:section>
-        <p14:section name="Problem and approach" id="{71200826-a01d-df3a-8a22-21288be01514}">
+        <p14:section name="Problem and approach" id="{470d4d38-3160-30fc-ef66-4b6ba58a3557}">
           <p14:sldIdLst>
             <p14:sldId id="258"/>
             <p14:sldId id="259"/>
           </p14:sldIdLst>
         </p14:section>
-        <p14:section name="Key insights" id="{f19c877a-acc0-e72a-31ab-e6488938562c}">
+        <p14:section name="Key insights" id="{99d947e4-360e-897a-752c-5804141b3078}">
           <p14:sldIdLst>
             <p14:sldId id="260"/>
             <p14:sldId id="261"/>
             <p14:sldId id="262"/>
           </p14:sldIdLst>
         </p14:section>
-        <p14:section name="Modelling" id="{61d367d4-085f-db42-cff0-c0f9ba0b7ae6}">
+        <p14:section name="Modelling" id="{b99e9f6c-109c-3ca0-34d3-0c7201ae9aab}">
           <p14:sldIdLst>
             <p14:sldId id="263"/>
             <p14:sldId id="264"/>
@@ -152,7 +152,7 @@
             <p14:sldId id="266"/>
           </p14:sldIdLst>
         </p14:section>
-        <p14:section name="Recommendations" id="{58f6ba84-b8b6-def5-64c8-46ee0e7bc70f}">
+        <p14:section name="Recommendations" id="{4c47a976-82db-155e-284f-b6ced5cec472}">
           <p14:sldIdLst>
             <p14:sldId id="267"/>
             <p14:sldId id="268"/>
@@ -160,7 +160,7 @@
             <p14:sldId id="270"/>
           </p14:sldIdLst>
         </p14:section>
-        <p14:section name="Appendix" id="{d280a697-0b7b-9871-a73c-4e8258fb681c}">
+        <p14:section name="Appendix" id="{4755cd83-9f89-c594-0753-28bc657bd757}">
           <p14:sldIdLst>
             <p14:sldId id="271"/>
             <p14:sldId id="272"/>
@@ -3747,7 +3747,7 @@
           <a:p>
             <a:r>
               <a:rPr lang="en-US" dirty="0"/>
-              <a:t>Good morning. In the next eight minutes I will show how a bank can cut the default-related cost of the home-equity loans it approves today by about four fifths with a model it can also explain to regulators and applicants.</a:t>
+              <a:t>Good morning. In the next eight minutes I will show how a bank can cut the default-related cost of the home equity loans it approves today. The cut is about four fifths, with a model the bank can also explain to regulators and applicants.</a:t>
             </a:r>
             <a:endParaRPr lang="en-US" dirty="0"/>
           </a:p>
@@ -3835,7 +3835,7 @@
           <a:p>
             <a:r>
               <a:rPr lang="en-US" dirty="0"/>
-              <a:t>The proposal. A Random Forest does the scoring; a surrogate decision tree fitted to the forest's out-of-fold decisions, which reproduces ninety-three percent of them, provides the plain-language reasons for every decline. On unseen applicants the forest catches 93 percent of defaulters and two out of three flagged applicants really would have defaulted.</a:t>
+              <a:t>The proposal. A Random Forest scores the applicants. A surrogate decision tree fitted to the forest's out-of-fold decisions reproduces ninety-three percent of them and provides the plain-language reasons for every decline. On unseen applicants the forest catches 93 percent of defaulters. On the same applicants, two out of three flagged applicants really would have defaulted.</a:t>
             </a:r>
             <a:endParaRPr lang="en-US" dirty="0"/>
           </a:p>
@@ -3923,7 +3923,7 @@
           <a:p>
             <a:r>
               <a:rPr lang="en-US" dirty="0"/>
-              <a:t>The model outputs a probability, and 0.5 is only a convention. The cut-off was chosen on out-of-fold predictions of the training data, so the test set played no part. Moving it to 0.15 cuts missed defaulters from 63 to 15 per thousand applicants on the test set, at the price of declining 87 instead of 26 good customers. It is the cheapest operating point for any cost ratio between three and six to one, and it held on a finer grid and on other train/test splits. It sits just below the textbook break-even of 0.18 for a perfectly calibrated score because the forest's scores understate risk in the decision range: applicants scored fifteen to twenty percent defaulted about twenty-three percent of the time.</a:t>
+              <a:t>The model outputs a probability, and 0.5 is only a convention. We chose the threshold on out-of-fold predictions of the training rows, so the test set played no part. Moving it to 0.15 cuts missed defaulters from 63 to 15 per thousand applicants on the test set. The price is declining 87 instead of 26 good customers. It is the cheapest operating point for any cost ratio between three and six to one. It held on a finer grid and on other train/test splits. It sits just below the textbook break-even of 0.18 for a perfectly calibrated score, because the forest's scores understate risk in the decision range. Applicants scored fifteen to twenty percent defaulted about twenty-three percent of the time.</a:t>
             </a:r>
             <a:endParaRPr lang="en-US" dirty="0"/>
           </a:p>
@@ -4011,7 +4011,7 @@
           <a:p>
             <a:r>
               <a:rPr lang="en-US" dirty="0"/>
-              <a:t>Put together with round-number assumptions, the bank's default-related cost falls from about 10.8 million to about 1.8 million a year on 6,000 applications. Even if the real benefit were a quarter of that, the project pays back inside a year. Finance should replace these assumptions with actual loss and margin figures.</a:t>
+              <a:t>With round-number assumptions, the bank's default-related cost falls from about 10.8 million to about 1.8 million a year on 6,000 applications. Even if the real benefit were a quarter of that, the project repays its cost inside a year. Finance should replace these assumptions with actual loss and margin figures.</a:t>
             </a:r>
             <a:endParaRPr lang="en-US" dirty="0"/>
           </a:p>
@@ -4099,7 +4099,7 @@
           <a:p>
             <a:r>
               <a:rPr lang="en-US" dirty="0"/>
-              <a:t>Implementation in three phases: prepare, shadow and pilot, then scale. And two policy rules the bank can adopt immediately, with or without the model: a debt-to-income limit of 45 percent and a referral to an underwriter for anyone with two or more delinquencies or derogatory reports, cut-offs read straight from the observed default rates.</a:t>
+              <a:t>The roadmap has three phases: prepare, shadow and pilot, then scale. There are two policy rules the bank can adopt immediately, with or without the model. First, set a debt-to-income limit of 45 percent. Second, refer anyone with two or more delinquencies or derogatory reports to an underwriter. We read both thresholds straight from the observed default rates.</a:t>
             </a:r>
             <a:endParaRPr lang="en-US" dirty="0"/>
           </a:p>
@@ -4187,7 +4187,7 @@
           <a:p>
             <a:r>
               <a:rPr lang="en-US" dirty="0"/>
-              <a:t>The main risks are selection bias, because the data only covers approved loans, drift in the missing-value signal once verification becomes mandatory, and fair-lending exposure. Each has a concrete mitigation. Next steps include reject inference, engineered ratios, calibration and time-based validation.</a:t>
+              <a:t>The main risks are selection bias, drift in the missing-value signal, and fair-lending exposure. Selection bias comes from data that covers only approved loans. The drift starts once verification becomes mandatory. Each has a concrete mitigation. Next steps include reject inference, engineered ratios, calibration and time-based validation.</a:t>
             </a:r>
             <a:endParaRPr lang="en-US" dirty="0"/>
           </a:p>
@@ -4715,7 +4715,7 @@
           <a:p>
             <a:r>
               <a:rPr lang="en-US" dirty="0"/>
-              <a:t>Four things to remember. One in five loans goes bad. The biggest red flag is income the bank could not verify. The proposed model catches 93 percent of defaulters before the money leaves the bank. And under reasonable assumptions that is worth about nine million dollars a year.</a:t>
+              <a:t>Four things to remember. One in five loans ends in default. The biggest red flag is income the bank could not check. The proposed model catches 93 percent of defaulters before the money leaves the bank. And under reasonable assumptions that is worth about nine million dollars a year.</a:t>
             </a:r>
             <a:endParaRPr lang="en-US" dirty="0"/>
           </a:p>
@@ -4803,7 +4803,7 @@
           <a:p>
             <a:r>
               <a:rPr lang="en-US" dirty="0"/>
-              <a:t>The business context: profit comes from interest, losses come from defaulters, and the current manual process is slow and inconsistent. The data is 5,960 recent home equity loans with 12 attributes and a 20 percent default rate. Almost half the applications have at least one blank field, which turns out to matter a great deal.</a:t>
+              <a:t>The business context: profit comes from interest, and losses come from defaulters. The current manual process is slow and inconsistent. The data is 5,960 recent home equity loans with 12 attributes and a 20 percent default rate. Almost half the applications have at least one blank field. That matters a great deal.</a:t>
             </a:r>
             <a:endParaRPr lang="en-US" dirty="0"/>
           </a:p>
@@ -4891,7 +4891,7 @@
           <a:p>
             <a:r>
               <a:rPr lang="en-US" dirty="0"/>
-              <a:t>Five steps. Explore the data, prepare it, build linear and non-linear models, measure them on the metric that follows the money, and turn the result into recommendations. The key preparation decision was to keep a flag for every missing field instead of just filling the gaps.</a:t>
+              <a:t>Five steps. Explore the data. Prepare it. Build linear and non-linear models. Measure them on the metric that follows the money. Convert the result into recommendations. The key preparation decision was to keep a flag for every missing field instead of just filling the gaps.</a:t>
             </a:r>
             <a:endParaRPr lang="en-US" dirty="0"/>
           </a:p>
@@ -5067,7 +5067,7 @@
           <a:p>
             <a:r>
               <a:rPr lang="en-US" dirty="0"/>
-              <a:t>Two more drivers that are easy to explain. The debt-to-income ratio is not a slope but a cliff: between 20 and 40 percent, 4 to 7 percent default; above 45 percent, 87 to 100 percent. And repayment history repeats: each delinquent credit line roughly doubles the default rate.</a:t>
+              <a:t>Two more drivers that are easy to explain. The debt-to-income ratio is not a slope but a cliff: between 20 and 40 percent, 4 to 7 percent default. Above 45 percent, 87 to 100 percent default. And repayment history repeats: each delinquent credit line roughly doubles the default rate.</a:t>
             </a:r>
             <a:endParaRPr lang="en-US" dirty="0"/>
           </a:p>
@@ -5155,7 +5155,7 @@
           <a:p>
             <a:r>
               <a:rPr lang="en-US" dirty="0"/>
-              <a:t>Three supporting drivers. A long credit history protects. Small loans are the riskiest, not the safest. Occupation matters a little: removing it raises the expected cost of credit errors by about 10 percent, and the fair-lending review decides whether it stays in.</a:t>
+              <a:t>Three supporting drivers. A long credit history protects. Small loans are the riskiest, not the safest. Occupation matters a little: removing it raises the expected cost of credit errors by about 10 percent. The fair-lending review decides whether it stays in the model.</a:t>
             </a:r>
             <a:endParaRPr lang="en-US" dirty="0"/>
           </a:p>
@@ -5243,7 +5243,7 @@
           <a:p>
             <a:r>
               <a:rPr lang="en-US" dirty="0"/>
-              <a:t>Before comparing models, the yardstick. Approving a future defaulter costs the bank most of the principal; declining a good customer costs only the margin. So the primary metric is recall, the share of defaulters we catch, with precision as the guard-rail against declining everyone.</a:t>
+              <a:t>Before comparing models, the yardstick. Approving a future defaulter costs the bank most of the principal. Declining a good customer costs only the margin. So the primary metric is recall, the share of defaulters we catch, with precision as the guard-rail against declining everyone.</a:t>
             </a:r>
             <a:endParaRPr lang="en-US" dirty="0"/>
           </a:p>
@@ -5331,7 +5331,7 @@
           <a:p>
             <a:r>
               <a:rPr lang="en-US" dirty="0"/>
-              <a:t>Eleven model variants were built; these six tell the story. At the usual cut-off the forest with class weights has the best balance and ranks applicants among the best. The final configuration and its threshold were then selected together on repeated out-of-fold expected cost using training data only. The rule was fixed beforehand: lowest average cost of mistakes, and the simplest set-up when several are within run-to-run noise. Three forests tied within that noise, so class weights made no measurable difference once the cut-off is tuned, and the plain forest at a 0.15 cut-off was chosen; on the test set it catches 93 percent of defaulters while two thirds of the flagged applicants really would have defaulted. At their own best cut-offs the logistic regression and the tree cost 550 and 607 thousand dollars per thousand applicants against 317 thousand for the forest, so the forest also wins on the cost yardstick.</a:t>
+              <a:t>We built eleven model variants. These six tell the story. At the usual threshold the forest with class weights has the best balance and ranks applicants among the best. We then chose the final configuration and its threshold together on repeated out-of-fold expected cost, using training rows only. We fixed the rule beforehand: lowest mean cost of mistakes, and the simplest set-up when several are within run-to-run noise. Three forests tied within that noise, so class weights made no measurable difference once we tune the threshold. We chose the plain forest at a 0.15 threshold. On the test set it catches 93 percent of defaulters, and two thirds of the flagged applicants really would have defaulted. At their own best thresholds the logistic regression and the tree cost 550 and 607 thousand dollars per thousand applicants. The forest costs 317 thousand, so it also wins on the cost yardstick.</a:t>
             </a:r>
             <a:endParaRPr lang="en-US" dirty="0"/>
           </a:p>
@@ -6076,7 +6076,7 @@
                   <a:schemeClr val="bg2"/>
                 </a:solidFill>
               </a:rPr>
-              <a:t>An interpretable credit-scoring model for home equity loan approvals</a:t>
+              <a:t>An interpretable credit-scoring model to approve home equity loans</a:t>
             </a:r>
             <a:endParaRPr lang="en-US" sz="1800" dirty="0"/>
           </a:p>
@@ -6313,7 +6313,7 @@
                   <a:schemeClr val="tx1"/>
                 </a:solidFill>
               </a:rPr>
-              <a:t>Inputs: all 27 (10 financial attributes, 11 missing-value flags, occupation and loan purpose). Fallback without occupation: 21 inputs, about 10% more credit-error cost.</a:t>
+              <a:t>Inputs: all 27 (10 financial attributes, 11 missing-value flags, occupation and loan purpose). Fallback without occupation: 21 inputs, about 10% more expected cost.</a:t>
             </a:r>
             <a:endParaRPr lang="en-US" sz="1150" dirty="0"/>
           </a:p>
@@ -6331,7 +6331,7 @@
                   <a:schemeClr val="tx1"/>
                 </a:solidFill>
               </a:rPr>
-              <a:t>Decision threshold 0.15, chosen together with the configuration by minimising expected cost on repeated out-of-fold predictions of the training rows (stable for cost ratios 3:1 to 6:1 and across train/test splits); approve / refer / decline bands (about 69% / 7% / 24% of applicants) keep an underwriter in the loop.</a:t>
+              <a:t>We chose decision threshold 0.15 together with the configuration to minimise expected cost on repeated out-of-fold predictions of the training rows. It holds for cost ratios 3:1 to 6:1 and across train/test splits. Approve / refer / decline bands (about 69% / 7% / 24% of applicants) keep an underwriter in the loop.</a:t>
             </a:r>
             <a:endParaRPr lang="en-US" sz="1150" dirty="0"/>
           </a:p>
@@ -6349,7 +6349,7 @@
                   <a:schemeClr val="tx1"/>
                 </a:solidFill>
               </a:rPr>
-              <a:t>Explanation layer: a depth-4 surrogate tree fitted to the forest's out-of-fold decisions reproduces 93% of them; its rules (ratio missing; ratio above 44%; a delinquent line together with a derogatory report) supply the ECOA adverse-action reasons.</a:t>
+              <a:t>Explanation layer: a depth-4 surrogate tree fitted to the forest's out-of-fold decisions reproduces 93% of them. Its rules (ratio missing, ratio above 44%, a delinquent line together with a derogatory report) supply the ECOA adverse-action reasons.</a:t>
             </a:r>
             <a:endParaRPr lang="en-US" sz="1150" dirty="0"/>
           </a:p>
@@ -6367,7 +6367,7 @@
                   <a:schemeClr val="tx1"/>
                 </a:solidFill>
               </a:rPr>
-              <a:t>Test set held out before any pre-processing; scored once, after all choices were made on training data.</a:t>
+              <a:t>We scored the reserved test set only once, after all choices.</a:t>
             </a:r>
             <a:endParaRPr lang="en-US" sz="1150" dirty="0"/>
           </a:p>
@@ -6691,7 +6691,7 @@
                   <a:schemeClr val="tx1"/>
                 </a:solidFill>
               </a:rPr>
-              <a:t>Per 1,000 applicants: 185 of 200 defaulters flagged in advance, 15 missed, 87 good customers referred or declined; 27% of applicants flagged, 73% approved.</a:t>
+              <a:t>Per 1,000 applicants: 185 of 200 defaulters flagged in advance, 15 missed, 87 good customers referred or declined. 27% of applicants flagged, 73% approved.</a:t>
             </a:r>
             <a:endParaRPr lang="en-US" sz="1150" dirty="0"/>
           </a:p>
@@ -6799,7 +6799,7 @@
                   <a:srgbClr val="1E2761"/>
                 </a:solidFill>
               </a:rPr>
-              <a:t>Why a 0.15 threshold: the decision cut-off is a business dial, not a constant</a:t>
+              <a:t>Why a 0.15 threshold: it is a business dial, not a constant</a:t>
             </a:r>
             <a:endParaRPr lang="en-US" sz="2400" dirty="0"/>
           </a:p>
@@ -7129,7 +7129,7 @@
                   <a:schemeClr val="accent6"/>
                 </a:solidFill>
               </a:rPr>
-              <a:t>Curves: out-of-fold predictions on the training rows, which is where the threshold was chosen. Cards: test set, per 1,000 applicants; cost assumes $9,000 per missed defaulter and $2,000 per wrongly declined customer. The optimum stays at 0.15 for cost ratios from 3:1 to 6:1, on a finer grid and on other train/test splits; it sits just below the textbook break-even (0.18) because the scores understate risk.</a:t>
+              <a:t>Curves: out-of-fold predictions on the training rows, where we chose the threshold. Cards: test set, per 1,000 applicants. Cost assumes $9,000 per missed defaulter and $2,000 per wrongly declined customer. The optimum stays at 0.15 for cost ratios from 3:1 to 6:1, on a finer grid and on other train/test splits. It sits just below the textbook break-even (0.18) because the scores understate risk.</a:t>
             </a:r>
             <a:endParaRPr lang="en-US" sz="900" dirty="0"/>
           </a:p>
@@ -7624,7 +7624,7 @@
                           <a:ea typeface="Calibri" pitchFamily="34" charset="-122"/>
                           <a:cs typeface="Calibri" pitchFamily="34" charset="-120"/>
                         </a:rPr>
-                        <a:t>about 90 slip through</a:t>
+                        <a:t>about 90 missed</a:t>
                       </a:r>
                       <a:endParaRPr lang="en-US" sz="1150" dirty="0">
                         <a:latin typeface="Calibri" charset="0"/>
@@ -8361,7 +8361,7 @@
                   <a:schemeClr val="bg2"/>
                 </a:solidFill>
               </a:rPr>
-              <a:t>indicative gross annual benefit; about $8.9M after running costs, $8.5M in year one</a:t>
+              <a:t>indicative gross annual benefit. About $8.9M after running costs, $8.5M in year one</a:t>
             </a:r>
             <a:endParaRPr lang="en-US" sz="1200" dirty="0"/>
           </a:p>
@@ -8401,7 +8401,7 @@
                   <a:schemeClr val="tx1"/>
                 </a:solidFill>
               </a:rPr>
-              <a:t>Assumptions: 6,000 applications a year, defaulted loans average $16,900 with about half recovered ($9,000 per missed defaulter), forgone margin about $2,000 per declined good customer, production performance equal to test performance; measured as an extra screen on the loans the bank approves today, before mandatory income verification.</a:t>
+              <a:t>Assumptions: 6,000 applications a year. Defaulted loans average $16,900 with about half recovered ($9,000 per missed defaulter). Forgone margin about $2,000 per declined good customer. Production performance equal to test performance. Measured as an extra screen on the loans the bank approves today, before mandatory income verification.</a:t>
             </a:r>
             <a:endParaRPr lang="en-US" sz="1100" dirty="0"/>
           </a:p>
@@ -8419,7 +8419,7 @@
                   <a:schemeClr val="tx1"/>
                 </a:solidFill>
               </a:rPr>
-              <a:t>Costs: roughly $300-400k one-off (pipeline, integration, validation, fairness review, training) and about $100k a year to run and monitor. Pays back within the first year even if only a quarter of the benefit is realised.</a:t>
+              <a:t>Costs: roughly $300-400k one-off (pipeline, integration, validation, fairness review, training) and about $100k a year to run and monitor. Repays its cost within year one even if only a quarter of the benefit is realised.</a:t>
             </a:r>
             <a:endParaRPr lang="en-US" sz="1100" dirty="0"/>
           </a:p>
@@ -8745,7 +8745,7 @@
                   <a:schemeClr val="tx1"/>
                 </a:solidFill>
               </a:rPr>
-              <a:t>Confirm the threshold with real loss and margin figures</a:t>
+              <a:t>Check the threshold with real loss and margin figures</a:t>
             </a:r>
             <a:endParaRPr lang="en-US" sz="1100" dirty="0"/>
           </a:p>
@@ -8763,7 +8763,7 @@
                   <a:schemeClr val="tx1"/>
                 </a:solidFill>
               </a:rPr>
-              <a:t>Fairness and model-risk review</a:t>
+              <a:t>Review fairness and model risk</a:t>
             </a:r>
             <a:endParaRPr lang="en-US" sz="1100" dirty="0"/>
           </a:p>
@@ -8945,7 +8945,7 @@
                   <a:schemeClr val="tx1"/>
                 </a:solidFill>
               </a:rPr>
-              <a:t>Re-train once verified ratios flow in; tune the approve / refer / decline bands</a:t>
+              <a:t>Re-train once verified ratios arrive. Tune the approve / refer / decline bands</a:t>
             </a:r>
             <a:endParaRPr lang="en-US" sz="1100" dirty="0"/>
           </a:p>
@@ -9127,7 +9127,7 @@
                   <a:schemeClr val="tx1"/>
                 </a:solidFill>
               </a:rPr>
-              <a:t>Switch on automated approve / decline for clear cases</a:t>
+              <a:t>Start automated approve / decline for clear cases</a:t>
             </a:r>
             <a:endParaRPr lang="en-US" sz="1100" dirty="0"/>
           </a:p>
@@ -9145,7 +9145,7 @@
                   <a:schemeClr val="tx1"/>
                 </a:solidFill>
               </a:rPr>
-              <a:t>Monthly monitoring of recall, precision, approval rate, missing fields</a:t>
+              <a:t>Monitor monthly: recall, precision, approval rate, missing fields</a:t>
             </a:r>
             <a:endParaRPr lang="en-US" sz="1100" dirty="0"/>
           </a:p>
@@ -9163,7 +9163,7 @@
                   <a:schemeClr val="tx1"/>
                 </a:solidFill>
               </a:rPr>
-              <a:t>Yearly re-training; threshold review with finance</a:t>
+              <a:t>Yearly re-training. Threshold review with finance</a:t>
             </a:r>
             <a:endParaRPr lang="en-US" sz="1100" dirty="0"/>
           </a:p>
@@ -9239,7 +9239,7 @@
                   <a:schemeClr val="tx1"/>
                 </a:solidFill>
               </a:rPr>
-              <a:t>Decline or escalate above a 45% debt-to-income ratio; refer to an underwriter with two or more delinquent credit lines or two or more major derogatory reports (45% and 51%+ observed default). Hard rules take precedence over the score.</a:t>
+              <a:t>Decline or escalate above a 45% debt-to-income ratio. Refer to an underwriter with two or more delinquent credit lines or two or more major derogatory reports. Observed default: 45% and 51%+. Hard rules take precedence over the score.</a:t>
             </a:r>
             <a:endParaRPr lang="en-US" sz="1150" dirty="0"/>
           </a:p>
@@ -9486,7 +9486,7 @@
                   <a:schemeClr val="tx1"/>
                 </a:solidFill>
               </a:rPr>
-              <a:t>The 'ratio missing' signal will change once verification is mandatory: re-train on the verified population before go-live. On applicants with a recorded ratio the model already catches 83% at 80% precision.</a:t>
+              <a:t>The 'ratio missing' signal will change once verification is mandatory. Re-train on the verified population before go-live. On applicants with a recorded ratio the model already catches 83% at 80% precision.</a:t>
             </a:r>
             <a:endParaRPr lang="en-US" sz="1100" dirty="0"/>
           </a:p>
@@ -9522,7 +9522,7 @@
                   <a:schemeClr val="tx1"/>
                 </a:solidFill>
               </a:rPr>
-              <a:t>Fair lending: the 0.15 cut-off wrongly flags about 11% of creditworthy applicants (3% at 0.5), so disparate-impact testing before launch, annually and whenever the cut-off moves; a 21-input fallback without occupation is ready (about 10% more credit-error cost).</a:t>
+              <a:t>Fair lending: the 0.15 threshold wrongly flags about 11% of creditworthy applicants (3% at 0.5). Test for disparate impact before go-live, yearly and at each threshold change. A fallback without occupation is ready (about 10% more cost).</a:t>
             </a:r>
             <a:endParaRPr lang="en-US" sz="1100" dirty="0"/>
           </a:p>
@@ -9715,7 +9715,7 @@
                   <a:schemeClr val="tx1"/>
                 </a:solidFill>
               </a:rPr>
-              <a:t>Risk-based pricing for the referral band; early-warning scoring on existing loans.</a:t>
+              <a:t>Risk-based pricing for the referral band. Early-warning scoring on existing loans.</a:t>
             </a:r>
             <a:endParaRPr lang="en-US" sz="1100" dirty="0"/>
           </a:p>
@@ -9733,7 +9733,7 @@
                   <a:schemeClr val="tx1"/>
                 </a:solidFill>
               </a:rPr>
-              <a:t>Per-applicant SHAP-style reason codes in applicant-friendly language.</a:t>
+              <a:t>SHAP-style reason codes per applicant in applicant-friendly language.</a:t>
             </a:r>
             <a:endParaRPr lang="en-US" sz="1100" dirty="0"/>
           </a:p>
@@ -9893,7 +9893,7 @@
                   <a:schemeClr val="accent4"/>
                 </a:solidFill>
               </a:rPr>
-              <a:t>Catch 93% of defaulters, explain every decision, and save an indicative $9M a year.</a:t>
+              <a:t>Catch 93% of defaulters. Explain every decision. Save an indicative $9M a year.</a:t>
             </a:r>
             <a:endParaRPr lang="en-US" sz="1800" dirty="0"/>
           </a:p>
@@ -16014,7 +16014,7 @@
                   <a:schemeClr val="accent6"/>
                 </a:solidFill>
               </a:rPr>
-              <a:t>Test set of 1,788 applicants at the 0.5 threshold except the proposed model. Train recall of 1.000 marks un-pruned models that memorised the training data. The proposed model (the default forest with its threshold moved) and its threshold were selected on repeated out-of-fold expected cost (training rows only) under a rule fixed beforehand: lowest mean cost, simplest set-up among those within one standard error (about $10,500). Mean out-of-fold ROC-AUC 0.961 against 0.963 on test.</a:t>
+              <a:t>Test set of 1,788 applicants at the 0.5 threshold except the proposed model. Train recall of 1.000 marks un-pruned models that memorised the training rows. We chose the proposed model (the default forest with its threshold moved) and its threshold on repeated out-of-fold expected cost (training rows only). We fixed the rule beforehand: lowest mean cost, simplest set-up among those within one standard error (about $10,500). Mean out-of-fold ROC-AUC 0.961 against 0.963 on test.</a:t>
             </a:r>
             <a:endParaRPr lang="en-US" sz="900" dirty="0"/>
           </a:p>
@@ -16178,7 +16178,7 @@
                   <a:schemeClr val="tx1"/>
                 </a:solidFill>
               </a:rPr>
-              <a:t>The debt-to-income ratio and its missing flag carry a third of the final forest's decision power; with delinquent lines and credit-history length, about half.</a:t>
+              <a:t>The debt-to-income ratio and its missing flag carry a third of the final forest's decision power. With delinquent lines and credit-history length, about half.</a:t>
             </a:r>
             <a:endParaRPr lang="en-US" sz="1100" dirty="0"/>
           </a:p>
@@ -16196,7 +16196,7 @@
                   <a:schemeClr val="tx1"/>
                 </a:solidFill>
               </a:rPr>
-              <a:t>Permutation importance (drop in ranking quality when a column is shuffled) ranks the same four at the top, delinquent credit lines first.</a:t>
+              <a:t>Permutation importance (drop in ranking quality when we shuffle a column) ranks the same four at the top, delinquent credit lines first.</a:t>
             </a:r>
             <a:endParaRPr lang="en-US" sz="1100" dirty="0"/>
           </a:p>
@@ -16232,7 +16232,7 @@
                   <a:schemeClr val="tx1"/>
                 </a:solidFill>
               </a:rPr>
-              <a:t>Occupation, loan purpose and minor flags matter little individually, yet dropping them raised out-of-fold expected cost by about a fifth, and dropping occupation alone by about 10%, so they stay subject to the fair-lending review.</a:t>
+              <a:t>Occupation, loan purpose and minor flags matter little individually. Yet removing them raised out-of-fold expected cost by about a fifth, and removing occupation alone by about 10%. So they stay subject to the fair-lending review.</a:t>
             </a:r>
             <a:endParaRPr lang="en-US" sz="1100" dirty="0"/>
           </a:p>
@@ -16491,7 +16491,7 @@
                   <a:schemeClr val="tx1"/>
                 </a:solidFill>
               </a:rPr>
-              <a:t>Yes: flag, whatever the credit history (62% of these applicants defaulted). Verify income before approving.</a:t>
+              <a:t>Yes: flag, whatever the credit history (62% of these applicants defaulted). Check income before approving.</a:t>
             </a:r>
             <a:endParaRPr lang="en-US" sz="1200" dirty="0"/>
           </a:p>
@@ -16803,7 +16803,7 @@
                   <a:schemeClr val="tx1"/>
                 </a:solidFill>
               </a:rPr>
-              <a:t>Yes: flag. Otherwise clear; applicants with no delinquent line default only about 4-5% of the time.</a:t>
+              <a:t>Yes: flag. Otherwise clear. Applicants with no delinquent line default only about 4-5% of the time.</a:t>
             </a:r>
             <a:endParaRPr lang="en-US" sz="1200" dirty="0"/>
           </a:p>
@@ -16959,7 +16959,7 @@
                   <a:schemeClr val="tx1"/>
                 </a:solidFill>
               </a:rPr>
-              <a:t>They reproduce 93% of the forest's decisions on unseen applicants (73% for never flagging; kappa 0.82); the forest's own top risk drivers explain the remaining 7%.</a:t>
+              <a:t>They reproduce 93% of the forest's decisions on unseen applicants (73% for never flagging, kappa 0.82). The forest's own top risk drivers explain the remaining 7%.</a:t>
             </a:r>
             <a:endParaRPr lang="en-US" sz="1200" dirty="0"/>
           </a:p>
@@ -17115,7 +17115,7 @@
                   <a:schemeClr val="tx1"/>
                 </a:solidFill>
               </a:rPr>
-              <a:t>Loan size, credit-history length, occupation and loan purpose do not change the outcome in the surrogate: they matter only in combination inside the forest, which supplies the per-applicant reason codes.</a:t>
+              <a:t>Loan size, credit-history length, occupation and loan purpose do not change the outcome in the surrogate. They matter only in combination inside the forest, which supplies the per-applicant reason codes.</a:t>
             </a:r>
             <a:endParaRPr lang="en-US" sz="1200" dirty="0"/>
           </a:p>
@@ -17151,7 +17151,7 @@
                   <a:schemeClr val="accent6"/>
                 </a:solidFill>
               </a:rPr>
-              <a:t>Surrogate: depth-4 tree, minimum 20 applicants per leaf, fitted to the forest's out-of-fold flag/clear decisions at threshold 0.15 on the training rows; it agrees with the forest on 93% of test decisions (73% for a rule that never flags). The stand-alone tuned tree (test recall 82%, precision 53%) found the same drivers.</a:t>
+              <a:t>Surrogate: depth-4 tree, minimum 20 applicants per leaf, fitted to the forest's out-of-fold flag/clear decisions at threshold 0.15 on the training rows. It agrees with the forest on 93% of test decisions (73% for a rule that never flags). The stand-alone tuned tree (test recall 82%, precision 53%) found the same drivers.</a:t>
             </a:r>
             <a:endParaRPr lang="en-US" sz="900" dirty="0"/>
           </a:p>
@@ -17378,7 +17378,7 @@
                           <a:ea typeface="Calibri" pitchFamily="34" charset="-122"/>
                           <a:cs typeface="Calibri" pitchFamily="34" charset="-120"/>
                         </a:rPr>
-                        <a:t>What was done</a:t>
+                        <a:t>What we did</a:t>
                       </a:r>
                       <a:endParaRPr lang="en-US" sz="950" dirty="0">
                         <a:latin typeface="Calibri" charset="0"/>
@@ -17581,7 +17581,7 @@
                           <a:ea typeface="Calibri" pitchFamily="34" charset="-122"/>
                           <a:cs typeface="Calibri" pitchFamily="34" charset="-120"/>
                         </a:rPr>
-                        <a:t>None found; no rows dropped</a:t>
+                        <a:t>None found. No rows removed</a:t>
                       </a:r>
                       <a:endParaRPr lang="en-US" sz="950" dirty="0">
                         <a:latin typeface="Calibri" charset="0"/>
@@ -17843,7 +17843,7 @@
                           <a:ea typeface="Calibri" pitchFamily="34" charset="-122"/>
                           <a:cs typeface="Calibri" pitchFamily="34" charset="-120"/>
                         </a:rPr>
-                        <a:t>Missingness of debt-to-income and property value is the strongest default signal; dropping rows would lose 44% of the data</a:t>
+                        <a:t>Missingness of debt-to-income and property value is the strongest default signal. Removing rows would lose 44% of the data</a:t>
                       </a:r>
                       <a:endParaRPr lang="en-US" sz="950" dirty="0">
                         <a:latin typeface="Calibri" charset="0"/>
@@ -17975,7 +17975,7 @@
                           <a:ea typeface="Calibri" pitchFamily="34" charset="-122"/>
                           <a:cs typeface="Calibri" pitchFamily="34" charset="-120"/>
                         </a:rPr>
-                        <a:t>IQR capping for the linear model only; DEROG and DELINQ capped at the 99th percentile; tree models use raw values</a:t>
+                        <a:t>IQR capping for the linear model only. DEROG and DELINQ capped at the 99th percentile. Tree models use raw values</a:t>
                       </a:r>
                       <a:endParaRPr lang="en-US" sz="950" dirty="0">
                         <a:latin typeface="Calibri" charset="0"/>
@@ -18040,7 +18040,7 @@
                           <a:ea typeface="Calibri" pitchFamily="34" charset="-122"/>
                           <a:cs typeface="Calibri" pitchFamily="34" charset="-120"/>
                         </a:rPr>
-                        <a:t>Linear models are pulled by extremes (debt-to-income 203%, credit history 97 years); trees split on rank order and keep the 'above 50% always defaults' signal</a:t>
+                        <a:t>Extreme values pull linear models (debt-to-income 203%, credit history 97 years). Trees split on rank order and keep the 'above 50% always defaults' signal</a:t>
                       </a:r>
                       <a:endParaRPr lang="en-US" sz="950" dirty="0">
                         <a:latin typeface="Calibri" charset="0"/>
@@ -18172,7 +18172,7 @@
                           <a:ea typeface="Calibri" pitchFamily="34" charset="-122"/>
                           <a:cs typeface="Calibri" pitchFamily="34" charset="-120"/>
                         </a:rPr>
-                        <a:t>One-hot encoding of REASON and JOB (drop first); standard scaling of the continuous inputs for the linear model only, flags left as 0/1</a:t>
+                        <a:t>One-hot encoding of REASON and JOB (drop first). Standard scaling of the continuous inputs for the linear model only, flags left as 0/1</a:t>
                       </a:r>
                       <a:endParaRPr lang="en-US" sz="950" dirty="0">
                         <a:latin typeface="Calibri" charset="0"/>
@@ -18369,7 +18369,7 @@
                           <a:ea typeface="Calibri" pitchFamily="34" charset="-122"/>
                           <a:cs typeface="Calibri" pitchFamily="34" charset="-120"/>
                         </a:rPr>
-                        <a:t>70% train / 30% test, stratified on the target, fixed seed, held out before any statistic was fitted; identical applicants in both data versions</a:t>
+                        <a:t>70% train / 30% test, stratified on the target, fixed seed, reserved before we fitted any statistic. Identical applicants in both data versions</a:t>
                       </a:r>
                       <a:endParaRPr lang="en-US" sz="950" dirty="0">
                         <a:latin typeface="Calibri" charset="0"/>
@@ -18434,7 +18434,7 @@
                           <a:ea typeface="Calibri" pitchFamily="34" charset="-122"/>
                           <a:cs typeface="Calibri" pitchFamily="34" charset="-120"/>
                         </a:rPr>
-                        <a:t>No leakage from test rows into fences, medians or scaling; results comparable across models</a:t>
+                        <a:t>No leakage from test rows into fences, medians or scaling. Results comparable across models</a:t>
                       </a:r>
                       <a:endParaRPr lang="en-US" sz="950" dirty="0">
                         <a:latin typeface="Calibri" charset="0"/>
@@ -18566,7 +18566,7 @@
                           <a:ea typeface="Calibri" pitchFamily="34" charset="-122"/>
                           <a:cs typeface="Calibri" pitchFamily="34" charset="-120"/>
                         </a:rPr>
-                        <a:t>Class weights (balanced or 0.2/0.8) inside the individual models, then the decision threshold for the final model; no resampling</a:t>
+                        <a:t>Class weights (balanced or 0.2/0.8) inside the individual models, then the decision threshold for the final model. No resampling</a:t>
                       </a:r>
                       <a:endParaRPr lang="en-US" sz="950" dirty="0">
                         <a:latin typeface="Calibri" charset="0"/>
@@ -18631,7 +18631,7 @@
                           <a:ea typeface="Calibri" pitchFamily="34" charset="-122"/>
                           <a:cs typeface="Calibri" pitchFamily="34" charset="-120"/>
                         </a:rPr>
-                        <a:t>Keeps every real applicant; class weights lifted recall by 23 points for logistic regression and 9 for the forest at the 0.5 cut-off, but made no measurable difference once the threshold was chosen on cost, so the final forest is unweighted</a:t>
+                        <a:t>Keeps each real applicant. Class weights lifted recall by 23 points for logistic regression and 9 for the forest at the 0.5 threshold. They made no measurable difference once we chose the threshold on cost, so the final forest is unweighted</a:t>
                       </a:r>
                       <a:endParaRPr lang="en-US" sz="950" dirty="0">
                         <a:latin typeface="Calibri" charset="0"/>
@@ -18763,7 +18763,7 @@
                           <a:ea typeface="Calibri" pitchFamily="34" charset="-122"/>
                           <a:cs typeface="Calibri" pitchFamily="34" charset="-120"/>
                         </a:rPr>
-                        <a:t>27 columns: the 10 attributes, 11 missing flags and 6 one-hot indicators (REASON HomeImp; JOB Office, Other, ProfExe, Sales, Self)</a:t>
+                        <a:t>27 columns: the 10 attributes, 11 missing flags and 6 one-hot indicators (REASON HomeImp, JOB Office/Other/ProfExe/Sales/Self)</a:t>
                       </a:r>
                       <a:endParaRPr lang="en-US" sz="950" dirty="0">
                         <a:latin typeface="Calibri" charset="0"/>
@@ -18828,7 +18828,7 @@
                           <a:ea typeface="Calibri" pitchFamily="34" charset="-122"/>
                           <a:cs typeface="Calibri" pitchFamily="34" charset="-120"/>
                         </a:rPr>
-                        <a:t>Every input to the final model is named in the notebook's final-pipeline cell, with the imputation values and model settings</a:t>
+                        <a:t>The notebook's final-pipeline cell names every input to the final model, with the imputation values and model settings</a:t>
                       </a:r>
                       <a:endParaRPr lang="en-US" sz="950" dirty="0">
                         <a:latin typeface="Calibri" charset="0"/>
@@ -19195,7 +19195,7 @@
                   <a:schemeClr val="tx1"/>
                 </a:solidFill>
               </a:rPr>
-              <a:t>default rate when the applicant's debt-to-income ratio is missing, versus 8.6% when it is recorded. Unverified income is the strongest warning sign.</a:t>
+              <a:t>default rate when the applicant's debt-to-income ratio is missing, versus 8.6% when it is present. Unverified income is the strongest warning sign.</a:t>
             </a:r>
             <a:endParaRPr lang="en-US" sz="1250" dirty="0"/>
           </a:p>
@@ -19301,7 +19301,7 @@
                   <a:schemeClr val="tx1"/>
                 </a:solidFill>
               </a:rPr>
-              <a:t>of future defaulters are caught by the proposed Random Forest model on unseen applicants, while 2 of every 3 applicants it flags really would have defaulted.</a:t>
+              <a:t>of future defaulters among unseen applicants. The proposed Random Forest model catches them. 2 of every 3 applicants it flags really would have defaulted.</a:t>
             </a:r>
             <a:endParaRPr lang="en-US" sz="1250" dirty="0"/>
           </a:p>
@@ -19555,7 +19555,7 @@
                   <a:schemeClr val="tx1"/>
                 </a:solidFill>
               </a:rPr>
-              <a:t>Interest on home loans is a major share of retail bank profit; bad loans eat it up.</a:t>
+              <a:t>Interest on home loans is a major share of retail bank profit. Defaults consume it.</a:t>
             </a:r>
             <a:endParaRPr lang="en-US" sz="1350" dirty="0"/>
           </a:p>
@@ -19573,7 +19573,7 @@
                   <a:schemeClr val="tx1"/>
                 </a:solidFill>
               </a:rPr>
-              <a:t>Today each application is judged manually: slow, inconsistent across underwriters, open to error and bias.</a:t>
+              <a:t>Today each decision is manual: slow, inconsistent across underwriters, open to error and bias.</a:t>
             </a:r>
             <a:endParaRPr lang="en-US" sz="1350" dirty="0"/>
           </a:p>
@@ -19996,7 +19996,7 @@
                   <a:schemeClr val="accent1"/>
                 </a:solidFill>
               </a:rPr>
-              <a:t>Objective: predict which applicants are likely to default and tell the bank which attributes to weigh when approving a loan.</a:t>
+              <a:t>Objective: predict which applicants are likely to default. Tell the bank which attributes to weigh when approving a loan.</a:t>
             </a:r>
             <a:endParaRPr lang="en-US" sz="1250" dirty="0"/>
           </a:p>
@@ -20264,7 +20264,7 @@
                   <a:schemeClr val="tx1"/>
                 </a:solidFill>
               </a:rPr>
-              <a:t>Univariate, bivariate and correlation analysis; default rate by band; pattern of missing values</a:t>
+              <a:t>Univariate, bivariate and correlation analysis. Default rate by band. Pattern of missing values</a:t>
             </a:r>
             <a:endParaRPr lang="en-US" sz="1100" dirty="0"/>
           </a:p>
@@ -20424,7 +20424,7 @@
                   <a:schemeClr val="tx1"/>
                 </a:solidFill>
               </a:rPr>
-              <a:t>Hold out a stratified 30% test set first; flag every missing field; impute median/mode learned on training rows; cap outliers for the linear model only; one-hot encode</a:t>
+              <a:t>Reserve a stratified 30% test set first. Flag every missing field. Impute median/mode learned on training rows. Cap outliers for the linear model only. One-hot encode</a:t>
             </a:r>
             <a:endParaRPr lang="en-US" sz="1100" dirty="0"/>
           </a:p>
@@ -20584,7 +20584,7 @@
                   <a:schemeClr val="tx1"/>
                 </a:solidFill>
               </a:rPr>
-              <a:t>Logistic Regression (linear benchmark), Decision Tree, Bagging, Random Forest; class weights; cross-validated grid search</a:t>
+              <a:t>Logistic Regression (linear benchmark), Decision Tree, Bagging, Random Forest. Class weights. Cross-validated grid search</a:t>
             </a:r>
             <a:endParaRPr lang="en-US" sz="1100" dirty="0"/>
           </a:p>
@@ -20744,7 +20744,7 @@
                   <a:schemeClr val="tx1"/>
                 </a:solidFill>
               </a:rPr>
-              <a:t>Recall on defaulters as the primary metric; precision, F1, ROC-AUC as guard-rails; final model and threshold chosen on out-of-fold expected cost</a:t>
+              <a:t>Recall on defaulters as the primary metric. Precision, F1, ROC-AUC as guard-rails. Final model and threshold chosen on out-of-fold expected cost</a:t>
             </a:r>
             <a:endParaRPr lang="en-US" sz="1100" dirty="0"/>
           </a:p>
@@ -21104,7 +21104,7 @@
                   <a:schemeClr val="tx1"/>
                 </a:solidFill>
               </a:rPr>
-              <a:t>Overall default rate is 20%, so these gaps multiply risk three to five times.</a:t>
+              <a:t>The overall default rate is 20%, so these gaps multiply risk 3 to 5 times.</a:t>
             </a:r>
             <a:endParaRPr lang="en-US" sz="1250" dirty="0"/>
           </a:p>
@@ -21122,7 +21122,7 @@
                   <a:schemeClr val="tx1"/>
                 </a:solidFill>
               </a:rPr>
-              <a:t>Interpretation: income or collateral that could not be verified, or that the applicant chose not to supply.</a:t>
+              <a:t>Interpretation: the bank could not check the income or collateral, or the applicant chose not to supply it.</a:t>
             </a:r>
             <a:endParaRPr lang="en-US" sz="1250" dirty="0"/>
           </a:p>
@@ -21140,7 +21140,7 @@
                   <a:schemeClr val="tx1"/>
                 </a:solidFill>
               </a:rPr>
-              <a:t>Action: every imputed field gets a 'was missing' flag in the model, and verification should become mandatory in the process.</a:t>
+              <a:t>Action: every imputed field gets a 'was missing' flag in the model. Verification should become mandatory in the process.</a:t>
             </a:r>
             <a:endParaRPr lang="en-US" sz="1250" dirty="0"/>
           </a:p>
@@ -21316,7 +21316,7 @@
                   <a:schemeClr val="tx1"/>
                 </a:solidFill>
               </a:rPr>
-              <a:t>Between a 20% and a 40% ratio only 4-7% default; above 45% almost everyone does. Each delinquent line or derogatory report roughly doubles the risk (0 reports: 17%, 1: 39%, 2: 51%, 3+: about 75%). Both are plain-language rules an applicant can be given.</a:t>
+              <a:t>Between a 20% and a 40% ratio only 4-7% default. Above 45% almost everyone does. Each delinquent line or derogatory report roughly doubles the risk (0 reports: 17%, 1: 39%, 2: 51%, 3+: about 75%). Both are plain-language rules to give an applicant.</a:t>
             </a:r>
             <a:endParaRPr lang="en-US" sz="1200" dirty="0"/>
           </a:p>
@@ -21508,7 +21508,7 @@
                   <a:schemeClr val="tx1"/>
                 </a:solidFill>
               </a:rPr>
-              <a:t>Default rate (%) by group. Applicants with under five years of credit history default four times as often as those with twenty-plus years. Loans under $5,000 default 57% of the time. Occupation shifts risk moderately; on its own it adds little at the usual cut-off, but removing it from the final model raises the expected cost of credit errors by about 10%, so it stays in, subject to the fair-lending review.</a:t>
+              <a:t>Default rate (%) by group. Applicants with under five years of credit history default four times as often as those with twenty-plus years. Loans under $5,000 default 57% of the time. Occupation shifts risk moderately. On its own it adds little at the usual threshold. But removing it from the final model raises the expected cost of credit errors by about 10%. So it stays, subject to the fair-lending review.</a:t>
             </a:r>
             <a:endParaRPr lang="en-US" sz="1200" dirty="0"/>
           </a:p>
@@ -21740,7 +21740,7 @@
                   <a:schemeClr val="tx1"/>
                 </a:solidFill>
               </a:rPr>
-              <a:t>The model says 'will repay', the customer defaults.</a:t>
+              <a:t>The model says 'will repay'. The customer defaults.</a:t>
             </a:r>
             <a:endParaRPr lang="en-US" sz="1200" dirty="0"/>
           </a:p>
@@ -21776,7 +21776,7 @@
                   <a:schemeClr val="tx1"/>
                 </a:solidFill>
               </a:rPr>
-              <a:t>Bank loses most of the principal plus collection cost: about $9,000 on a typical $16,900 defaulted loan.</a:t>
+              <a:t>The bank loses most of the principal plus collection cost: about $9,000 on an average $16,900 defaulted loan.</a:t>
             </a:r>
             <a:endParaRPr lang="en-US" sz="1200" dirty="0"/>
           </a:p>
@@ -21900,7 +21900,7 @@
                   <a:schemeClr val="tx1"/>
                 </a:solidFill>
               </a:rPr>
-              <a:t>The model says 'will default', the customer would have repaid.</a:t>
+              <a:t>The model says 'will default'. The customer would have repaid.</a:t>
             </a:r>
             <a:endParaRPr lang="en-US" sz="1200" dirty="0"/>
           </a:p>
@@ -21936,7 +21936,7 @@
                   <a:schemeClr val="tx1"/>
                 </a:solidFill>
               </a:rPr>
-              <a:t>Bank forgoes the interest margin on one good customer: about $2,000.</a:t>
+              <a:t>The bank forgoes the interest margin on one good applicant: about $2,000.</a:t>
             </a:r>
             <a:endParaRPr lang="en-US" sz="1200" dirty="0"/>
           </a:p>
@@ -21976,7 +21976,7 @@
                   <a:schemeClr val="tx1"/>
                 </a:solidFill>
               </a:rPr>
-              <a:t>A missed defaulter costs roughly 4.5 times a wrongly declined customer, so the primary metric is Recall: the share of future defaulters the model catches.</a:t>
+              <a:t>A missed defaulter costs roughly 4.5 times a wrongly declined customer. So the primary metric is Recall: the share of future defaulters the model catches.</a:t>
             </a:r>
             <a:endParaRPr lang="en-US" sz="1250" dirty="0"/>
           </a:p>
@@ -21994,7 +21994,7 @@
                   <a:schemeClr val="tx1"/>
                 </a:solidFill>
               </a:rPr>
-              <a:t>Guard-rails: Precision (how many of the flagged applicants really default) and F1, so the model does not simply decline everyone. ROC-AUC measures how well applicants are ranked by risk, which matters when the threshold moves.</a:t>
+              <a:t>Guard-rails: Precision (how many flagged applicants really default) and F1, so the model does not simply decline everyone. ROC-AUC measures how well the model ranks applicants by risk, which matters when the threshold moves.</a:t>
             </a:r>
             <a:endParaRPr lang="en-US" sz="1250" dirty="0"/>
           </a:p>
@@ -22012,7 +22012,7 @@
                   <a:schemeClr val="tx1"/>
                 </a:solidFill>
               </a:rPr>
-              <a:t>Individual models are tuned by cross-validated grid search on recall; the final model and its threshold are chosen on out-of-fold expected cost, training data only; the held-out 30% is scored once.</a:t>
+              <a:t>We tune individual models by cross-validated grid search on recall. We choose the final model and its threshold on out-of-fold expected cost, training rows only. We score the 30% test set once.</a:t>
             </a:r>
             <a:endParaRPr lang="en-US" sz="1250" dirty="0"/>
           </a:p>
@@ -22176,7 +22176,7 @@
                   <a:schemeClr val="tx1"/>
                 </a:solidFill>
               </a:rPr>
-              <a:t>Linear vs non-linear: logistic regression reaches 80% recall but only 61% precision. The data is made of thresholds, which trees capture and a straight line cannot.</a:t>
+              <a:t>Linear vs non-linear: logistic regression reaches 80% recall but only 61% precision. The data is made of steps, which trees capture and a straight line cannot.</a:t>
             </a:r>
             <a:endParaRPr lang="en-US" sz="1200" dirty="0"/>
           </a:p>
@@ -22230,7 +22230,7 @@
                   <a:schemeClr val="tx1"/>
                 </a:solidFill>
               </a:rPr>
-              <a:t>Final choice on the expected cost of mistakes (training data only), by a rule fixed beforehand: lowest average cost, simplest if within noise. Three forests tied; the plain forest at 0.15 catches 93% at 68% precision on test.</a:t>
+              <a:t>Final choice on the expected cost of mistakes (training rows only), by a rule fixed beforehand: lowest mean cost, simplest if within noise. Three forests tied. The plain forest at 0.15 catches 93% at 68% precision on test.</a:t>
             </a:r>
             <a:endParaRPr lang="en-US" sz="1200" dirty="0"/>
           </a:p>

--- a/presentation/Loan_Default_Prediction_Presentation.pptx
+++ b/presentation/Loan_Default_Prediction_Presentation.pptx
@@ -125,26 +125,26 @@
   <p:extLst>
     <p:ext uri="{521415D9-36F7-43E2-AB2F-B90AF26B5E84}">
       <p14:sectionLst xmlns:p14="http://schemas.microsoft.com/office/powerpoint/2010/main">
-        <p14:section name="Opening" id="{0922af18-7460-52ec-e2f5-8842d22753ab}">
+        <p14:section name="Opening" id="{05f17b95-2e9d-e1cf-d5c3-31552d2972ad}">
           <p14:sldIdLst>
             <p14:sldId id="256"/>
             <p14:sldId id="257"/>
           </p14:sldIdLst>
         </p14:section>
-        <p14:section name="Problem and approach" id="{470d4d38-3160-30fc-ef66-4b6ba58a3557}">
+        <p14:section name="Problem and approach" id="{b53050ee-32a1-3593-ba50-ff4c29b8db7a}">
           <p14:sldIdLst>
             <p14:sldId id="258"/>
             <p14:sldId id="259"/>
           </p14:sldIdLst>
         </p14:section>
-        <p14:section name="Key insights" id="{99d947e4-360e-897a-752c-5804141b3078}">
+        <p14:section name="Key insights" id="{cbe73b71-560d-06fb-1c97-4c4c6a2a2760}">
           <p14:sldIdLst>
             <p14:sldId id="260"/>
             <p14:sldId id="261"/>
             <p14:sldId id="262"/>
           </p14:sldIdLst>
         </p14:section>
-        <p14:section name="Modelling" id="{b99e9f6c-109c-3ca0-34d3-0c7201ae9aab}">
+        <p14:section name="Modelling" id="{4b3a6934-de0e-8701-8407-be9685350889}">
           <p14:sldIdLst>
             <p14:sldId id="263"/>
             <p14:sldId id="264"/>
@@ -152,7 +152,7 @@
             <p14:sldId id="266"/>
           </p14:sldIdLst>
         </p14:section>
-        <p14:section name="Recommendations" id="{4c47a976-82db-155e-284f-b6ced5cec472}">
+        <p14:section name="Recommendations" id="{40b678c2-f08f-08bd-1f44-3deee930ed7e}">
           <p14:sldIdLst>
             <p14:sldId id="267"/>
             <p14:sldId id="268"/>
@@ -160,7 +160,7 @@
             <p14:sldId id="270"/>
           </p14:sldIdLst>
         </p14:section>
-        <p14:section name="Appendix" id="{4755cd83-9f89-c594-0753-28bc657bd757}">
+        <p14:section name="Appendix" id="{fdd49870-b53a-963b-aafc-92d4b52e7c5c}">
           <p14:sldIdLst>
             <p14:sldId id="271"/>
             <p14:sldId id="272"/>
@@ -905,7 +905,7 @@
                 </a:solidFill>
                 <a:latin typeface="+mj-lt"/>
               </a:rPr>
-              <a:t>Default rate (%) by number of delinquent credit lines</a:t>
+              <a:t>Default rate (%) by delinquent credit lines</a:t>
             </a:r>
           </a:p>
         </c:rich>
@@ -1391,7 +1391,7 @@
         <c:axId val="2094734552"/>
         <c:scaling>
           <c:orientation val="minMax"/>
-          <c:max val="60"/>
+          <c:max val="70"/>
           <c:min val="0"/>
         </c:scaling>
         <c:delete val="0"/>
@@ -1590,7 +1590,7 @@
                   <c:v>25.1</c:v>
                 </c:pt>
                 <c:pt idx="2">
-                  <c:v>20.5</c:v>
+                  <c:v>20.48</c:v>
                 </c:pt>
                 <c:pt idx="3">
                   <c:v>16.2</c:v>
@@ -1969,7 +1969,7 @@
         <c:axId val="2094734552"/>
         <c:scaling>
           <c:orientation val="minMax"/>
-          <c:max val="45"/>
+          <c:max val="70"/>
           <c:min val="0"/>
         </c:scaling>
         <c:delete val="0"/>
@@ -3120,7 +3120,7 @@
                 <c:ptCount val="12"/>
                 <c:lvl>
                   <c:pt idx="0">
-                    <c:v>Debt-to-income missing</c:v>
+                    <c:v>Debt-to-income ratio missing</c:v>
                   </c:pt>
                   <c:pt idx="1">
                     <c:v>Debt-to-income ratio</c:v>
@@ -3141,16 +3141,16 @@
                     <c:v>Number of credit lines</c:v>
                   </c:pt>
                   <c:pt idx="7">
-                    <c:v>Mortgage due</c:v>
+                    <c:v>Mortgage balance</c:v>
                   </c:pt>
                   <c:pt idx="8">
-                    <c:v>Years at job</c:v>
+                    <c:v>Years at current job</c:v>
                   </c:pt>
                   <c:pt idx="9">
-                    <c:v>Derogatory reports</c:v>
+                    <c:v>Major derogatory reports</c:v>
                   </c:pt>
                   <c:pt idx="10">
-                    <c:v>Recent inquiries</c:v>
+                    <c:v>Recent credit inquiries</c:v>
                   </c:pt>
                   <c:pt idx="11">
                     <c:v>Property value missing</c:v>
@@ -3835,7 +3835,7 @@
           <a:p>
             <a:r>
               <a:rPr lang="en-US" dirty="0"/>
-              <a:t>The proposal. A Random Forest scores the applicants. A surrogate decision tree fitted to the forest's out-of-fold decisions reproduces ninety-three percent of them and provides the plain-language reasons for every decline. On unseen applicants the forest catches 93 percent of defaulters. On the same applicants, two out of three flagged applicants really would have defaulted.</a:t>
+              <a:t>The proposal. A Random Forest scores the applicants. A surrogate decision tree fitted to the forest's out-of-fold decisions reproduces ninety-three percent of them and gives the plain-language summary of the rules. Per-applicant risk drivers, built before the shadow run, give each decline its own reason. On unseen applicants the forest catches 93 percent of defaulters. On the same applicants, two out of three flagged applicants really defaulted.</a:t>
             </a:r>
             <a:endParaRPr lang="en-US" dirty="0"/>
           </a:p>
@@ -3923,7 +3923,7 @@
           <a:p>
             <a:r>
               <a:rPr lang="en-US" dirty="0"/>
-              <a:t>The model outputs a probability, and 0.5 is only a convention. We chose the threshold on out-of-fold predictions of the training rows, so the test set played no part. Moving it to 0.15 cuts missed defaulters from 63 to 15 per thousand applicants on the test set. The price is declining 87 instead of 26 good customers. It is the cheapest operating point for any cost ratio between three and six to one. It held on a finer grid and on other train/test splits. It sits just below the textbook break-even of 0.18 for a perfectly calibrated score, because the forest's scores understate risk in the decision range. Applicants scored fifteen to twenty percent defaulted about twenty-three percent of the time.</a:t>
+              <a:t>The model outputs a probability, and 0.5 is only a convention. We chose the threshold on out-of-fold predictions of the training rows, so the test set played no part. Moving it to 0.15 cuts missed defaulters from 63 to 15 per thousand applicants on the test set. The price is flagging 87 instead of 26 good customers. It is the cheapest operating point for any cost ratio between three and six to one. It held on a finer grid and on other train/test splits. It sits just below the textbook break-even of 0.18 for a perfectly calibrated score, because the forest's scores understate risk in the decision range. Applicants scored fifteen to twenty percent defaulted about twenty-three percent of the time.</a:t>
             </a:r>
             <a:endParaRPr lang="en-US" dirty="0"/>
           </a:p>
@@ -4099,7 +4099,7 @@
           <a:p>
             <a:r>
               <a:rPr lang="en-US" dirty="0"/>
-              <a:t>The roadmap has three phases: prepare, shadow and pilot, then scale. There are two policy rules the bank can adopt immediately, with or without the model. First, set a debt-to-income limit of 45 percent. Second, refer anyone with two or more delinquencies or derogatory reports to an underwriter. We read both thresholds straight from the observed default rates.</a:t>
+              <a:t>The roadmap has three phases: prepare, shadow run, then scale. There are three policy rules the bank can adopt immediately, with or without the model. First, set a debt-to-income limit of 45 percent. Second, refer anyone with two or more delinquencies or derogatory reports to an underwriter. Third, treat a missing income or valuation as high risk and require verification. We read the first two thresholds straight from the observed default rates. Where a rule and the score disagree, the stricter outcome applies.</a:t>
             </a:r>
             <a:endParaRPr lang="en-US" dirty="0"/>
           </a:p>
@@ -4363,7 +4363,7 @@
           <a:p>
             <a:r>
               <a:rPr lang="en-US" dirty="0"/>
-              <a:t/>
+              <a:t>All models on the test set. We fixed the selection rule beforehand: lowest mean cost, and the simplest set-up among those within one standard error, about 10,500 dollars per thousand applicants. The mean out-of-fold ROC-AUC of the proposed model is 0.961, against 0.963 on the test set.</a:t>
             </a:r>
             <a:endParaRPr lang="en-US" dirty="0"/>
           </a:p>
@@ -4715,7 +4715,7 @@
           <a:p>
             <a:r>
               <a:rPr lang="en-US" dirty="0"/>
-              <a:t>Four things to remember. One in five loans ends in default. The biggest red flag is income the bank could not check. The proposed model catches 93 percent of defaulters before the money leaves the bank. And under reasonable assumptions that is worth about nine million dollars a year.</a:t>
+              <a:t>Four things to remember. One in five loans ends in default. The biggest red flag is income the bank could not check. The proposed model catches 93 percent of defaulters before the money leaves the bank. And under reasonable assumptions that is worth about nine million dollars a year. We recommend mandatory income and valuation checks first. Then deploy the forest at a 0.15 threshold with approve, refer and decline bands, after a two-month shadow run and a fairness review.</a:t>
             </a:r>
             <a:endParaRPr lang="en-US" dirty="0"/>
           </a:p>
@@ -5067,7 +5067,7 @@
           <a:p>
             <a:r>
               <a:rPr lang="en-US" dirty="0"/>
-              <a:t>Two more drivers that are easy to explain. The debt-to-income ratio is not a slope but a cliff: between 20 and 40 percent, 4 to 7 percent default. Above 45 percent, 87 to 100 percent default. And repayment history repeats: each delinquent credit line roughly doubles the default rate.</a:t>
+              <a:t>Two more drivers that are easy to explain. The debt-to-income ratio is not a slope but a cliff: between 20 and 40 percent, 4 to 7 percent default. Above 45 percent, 87 to 100 percent default. And repayment history repeats: the first delinquent credit line more than doubles the default rate, and each further one raises it again. Both are plain-language rules to give an applicant.</a:t>
             </a:r>
             <a:endParaRPr lang="en-US" dirty="0"/>
           </a:p>
@@ -5331,7 +5331,7 @@
           <a:p>
             <a:r>
               <a:rPr lang="en-US" dirty="0"/>
-              <a:t>We built eleven model variants. These six tell the story. At the usual threshold the forest with class weights has the best balance and ranks applicants among the best. We then chose the final configuration and its threshold together on repeated out-of-fold expected cost, using training rows only. We fixed the rule beforehand: lowest mean cost of mistakes, and the simplest set-up when several are within run-to-run noise. Three forests tied within that noise, so class weights made no measurable difference once we tune the threshold. We chose the plain forest at a 0.15 threshold. On the test set it catches 93 percent of defaulters, and two thirds of the flagged applicants really would have defaulted. At their own best thresholds the logistic regression and the tree cost 550 and 607 thousand dollars per thousand applicants. The forest costs 317 thousand, so it also wins on the cost yardstick.</a:t>
+              <a:t>We built eleven model variants. These six tell the story. At the usual threshold the forest with class weights has the best balance and ranks applicants among the best. We then chose the final configuration and its threshold together on repeated out-of-fold expected cost, using training rows only. We fixed the rule beforehand: lowest mean cost of mistakes, and the simplest set-up when several are within run-to-run noise. Three forests tied within that noise, so class weights made no measurable difference once we tune the threshold. We chose the plain forest at a 0.15 threshold. On the test set it catches 93 percent of defaulters, and two thirds of the flagged applicants really defaulted. At their own best thresholds the logistic regression and the tree cost 550 and 607 thousand dollars per thousand applicants. The forest costs 317 thousand, so it also wins on the cost yardstick.</a:t>
             </a:r>
             <a:endParaRPr lang="en-US" dirty="0"/>
           </a:p>
@@ -6290,14 +6290,14 @@
               <a:buChar char="•"/>
             </a:pPr>
             <a:r>
-              <a:rPr lang="en-US" sz="1150" dirty="0">
+              <a:rPr lang="en-US" sz="1100" dirty="0">
                 <a:solidFill>
                   <a:schemeClr val="tx1"/>
                 </a:solidFill>
               </a:rPr>
-              <a:t>Scoring engine: Random Forest, 200 fully grown trees, no class weights: the decision threshold handles the imbalance.</a:t>
+              <a:t>Scoring engine: Random Forest, 200 fully grown trees, no class weights (the threshold handles the imbalance).</a:t>
             </a:r>
-            <a:endParaRPr lang="en-US" sz="1150" dirty="0"/>
+            <a:endParaRPr lang="en-US" sz="1100" dirty="0"/>
           </a:p>
           <a:p>
             <a:pPr marL="177800" indent="-177800">
@@ -6308,14 +6308,14 @@
               <a:buChar char="•"/>
             </a:pPr>
             <a:r>
-              <a:rPr lang="en-US" sz="1150" dirty="0">
+              <a:rPr lang="en-US" sz="1100" dirty="0">
                 <a:solidFill>
                   <a:schemeClr val="tx1"/>
                 </a:solidFill>
               </a:rPr>
-              <a:t>Inputs: all 27 (10 financial attributes, 11 missing-value flags, occupation and loan purpose). Fallback without occupation: 21 inputs, about 10% more expected cost.</a:t>
+              <a:t>Inputs: all 27 (10 attributes, 11 missing-value flags, occupation and loan purpose). Fallback without occupation: 21 inputs, about 10% more cost.</a:t>
             </a:r>
-            <a:endParaRPr lang="en-US" sz="1150" dirty="0"/>
+            <a:endParaRPr lang="en-US" sz="1100" dirty="0"/>
           </a:p>
           <a:p>
             <a:pPr marL="177800" indent="-177800">
@@ -6326,14 +6326,14 @@
               <a:buChar char="•"/>
             </a:pPr>
             <a:r>
-              <a:rPr lang="en-US" sz="1150" dirty="0">
+              <a:rPr lang="en-US" sz="1100" dirty="0">
                 <a:solidFill>
                   <a:schemeClr val="tx1"/>
                 </a:solidFill>
               </a:rPr>
-              <a:t>We chose decision threshold 0.15 together with the configuration to minimise expected cost on repeated out-of-fold predictions of the training rows. It holds for cost ratios 3:1 to 6:1 and across train/test splits. Approve / refer / decline bands (about 69% / 7% / 24% of applicants) keep an underwriter in the loop.</a:t>
+              <a:t>Threshold 0.15, chosen with the configuration on repeated out-of-fold expected cost (training rows). It holds for cost ratios 3:1 to 6:1 and across splits. Approve / refer / decline bands (69% / 7% / 24%) keep an underwriter in the loop.</a:t>
             </a:r>
-            <a:endParaRPr lang="en-US" sz="1150" dirty="0"/>
+            <a:endParaRPr lang="en-US" sz="1100" dirty="0"/>
           </a:p>
           <a:p>
             <a:pPr marL="177800" indent="-177800">
@@ -6344,14 +6344,14 @@
               <a:buChar char="•"/>
             </a:pPr>
             <a:r>
-              <a:rPr lang="en-US" sz="1150" dirty="0">
+              <a:rPr lang="en-US" sz="1100" dirty="0">
                 <a:solidFill>
                   <a:schemeClr val="tx1"/>
                 </a:solidFill>
               </a:rPr>
-              <a:t>Explanation layer: a depth-4 surrogate tree fitted to the forest's out-of-fold decisions reproduces 93% of them. Its rules (ratio missing, ratio above 44%, a delinquent line together with a derogatory report) supply the ECOA adverse-action reasons.</a:t>
+              <a:t>Explanation layer: a depth-4 surrogate tree reproduces 93% of the forest's out-of-fold decisions and gives the plain-language summary. Per-applicant risk drivers (built in months 0-2) give each decline its ECOA reason.</a:t>
             </a:r>
-            <a:endParaRPr lang="en-US" sz="1150" dirty="0"/>
+            <a:endParaRPr lang="en-US" sz="1100" dirty="0"/>
           </a:p>
           <a:p>
             <a:pPr marL="177800" indent="-177800">
@@ -6362,14 +6362,14 @@
               <a:buChar char="•"/>
             </a:pPr>
             <a:r>
-              <a:rPr lang="en-US" sz="1150" dirty="0">
+              <a:rPr lang="en-US" sz="1100" dirty="0">
                 <a:solidFill>
                   <a:schemeClr val="tx1"/>
                 </a:solidFill>
               </a:rPr>
-              <a:t>We scored the reserved test set only once, after all choices.</a:t>
+              <a:t>We scored the reserved test set once, after all choices.</a:t>
             </a:r>
-            <a:endParaRPr lang="en-US" sz="1150" dirty="0"/>
+            <a:endParaRPr lang="en-US" sz="1100" dirty="0"/>
           </a:p>
         </p:txBody>
       </p:sp>
@@ -6691,7 +6691,7 @@
                   <a:schemeClr val="tx1"/>
                 </a:solidFill>
               </a:rPr>
-              <a:t>Per 1,000 applicants: 185 of 200 defaulters flagged in advance, 15 missed, 87 good customers referred or declined. 27% of applicants flagged, 73% approved.</a:t>
+              <a:t>Per 1,000 applicants at 0.15: 185 of 200 defaulters flagged in advance, 15 missed, 87 good customers flagged. 27% of applicants flagged, 73% approved.</a:t>
             </a:r>
             <a:endParaRPr lang="en-US" sz="1150" dirty="0"/>
           </a:p>
@@ -6813,7 +6813,7 @@
         </p:nvGraphicFramePr>
         <p:xfrm>
           <a:off x="365760" y="1097280"/>
-          <a:ext cx="4846320" cy="3337560"/>
+          <a:ext cx="4846320" cy="3200400"/>
         </p:xfrm>
         <a:graphic xmlns:a="http://schemas.openxmlformats.org/drawingml/2006/main">
           <a:graphicData uri="http://schemas.openxmlformats.org/drawingml/2006/chart">
@@ -6829,12 +6829,12 @@
         </p:nvSpPr>
         <p:spPr>
           <a:xfrm>
-            <a:off x="5394960" y="1188720"/>
-            <a:ext cx="3383280" cy="1645920"/>
+            <a:off x="5394960" y="1143000"/>
+            <a:ext cx="3383280" cy="1463040"/>
           </a:xfrm>
           <a:prstGeom prst="roundRect">
             <a:avLst>
-              <a:gd name="adj" fmla="val 4444"/>
+              <a:gd name="adj" fmla="val 5000"/>
             </a:avLst>
           </a:prstGeom>
           <a:solidFill>
@@ -6856,7 +6856,7 @@
         </p:nvSpPr>
         <p:spPr>
           <a:xfrm>
-            <a:off x="5577840" y="1280160"/>
+            <a:off x="5577840" y="1234440"/>
             <a:ext cx="3017520" cy="365760"/>
           </a:xfrm>
           <a:prstGeom prst="rect">
@@ -6892,8 +6892,8 @@
         </p:nvSpPr>
         <p:spPr>
           <a:xfrm>
-            <a:off x="5577840" y="1691640"/>
-            <a:ext cx="3017520" cy="1097280"/>
+            <a:off x="5577840" y="1618488"/>
+            <a:ext cx="3017520" cy="914400"/>
           </a:xfrm>
           <a:prstGeom prst="rect">
             <a:avLst/>
@@ -6936,7 +6936,7 @@
                   <a:schemeClr val="tx1"/>
                 </a:solidFill>
               </a:rPr>
-              <a:t>26 good customers declined</a:t>
+              <a:t>26 good customers flagged</a:t>
             </a:r>
             <a:endParaRPr lang="en-US" sz="1200" dirty="0"/>
           </a:p>
@@ -6968,12 +6968,12 @@
         </p:nvSpPr>
         <p:spPr>
           <a:xfrm>
-            <a:off x="5394960" y="2971800"/>
-            <a:ext cx="3383280" cy="1645920"/>
+            <a:off x="5394960" y="2743200"/>
+            <a:ext cx="3383280" cy="1463040"/>
           </a:xfrm>
           <a:prstGeom prst="roundRect">
             <a:avLst>
-              <a:gd name="adj" fmla="val 4444"/>
+              <a:gd name="adj" fmla="val 5000"/>
             </a:avLst>
           </a:prstGeom>
           <a:solidFill>
@@ -6995,7 +6995,7 @@
         </p:nvSpPr>
         <p:spPr>
           <a:xfrm>
-            <a:off x="5577840" y="3063240"/>
+            <a:off x="5577840" y="2834640"/>
             <a:ext cx="3017520" cy="365760"/>
           </a:xfrm>
           <a:prstGeom prst="rect">
@@ -7031,8 +7031,8 @@
         </p:nvSpPr>
         <p:spPr>
           <a:xfrm>
-            <a:off x="5577840" y="3474720"/>
-            <a:ext cx="3017520" cy="1097280"/>
+            <a:off x="5577840" y="3218688"/>
+            <a:ext cx="3017520" cy="914400"/>
           </a:xfrm>
           <a:prstGeom prst="rect">
             <a:avLst/>
@@ -7075,7 +7075,7 @@
                   <a:schemeClr val="tx1"/>
                 </a:solidFill>
               </a:rPr>
-              <a:t>87 good customers declined</a:t>
+              <a:t>87 good customers flagged</a:t>
             </a:r>
             <a:endParaRPr lang="en-US" sz="1200" dirty="0"/>
           </a:p>
@@ -7107,8 +7107,8 @@
         </p:nvSpPr>
         <p:spPr>
           <a:xfrm>
-            <a:off x="457200" y="4498848"/>
-            <a:ext cx="7680960" cy="256032"/>
+            <a:off x="457200" y="4370832"/>
+            <a:ext cx="8229600" cy="329184"/>
           </a:xfrm>
           <a:prstGeom prst="rect">
             <a:avLst/>
@@ -7129,7 +7129,7 @@
                   <a:schemeClr val="accent6"/>
                 </a:solidFill>
               </a:rPr>
-              <a:t>Curves: out-of-fold predictions on the training rows, where we chose the threshold. Cards: test set, per 1,000 applicants. Cost assumes $9,000 per missed defaulter and $2,000 per wrongly declined customer. The optimum stays at 0.15 for cost ratios from 3:1 to 6:1, on a finer grid and on other train/test splits. It sits just below the textbook break-even (0.18) because the scores understate risk.</a:t>
+              <a:t>Curves: out-of-fold predictions on the training rows. Cards: test set, per 1,000 applicants, at $9,000 per missed defaulter and $2,000 per wrongly declined customer. The optimum stays at 0.15 for cost ratios 3:1 to 6:1 and on other splits.</a:t>
             </a:r>
             <a:endParaRPr lang="en-US" sz="900" dirty="0"/>
           </a:p>
@@ -7888,7 +7888,7 @@
                           <a:ea typeface="Calibri" pitchFamily="34" charset="-122"/>
                           <a:cs typeface="Calibri" pitchFamily="34" charset="-120"/>
                         </a:rPr>
-                        <a:t>Good customers declined or referred</a:t>
+                        <a:t>Good customers flagged at 0.15</a:t>
                       </a:r>
                       <a:endParaRPr lang="en-US" sz="1150" dirty="0">
                         <a:latin typeface="Calibri" charset="0"/>
@@ -8419,7 +8419,7 @@
                   <a:schemeClr val="tx1"/>
                 </a:solidFill>
               </a:rPr>
-              <a:t>Costs: roughly $300-400k one-off (pipeline, integration, validation, fairness review, training) and about $100k a year to run and monitor. Repays its cost within year one even if only a quarter of the benefit is realised.</a:t>
+              <a:t>Costs: roughly $300-400k one-off (pipeline, integration, validation, fairness review, training) and about $100k a year to run and monitor. It repays its cost within year one even if the bank gets only a quarter of the benefit.</a:t>
             </a:r>
             <a:endParaRPr lang="en-US" sz="1100" dirty="0"/>
           </a:p>
@@ -8727,7 +8727,7 @@
                   <a:schemeClr val="tx1"/>
                 </a:solidFill>
               </a:rPr>
-              <a:t>Build the scoring pipeline and reason codes</a:t>
+              <a:t>Build the scoring pipeline and per-applicant risk drivers</a:t>
             </a:r>
             <a:endParaRPr lang="en-US" sz="1100" dirty="0"/>
           </a:p>
@@ -8887,7 +8887,7 @@
                   <a:schemeClr val="accent1"/>
                 </a:solidFill>
               </a:rPr>
-              <a:t>Months 2-4: shadow and pilot</a:t>
+              <a:t>Months 2-4: shadow run</a:t>
             </a:r>
             <a:endParaRPr lang="en-US" sz="1300" dirty="0"/>
           </a:p>
@@ -8945,7 +8945,7 @@
                   <a:schemeClr val="tx1"/>
                 </a:solidFill>
               </a:rPr>
-              <a:t>Re-train once verified ratios arrive. Tune the approve / refer / decline bands</a:t>
+              <a:t>Test the model on applicants with a recorded ratio. Tune the approve / refer / decline bands</a:t>
             </a:r>
             <a:endParaRPr lang="en-US" sz="1100" dirty="0"/>
           </a:p>
@@ -8963,7 +8963,7 @@
                   <a:schemeClr val="tx1"/>
                 </a:solidFill>
               </a:rPr>
-              <a:t>Train underwriters on reason codes and referrals</a:t>
+              <a:t>Train underwriters on risk drivers and referrals</a:t>
             </a:r>
             <a:endParaRPr lang="en-US" sz="1100" dirty="0"/>
           </a:p>
@@ -9163,7 +9163,7 @@
                   <a:schemeClr val="tx1"/>
                 </a:solidFill>
               </a:rPr>
-              <a:t>Yearly re-training. Threshold review with finance</a:t>
+              <a:t>Re-train once 12+ months of verified outcomes exist, then yearly. Threshold review with finance</a:t>
             </a:r>
             <a:endParaRPr lang="en-US" sz="1100" dirty="0"/>
           </a:p>
@@ -9239,7 +9239,7 @@
                   <a:schemeClr val="tx1"/>
                 </a:solidFill>
               </a:rPr>
-              <a:t>Decline or escalate above a 45% debt-to-income ratio. Refer to an underwriter with two or more delinquent credit lines or two or more major derogatory reports. Observed default: 45% and 51%+. Hard rules take precedence over the score.</a:t>
+              <a:t>Decline or escalate above a 45% debt-to-income ratio. Refer to an underwriter with two or more delinquent credit lines or two or more major derogatory reports. Observed default: 45% and 51%+. Where a rule and the score disagree, the stricter outcome applies.</a:t>
             </a:r>
             <a:endParaRPr lang="en-US" sz="1150" dirty="0"/>
           </a:p>
@@ -9486,7 +9486,7 @@
                   <a:schemeClr val="tx1"/>
                 </a:solidFill>
               </a:rPr>
-              <a:t>The 'ratio missing' signal will change once verification is mandatory. Re-train on the verified population before go-live. On applicants with a recorded ratio the model already catches 83% at 80% precision.</a:t>
+              <a:t>The 'ratio missing' signal will change once verification is mandatory. Before go-live, test the model on applicants with a recorded ratio (83% caught at 80% precision). Re-train after 12+ months of verified outcomes.</a:t>
             </a:r>
             <a:endParaRPr lang="en-US" sz="1100" dirty="0"/>
           </a:p>
@@ -9540,7 +9540,7 @@
                   <a:schemeClr val="tx1"/>
                 </a:solidFill>
               </a:rPr>
-              <a:t>Explainability and automation bias: tree-based reason codes, a referral band, documented overrides.</a:t>
+              <a:t>Explainability and automation bias: per-applicant risk drivers (built in months 0-2), a referral band, documented overrides.</a:t>
             </a:r>
             <a:endParaRPr lang="en-US" sz="1100" dirty="0"/>
           </a:p>
@@ -9643,7 +9643,7 @@
                   <a:schemeClr val="tx1"/>
                 </a:solidFill>
               </a:rPr>
-              <a:t>Reject inference to cover applicants the old process declined.</a:t>
+              <a:t>Reject inference to cover applicants the old process declined (needs 12+ months of data).</a:t>
             </a:r>
             <a:endParaRPr lang="en-US" sz="1100" dirty="0"/>
           </a:p>
@@ -9733,7 +9733,7 @@
                   <a:schemeClr val="tx1"/>
                 </a:solidFill>
               </a:rPr>
-              <a:t>SHAP-style reason codes per applicant in applicant-friendly language.</a:t>
+              <a:t>Applicant-friendly wording for the per-applicant risk drivers, tested with compliance staff.</a:t>
             </a:r>
             <a:endParaRPr lang="en-US" sz="1100" dirty="0"/>
           </a:p>
@@ -15992,8 +15992,8 @@
         </p:nvSpPr>
         <p:spPr>
           <a:xfrm>
-            <a:off x="457200" y="4526280"/>
-            <a:ext cx="8229600" cy="228600"/>
+            <a:off x="457200" y="4407408"/>
+            <a:ext cx="8229600" cy="301752"/>
           </a:xfrm>
           <a:prstGeom prst="rect">
             <a:avLst/>
@@ -16014,7 +16014,7 @@
                   <a:schemeClr val="accent6"/>
                 </a:solidFill>
               </a:rPr>
-              <a:t>Test set of 1,788 applicants at the 0.5 threshold except the proposed model. Train recall of 1.000 marks un-pruned models that memorised the training rows. We chose the proposed model (the default forest with its threshold moved) and its threshold on repeated out-of-fold expected cost (training rows only). We fixed the rule beforehand: lowest mean cost, simplest set-up among those within one standard error (about $10,500). Mean out-of-fold ROC-AUC 0.961 against 0.963 on test.</a:t>
+              <a:t>Test set of 1,788 applicants at the 0.5 threshold except the proposed model. Train recall of 1.000 marks un-pruned models that memorised the training rows. We chose the proposed model and its threshold on repeated out-of-fold expected cost (training rows only).</a:t>
             </a:r>
             <a:endParaRPr lang="en-US" sz="900" dirty="0"/>
           </a:p>
@@ -16505,7 +16505,7 @@
         </p:nvSpPr>
         <p:spPr>
           <a:xfrm>
-            <a:off x="1005840" y="1847088"/>
+            <a:off x="1005840" y="1819656"/>
             <a:ext cx="7772400" cy="0"/>
           </a:xfrm>
           <a:prstGeom prst="line">
@@ -16528,7 +16528,7 @@
         </p:nvSpPr>
         <p:spPr>
           <a:xfrm>
-            <a:off x="457200" y="1975104"/>
+            <a:off x="457200" y="1938528"/>
             <a:ext cx="384048" cy="384048"/>
           </a:xfrm>
           <a:prstGeom prst="ellipse">
@@ -16553,7 +16553,7 @@
         </p:nvSpPr>
         <p:spPr>
           <a:xfrm>
-            <a:off x="457200" y="1975104"/>
+            <a:off x="457200" y="1938528"/>
             <a:ext cx="384048" cy="384048"/>
           </a:xfrm>
           <a:prstGeom prst="rect">
@@ -16589,7 +16589,7 @@
         </p:nvSpPr>
         <p:spPr>
           <a:xfrm>
-            <a:off x="1005840" y="1883664"/>
+            <a:off x="1005840" y="1847088"/>
             <a:ext cx="3291840" cy="603504"/>
           </a:xfrm>
           <a:prstGeom prst="rect">
@@ -16625,7 +16625,7 @@
         </p:nvSpPr>
         <p:spPr>
           <a:xfrm>
-            <a:off x="4389120" y="1883664"/>
+            <a:off x="4389120" y="1847088"/>
             <a:ext cx="4389120" cy="603504"/>
           </a:xfrm>
           <a:prstGeom prst="rect">
@@ -16661,7 +16661,7 @@
         </p:nvSpPr>
         <p:spPr>
           <a:xfrm>
-            <a:off x="1005840" y="2542032"/>
+            <a:off x="1005840" y="2478024"/>
             <a:ext cx="7772400" cy="0"/>
           </a:xfrm>
           <a:prstGeom prst="line">
@@ -16684,7 +16684,7 @@
         </p:nvSpPr>
         <p:spPr>
           <a:xfrm>
-            <a:off x="457200" y="2670048"/>
+            <a:off x="457200" y="2596896"/>
             <a:ext cx="384048" cy="384048"/>
           </a:xfrm>
           <a:prstGeom prst="ellipse">
@@ -16709,7 +16709,7 @@
         </p:nvSpPr>
         <p:spPr>
           <a:xfrm>
-            <a:off x="457200" y="2670048"/>
+            <a:off x="457200" y="2596896"/>
             <a:ext cx="384048" cy="384048"/>
           </a:xfrm>
           <a:prstGeom prst="rect">
@@ -16745,7 +16745,7 @@
         </p:nvSpPr>
         <p:spPr>
           <a:xfrm>
-            <a:off x="1005840" y="2578608"/>
+            <a:off x="1005840" y="2505456"/>
             <a:ext cx="3291840" cy="603504"/>
           </a:xfrm>
           <a:prstGeom prst="rect">
@@ -16781,7 +16781,7 @@
         </p:nvSpPr>
         <p:spPr>
           <a:xfrm>
-            <a:off x="4389120" y="2578608"/>
+            <a:off x="4389120" y="2505456"/>
             <a:ext cx="4389120" cy="603504"/>
           </a:xfrm>
           <a:prstGeom prst="rect">
@@ -16817,7 +16817,7 @@
         </p:nvSpPr>
         <p:spPr>
           <a:xfrm>
-            <a:off x="1005840" y="3236976"/>
+            <a:off x="1005840" y="3136392"/>
             <a:ext cx="7772400" cy="0"/>
           </a:xfrm>
           <a:prstGeom prst="line">
@@ -16840,7 +16840,7 @@
         </p:nvSpPr>
         <p:spPr>
           <a:xfrm>
-            <a:off x="457200" y="3364992"/>
+            <a:off x="457200" y="3255264"/>
             <a:ext cx="384048" cy="384048"/>
           </a:xfrm>
           <a:prstGeom prst="ellipse">
@@ -16865,7 +16865,7 @@
         </p:nvSpPr>
         <p:spPr>
           <a:xfrm>
-            <a:off x="457200" y="3364992"/>
+            <a:off x="457200" y="3255264"/>
             <a:ext cx="384048" cy="384048"/>
           </a:xfrm>
           <a:prstGeom prst="rect">
@@ -16901,7 +16901,7 @@
         </p:nvSpPr>
         <p:spPr>
           <a:xfrm>
-            <a:off x="1005840" y="3273552"/>
+            <a:off x="1005840" y="3163824"/>
             <a:ext cx="3291840" cy="603504"/>
           </a:xfrm>
           <a:prstGeom prst="rect">
@@ -16937,7 +16937,7 @@
         </p:nvSpPr>
         <p:spPr>
           <a:xfrm>
-            <a:off x="4389120" y="3273552"/>
+            <a:off x="4389120" y="3163824"/>
             <a:ext cx="4389120" cy="603504"/>
           </a:xfrm>
           <a:prstGeom prst="rect">
@@ -16959,7 +16959,7 @@
                   <a:schemeClr val="tx1"/>
                 </a:solidFill>
               </a:rPr>
-              <a:t>They reproduce 93% of the forest's decisions on unseen applicants (73% for never flagging, kappa 0.82). The forest's own top risk drivers explain the remaining 7%.</a:t>
+              <a:t>They reproduce 93% of the forest's decisions on unseen applicants (73% for never flagging, kappa 0.82). Per-applicant risk drivers from the forest give each decline its own reason.</a:t>
             </a:r>
             <a:endParaRPr lang="en-US" sz="1200" dirty="0"/>
           </a:p>
@@ -16973,7 +16973,7 @@
         </p:nvSpPr>
         <p:spPr>
           <a:xfrm>
-            <a:off x="1005840" y="3931920"/>
+            <a:off x="1005840" y="3794760"/>
             <a:ext cx="7772400" cy="0"/>
           </a:xfrm>
           <a:prstGeom prst="line">
@@ -16996,7 +16996,7 @@
         </p:nvSpPr>
         <p:spPr>
           <a:xfrm>
-            <a:off x="457200" y="4059936"/>
+            <a:off x="457200" y="3913632"/>
             <a:ext cx="384048" cy="384048"/>
           </a:xfrm>
           <a:prstGeom prst="ellipse">
@@ -17021,7 +17021,7 @@
         </p:nvSpPr>
         <p:spPr>
           <a:xfrm>
-            <a:off x="457200" y="4059936"/>
+            <a:off x="457200" y="3913632"/>
             <a:ext cx="384048" cy="384048"/>
           </a:xfrm>
           <a:prstGeom prst="rect">
@@ -17057,7 +17057,7 @@
         </p:nvSpPr>
         <p:spPr>
           <a:xfrm>
-            <a:off x="1005840" y="3968496"/>
+            <a:off x="1005840" y="3822192"/>
             <a:ext cx="3291840" cy="603504"/>
           </a:xfrm>
           <a:prstGeom prst="rect">
@@ -17093,7 +17093,7 @@
         </p:nvSpPr>
         <p:spPr>
           <a:xfrm>
-            <a:off x="4389120" y="3968496"/>
+            <a:off x="4389120" y="3822192"/>
             <a:ext cx="4389120" cy="603504"/>
           </a:xfrm>
           <a:prstGeom prst="rect">
@@ -17115,7 +17115,7 @@
                   <a:schemeClr val="tx1"/>
                 </a:solidFill>
               </a:rPr>
-              <a:t>Loan size, credit-history length, occupation and loan purpose do not change the outcome in the surrogate. They matter only in combination inside the forest, which supplies the per-applicant reason codes.</a:t>
+              <a:t>Loan size, credit-history length, occupation and loan purpose do not change the surrogate's outcome. They matter only in combination inside the forest.</a:t>
             </a:r>
             <a:endParaRPr lang="en-US" sz="1200" dirty="0"/>
           </a:p>
@@ -17129,8 +17129,8 @@
         </p:nvSpPr>
         <p:spPr>
           <a:xfrm>
-            <a:off x="457200" y="4572000"/>
-            <a:ext cx="8229600" cy="228600"/>
+            <a:off x="457200" y="4462272"/>
+            <a:ext cx="8229600" cy="274320"/>
           </a:xfrm>
           <a:prstGeom prst="rect">
             <a:avLst/>
@@ -17151,7 +17151,7 @@
                   <a:schemeClr val="accent6"/>
                 </a:solidFill>
               </a:rPr>
-              <a:t>Surrogate: depth-4 tree, minimum 20 applicants per leaf, fitted to the forest's out-of-fold flag/clear decisions at threshold 0.15 on the training rows. It agrees with the forest on 93% of test decisions (73% for a rule that never flags). The stand-alone tuned tree (test recall 82%, precision 53%) found the same drivers.</a:t>
+              <a:t>Surrogate: depth-4 tree, at least 20 applicants per leaf, fitted to the forest's out-of-fold flag/clear decisions at threshold 0.15 on the training rows. The stand-alone tuned tree (test recall 82%, precision 53%) found the same drivers.</a:t>
             </a:r>
             <a:endParaRPr lang="en-US" sz="900" dirty="0"/>
           </a:p>
@@ -18998,7 +18998,7 @@
         <p:spPr>
           <a:xfrm>
             <a:off x="457200" y="1188720"/>
-            <a:ext cx="1965960" cy="3291840"/>
+            <a:ext cx="1965960" cy="2743200"/>
           </a:xfrm>
           <a:prstGeom prst="roundRect">
             <a:avLst>
@@ -19067,8 +19067,8 @@
         </p:nvSpPr>
         <p:spPr>
           <a:xfrm>
-            <a:off x="594360" y="2286000"/>
-            <a:ext cx="1691640" cy="2011680"/>
+            <a:off x="594360" y="2240280"/>
+            <a:ext cx="1691640" cy="1600200"/>
           </a:xfrm>
           <a:prstGeom prst="rect">
             <a:avLst/>
@@ -19084,14 +19084,14 @@
               <a:buNone/>
             </a:pPr>
             <a:r>
-              <a:rPr lang="en-US" sz="1250" dirty="0">
+              <a:rPr lang="en-US" sz="1200" dirty="0">
                 <a:solidFill>
                   <a:schemeClr val="tx1"/>
                 </a:solidFill>
               </a:rPr>
               <a:t>home equity loans in the data ended in default. Accuracy alone is a misleading yardstick.</a:t>
             </a:r>
-            <a:endParaRPr lang="en-US" sz="1250" dirty="0"/>
+            <a:endParaRPr lang="en-US" sz="1200" dirty="0"/>
           </a:p>
         </p:txBody>
       </p:sp>
@@ -19104,7 +19104,7 @@
         <p:spPr>
           <a:xfrm>
             <a:off x="2560320" y="1188720"/>
-            <a:ext cx="1965960" cy="3291840"/>
+            <a:ext cx="1965960" cy="2743200"/>
           </a:xfrm>
           <a:prstGeom prst="roundRect">
             <a:avLst>
@@ -19173,8 +19173,8 @@
         </p:nvSpPr>
         <p:spPr>
           <a:xfrm>
-            <a:off x="2697480" y="2286000"/>
-            <a:ext cx="1691640" cy="2011680"/>
+            <a:off x="2697480" y="2240280"/>
+            <a:ext cx="1691640" cy="1600200"/>
           </a:xfrm>
           <a:prstGeom prst="rect">
             <a:avLst/>
@@ -19190,14 +19190,14 @@
               <a:buNone/>
             </a:pPr>
             <a:r>
-              <a:rPr lang="en-US" sz="1250" dirty="0">
+              <a:rPr lang="en-US" sz="1200" dirty="0">
                 <a:solidFill>
                   <a:schemeClr val="tx1"/>
                 </a:solidFill>
               </a:rPr>
               <a:t>default rate when the applicant's debt-to-income ratio is missing, versus 8.6% when it is present. Unverified income is the strongest warning sign.</a:t>
             </a:r>
-            <a:endParaRPr lang="en-US" sz="1250" dirty="0"/>
+            <a:endParaRPr lang="en-US" sz="1200" dirty="0"/>
           </a:p>
         </p:txBody>
       </p:sp>
@@ -19210,7 +19210,7 @@
         <p:spPr>
           <a:xfrm>
             <a:off x="4663440" y="1188720"/>
-            <a:ext cx="1965960" cy="3291840"/>
+            <a:ext cx="1965960" cy="2743200"/>
           </a:xfrm>
           <a:prstGeom prst="roundRect">
             <a:avLst>
@@ -19279,8 +19279,8 @@
         </p:nvSpPr>
         <p:spPr>
           <a:xfrm>
-            <a:off x="4800600" y="2286000"/>
-            <a:ext cx="1691640" cy="2011680"/>
+            <a:off x="4800600" y="2240280"/>
+            <a:ext cx="1691640" cy="1600200"/>
           </a:xfrm>
           <a:prstGeom prst="rect">
             <a:avLst/>
@@ -19296,14 +19296,14 @@
               <a:buNone/>
             </a:pPr>
             <a:r>
-              <a:rPr lang="en-US" sz="1250" dirty="0">
+              <a:rPr lang="en-US" sz="1200" dirty="0">
                 <a:solidFill>
                   <a:schemeClr val="tx1"/>
                 </a:solidFill>
               </a:rPr>
-              <a:t>of future defaulters among unseen applicants. The proposed Random Forest model catches them. 2 of every 3 applicants it flags really would have defaulted.</a:t>
+              <a:t>of future defaulters among unseen applicants. The proposed Random Forest model catches them. 2 of every 3 applicants it flagged really defaulted.</a:t>
             </a:r>
-            <a:endParaRPr lang="en-US" sz="1250" dirty="0"/>
+            <a:endParaRPr lang="en-US" sz="1200" dirty="0"/>
           </a:p>
         </p:txBody>
       </p:sp>
@@ -19316,7 +19316,7 @@
         <p:spPr>
           <a:xfrm>
             <a:off x="6766560" y="1188720"/>
-            <a:ext cx="1965960" cy="3291840"/>
+            <a:ext cx="1965960" cy="2743200"/>
           </a:xfrm>
           <a:prstGeom prst="roundRect">
             <a:avLst>
@@ -19385,8 +19385,8 @@
         </p:nvSpPr>
         <p:spPr>
           <a:xfrm>
-            <a:off x="6903720" y="2286000"/>
-            <a:ext cx="1691640" cy="2011680"/>
+            <a:off x="6903720" y="2240280"/>
+            <a:ext cx="1691640" cy="1600200"/>
           </a:xfrm>
           <a:prstGeom prst="rect">
             <a:avLst/>
@@ -19402,12 +19402,59 @@
               <a:buNone/>
             </a:pPr>
             <a:r>
-              <a:rPr lang="en-US" sz="1250" dirty="0">
+              <a:rPr lang="en-US" sz="1200" dirty="0">
                 <a:solidFill>
                   <a:schemeClr val="tx1"/>
                 </a:solidFill>
               </a:rPr>
               <a:t>indicative annual benefit on 6,000 applications, from roughly $10.8M of default-related cost down to about $1.8M.</a:t>
+            </a:r>
+            <a:endParaRPr lang="en-US" sz="1200" dirty="0"/>
+          </a:p>
+        </p:txBody>
+      </p:sp>
+      <p:sp>
+        <p:nvSpPr>
+          <p:cNvPr id="15" name="recommendation line"/>
+          <p:cNvSpPr txBox="1"/>
+          <p:nvPr/>
+        </p:nvSpPr>
+        <p:spPr>
+          <a:xfrm>
+            <a:off x="457200" y="4069080"/>
+            <a:ext cx="8229600" cy="594360"/>
+          </a:xfrm>
+          <a:prstGeom prst="rect">
+            <a:avLst/>
+          </a:prstGeom>
+          <a:noFill/>
+          <a:ln/>
+        </p:spPr>
+        <p:txBody>
+          <a:bodyPr wrap="square" lIns="0" tIns="0" rIns="0" bIns="0" rtlCol="0" anchor="t"/>
+          <a:lstStyle/>
+          <a:p>
+            <a:pPr indent="0" marL="0">
+              <a:buNone/>
+            </a:pPr>
+            <a:r>
+              <a:rPr lang="en-US" sz="1250" b="1" dirty="0">
+                <a:solidFill>
+                  <a:schemeClr val="accent2"/>
+                </a:solidFill>
+              </a:rPr>
+              <a:t>Recommendation: </a:t>
+            </a:r>
+            <a:pPr indent="0" marL="0">
+              <a:buNone/>
+            </a:pPr>
+            <a:r>
+              <a:rPr lang="en-US" sz="1250" dirty="0">
+                <a:solidFill>
+                  <a:schemeClr val="accent1"/>
+                </a:solidFill>
+              </a:rPr>
+              <a:t>make income and valuation checks mandatory. Deploy the forest at a 0.15 threshold with approve / refer / decline bands, after a two-month shadow run and a fairness review.</a:t>
             </a:r>
             <a:endParaRPr lang="en-US" sz="1250" dirty="0"/>
           </a:p>
@@ -21316,7 +21363,7 @@
                   <a:schemeClr val="tx1"/>
                 </a:solidFill>
               </a:rPr>
-              <a:t>Between a 20% and a 40% ratio only 4-7% default. Above 45% almost everyone does. Each delinquent line or derogatory report roughly doubles the risk (0 reports: 17%, 1: 39%, 2: 51%, 3+: about 75%). Both are plain-language rules to give an applicant.</a:t>
+              <a:t>Between a 20% and a 40% ratio only 4-7% default. Above 45% almost everyone does. The first delinquent line or derogatory report more than doubles the risk. Each further one raises it again (delinquent lines: 14% at zero, 34% at one, 100% at six or more).</a:t>
             </a:r>
             <a:endParaRPr lang="en-US" sz="1200" dirty="0"/>
           </a:p>
@@ -21503,14 +21550,14 @@
               <a:buNone/>
             </a:pPr>
             <a:r>
-              <a:rPr lang="en-US" sz="1200" dirty="0">
+              <a:rPr lang="en-US" sz="1150" dirty="0">
                 <a:solidFill>
                   <a:schemeClr val="tx1"/>
                 </a:solidFill>
               </a:rPr>
-              <a:t>Default rate (%) by group. Applicants with under five years of credit history default four times as often as those with twenty-plus years. Loans under $5,000 default 57% of the time. Occupation shifts risk moderately. On its own it adds little at the usual threshold. But removing it from the final model raises the expected cost of credit errors by about 10%. So it stays, subject to the fair-lending review.</a:t>
+              <a:t>Default rate (%) by group. Applicants with under five years of credit history default four times as often as those with twenty-plus years. Loans under $5,000 default 57% of the time. Occupation shifts risk moderately and adds little on its own at the usual threshold. But removing it from the final model raises the expected cost of credit errors by about 10%. So it stays, subject to the fair-lending review.</a:t>
             </a:r>
-            <a:endParaRPr lang="en-US" sz="1200" dirty="0"/>
+            <a:endParaRPr lang="en-US" sz="1150" dirty="0"/>
           </a:p>
         </p:txBody>
       </p:sp>
@@ -21900,7 +21947,7 @@
                   <a:schemeClr val="tx1"/>
                 </a:solidFill>
               </a:rPr>
-              <a:t>The model says 'will default'. The customer would have repaid.</a:t>
+              <a:t>The model says 'will default'. The customer is creditworthy.</a:t>
             </a:r>
             <a:endParaRPr lang="en-US" sz="1200" dirty="0"/>
           </a:p>

--- a/presentation/Loan_Default_Prediction_Presentation.pptx
+++ b/presentation/Loan_Default_Prediction_Presentation.pptx
@@ -125,26 +125,26 @@
   <p:extLst>
     <p:ext uri="{521415D9-36F7-43E2-AB2F-B90AF26B5E84}">
       <p14:sectionLst xmlns:p14="http://schemas.microsoft.com/office/powerpoint/2010/main">
-        <p14:section name="Opening" id="{05f17b95-2e9d-e1cf-d5c3-31552d2972ad}">
+        <p14:section name="Opening" id="{024872b7-6347-1176-c108-1a6c5df5e5e9}">
           <p14:sldIdLst>
             <p14:sldId id="256"/>
             <p14:sldId id="257"/>
           </p14:sldIdLst>
         </p14:section>
-        <p14:section name="Problem and approach" id="{b53050ee-32a1-3593-ba50-ff4c29b8db7a}">
+        <p14:section name="Problem and approach" id="{3c3469b8-a23c-0f4f-30d4-ca2009c7e98d}">
           <p14:sldIdLst>
             <p14:sldId id="258"/>
             <p14:sldId id="259"/>
           </p14:sldIdLst>
         </p14:section>
-        <p14:section name="Key insights" id="{cbe73b71-560d-06fb-1c97-4c4c6a2a2760}">
+        <p14:section name="Key insights" id="{29298f19-d98a-9751-ef4e-5137f4b61733}">
           <p14:sldIdLst>
             <p14:sldId id="260"/>
             <p14:sldId id="261"/>
             <p14:sldId id="262"/>
           </p14:sldIdLst>
         </p14:section>
-        <p14:section name="Modelling" id="{4b3a6934-de0e-8701-8407-be9685350889}">
+        <p14:section name="Modelling" id="{7d01b399-d63f-6834-28b7-33db6f38b6ed}">
           <p14:sldIdLst>
             <p14:sldId id="263"/>
             <p14:sldId id="264"/>
@@ -152,7 +152,7 @@
             <p14:sldId id="266"/>
           </p14:sldIdLst>
         </p14:section>
-        <p14:section name="Recommendations" id="{40b678c2-f08f-08bd-1f44-3deee930ed7e}">
+        <p14:section name="Recommendations" id="{1a560e43-1db7-195c-1d4f-f33ca76b414f}">
           <p14:sldIdLst>
             <p14:sldId id="267"/>
             <p14:sldId id="268"/>
@@ -160,7 +160,7 @@
             <p14:sldId id="270"/>
           </p14:sldIdLst>
         </p14:section>
-        <p14:section name="Appendix" id="{fdd49870-b53a-963b-aafc-92d4b52e7c5c}">
+        <p14:section name="Appendix" id="{ad62cb44-cad2-0677-bb70-513f158d669f}">
           <p14:sldIdLst>
             <p14:sldId id="271"/>
             <p14:sldId id="272"/>
@@ -5331,7 +5331,7 @@
           <a:p>
             <a:r>
               <a:rPr lang="en-US" dirty="0"/>
-              <a:t>We built eleven model variants. These six tell the story. At the usual threshold the forest with class weights has the best balance and ranks applicants among the best. We then chose the final configuration and its threshold together on repeated out-of-fold expected cost, using training rows only. We fixed the rule beforehand: lowest mean cost of mistakes, and the simplest set-up when several are within run-to-run noise. Three forests tied within that noise, so class weights made no measurable difference once we tune the threshold. We chose the plain forest at a 0.15 threshold. On the test set it catches 93 percent of defaulters, and two thirds of the flagged applicants really defaulted. At their own best thresholds the logistic regression and the tree cost 550 and 607 thousand dollars per thousand applicants. The forest costs 317 thousand, so it also wins on the cost yardstick.</a:t>
+              <a:t>We built eleven model variants. These six tell the story. At the usual threshold the forest with class weights has the best balance and ranks applicants among the best. We then chose the final configuration and its threshold together on repeated out-of-fold expected cost, using training rows only. We fixed the rule beforehand: lowest mean cost of mistakes, and the simplest set-up when several are within run-to-run noise. Three forests tied within that noise, so class weights added nothing once we tune the threshold. We chose the plain forest at a 0.15 threshold. On the test set it catches 93 percent of defaulters, and two thirds of the flagged applicants really defaulted. At their own best thresholds the logistic regression and the tree cost 550 and 607 thousand dollars per thousand applicants. The forest costs 317 thousand, so it also wins on the cost yardstick.</a:t>
             </a:r>
             <a:endParaRPr lang="en-US" dirty="0"/>
           </a:p>
@@ -6349,7 +6349,7 @@
                   <a:schemeClr val="tx1"/>
                 </a:solidFill>
               </a:rPr>
-              <a:t>Explanation layer: a depth-4 surrogate tree reproduces 93% of the forest's out-of-fold decisions and gives the plain-language summary. Per-applicant risk drivers (built in months 0-2) give each decline its ECOA reason.</a:t>
+              <a:t>Explanation layer: a depth-4 surrogate tree reproduces 93% of the forest's out-of-fold decisions and gives the plain-language summary. Per-applicant risk drivers (built before the shadow run) give each decline its ECOA reason.</a:t>
             </a:r>
             <a:endParaRPr lang="en-US" sz="1100" dirty="0"/>
           </a:p>
@@ -9661,7 +9661,7 @@
                   <a:schemeClr val="tx1"/>
                 </a:solidFill>
               </a:rPr>
-              <a:t>Engineered features: loan-to-value and payment-to-income ratios.</a:t>
+              <a:t>Engineered features: combined loan-to-value ratio, debt-to-income bands, interaction terms.</a:t>
             </a:r>
             <a:endParaRPr lang="en-US" sz="1100" dirty="0"/>
           </a:p>
@@ -18631,7 +18631,7 @@
                           <a:ea typeface="Calibri" pitchFamily="34" charset="-122"/>
                           <a:cs typeface="Calibri" pitchFamily="34" charset="-120"/>
                         </a:rPr>
-                        <a:t>Keeps each real applicant. Class weights lifted recall by 23 points for logistic regression and 9 for the forest at the 0.5 threshold. They made no measurable difference once we chose the threshold on cost, so the final forest is unweighted</a:t>
+                        <a:t>Keeps each real applicant. Class weights lifted recall by 23 points for logistic regression and 9 for the forest at the 0.5 threshold. They added nothing once we chose the threshold on cost, so the final forest is unweighted</a:t>
                       </a:r>
                       <a:endParaRPr lang="en-US" sz="950" dirty="0">
                         <a:latin typeface="Calibri" charset="0"/>

--- a/presentation/Loan_Default_Prediction_Presentation.pptx
+++ b/presentation/Loan_Default_Prediction_Presentation.pptx
@@ -125,26 +125,26 @@
   <p:extLst>
     <p:ext uri="{521415D9-36F7-43E2-AB2F-B90AF26B5E84}">
       <p14:sectionLst xmlns:p14="http://schemas.microsoft.com/office/powerpoint/2010/main">
-        <p14:section name="Opening" id="{024872b7-6347-1176-c108-1a6c5df5e5e9}">
+        <p14:section name="Opening" id="{26b4bff5-d502-a538-1ab2-91c5de606850}">
           <p14:sldIdLst>
             <p14:sldId id="256"/>
             <p14:sldId id="257"/>
           </p14:sldIdLst>
         </p14:section>
-        <p14:section name="Problem and approach" id="{3c3469b8-a23c-0f4f-30d4-ca2009c7e98d}">
+        <p14:section name="Problem and approach" id="{07013b1c-fdbb-0eba-9175-e32c77e209b9}">
           <p14:sldIdLst>
             <p14:sldId id="258"/>
             <p14:sldId id="259"/>
           </p14:sldIdLst>
         </p14:section>
-        <p14:section name="Key insights" id="{29298f19-d98a-9751-ef4e-5137f4b61733}">
+        <p14:section name="Key insights" id="{44898d68-4f9f-c501-4c89-5ed46a3b47de}">
           <p14:sldIdLst>
             <p14:sldId id="260"/>
             <p14:sldId id="261"/>
             <p14:sldId id="262"/>
           </p14:sldIdLst>
         </p14:section>
-        <p14:section name="Modelling" id="{7d01b399-d63f-6834-28b7-33db6f38b6ed}">
+        <p14:section name="Modelling" id="{fdb1327d-4aac-26a6-0494-8c252398247f}">
           <p14:sldIdLst>
             <p14:sldId id="263"/>
             <p14:sldId id="264"/>
@@ -152,7 +152,7 @@
             <p14:sldId id="266"/>
           </p14:sldIdLst>
         </p14:section>
-        <p14:section name="Recommendations" id="{1a560e43-1db7-195c-1d4f-f33ca76b414f}">
+        <p14:section name="Recommendations" id="{7d809f85-6544-e076-0c1e-191b39603eb6}">
           <p14:sldIdLst>
             <p14:sldId id="267"/>
             <p14:sldId id="268"/>
@@ -160,7 +160,7 @@
             <p14:sldId id="270"/>
           </p14:sldIdLst>
         </p14:section>
-        <p14:section name="Appendix" id="{ad62cb44-cad2-0677-bb70-513f158d669f}">
+        <p14:section name="Appendix" id="{12bbe9fc-a2d1-f086-4b5d-14fa725e3ad2}">
           <p14:sldIdLst>
             <p14:sldId id="271"/>
             <p14:sldId id="272"/>
@@ -2143,7 +2143,7 @@
                     <c:v>Bagged trees (200)</c:v>
                   </c:pt>
                   <c:pt idx="3">
-                    <c:v>Random Forest (default; proposed at 0.5)</c:v>
+                    <c:v>Random Forest (default: proposed model at 0.5)</c:v>
                   </c:pt>
                   <c:pt idx="4">
                     <c:v>Random Forest (class weights)</c:v>
@@ -2244,7 +2244,7 @@
                     <c:v>Bagged trees (200)</c:v>
                   </c:pt>
                   <c:pt idx="3">
-                    <c:v>Random Forest (default; proposed at 0.5)</c:v>
+                    <c:v>Random Forest (default: proposed model at 0.5)</c:v>
                   </c:pt>
                   <c:pt idx="4">
                     <c:v>Random Forest (class weights)</c:v>

--- a/presentation/Loan_Default_Prediction_Presentation.pptx
+++ b/presentation/Loan_Default_Prediction_Presentation.pptx
@@ -125,26 +125,26 @@
   <p:extLst>
     <p:ext uri="{521415D9-36F7-43E2-AB2F-B90AF26B5E84}">
       <p14:sectionLst xmlns:p14="http://schemas.microsoft.com/office/powerpoint/2010/main">
-        <p14:section name="Opening" id="{26b4bff5-d502-a538-1ab2-91c5de606850}">
+        <p14:section name="Opening" id="{a7f826f0-1d36-ae61-6541-eb9d3fbe70db}">
           <p14:sldIdLst>
             <p14:sldId id="256"/>
             <p14:sldId id="257"/>
           </p14:sldIdLst>
         </p14:section>
-        <p14:section name="Problem and approach" id="{07013b1c-fdbb-0eba-9175-e32c77e209b9}">
+        <p14:section name="Problem and approach" id="{368fc12e-f32b-ea89-db37-afccd7554805}">
           <p14:sldIdLst>
             <p14:sldId id="258"/>
             <p14:sldId id="259"/>
           </p14:sldIdLst>
         </p14:section>
-        <p14:section name="Key insights" id="{44898d68-4f9f-c501-4c89-5ed46a3b47de}">
+        <p14:section name="Key insights" id="{2ec2be44-89c2-78f7-ed66-827689e9557b}">
           <p14:sldIdLst>
             <p14:sldId id="260"/>
             <p14:sldId id="261"/>
             <p14:sldId id="262"/>
           </p14:sldIdLst>
         </p14:section>
-        <p14:section name="Modelling" id="{fdb1327d-4aac-26a6-0494-8c252398247f}">
+        <p14:section name="Modelling" id="{c4a2f653-b9ad-e94e-74d5-85153b76eae2}">
           <p14:sldIdLst>
             <p14:sldId id="263"/>
             <p14:sldId id="264"/>
@@ -152,7 +152,7 @@
             <p14:sldId id="266"/>
           </p14:sldIdLst>
         </p14:section>
-        <p14:section name="Recommendations" id="{7d809f85-6544-e076-0c1e-191b39603eb6}">
+        <p14:section name="Recommendations" id="{53d25c27-e281-58f0-f06d-e49182df7018}">
           <p14:sldIdLst>
             <p14:sldId id="267"/>
             <p14:sldId id="268"/>
@@ -160,7 +160,7 @@
             <p14:sldId id="270"/>
           </p14:sldIdLst>
         </p14:section>
-        <p14:section name="Appendix" id="{12bbe9fc-a2d1-f086-4b5d-14fa725e3ad2}">
+        <p14:section name="Appendix" id="{01266bd1-2a0e-f19d-bab9-3995f3ef9572}">
           <p14:sldIdLst>
             <p14:sldId id="271"/>
             <p14:sldId id="272"/>
@@ -4099,7 +4099,7 @@
           <a:p>
             <a:r>
               <a:rPr lang="en-US" dirty="0"/>
-              <a:t>The roadmap has three phases: prepare, shadow run, then scale. There are three policy rules the bank can adopt immediately, with or without the model. First, set a debt-to-income limit of 45 percent. Second, refer anyone with two or more delinquencies or derogatory reports to an underwriter. Third, treat a missing income or valuation as high risk and require verification. We read the first two thresholds straight from the observed default rates. Where a rule and the score disagree, the stricter outcome applies.</a:t>
+              <a:t>The roadmap has three phases: prepare, shadow run, then scale. There are three policy rules the bank can adopt immediately, with or without the model. First, set a debt-to-income limit of 45 percent. Second, refer anyone with two or more delinquencies or derogatory reports to an underwriter. Third, treat a missing income or valuation as high risk and require verification. We read the first two thresholds straight from the observed default rates. Where a rule and the score disagree, the stricter outcome applies. The slide 10 band shares exclude these referrals.</a:t>
             </a:r>
             <a:endParaRPr lang="en-US" dirty="0"/>
           </a:p>
@@ -5243,7 +5243,7 @@
           <a:p>
             <a:r>
               <a:rPr lang="en-US" dirty="0"/>
-              <a:t>Before comparing models, the yardstick. Approving a future defaulter costs the bank most of the principal. Declining a good customer costs only the margin. So the primary metric is recall, the share of defaulters we catch, with precision as the guard-rail against declining everyone.</a:t>
+              <a:t>Before comparing models, the yardstick. Approving a future defaulter costs the bank a large part of the principal. Declining a good customer costs only the margin. So the primary metric is recall, the share of defaulters we catch, with precision as the guard-rail against declining everyone.</a:t>
             </a:r>
             <a:endParaRPr lang="en-US" dirty="0"/>
           </a:p>
@@ -5331,7 +5331,7 @@
           <a:p>
             <a:r>
               <a:rPr lang="en-US" dirty="0"/>
-              <a:t>We built eleven model variants. These six tell the story. At the usual threshold the forest with class weights has the best balance and ranks applicants among the best. We then chose the final configuration and its threshold together on repeated out-of-fold expected cost, using training rows only. We fixed the rule beforehand: lowest mean cost of mistakes, and the simplest set-up when several are within run-to-run noise. Three forests tied within that noise, so class weights added nothing once we tune the threshold. We chose the plain forest at a 0.15 threshold. On the test set it catches 93 percent of defaulters, and two thirds of the flagged applicants really defaulted. At their own best thresholds the logistic regression and the tree cost 550 and 607 thousand dollars per thousand applicants. The forest costs 317 thousand, so it also wins on the cost yardstick.</a:t>
+              <a:t>We built eleven model variants. These six tell the story. At the usual threshold the forest with class weights has the best balance and ranks applicants among the best. We then chose the final configuration and its threshold together on repeated out-of-fold expected cost, using training rows only. We fixed the rule beforehand: lowest mean cost of mistakes, and the simplest set-up when several are within run-to-run noise. Three forests tied within that noise, so class weights added nothing once we chose the threshold on cost. We chose the plain forest at a 0.15 threshold. On the test set it catches 93 percent of defaulters, and two thirds of the flagged applicants really defaulted. At their own best thresholds the bagged trees, the logistic regression and the tree cost 390, 550 and 607 thousand dollars per thousand applicants. The forest costs 317 thousand, so it also wins on the cost yardstick.</a:t>
             </a:r>
             <a:endParaRPr lang="en-US" dirty="0"/>
           </a:p>
@@ -8356,14 +8356,14 @@
               <a:buNone/>
             </a:pPr>
             <a:r>
-              <a:rPr lang="en-US" sz="1200" dirty="0">
+              <a:rPr lang="en-US" sz="1100" dirty="0">
                 <a:solidFill>
                   <a:schemeClr val="bg2"/>
                 </a:solidFill>
               </a:rPr>
               <a:t>indicative gross annual benefit. About $8.9M after running costs, $8.5M in year one</a:t>
             </a:r>
-            <a:endParaRPr lang="en-US" sz="1200" dirty="0"/>
+            <a:endParaRPr lang="en-US" sz="1100" dirty="0"/>
           </a:p>
         </p:txBody>
       </p:sp>
@@ -8945,7 +8945,7 @@
                   <a:schemeClr val="tx1"/>
                 </a:solidFill>
               </a:rPr>
-              <a:t>Test the model on applicants with a recorded ratio. Tune the approve / refer / decline bands</a:t>
+              <a:t>Test on past applicants with a recorded ratio. Tune the approve / refer / decline bands</a:t>
             </a:r>
             <a:endParaRPr lang="en-US" sz="1100" dirty="0"/>
           </a:p>
@@ -9145,7 +9145,7 @@
                   <a:schemeClr val="tx1"/>
                 </a:solidFill>
               </a:rPr>
-              <a:t>Monitor monthly: recall, precision, approval rate, missing fields</a:t>
+              <a:t>Monthly: approval rate, missing fields. As outcomes arrive: recall, precision</a:t>
             </a:r>
             <a:endParaRPr lang="en-US" sz="1100" dirty="0"/>
           </a:p>
@@ -9486,7 +9486,7 @@
                   <a:schemeClr val="tx1"/>
                 </a:solidFill>
               </a:rPr>
-              <a:t>The 'ratio missing' signal will change once verification is mandatory. Before go-live, test the model on applicants with a recorded ratio (83% caught at 80% precision). Re-train after 12+ months of verified outcomes.</a:t>
+              <a:t>The 'ratio missing' signal will change once verification is mandatory. Before go-live, test on past applicants with a recorded ratio (83% caught at 80% precision). Re-train after 12+ months of verified outcomes.</a:t>
             </a:r>
             <a:endParaRPr lang="en-US" sz="1100" dirty="0"/>
           </a:p>
@@ -9540,7 +9540,7 @@
                   <a:schemeClr val="tx1"/>
                 </a:solidFill>
               </a:rPr>
-              <a:t>Explainability and automation bias: per-applicant risk drivers (built in months 0-2), a referral band, documented overrides.</a:t>
+              <a:t>Explainability and automation bias: per-applicant risk drivers, a referral band, documented overrides.</a:t>
             </a:r>
             <a:endParaRPr lang="en-US" sz="1100" dirty="0"/>
           </a:p>
@@ -18040,7 +18040,7 @@
                           <a:ea typeface="Calibri" pitchFamily="34" charset="-122"/>
                           <a:cs typeface="Calibri" pitchFamily="34" charset="-120"/>
                         </a:rPr>
-                        <a:t>Extreme values pull linear models (debt-to-income 203%, credit history 97 years). Trees split on rank order and keep the 'above 50% always defaults' signal</a:t>
+                        <a:t>Extreme values pull linear models (debt-to-income 203%, credit history 97 years). Trees split on rank order, so extreme values do not distort them</a:t>
                       </a:r>
                       <a:endParaRPr lang="en-US" sz="950" dirty="0">
                         <a:latin typeface="Calibri" charset="0"/>
@@ -21823,7 +21823,7 @@
                   <a:schemeClr val="tx1"/>
                 </a:solidFill>
               </a:rPr>
-              <a:t>The bank loses most of the principal plus collection cost: about $9,000 on an average $16,900 defaulted loan.</a:t>
+              <a:t>The bank loses a large part of the principal plus collection cost: about $9,000 on an average $16,900 defaulted loan.</a:t>
             </a:r>
             <a:endParaRPr lang="en-US" sz="1200" dirty="0"/>
           </a:p>

--- a/presentation/Loan_Default_Prediction_Presentation.pptx
+++ b/presentation/Loan_Default_Prediction_Presentation.pptx
@@ -125,26 +125,26 @@
   <p:extLst>
     <p:ext uri="{521415D9-36F7-43E2-AB2F-B90AF26B5E84}">
       <p14:sectionLst xmlns:p14="http://schemas.microsoft.com/office/powerpoint/2010/main">
-        <p14:section name="Opening" id="{a7f826f0-1d36-ae61-6541-eb9d3fbe70db}">
+        <p14:section name="Opening" id="{38c4bc4e-2915-2a87-b841-446367403869}">
           <p14:sldIdLst>
             <p14:sldId id="256"/>
             <p14:sldId id="257"/>
           </p14:sldIdLst>
         </p14:section>
-        <p14:section name="Problem and approach" id="{368fc12e-f32b-ea89-db37-afccd7554805}">
+        <p14:section name="Problem and approach" id="{b321e987-0aff-7844-b0cc-2b3942438861}">
           <p14:sldIdLst>
             <p14:sldId id="258"/>
             <p14:sldId id="259"/>
           </p14:sldIdLst>
         </p14:section>
-        <p14:section name="Key insights" id="{2ec2be44-89c2-78f7-ed66-827689e9557b}">
+        <p14:section name="Key insights" id="{5632ece6-e2a5-ce98-7a0a-b8a4fd66bd13}">
           <p14:sldIdLst>
             <p14:sldId id="260"/>
             <p14:sldId id="261"/>
             <p14:sldId id="262"/>
           </p14:sldIdLst>
         </p14:section>
-        <p14:section name="Modelling" id="{c4a2f653-b9ad-e94e-74d5-85153b76eae2}">
+        <p14:section name="Modelling" id="{113d6635-5758-bcbf-3157-d78d9cf98f23}">
           <p14:sldIdLst>
             <p14:sldId id="263"/>
             <p14:sldId id="264"/>
@@ -152,7 +152,7 @@
             <p14:sldId id="266"/>
           </p14:sldIdLst>
         </p14:section>
-        <p14:section name="Recommendations" id="{53d25c27-e281-58f0-f06d-e49182df7018}">
+        <p14:section name="Recommendations" id="{8ea0698d-341c-6881-8e58-27ab8191cf38}">
           <p14:sldIdLst>
             <p14:sldId id="267"/>
             <p14:sldId id="268"/>
@@ -160,7 +160,7 @@
             <p14:sldId id="270"/>
           </p14:sldIdLst>
         </p14:section>
-        <p14:section name="Appendix" id="{01266bd1-2a0e-f19d-bab9-3995f3ef9572}">
+        <p14:section name="Appendix" id="{cbbb411e-e37b-827c-95f7-b36e804b4a75}">
           <p14:sldIdLst>
             <p14:sldId id="271"/>
             <p14:sldId id="272"/>
@@ -18828,7 +18828,7 @@
                           <a:ea typeface="Calibri" pitchFamily="34" charset="-122"/>
                           <a:cs typeface="Calibri" pitchFamily="34" charset="-120"/>
                         </a:rPr>
-                        <a:t>The notebook's final-pipeline cell names every input to the final model, with the imputation values and model settings</a:t>
+                        <a:t>The final-pipeline cell names every input. Smaller sets cost more out of fold (21 inputs without occupation +10%, 12 inputs +19%), so all 27 stay</a:t>
                       </a:r>
                       <a:endParaRPr lang="en-US" sz="950" dirty="0">
                         <a:latin typeface="Calibri" charset="0"/>

--- a/presentation/Loan_Default_Prediction_Presentation.pptx
+++ b/presentation/Loan_Default_Prediction_Presentation.pptx
@@ -125,26 +125,26 @@
   <p:extLst>
     <p:ext uri="{521415D9-36F7-43E2-AB2F-B90AF26B5E84}">
       <p14:sectionLst xmlns:p14="http://schemas.microsoft.com/office/powerpoint/2010/main">
-        <p14:section name="Opening" id="{38c4bc4e-2915-2a87-b841-446367403869}">
+        <p14:section name="Opening" id="{4bd73a43-34e0-c8c7-d7de-0e125493f825}">
           <p14:sldIdLst>
             <p14:sldId id="256"/>
             <p14:sldId id="257"/>
           </p14:sldIdLst>
         </p14:section>
-        <p14:section name="Problem and approach" id="{b321e987-0aff-7844-b0cc-2b3942438861}">
+        <p14:section name="Problem and approach" id="{2dc41030-6da8-2a51-ad2a-17cd48bdcd8a}">
           <p14:sldIdLst>
             <p14:sldId id="258"/>
             <p14:sldId id="259"/>
           </p14:sldIdLst>
         </p14:section>
-        <p14:section name="Key insights" id="{5632ece6-e2a5-ce98-7a0a-b8a4fd66bd13}">
+        <p14:section name="Key insights" id="{e1789cb2-adee-278c-4cc3-96e3b7e0bc92}">
           <p14:sldIdLst>
             <p14:sldId id="260"/>
             <p14:sldId id="261"/>
             <p14:sldId id="262"/>
           </p14:sldIdLst>
         </p14:section>
-        <p14:section name="Modelling" id="{113d6635-5758-bcbf-3157-d78d9cf98f23}">
+        <p14:section name="Modelling" id="{73805249-8449-dbaf-d53f-15d67b4d9db0}">
           <p14:sldIdLst>
             <p14:sldId id="263"/>
             <p14:sldId id="264"/>
@@ -152,7 +152,7 @@
             <p14:sldId id="266"/>
           </p14:sldIdLst>
         </p14:section>
-        <p14:section name="Recommendations" id="{8ea0698d-341c-6881-8e58-27ab8191cf38}">
+        <p14:section name="Recommendations" id="{6e40bfff-3293-bf34-89f9-8e5a02edd23e}">
           <p14:sldIdLst>
             <p14:sldId id="267"/>
             <p14:sldId id="268"/>
@@ -160,7 +160,7 @@
             <p14:sldId id="270"/>
           </p14:sldIdLst>
         </p14:section>
-        <p14:section name="Appendix" id="{cbbb411e-e37b-827c-95f7-b36e804b4a75}">
+        <p14:section name="Appendix" id="{71f734e1-526b-6809-5fdf-ba3f4c5f5e7d}">
           <p14:sldIdLst>
             <p14:sldId id="271"/>
             <p14:sldId id="272"/>
@@ -2143,7 +2143,7 @@
                     <c:v>Bagged trees (200)</c:v>
                   </c:pt>
                   <c:pt idx="3">
-                    <c:v>Random Forest (default: proposed model at 0.5)</c:v>
+                    <c:v>Random Forest (proposed model at 0.5)</c:v>
                   </c:pt>
                   <c:pt idx="4">
                     <c:v>Random Forest (class weights)</c:v>
@@ -2171,7 +2171,7 @@
                   <c:v>68.3</c:v>
                 </c:pt>
                 <c:pt idx="3">
-                  <c:v>68.6</c:v>
+                  <c:v>67.8</c:v>
                 </c:pt>
                 <c:pt idx="4">
                   <c:v>77.3</c:v>
@@ -2244,7 +2244,7 @@
                     <c:v>Bagged trees (200)</c:v>
                   </c:pt>
                   <c:pt idx="3">
-                    <c:v>Random Forest (default: proposed model at 0.5)</c:v>
+                    <c:v>Random Forest (proposed model at 0.5)</c:v>
                   </c:pt>
                   <c:pt idx="4">
                     <c:v>Random Forest (class weights)</c:v>
@@ -2272,13 +2272,13 @@
                   <c:v>82.7</c:v>
                 </c:pt>
                 <c:pt idx="3">
-                  <c:v>84.2</c:v>
+                  <c:v>82.9</c:v>
                 </c:pt>
                 <c:pt idx="4">
                   <c:v>76.9</c:v>
                 </c:pt>
                 <c:pt idx="5">
-                  <c:v>68.1</c:v>
+                  <c:v>67.4</c:v>
                 </c:pt>
               </c:numCache>
             </c:numRef>
@@ -2615,46 +2615,46 @@
                 <c:formatCode>General</c:formatCode>
                 <c:ptCount val="14"/>
                 <c:pt idx="0">
-                  <c:v>98.6</c:v>
+                  <c:v>98.4</c:v>
                 </c:pt>
                 <c:pt idx="1">
-                  <c:v>96.4</c:v>
+                  <c:v>96.2</c:v>
                 </c:pt>
                 <c:pt idx="2">
                   <c:v>93.7</c:v>
                 </c:pt>
                 <c:pt idx="3">
-                  <c:v>90.4</c:v>
+                  <c:v>90.2</c:v>
                 </c:pt>
                 <c:pt idx="4">
-                  <c:v>87.1</c:v>
+                  <c:v>86.7</c:v>
                 </c:pt>
                 <c:pt idx="5">
                   <c:v>83.9</c:v>
                 </c:pt>
                 <c:pt idx="6">
-                  <c:v>80.8</c:v>
+                  <c:v>81.2</c:v>
                 </c:pt>
                 <c:pt idx="7">
-                  <c:v>78.4</c:v>
+                  <c:v>78.2</c:v>
                 </c:pt>
                 <c:pt idx="8">
                   <c:v>75.1</c:v>
                 </c:pt>
                 <c:pt idx="9">
-                  <c:v>71.4</c:v>
+                  <c:v>71</c:v>
                 </c:pt>
                 <c:pt idx="10">
-                  <c:v>67.2</c:v>
+                  <c:v>66.7</c:v>
                 </c:pt>
                 <c:pt idx="11">
-                  <c:v>62</c:v>
+                  <c:v>61.3</c:v>
                 </c:pt>
                 <c:pt idx="12">
-                  <c:v>55.3</c:v>
+                  <c:v>53</c:v>
                 </c:pt>
                 <c:pt idx="13">
-                  <c:v>47.4</c:v>
+                  <c:v>45.4</c:v>
                 </c:pt>
               </c:numCache>
             </c:numRef>
@@ -2789,46 +2789,46 @@
                 <c:formatCode>General</c:formatCode>
                 <c:ptCount val="14"/>
                 <c:pt idx="0">
-                  <c:v>44.6</c:v>
+                  <c:v>43.8</c:v>
                 </c:pt>
                 <c:pt idx="1">
-                  <c:v>57.1</c:v>
+                  <c:v>56.6</c:v>
                 </c:pt>
                 <c:pt idx="2">
-                  <c:v>64.7</c:v>
+                  <c:v>63.9</c:v>
                 </c:pt>
                 <c:pt idx="3">
-                  <c:v>68.5</c:v>
+                  <c:v>68</c:v>
                 </c:pt>
                 <c:pt idx="4">
-                  <c:v>71.1</c:v>
+                  <c:v>70.7</c:v>
                 </c:pt>
                 <c:pt idx="5">
-                  <c:v>73.6</c:v>
+                  <c:v>73</c:v>
                 </c:pt>
                 <c:pt idx="6">
-                  <c:v>75.5</c:v>
+                  <c:v>75.4</c:v>
                 </c:pt>
                 <c:pt idx="7">
-                  <c:v>78.1</c:v>
+                  <c:v>77.8</c:v>
                 </c:pt>
                 <c:pt idx="8">
                   <c:v>80.2</c:v>
                 </c:pt>
                 <c:pt idx="9">
-                  <c:v>82.5</c:v>
+                  <c:v>82.7</c:v>
                 </c:pt>
                 <c:pt idx="10">
-                  <c:v>85.6</c:v>
+                  <c:v>85.5</c:v>
                 </c:pt>
                 <c:pt idx="11">
-                  <c:v>87.6</c:v>
+                  <c:v>87.8</c:v>
                 </c:pt>
                 <c:pt idx="12">
-                  <c:v>89.2</c:v>
+                  <c:v>89.4</c:v>
                 </c:pt>
                 <c:pt idx="13">
-                  <c:v>91.5</c:v>
+                  <c:v>91</c:v>
                 </c:pt>
               </c:numCache>
             </c:numRef>
@@ -3166,40 +3166,40 @@
                 <c:formatCode>General</c:formatCode>
                 <c:ptCount val="12"/>
                 <c:pt idx="0">
-                  <c:v>18.6</c:v>
+                  <c:v>17.2</c:v>
                 </c:pt>
                 <c:pt idx="1">
-                  <c:v>14</c:v>
+                  <c:v>14.4</c:v>
                 </c:pt>
                 <c:pt idx="2">
-                  <c:v>8.6</c:v>
+                  <c:v>8.7</c:v>
                 </c:pt>
                 <c:pt idx="3">
                   <c:v>8</c:v>
                 </c:pt>
                 <c:pt idx="4">
-                  <c:v>6.9</c:v>
+                  <c:v>7.5</c:v>
                 </c:pt>
                 <c:pt idx="5">
+                  <c:v>7.2</c:v>
+                </c:pt>
+                <c:pt idx="6">
+                  <c:v>6.8</c:v>
+                </c:pt>
+                <c:pt idx="7">
                   <c:v>6.7</c:v>
                 </c:pt>
-                <c:pt idx="6">
-                  <c:v>6.4</c:v>
-                </c:pt>
-                <c:pt idx="7">
-                  <c:v>6.4</c:v>
-                </c:pt>
                 <c:pt idx="8">
-                  <c:v>5.1</c:v>
+                  <c:v>5.3</c:v>
                 </c:pt>
                 <c:pt idx="9">
-                  <c:v>4.4</c:v>
+                  <c:v>4.7</c:v>
                 </c:pt>
                 <c:pt idx="10">
-                  <c:v>3.4</c:v>
+                  <c:v>3.6</c:v>
                 </c:pt>
                 <c:pt idx="11">
-                  <c:v>2.6</c:v>
+                  <c:v>2.9</c:v>
                 </c:pt>
               </c:numCache>
             </c:numRef>
@@ -3835,7 +3835,7 @@
           <a:p>
             <a:r>
               <a:rPr lang="en-US" dirty="0"/>
-              <a:t>The proposal. A Random Forest scores the applicants. A surrogate decision tree fitted to the forest's out-of-fold decisions reproduces ninety-three percent of them and gives the plain-language summary of the rules. Per-applicant risk drivers, built before the shadow run, give each decline its own reason. On unseen applicants the forest catches 93 percent of defaulters. On the same applicants, two out of three flagged applicants really defaulted.</a:t>
+              <a:t>The proposal. A Random Forest on 22 inputs scores the applicants. Stage 2 of the selection removed five weak missing flags, those of mortgage balance, delinquent lines, credit-line age, inquiries and number of credit lines. The rule kept the smallest input set within one standard error of the lowest cost. Stage 3 checked the 22-input forest against all 27 inputs and kept it. The fallback without occupation uses 16 inputs and costs about 13 percent more. A surrogate decision tree, fitted to the forest's out-of-fold decisions, reproduces ninety-three percent of the forest's decisions on unseen applicants. It gives the plain-language summary of the rules. Per-applicant risk drivers, built before the shadow run, give each decline its own reason. On unseen applicants the forest catches 93 percent of defaulters. On the same applicants, two out of three flagged applicants really defaulted.</a:t>
             </a:r>
             <a:endParaRPr lang="en-US" dirty="0"/>
           </a:p>
@@ -3923,7 +3923,7 @@
           <a:p>
             <a:r>
               <a:rPr lang="en-US" dirty="0"/>
-              <a:t>The model outputs a probability, and 0.5 is only a convention. We chose the threshold on out-of-fold predictions of the training rows, so the test set played no part. Moving it to 0.15 cuts missed defaulters from 63 to 15 per thousand applicants on the test set. The price is flagging 87 instead of 26 good customers. It is the cheapest operating point for any cost ratio between three and six to one. It held on a finer grid and on other train/test splits. It sits just below the textbook break-even of 0.18 for a perfectly calibrated score, because the forest's scores understate risk in the decision range. Applicants scored fifteen to twenty percent defaulted about twenty-three percent of the time.</a:t>
+              <a:t>The model outputs a probability, and 0.5 is only a convention. We chose the threshold on out-of-fold predictions of the training rows, so the test set played no part. Moving it to 0.15 cuts missed defaulters from 64 to 15 per thousand applicants on the test set. The price is flagging 90 instead of 28 good customers. It is the cheapest operating point for any cost ratio between four and a half and eight to one. Our assumed ratio of four and a half to one sits at the lower edge of that range. It held on a finer grid and on other train/test splits. It sits just below the textbook break-even of 0.18 for a perfectly calibrated score, because the forest's scores understate risk in the decision range. Applicants scored fifteen to twenty percent defaulted about twenty-eight percent of the time.</a:t>
             </a:r>
             <a:endParaRPr lang="en-US" dirty="0"/>
           </a:p>
@@ -4011,7 +4011,7 @@
           <a:p>
             <a:r>
               <a:rPr lang="en-US" dirty="0"/>
-              <a:t>With round-number assumptions, the bank's default-related cost falls from about 10.8 million to about 1.8 million a year on 6,000 applications. Even if the real benefit were a quarter of that, the project repays its cost inside a year. Finance should replace these assumptions with actual loss and margin figures.</a:t>
+              <a:t>With round-number assumptions, the bank's default-related cost falls from about 10.8 million to about 1.9 million a year on 6,000 applications. Even if the real benefit were a quarter of that, the project repays its cost inside a year. Finance should replace these assumptions with actual loss and margin figures.</a:t>
             </a:r>
             <a:endParaRPr lang="en-US" dirty="0"/>
           </a:p>
@@ -4363,7 +4363,7 @@
           <a:p>
             <a:r>
               <a:rPr lang="en-US" dirty="0"/>
-              <a:t>All models on the test set. We fixed the selection rule beforehand: lowest mean cost, and the simplest set-up among those within one standard error, about 10,500 dollars per thousand applicants. The mean out-of-fold ROC-AUC of the proposed model is 0.961, against 0.963 on the test set.</a:t>
+              <a:t>All models on the test set. We fixed the selection rule beforehand: lowest mean cost, and the simplest set-up among those within one standard error, about 10,500 dollars per thousand applicants. On the seed-averaged input curve one standard error is about 9,700 dollars, and the same rule kept 22 inputs. The mean out-of-fold ROC-AUC of the proposed model is 0.960, against 0.961 on the test set.</a:t>
             </a:r>
             <a:endParaRPr lang="en-US" dirty="0"/>
           </a:p>
@@ -4979,7 +4979,7 @@
           <a:p>
             <a:r>
               <a:rPr lang="en-US" dirty="0"/>
-              <a:t>The single most important finding. When the debt-to-income ratio is missing, 62 percent of those applicants defaulted. When the property valuation is missing, 94 percent. The absence of information is itself a signal, so the models carry a flag for every missing field.</a:t>
+              <a:t>The single most important finding. When the debt-to-income ratio is missing, 62 percent of those applicants defaulted. When the property valuation is missing, 94 percent. The absence of information is itself a signal, so the models carry a flag for every missing field. The final model keeps six of these flags, because the input-set reduction removed five weak ones.</a:t>
             </a:r>
             <a:endParaRPr lang="en-US" dirty="0"/>
           </a:p>
@@ -5155,7 +5155,7 @@
           <a:p>
             <a:r>
               <a:rPr lang="en-US" dirty="0"/>
-              <a:t>Three supporting drivers. A long credit history protects. Small loans are the riskiest, not the safest. Occupation matters a little: removing it raises the expected cost of credit errors by about 10 percent. The fair-lending review decides whether it stays in the model.</a:t>
+              <a:t>Three supporting drivers. A long credit history protects. Small loans are the riskiest, not the safest. Occupation matters a little: removing it raises the expected cost of credit errors by about 13 percent. The fair-lending review decides whether it stays in the model.</a:t>
             </a:r>
             <a:endParaRPr lang="en-US" dirty="0"/>
           </a:p>
@@ -5331,7 +5331,7 @@
           <a:p>
             <a:r>
               <a:rPr lang="en-US" dirty="0"/>
-              <a:t>We built eleven model variants. These six tell the story. At the usual threshold the forest with class weights has the best balance and ranks applicants among the best. We then chose the final configuration and its threshold together on repeated out-of-fold expected cost, using training rows only. We fixed the rule beforehand: lowest mean cost of mistakes, and the simplest set-up when several are within run-to-run noise. Three forests tied within that noise, so class weights added nothing once we chose the threshold on cost. We chose the plain forest at a 0.15 threshold. On the test set it catches 93 percent of defaulters, and two thirds of the flagged applicants really defaulted. At their own best thresholds the bagged trees, the logistic regression and the tree cost 390, 550 and 607 thousand dollars per thousand applicants. The forest costs 317 thousand, so it also wins on the cost yardstick.</a:t>
+              <a:t>We built eleven model variants. These six tell the story. At the usual threshold the forest with class weights has the best balance and ranks applicants among the best. We then chose the final configuration and its threshold together on repeated out-of-fold expected cost, using training rows only. We fixed the rule beforehand: lowest mean cost of mistakes, and the simplest set-up when several are within run-to-run noise. Three forests tied within that noise, so class weights added nothing once we chose the threshold on cost. We chose the plain forest at a 0.15 threshold. The same rule then removed five weak missing flags, so the forest uses 22 of the 27 inputs. On the test set it catches 93 percent of defaulters, and two thirds of the flagged applicants really defaulted. At their own best thresholds the bagged trees, the logistic regression and the tree cost 390, 550 and 607 thousand dollars per thousand applicants. The selected forest costs 324 thousand, so it also wins on the cost yardstick.</a:t>
             </a:r>
             <a:endParaRPr lang="en-US" dirty="0"/>
           </a:p>
@@ -6313,7 +6313,7 @@
                   <a:schemeClr val="tx1"/>
                 </a:solidFill>
               </a:rPr>
-              <a:t>Inputs: all 27 (10 attributes, 11 missing-value flags, occupation and loan purpose). Fallback without occupation: 21 inputs, about 10% more cost.</a:t>
+              <a:t>Inputs: 22 of 27 (10 attributes, 6 missing-value flags, occupation and loan purpose). Fallback without occupation: 16 inputs, about 13% more cost.</a:t>
             </a:r>
             <a:endParaRPr lang="en-US" sz="1100" dirty="0"/>
           </a:p>
@@ -6331,7 +6331,7 @@
                   <a:schemeClr val="tx1"/>
                 </a:solidFill>
               </a:rPr>
-              <a:t>Threshold 0.15, chosen with the configuration on repeated out-of-fold expected cost (training rows). It holds for cost ratios 3:1 to 6:1 and across splits. Approve / refer / decline bands (69% / 7% / 24%) keep an underwriter in the loop.</a:t>
+              <a:t>Threshold 0.15, chosen with the configuration on repeated out-of-fold expected cost (training rows). It holds for cost ratios 4.5:1 to 8:1 and across splits. Approve / refer / decline bands (69% / 7% / 24%) keep an underwriter in the loop.</a:t>
             </a:r>
             <a:endParaRPr lang="en-US" sz="1100" dirty="0"/>
           </a:p>
@@ -6349,7 +6349,7 @@
                   <a:schemeClr val="tx1"/>
                 </a:solidFill>
               </a:rPr>
-              <a:t>Explanation layer: a depth-4 surrogate tree reproduces 93% of the forest's out-of-fold decisions and gives the plain-language summary. Per-applicant risk drivers (built before the shadow run) give each decline its ECOA reason.</a:t>
+              <a:t>Explanation layer: a depth-4 surrogate tree reproduces 93% of the forest's test decisions and gives the plain-language summary. Per-applicant risk drivers (built before the shadow run) give each decline its ECOA reason.</a:t>
             </a:r>
             <a:endParaRPr lang="en-US" sz="1100" dirty="0"/>
           </a:p>
@@ -6447,7 +6447,7 @@
       </p:sp>
       <p:sp>
         <p:nvSpPr>
-          <p:cNvPr id="8" name="stat 68%"/>
+          <p:cNvPr id="8" name="stat 67%"/>
           <p:cNvSpPr txBox="1"/>
           <p:nvPr/>
         </p:nvSpPr>
@@ -6475,7 +6475,7 @@
                   <a:schemeClr val="accent1"/>
                 </a:solidFill>
               </a:rPr>
-              <a:t>68%</a:t>
+              <a:t>67%</a:t>
             </a:r>
             <a:endParaRPr lang="en-US" sz="3400" dirty="0"/>
           </a:p>
@@ -6691,7 +6691,7 @@
                   <a:schemeClr val="tx1"/>
                 </a:solidFill>
               </a:rPr>
-              <a:t>Per 1,000 applicants at 0.15: 185 of 200 defaulters flagged in advance, 15 missed, 87 good customers flagged. 27% of applicants flagged, 73% approved.</a:t>
+              <a:t>Per 1,000 applicants at 0.15: 185 of 200 defaulters flagged in advance, 15 missed, 90 good customers flagged. 27% of applicants flagged, 73% approved.</a:t>
             </a:r>
             <a:endParaRPr lang="en-US" sz="1150" dirty="0"/>
           </a:p>
@@ -6918,7 +6918,7 @@
                   <a:schemeClr val="tx1"/>
                 </a:solidFill>
               </a:rPr>
-              <a:t>63 missed defaulters</a:t>
+              <a:t>64 missed defaulters</a:t>
             </a:r>
             <a:endParaRPr lang="en-US" sz="1200" dirty="0"/>
           </a:p>
@@ -6936,7 +6936,7 @@
                   <a:schemeClr val="tx1"/>
                 </a:solidFill>
               </a:rPr>
-              <a:t>26 good customers flagged</a:t>
+              <a:t>28 good customers flagged</a:t>
             </a:r>
             <a:endParaRPr lang="en-US" sz="1200" dirty="0"/>
           </a:p>
@@ -6954,7 +6954,7 @@
                   <a:schemeClr val="tx1"/>
                 </a:solidFill>
               </a:rPr>
-              <a:t>$615k indicative cost</a:t>
+              <a:t>$635k indicative cost</a:t>
             </a:r>
             <a:endParaRPr lang="en-US" sz="1200" dirty="0"/>
           </a:p>
@@ -7075,7 +7075,7 @@
                   <a:schemeClr val="tx1"/>
                 </a:solidFill>
               </a:rPr>
-              <a:t>87 good customers flagged</a:t>
+              <a:t>90 good customers flagged</a:t>
             </a:r>
             <a:endParaRPr lang="en-US" sz="1200" dirty="0"/>
           </a:p>
@@ -7093,7 +7093,7 @@
                   <a:schemeClr val="tx1"/>
                 </a:solidFill>
               </a:rPr>
-              <a:t>$304k indicative cost</a:t>
+              <a:t>$310k indicative cost</a:t>
             </a:r>
             <a:endParaRPr lang="en-US" sz="1200" dirty="0"/>
           </a:p>
@@ -7129,7 +7129,7 @@
                   <a:schemeClr val="accent6"/>
                 </a:solidFill>
               </a:rPr>
-              <a:t>Curves: out-of-fold predictions on the training rows. Cards: test set, per 1,000 applicants, at $9,000 per missed defaulter and $2,000 per wrongly declined customer. The optimum stays at 0.15 for cost ratios 3:1 to 6:1 and on other splits.</a:t>
+              <a:t>Curves: out-of-fold predictions on the training rows. Cards: test set, per 1,000 applicants, at $9,000 per missed defaulter and $2,000 per wrongly declined customer. The optimum stays at 0.15 for cost ratios 4.5:1 to 8:1 and on other splits.</a:t>
             </a:r>
             <a:endParaRPr lang="en-US" sz="900" dirty="0"/>
           </a:p>
@@ -8018,7 +8018,7 @@
                           <a:ea typeface="Calibri" pitchFamily="34" charset="-122"/>
                           <a:cs typeface="Calibri" pitchFamily="34" charset="-120"/>
                         </a:rPr>
-                        <a:t>about 520, margin forgone about $1.0M</a:t>
+                        <a:t>about 540, margin forgone about $1.1M</a:t>
                       </a:r>
                       <a:endParaRPr lang="en-US" sz="1150" dirty="0">
                         <a:latin typeface="Calibri" charset="0"/>
@@ -8215,7 +8215,7 @@
                           <a:ea typeface="Calibri" pitchFamily="34" charset="-122"/>
                           <a:cs typeface="Calibri" pitchFamily="34" charset="-120"/>
                         </a:rPr>
-                        <a:t>about $1.8M</a:t>
+                        <a:t>about $1.9M</a:t>
                       </a:r>
                       <a:endParaRPr lang="en-US" sz="1150" dirty="0">
                         <a:latin typeface="Calibri" charset="0"/>
@@ -8361,7 +8361,7 @@
                   <a:schemeClr val="bg2"/>
                 </a:solidFill>
               </a:rPr>
-              <a:t>indicative gross annual benefit. About $8.9M after running costs, $8.5M in year one</a:t>
+              <a:t>indicative gross annual benefit. About $8.8M after running costs, $8.5M in year one</a:t>
             </a:r>
             <a:endParaRPr lang="en-US" sz="1100" dirty="0"/>
           </a:p>
@@ -9486,7 +9486,7 @@
                   <a:schemeClr val="tx1"/>
                 </a:solidFill>
               </a:rPr>
-              <a:t>The 'ratio missing' signal will change once verification is mandatory. Before go-live, test on past applicants with a recorded ratio (83% caught at 80% precision). Re-train after 12+ months of verified outcomes.</a:t>
+              <a:t>The 'ratio missing' signal will change once verification is mandatory. Before go-live, test on past applicants with a recorded ratio (81% caught at 78% precision). Re-train after 12+ months of verified outcomes.</a:t>
             </a:r>
             <a:endParaRPr lang="en-US" sz="1100" dirty="0"/>
           </a:p>
@@ -9522,7 +9522,7 @@
                   <a:schemeClr val="tx1"/>
                 </a:solidFill>
               </a:rPr>
-              <a:t>Fair lending: the 0.15 threshold wrongly flags about 11% of creditworthy applicants (3% at 0.5). Test for disparate impact before go-live, yearly and at each threshold change. A fallback without occupation is ready (about 10% more cost).</a:t>
+              <a:t>Fair lending: the 0.15 threshold wrongly flags about 11% of creditworthy applicants (3% at 0.5). Test for disparate impact before go-live, yearly and at each threshold change. A fallback without occupation is ready (about 13% more cost).</a:t>
             </a:r>
             <a:endParaRPr lang="en-US" sz="1100" dirty="0"/>
           </a:p>
@@ -15084,7 +15084,7 @@
                           <a:ea typeface="Calibri" pitchFamily="34" charset="-122"/>
                           <a:cs typeface="Calibri" pitchFamily="34" charset="-120"/>
                         </a:rPr>
-                        <a:t>Random Forest (tuned, 12 features)</a:t>
+                        <a:t>Random Forest (tuned, 12 inputs)</a:t>
                       </a:r>
                       <a:endParaRPr lang="en-US" sz="950" dirty="0">
                         <a:latin typeface="Calibri" charset="0"/>
@@ -15541,7 +15541,7 @@
                           <a:ea typeface="Calibri" pitchFamily="34" charset="-122"/>
                           <a:cs typeface="Calibri" pitchFamily="34" charset="-120"/>
                         </a:rPr>
-                        <a:t>Proposed: RF unweighted, 27 inputs, threshold 0.15</a:t>
+                        <a:t>Proposed: RF unweighted, 22 inputs, threshold 0.15</a:t>
                       </a:r>
                       <a:endParaRPr lang="en-US" sz="950" dirty="0">
                         <a:latin typeface="Calibri" charset="0"/>
@@ -15671,7 +15671,7 @@
                           <a:ea typeface="Calibri" pitchFamily="34" charset="-122"/>
                           <a:cs typeface="Calibri" pitchFamily="34" charset="-120"/>
                         </a:rPr>
-                        <a:t>0.681</a:t>
+                        <a:t>0.674</a:t>
                       </a:r>
                       <a:endParaRPr lang="en-US" sz="950" dirty="0">
                         <a:latin typeface="Calibri" charset="0"/>
@@ -15736,7 +15736,7 @@
                           <a:ea typeface="Calibri" pitchFamily="34" charset="-122"/>
                           <a:cs typeface="Calibri" pitchFamily="34" charset="-120"/>
                         </a:rPr>
-                        <a:t>0.785</a:t>
+                        <a:t>0.781</a:t>
                       </a:r>
                       <a:endParaRPr lang="en-US" sz="950" dirty="0">
                         <a:latin typeface="Calibri" charset="0"/>
@@ -15801,7 +15801,7 @@
                           <a:ea typeface="Calibri" pitchFamily="34" charset="-122"/>
                           <a:cs typeface="Calibri" pitchFamily="34" charset="-120"/>
                         </a:rPr>
-                        <a:t>0.899</a:t>
+                        <a:t>0.896</a:t>
                       </a:r>
                       <a:endParaRPr lang="en-US" sz="950" dirty="0">
                         <a:latin typeface="Calibri" charset="0"/>
@@ -15866,7 +15866,7 @@
                           <a:ea typeface="Calibri" pitchFamily="34" charset="-122"/>
                           <a:cs typeface="Calibri" pitchFamily="34" charset="-120"/>
                         </a:rPr>
-                        <a:t>0.963</a:t>
+                        <a:t>0.961</a:t>
                       </a:r>
                       <a:endParaRPr lang="en-US" sz="950" dirty="0">
                         <a:latin typeface="Calibri" charset="0"/>
@@ -16014,7 +16014,7 @@
                   <a:schemeClr val="accent6"/>
                 </a:solidFill>
               </a:rPr>
-              <a:t>Test set of 1,788 applicants at the 0.5 threshold except the proposed model. Train recall of 1.000 marks un-pruned models that memorised the training rows. We chose the proposed model and its threshold on repeated out-of-fold expected cost (training rows only).</a:t>
+              <a:t>Test set of 1,788 applicants at the 0.5 threshold except the proposed model. Train recall of 1.000 marks un-pruned models that memorised the training rows. We chose the proposed model, its 22 inputs and its threshold on repeated out-of-fold expected cost (training rows only).</a:t>
             </a:r>
             <a:endParaRPr lang="en-US" sz="900" dirty="0"/>
           </a:p>
@@ -16232,7 +16232,7 @@
                   <a:schemeClr val="tx1"/>
                 </a:solidFill>
               </a:rPr>
-              <a:t>Occupation, loan purpose and minor flags matter little individually. Yet removing them raised out-of-fold expected cost by about a fifth, and removing occupation alone by about 10%. So they stay subject to the fair-lending review.</a:t>
+              <a:t>Stage 2 removed five weak missing flags (about 2% of the decision power). The cost stayed within one standard error. Removing occupation as well adds about 13%, so it stays subject to the fair-lending review.</a:t>
             </a:r>
             <a:endParaRPr lang="en-US" sz="1100" dirty="0"/>
           </a:p>
@@ -16767,7 +16767,7 @@
                   <a:schemeClr val="accent1"/>
                 </a:solidFill>
               </a:rPr>
-              <a:t>Ratio at or below 44%: a delinquent credit line together with a major derogatory report?</a:t>
+              <a:t>Ratio at or below 44%: a delinquent credit line and a credit history of 93 months or less?</a:t>
             </a:r>
             <a:endParaRPr lang="en-US" sz="1250" dirty="0"/>
           </a:p>
@@ -17115,7 +17115,7 @@
                   <a:schemeClr val="tx1"/>
                 </a:solidFill>
               </a:rPr>
-              <a:t>Loan size, credit-history length, occupation and loan purpose do not change the surrogate's outcome. They matter only in combination inside the forest.</a:t>
+              <a:t>Loan size, derogatory reports, occupation and loan purpose do not change the surrogate's outcome. They matter only in combination inside the forest.</a:t>
             </a:r>
             <a:endParaRPr lang="en-US" sz="1200" dirty="0"/>
           </a:p>
@@ -18763,7 +18763,7 @@
                           <a:ea typeface="Calibri" pitchFamily="34" charset="-122"/>
                           <a:cs typeface="Calibri" pitchFamily="34" charset="-120"/>
                         </a:rPr>
-                        <a:t>27 columns: the 10 attributes, 11 missing flags and 6 one-hot indicators (REASON HomeImp, JOB Office/Other/ProfExe/Sales/Self)</a:t>
+                        <a:t>22 of 27 columns: the 10 attributes, 6 missing flags (VALUE, REASON, JOB, YOJ, DEROG, DEBTINC) and 6 one-hot REASON/JOB indicators</a:t>
                       </a:r>
                       <a:endParaRPr lang="en-US" sz="950" dirty="0">
                         <a:latin typeface="Calibri" charset="0"/>
@@ -18828,7 +18828,7 @@
                           <a:ea typeface="Calibri" pitchFamily="34" charset="-122"/>
                           <a:cs typeface="Calibri" pitchFamily="34" charset="-120"/>
                         </a:rPr>
-                        <a:t>The final-pipeline cell names every input. Smaller sets cost more out of fold (21 inputs without occupation +10%, 12 inputs +19%), so all 27 stay</a:t>
+                        <a:t>Stage 2 removed five flags (MORTDUE, DELINQ, CLAGE, NINQ, CLNO): smallest set within one standard error of the lowest cost. Stage 3 checked it against all 27</a:t>
                       </a:r>
                       <a:endParaRPr lang="en-US" sz="950" dirty="0">
                         <a:latin typeface="Calibri" charset="0"/>
@@ -19407,7 +19407,7 @@
                   <a:schemeClr val="tx1"/>
                 </a:solidFill>
               </a:rPr>
-              <a:t>indicative annual benefit on 6,000 applications, from roughly $10.8M of default-related cost down to about $1.8M.</a:t>
+              <a:t>indicative annual benefit on 6,000 applications, from roughly $10.8M of default-related cost down to about $1.9M.</a:t>
             </a:r>
             <a:endParaRPr lang="en-US" sz="1200" dirty="0"/>
           </a:p>
@@ -20791,7 +20791,7 @@
                   <a:schemeClr val="tx1"/>
                 </a:solidFill>
               </a:rPr>
-              <a:t>Recall on defaulters as the primary metric. Precision, F1, ROC-AUC as guard-rails. Final model and threshold chosen on out-of-fold expected cost</a:t>
+              <a:t>Recall on defaulters as the primary metric. Precision, F1, ROC-AUC as guard-rails. Final model, inputs and threshold chosen on out-of-fold expected cost</a:t>
             </a:r>
             <a:endParaRPr lang="en-US" sz="1100" dirty="0"/>
           </a:p>
@@ -21187,7 +21187,7 @@
                   <a:schemeClr val="tx1"/>
                 </a:solidFill>
               </a:rPr>
-              <a:t>Action: every imputed field gets a 'was missing' flag in the model. Verification should become mandatory in the process.</a:t>
+              <a:t>Action: every imputed field gets a 'was missing' flag for the models. Verification should become mandatory in the process.</a:t>
             </a:r>
             <a:endParaRPr lang="en-US" sz="1250" dirty="0"/>
           </a:p>
@@ -21555,7 +21555,7 @@
                   <a:schemeClr val="tx1"/>
                 </a:solidFill>
               </a:rPr>
-              <a:t>Default rate (%) by group. Applicants with under five years of credit history default four times as often as those with twenty-plus years. Loans under $5,000 default 57% of the time. Occupation shifts risk moderately and adds little on its own at the usual threshold. But removing it from the final model raises the expected cost of credit errors by about 10%. So it stays, subject to the fair-lending review.</a:t>
+              <a:t>Default rate (%) by group. Applicants with under five years of credit history default four times as often as those with twenty-plus years. Loans under $5,000 default 57% of the time. Occupation shifts risk moderately and adds little on its own at the usual threshold. But removing it from the final model raises the expected cost of credit errors by about 13%. So it stays, subject to the fair-lending review.</a:t>
             </a:r>
             <a:endParaRPr lang="en-US" sz="1150" dirty="0"/>
           </a:p>
@@ -22277,7 +22277,7 @@
                   <a:schemeClr val="tx1"/>
                 </a:solidFill>
               </a:rPr>
-              <a:t>Final choice on the expected cost of mistakes (training rows only), by a rule fixed beforehand: lowest mean cost, simplest if within noise. Three forests tied. The plain forest at 0.15 catches 93% at 68% precision on test.</a:t>
+              <a:t>Final choice on the expected cost of mistakes (training rows only), by a rule fixed beforehand: lowest mean cost, simplest if within noise. The plain forest on 22 inputs at 0.15 catches 93% at 67% precision on test.</a:t>
             </a:r>
             <a:endParaRPr lang="en-US" sz="1200" dirty="0"/>
           </a:p>

--- a/presentation/Loan_Default_Prediction_Presentation.pptx
+++ b/presentation/Loan_Default_Prediction_Presentation.pptx
@@ -125,26 +125,26 @@
   <p:extLst>
     <p:ext uri="{521415D9-36F7-43E2-AB2F-B90AF26B5E84}">
       <p14:sectionLst xmlns:p14="http://schemas.microsoft.com/office/powerpoint/2010/main">
-        <p14:section name="Opening" id="{4bd73a43-34e0-c8c7-d7de-0e125493f825}">
+        <p14:section name="Opening" id="{a4457d1a-2bbf-3295-7f76-2787341740c4}">
           <p14:sldIdLst>
             <p14:sldId id="256"/>
             <p14:sldId id="257"/>
           </p14:sldIdLst>
         </p14:section>
-        <p14:section name="Problem and approach" id="{2dc41030-6da8-2a51-ad2a-17cd48bdcd8a}">
+        <p14:section name="Problem and approach" id="{65714d2d-2070-d04c-29a1-6ae6acb1db49}">
           <p14:sldIdLst>
             <p14:sldId id="258"/>
             <p14:sldId id="259"/>
           </p14:sldIdLst>
         </p14:section>
-        <p14:section name="Key insights" id="{e1789cb2-adee-278c-4cc3-96e3b7e0bc92}">
+        <p14:section name="Key insights" id="{c345ab57-e9ee-41ba-dde8-e8d9535996b0}">
           <p14:sldIdLst>
             <p14:sldId id="260"/>
             <p14:sldId id="261"/>
             <p14:sldId id="262"/>
           </p14:sldIdLst>
         </p14:section>
-        <p14:section name="Modelling" id="{73805249-8449-dbaf-d53f-15d67b4d9db0}">
+        <p14:section name="Modelling" id="{ce4cde7c-b9cd-6a0c-d7c3-7a0aff6c154a}">
           <p14:sldIdLst>
             <p14:sldId id="263"/>
             <p14:sldId id="264"/>
@@ -152,7 +152,7 @@
             <p14:sldId id="266"/>
           </p14:sldIdLst>
         </p14:section>
-        <p14:section name="Recommendations" id="{6e40bfff-3293-bf34-89f9-8e5a02edd23e}">
+        <p14:section name="Recommendations" id="{3aba29f0-69ab-701d-1e20-7bd2db4f8d54}">
           <p14:sldIdLst>
             <p14:sldId id="267"/>
             <p14:sldId id="268"/>
@@ -160,7 +160,7 @@
             <p14:sldId id="270"/>
           </p14:sldIdLst>
         </p14:section>
-        <p14:section name="Appendix" id="{71f734e1-526b-6809-5fdf-ba3f4c5f5e7d}">
+        <p14:section name="Appendix" id="{fe9ebe8a-b7e9-d0b6-0c75-f5f244f4bc54}">
           <p14:sldIdLst>
             <p14:sldId id="271"/>
             <p14:sldId id="272"/>
@@ -3747,7 +3747,7 @@
           <a:p>
             <a:r>
               <a:rPr lang="en-US" dirty="0"/>
-              <a:t>Good morning. In the next eight minutes I will show how a bank can cut the default-related cost of the home equity loans it approves today. The cut is about four fifths, with a model the bank can also explain to regulators and applicants.</a:t>
+              <a:t>Good morning. In eight minutes I will show how a bank can cut the cost of credit errors on the home equity loans it approves today. The cut is about four fifths, with a model the bank can also explain to regulators and applicants.</a:t>
             </a:r>
             <a:endParaRPr lang="en-US" dirty="0"/>
           </a:p>
@@ -4011,7 +4011,7 @@
           <a:p>
             <a:r>
               <a:rPr lang="en-US" dirty="0"/>
-              <a:t>With round-number assumptions, the bank's default-related cost falls from about 10.8 million to about 1.9 million a year on 6,000 applications. Even if the real benefit were a quarter of that, the project repays its cost inside a year. Finance should replace these assumptions with actual loss and margin figures.</a:t>
+              <a:t>With round-number assumptions, the bank's cost of credit errors falls from about 10.8 million to about 1.9 million a year on 6,000 applications. Even if the real benefit were a quarter of that, the project repays its cost inside a year. Finance should replace these assumptions with actual loss and margin figures.</a:t>
             </a:r>
             <a:endParaRPr lang="en-US" dirty="0"/>
           </a:p>
@@ -6331,7 +6331,7 @@
                   <a:schemeClr val="tx1"/>
                 </a:solidFill>
               </a:rPr>
-              <a:t>Threshold 0.15, chosen with the configuration on repeated out-of-fold expected cost (training rows). It holds for cost ratios 4.5:1 to 8:1 and across splits. Approve / refer / decline bands (69% / 7% / 24%) keep an underwriter in the loop.</a:t>
+              <a:t>Threshold 0.15, chosen with the configuration on repeated out-of-fold expected cost (training rows). It holds for cost ratios 4.5:1 to 8:1 and on a finer grid. Approve / refer / decline bands (69% / 7% / 24%) keep an underwriter in the loop.</a:t>
             </a:r>
             <a:endParaRPr lang="en-US" sz="1100" dirty="0"/>
           </a:p>
@@ -7129,7 +7129,7 @@
                   <a:schemeClr val="accent6"/>
                 </a:solidFill>
               </a:rPr>
-              <a:t>Curves: out-of-fold predictions on the training rows. Cards: test set, per 1,000 applicants, at $9,000 per missed defaulter and $2,000 per wrongly declined customer. The optimum stays at 0.15 for cost ratios 4.5:1 to 8:1 and on other splits.</a:t>
+              <a:t>Curves: out-of-fold predictions on the training rows. Cards: test set, per 1,000 applicants, at $9,000 per missed defaulter and $2,000 per wrongly declined customer. The optimum stays at 0.15 for cost ratios 4.5:1 to 8:1 and on a finer grid.</a:t>
             </a:r>
             <a:endParaRPr lang="en-US" sz="900" dirty="0"/>
           </a:p>
@@ -19407,7 +19407,7 @@
                   <a:schemeClr val="tx1"/>
                 </a:solidFill>
               </a:rPr>
-              <a:t>indicative annual benefit on 6,000 applications, from roughly $10.8M of default-related cost down to about $1.9M.</a:t>
+              <a:t>indicative annual benefit on 6,000 applications, from roughly $10.8M of credit-error cost down to about $1.9M.</a:t>
             </a:r>
             <a:endParaRPr lang="en-US" sz="1200" dirty="0"/>
           </a:p>

--- a/presentation/Loan_Default_Prediction_Presentation.pptx
+++ b/presentation/Loan_Default_Prediction_Presentation.pptx
@@ -125,26 +125,26 @@
   <p:extLst>
     <p:ext uri="{521415D9-36F7-43E2-AB2F-B90AF26B5E84}">
       <p14:sectionLst xmlns:p14="http://schemas.microsoft.com/office/powerpoint/2010/main">
-        <p14:section name="Opening" id="{a4457d1a-2bbf-3295-7f76-2787341740c4}">
+        <p14:section name="Opening" id="{e7d45f88-3d9c-75b4-4a2d-ceb0cccf3c9d}">
           <p14:sldIdLst>
             <p14:sldId id="256"/>
             <p14:sldId id="257"/>
           </p14:sldIdLst>
         </p14:section>
-        <p14:section name="Problem and approach" id="{65714d2d-2070-d04c-29a1-6ae6acb1db49}">
+        <p14:section name="Problem and approach" id="{dbf21325-3608-0ad1-f644-01aa8ae75c6a}">
           <p14:sldIdLst>
             <p14:sldId id="258"/>
             <p14:sldId id="259"/>
           </p14:sldIdLst>
         </p14:section>
-        <p14:section name="Key insights" id="{c345ab57-e9ee-41ba-dde8-e8d9535996b0}">
+        <p14:section name="Key insights" id="{32af3488-d75d-73ec-ad51-5b8ccaed7542}">
           <p14:sldIdLst>
             <p14:sldId id="260"/>
             <p14:sldId id="261"/>
             <p14:sldId id="262"/>
           </p14:sldIdLst>
         </p14:section>
-        <p14:section name="Modelling" id="{ce4cde7c-b9cd-6a0c-d7c3-7a0aff6c154a}">
+        <p14:section name="Modelling" id="{fd826df0-1a0c-9fc8-f654-8ee32c33d7e5}">
           <p14:sldIdLst>
             <p14:sldId id="263"/>
             <p14:sldId id="264"/>
@@ -152,7 +152,7 @@
             <p14:sldId id="266"/>
           </p14:sldIdLst>
         </p14:section>
-        <p14:section name="Recommendations" id="{3aba29f0-69ab-701d-1e20-7bd2db4f8d54}">
+        <p14:section name="Recommendations" id="{95bab55f-c5db-b28a-437e-2bb15f710fdf}">
           <p14:sldIdLst>
             <p14:sldId id="267"/>
             <p14:sldId id="268"/>
@@ -160,7 +160,7 @@
             <p14:sldId id="270"/>
           </p14:sldIdLst>
         </p14:section>
-        <p14:section name="Appendix" id="{fe9ebe8a-b7e9-d0b6-0c75-f5f244f4bc54}">
+        <p14:section name="Appendix" id="{750fd132-63cd-034f-47b0-3364360a719b}">
           <p14:sldIdLst>
             <p14:sldId id="271"/>
             <p14:sldId id="272"/>

--- a/presentation/Loan_Default_Prediction_Presentation.pptx
+++ b/presentation/Loan_Default_Prediction_Presentation.pptx
@@ -125,26 +125,26 @@
   <p:extLst>
     <p:ext uri="{521415D9-36F7-43E2-AB2F-B90AF26B5E84}">
       <p14:sectionLst xmlns:p14="http://schemas.microsoft.com/office/powerpoint/2010/main">
-        <p14:section name="Opening" id="{e7d45f88-3d9c-75b4-4a2d-ceb0cccf3c9d}">
+        <p14:section name="Opening" id="{610fd71e-f313-a676-6eae-468d4deb3d06}">
           <p14:sldIdLst>
             <p14:sldId id="256"/>
             <p14:sldId id="257"/>
           </p14:sldIdLst>
         </p14:section>
-        <p14:section name="Problem and approach" id="{dbf21325-3608-0ad1-f644-01aa8ae75c6a}">
+        <p14:section name="Problem and approach" id="{d4965090-96e4-2995-e04b-0be61a68496c}">
           <p14:sldIdLst>
             <p14:sldId id="258"/>
             <p14:sldId id="259"/>
           </p14:sldIdLst>
         </p14:section>
-        <p14:section name="Key insights" id="{32af3488-d75d-73ec-ad51-5b8ccaed7542}">
+        <p14:section name="Key insights" id="{9bf446a5-6f47-dd97-5a11-d880afca0b8a}">
           <p14:sldIdLst>
             <p14:sldId id="260"/>
             <p14:sldId id="261"/>
             <p14:sldId id="262"/>
           </p14:sldIdLst>
         </p14:section>
-        <p14:section name="Modelling" id="{fd826df0-1a0c-9fc8-f654-8ee32c33d7e5}">
+        <p14:section name="Modelling" id="{ae499c8a-c989-4f16-1976-d3aea65c27d0}">
           <p14:sldIdLst>
             <p14:sldId id="263"/>
             <p14:sldId id="264"/>
@@ -152,7 +152,7 @@
             <p14:sldId id="266"/>
           </p14:sldIdLst>
         </p14:section>
-        <p14:section name="Recommendations" id="{95bab55f-c5db-b28a-437e-2bb15f710fdf}">
+        <p14:section name="Recommendations" id="{ad930b30-243a-2648-756a-abd734ce40dd}">
           <p14:sldIdLst>
             <p14:sldId id="267"/>
             <p14:sldId id="268"/>
@@ -160,7 +160,7 @@
             <p14:sldId id="270"/>
           </p14:sldIdLst>
         </p14:section>
-        <p14:section name="Appendix" id="{750fd132-63cd-034f-47b0-3364360a719b}">
+        <p14:section name="Appendix" id="{63bb47e9-56a9-e499-9a6a-58286cbaeb55}">
           <p14:sldIdLst>
             <p14:sldId id="271"/>
             <p14:sldId id="272"/>
@@ -3923,7 +3923,7 @@
           <a:p>
             <a:r>
               <a:rPr lang="en-US" dirty="0"/>
-              <a:t>The model outputs a probability, and 0.5 is only a convention. We chose the threshold on out-of-fold predictions of the training rows, so the test set played no part. Moving it to 0.15 cuts missed defaulters from 64 to 15 per thousand applicants on the test set. The price is flagging 90 instead of 28 good customers. It is the cheapest operating point for any cost ratio between four and a half and eight to one. Our assumed ratio of four and a half to one sits at the lower edge of that range. It held on a finer grid and on other train/test splits. It sits just below the textbook break-even of 0.18 for a perfectly calibrated score, because the forest's scores understate risk in the decision range. Applicants scored fifteen to twenty percent defaulted about twenty-eight percent of the time.</a:t>
+              <a:t>The model outputs a probability, and 0.5 is only a convention. We chose the threshold on out-of-fold predictions of the training rows, so the test set played no part. Moving it to 0.15 cuts missed defaulters from 64 to 15 per thousand applicants on the test set. The price is flagging 90 instead of 28 good customers. It is the cheapest operating point for any cost ratio between four and a half and eight to one. Our assumed ratio of four and a half to one sits at the lower edge of that range. It held on a finer grid. On two other train/test splits, the 27-input forest also chose 0.15. It sits just below the textbook break-even of 0.18 for a perfectly calibrated score, because the forest's scores understate risk in the decision range. Applicants scored fifteen to twenty percent defaulted about twenty-eight percent of the time.</a:t>
             </a:r>
             <a:endParaRPr lang="en-US" dirty="0"/>
           </a:p>

--- a/presentation/Loan_Default_Prediction_Presentation.pptx
+++ b/presentation/Loan_Default_Prediction_Presentation.pptx
@@ -125,26 +125,26 @@
   <p:extLst>
     <p:ext uri="{521415D9-36F7-43E2-AB2F-B90AF26B5E84}">
       <p14:sectionLst xmlns:p14="http://schemas.microsoft.com/office/powerpoint/2010/main">
-        <p14:section name="Opening" id="{610fd71e-f313-a676-6eae-468d4deb3d06}">
+        <p14:section name="Opening" id="{f1d812b1-bbfd-5639-b9e3-f3d8c278ee32}">
           <p14:sldIdLst>
             <p14:sldId id="256"/>
             <p14:sldId id="257"/>
           </p14:sldIdLst>
         </p14:section>
-        <p14:section name="Problem and approach" id="{d4965090-96e4-2995-e04b-0be61a68496c}">
+        <p14:section name="Problem and approach" id="{b8c61038-d826-0760-5d49-355e70060d92}">
           <p14:sldIdLst>
             <p14:sldId id="258"/>
             <p14:sldId id="259"/>
           </p14:sldIdLst>
         </p14:section>
-        <p14:section name="Key insights" id="{9bf446a5-6f47-dd97-5a11-d880afca0b8a}">
+        <p14:section name="Key insights" id="{cd7182f9-ee30-bcc1-cf1f-a9e340e89887}">
           <p14:sldIdLst>
             <p14:sldId id="260"/>
             <p14:sldId id="261"/>
             <p14:sldId id="262"/>
           </p14:sldIdLst>
         </p14:section>
-        <p14:section name="Modelling" id="{ae499c8a-c989-4f16-1976-d3aea65c27d0}">
+        <p14:section name="Modelling" id="{8736df9f-2048-6a05-0aaf-b9d9b7f183b7}">
           <p14:sldIdLst>
             <p14:sldId id="263"/>
             <p14:sldId id="264"/>
@@ -152,7 +152,7 @@
             <p14:sldId id="266"/>
           </p14:sldIdLst>
         </p14:section>
-        <p14:section name="Recommendations" id="{ad930b30-243a-2648-756a-abd734ce40dd}">
+        <p14:section name="Recommendations" id="{4e3ae917-5486-3eb6-856f-7601f51e613e}">
           <p14:sldIdLst>
             <p14:sldId id="267"/>
             <p14:sldId id="268"/>
@@ -160,7 +160,7 @@
             <p14:sldId id="270"/>
           </p14:sldIdLst>
         </p14:section>
-        <p14:section name="Appendix" id="{63bb47e9-56a9-e499-9a6a-58286cbaeb55}">
+        <p14:section name="Appendix" id="{08533c47-fe4d-4e2f-39c6-56ee644ab8f6}">
           <p14:sldIdLst>
             <p14:sldId id="271"/>
             <p14:sldId id="272"/>
